--- a/presentation/Bookly-pitch.pptx
+++ b/presentation/Bookly-pitch.pptx
@@ -15,12 +15,9 @@
     <p:sldId id="263" r:id="rId9"/>
     <p:sldId id="264" r:id="rId10"/>
     <p:sldId id="265" r:id="rId11"/>
-    <p:sldId id="266" r:id="rId12"/>
-    <p:sldId id="267" r:id="rId13"/>
-    <p:sldId id="268" r:id="rId14"/>
   </p:sldIdLst>
   <p:notesMasterIdLst>
-    <p:notesMasterId r:id="rId15"/>
+    <p:notesMasterId r:id="rId12"/>
   </p:notesMasterIdLst>
   <p:sldSz cx="12192000" cy="6858000"/>
   <p:notesSz cx="6858000" cy="12192000"/>
@@ -119,41 +116,38 @@
   <p:extLst>
     <p:ext uri="{521415D9-36F7-43E2-AB2F-B90AF26B5E84}">
       <p14:sectionLst xmlns:p14="http://schemas.microsoft.com/office/powerpoint/2010/main">
-        <p14:section name="Вступ" id="{5307539e-9030-fa4a-321a-7230940cf8e0}">
+        <p14:section name="Вступ" id="{d9b9f476-20f9-52f4-c1a7-9add09af9fc6}">
           <p14:sldIdLst>
             <p14:sldId id="256"/>
           </p14:sldIdLst>
         </p14:section>
-        <p14:section name="Проблема і рішення" id="{fc9ae86d-7831-2c09-34fc-ccfd079ebfcd}">
+        <p14:section name="Проблема і рішення" id="{53990c80-82ec-ae28-3c38-3b58afe01bd4}">
           <p14:sldIdLst>
             <p14:sldId id="257"/>
+          </p14:sldIdLst>
+        </p14:section>
+        <p14:section name="Як це працює" id="{55856757-7abf-6079-3efd-9d58a0054f74}">
+          <p14:sldIdLst>
             <p14:sldId id="258"/>
           </p14:sldIdLst>
         </p14:section>
-        <p14:section name="Як це працює" id="{72e6e149-02a8-3be5-8fbf-0fe0f63f5197}">
+        <p14:section name="Демо" id="{e4ae56ed-4342-a248-a702-1fa86f4718f9}">
           <p14:sldIdLst>
             <p14:sldId id="259"/>
+            <p14:sldId id="260"/>
+            <p14:sldId id="261"/>
           </p14:sldIdLst>
         </p14:section>
-        <p14:section name="Демо" id="{8ecc4e0d-e615-86fd-bbc0-0ee6573b2299}">
+        <p14:section name="Чому це працює" id="{8bc77671-a8e4-09aa-7abd-ea31c1a2ce1f}">
           <p14:sldIdLst>
-            <p14:sldId id="260"/>
-            <p14:sldId id="261"/>
             <p14:sldId id="262"/>
             <p14:sldId id="263"/>
+            <p14:sldId id="264"/>
           </p14:sldIdLst>
         </p14:section>
-        <p14:section name="Чому це працює" id="{3b7e7b58-602e-da76-f593-0c84089e4e70}">
+        <p14:section name="Підсумок" id="{14544b80-21b1-5e6d-3a27-df410595974e}">
           <p14:sldIdLst>
-            <p14:sldId id="264"/>
             <p14:sldId id="265"/>
-            <p14:sldId id="266"/>
-            <p14:sldId id="267"/>
-          </p14:sldIdLst>
-        </p14:section>
-        <p14:section name="Підсумок" id="{e99316f3-dc90-4cb0-6227-39558ef5adf7}">
-          <p14:sldIdLst>
-            <p14:sldId id="268"/>
           </p14:sldIdLst>
         </p14:section>
       </p14:sectionLst>
@@ -648,7 +642,7 @@
           <a:p>
             <a:r>
               <a:rPr lang="en-US" dirty="0"/>
-              <a:t>Під агентом — працююча платформа: мульти-тенант, PostgreSQL, Docker, 119 тестів бекенду. Будь-який салон чи клініка реєструється, налаштовує правила — і AI-підтримка працює одразу. Відео: presentation/videos/product-tour.mp4</a:t>
+              <a:t>Підсумок: AI тут не інтерфейс спілкування, а учасник операцій. Наступні кроки — інтеграції й прогнозування неявок на даних, які платформа вже збирає.</a:t>
             </a:r>
             <a:endParaRPr lang="en-US" dirty="0"/>
           </a:p>
@@ -672,270 +666,6 @@
             <a:fld id="{F7021451-1387-4CA6-816F-3879F97B5CBC}" type="slidenum">
               <a:rPr lang="en-US"/>
               <a:t>10</a:t>
-            </a:fld>
-            <a:endParaRPr lang="en-US"/>
-          </a:p>
-        </p:txBody>
-      </p:sp>
-    </p:spTree>
-    <p:extLst>
-      <p:ext uri="{BB962C8B-B14F-4D97-AF65-F5344CB8AC3E}">
-        <p14:creationId xmlns:p14="http://schemas.microsoft.com/office/powerpoint/2010/main" val="1024086991"/>
-      </p:ext>
-    </p:extLst>
-  </p:cSld>
-  <p:clrMapOvr>
-    <a:masterClrMapping/>
-  </p:clrMapOvr>
-</p:notes>
-</file>
-
-<file path=ppt/notesSlides/notesSlide11.xml><?xml version="1.0" encoding="utf-8"?>
-<p:notes xmlns:a="http://schemas.openxmlformats.org/drawingml/2006/main" xmlns:r="http://schemas.openxmlformats.org/officeDocument/2006/relationships" xmlns:p="http://schemas.openxmlformats.org/presentationml/2006/main">
-  <p:cSld>
-    <p:spTree>
-      <p:nvGrpSpPr>
-        <p:cNvPr id="1" name=""/>
-        <p:cNvGrpSpPr/>
-        <p:nvPr/>
-      </p:nvGrpSpPr>
-      <p:grpSpPr>
-        <a:xfrm>
-          <a:off x="0" y="0"/>
-          <a:ext cx="0" cy="0"/>
-          <a:chOff x="0" y="0"/>
-          <a:chExt cx="0" cy="0"/>
-        </a:xfrm>
-      </p:grpSpPr>
-      <p:sp>
-        <p:nvSpPr>
-          <p:cNvPr id="2" name="Slide Image Placeholder 1"/>
-          <p:cNvSpPr>
-            <a:spLocks noGrp="1" noRot="1" noChangeAspect="1"/>
-          </p:cNvSpPr>
-          <p:nvPr>
-            <p:ph type="sldImg"/>
-          </p:nvPr>
-        </p:nvSpPr>
-        <p:spPr/>
-      </p:sp>
-      <p:sp>
-        <p:nvSpPr>
-          <p:cNvPr id="3" name="Notes Placeholder 2"/>
-          <p:cNvSpPr>
-            <a:spLocks noGrp="1"/>
-          </p:cNvSpPr>
-          <p:nvPr>
-            <p:ph type="body" idx="1"/>
-          </p:nvPr>
-        </p:nvSpPr>
-        <p:spPr/>
-        <p:txBody>
-          <a:bodyPr/>
-          <a:lstStyle/>
-          <a:p>
-            <a:r>
-              <a:rPr lang="en-US" dirty="0"/>
-              <a:t>Цифри з наших демо-сценаріїв: 500 грн Олени і 400 грн Максима збережено, 800 грн Петру повернено. Головне — адміністратор більше не робить рутинних дій руками, а лише погоджує те, що справді потребує людини.</a:t>
-            </a:r>
-            <a:endParaRPr lang="en-US" dirty="0"/>
-          </a:p>
-        </p:txBody>
-      </p:sp>
-      <p:sp>
-        <p:nvSpPr>
-          <p:cNvPr id="4" name="Slide Number Placeholder 3"/>
-          <p:cNvSpPr>
-            <a:spLocks noGrp="1"/>
-          </p:cNvSpPr>
-          <p:nvPr>
-            <p:ph type="sldNum" sz="quarter" idx="10"/>
-          </p:nvPr>
-        </p:nvSpPr>
-        <p:spPr/>
-        <p:txBody>
-          <a:bodyPr/>
-          <a:lstStyle/>
-          <a:p>
-            <a:fld id="{F7021451-1387-4CA6-816F-3879F97B5CBC}" type="slidenum">
-              <a:rPr lang="en-US"/>
-              <a:t>11</a:t>
-            </a:fld>
-            <a:endParaRPr lang="en-US"/>
-          </a:p>
-        </p:txBody>
-      </p:sp>
-    </p:spTree>
-    <p:extLst>
-      <p:ext uri="{BB962C8B-B14F-4D97-AF65-F5344CB8AC3E}">
-        <p14:creationId xmlns:p14="http://schemas.microsoft.com/office/powerpoint/2010/main" val="1024086991"/>
-      </p:ext>
-    </p:extLst>
-  </p:cSld>
-  <p:clrMapOvr>
-    <a:masterClrMapping/>
-  </p:clrMapOvr>
-</p:notes>
-</file>
-
-<file path=ppt/notesSlides/notesSlide12.xml><?xml version="1.0" encoding="utf-8"?>
-<p:notes xmlns:a="http://schemas.openxmlformats.org/drawingml/2006/main" xmlns:r="http://schemas.openxmlformats.org/officeDocument/2006/relationships" xmlns:p="http://schemas.openxmlformats.org/presentationml/2006/main">
-  <p:cSld>
-    <p:spTree>
-      <p:nvGrpSpPr>
-        <p:cNvPr id="1" name=""/>
-        <p:cNvGrpSpPr/>
-        <p:nvPr/>
-      </p:nvGrpSpPr>
-      <p:grpSpPr>
-        <a:xfrm>
-          <a:off x="0" y="0"/>
-          <a:ext cx="0" cy="0"/>
-          <a:chOff x="0" y="0"/>
-          <a:chExt cx="0" cy="0"/>
-        </a:xfrm>
-      </p:grpSpPr>
-      <p:sp>
-        <p:nvSpPr>
-          <p:cNvPr id="2" name="Slide Image Placeholder 1"/>
-          <p:cNvSpPr>
-            <a:spLocks noGrp="1" noRot="1" noChangeAspect="1"/>
-          </p:cNvSpPr>
-          <p:nvPr>
-            <p:ph type="sldImg"/>
-          </p:nvPr>
-        </p:nvSpPr>
-        <p:spPr/>
-      </p:sp>
-      <p:sp>
-        <p:nvSpPr>
-          <p:cNvPr id="3" name="Notes Placeholder 2"/>
-          <p:cNvSpPr>
-            <a:spLocks noGrp="1"/>
-          </p:cNvSpPr>
-          <p:nvPr>
-            <p:ph type="body" idx="1"/>
-          </p:nvPr>
-        </p:nvSpPr>
-        <p:spPr/>
-        <p:txBody>
-          <a:bodyPr/>
-          <a:lstStyle/>
-          <a:p>
-            <a:r>
-              <a:rPr lang="en-US" dirty="0"/>
-              <a:t>Пройтися по п'яти критеріях з ТЗ і коротко показати, де кожен закритий.</a:t>
-            </a:r>
-            <a:endParaRPr lang="en-US" dirty="0"/>
-          </a:p>
-        </p:txBody>
-      </p:sp>
-      <p:sp>
-        <p:nvSpPr>
-          <p:cNvPr id="4" name="Slide Number Placeholder 3"/>
-          <p:cNvSpPr>
-            <a:spLocks noGrp="1"/>
-          </p:cNvSpPr>
-          <p:nvPr>
-            <p:ph type="sldNum" sz="quarter" idx="10"/>
-          </p:nvPr>
-        </p:nvSpPr>
-        <p:spPr/>
-        <p:txBody>
-          <a:bodyPr/>
-          <a:lstStyle/>
-          <a:p>
-            <a:fld id="{F7021451-1387-4CA6-816F-3879F97B5CBC}" type="slidenum">
-              <a:rPr lang="en-US"/>
-              <a:t>12</a:t>
-            </a:fld>
-            <a:endParaRPr lang="en-US"/>
-          </a:p>
-        </p:txBody>
-      </p:sp>
-    </p:spTree>
-    <p:extLst>
-      <p:ext uri="{BB962C8B-B14F-4D97-AF65-F5344CB8AC3E}">
-        <p14:creationId xmlns:p14="http://schemas.microsoft.com/office/powerpoint/2010/main" val="1024086991"/>
-      </p:ext>
-    </p:extLst>
-  </p:cSld>
-  <p:clrMapOvr>
-    <a:masterClrMapping/>
-  </p:clrMapOvr>
-</p:notes>
-</file>
-
-<file path=ppt/notesSlides/notesSlide13.xml><?xml version="1.0" encoding="utf-8"?>
-<p:notes xmlns:a="http://schemas.openxmlformats.org/drawingml/2006/main" xmlns:r="http://schemas.openxmlformats.org/officeDocument/2006/relationships" xmlns:p="http://schemas.openxmlformats.org/presentationml/2006/main">
-  <p:cSld>
-    <p:spTree>
-      <p:nvGrpSpPr>
-        <p:cNvPr id="1" name=""/>
-        <p:cNvGrpSpPr/>
-        <p:nvPr/>
-      </p:nvGrpSpPr>
-      <p:grpSpPr>
-        <a:xfrm>
-          <a:off x="0" y="0"/>
-          <a:ext cx="0" cy="0"/>
-          <a:chOff x="0" y="0"/>
-          <a:chExt cx="0" cy="0"/>
-        </a:xfrm>
-      </p:grpSpPr>
-      <p:sp>
-        <p:nvSpPr>
-          <p:cNvPr id="2" name="Slide Image Placeholder 1"/>
-          <p:cNvSpPr>
-            <a:spLocks noGrp="1" noRot="1" noChangeAspect="1"/>
-          </p:cNvSpPr>
-          <p:nvPr>
-            <p:ph type="sldImg"/>
-          </p:nvPr>
-        </p:nvSpPr>
-        <p:spPr/>
-      </p:sp>
-      <p:sp>
-        <p:nvSpPr>
-          <p:cNvPr id="3" name="Notes Placeholder 2"/>
-          <p:cNvSpPr>
-            <a:spLocks noGrp="1"/>
-          </p:cNvSpPr>
-          <p:nvPr>
-            <p:ph type="body" idx="1"/>
-          </p:nvPr>
-        </p:nvSpPr>
-        <p:spPr/>
-        <p:txBody>
-          <a:bodyPr/>
-          <a:lstStyle/>
-          <a:p>
-            <a:r>
-              <a:rPr lang="en-US" dirty="0"/>
-              <a:t>Підсумок: AI тут не інтерфейс спілкування, а учасник операцій. Наступні кроки — інтеграції й прогнозування неявок на даних, які платформа вже збирає.</a:t>
-            </a:r>
-            <a:endParaRPr lang="en-US" dirty="0"/>
-          </a:p>
-        </p:txBody>
-      </p:sp>
-      <p:sp>
-        <p:nvSpPr>
-          <p:cNvPr id="4" name="Slide Number Placeholder 3"/>
-          <p:cNvSpPr>
-            <a:spLocks noGrp="1"/>
-          </p:cNvSpPr>
-          <p:nvPr>
-            <p:ph type="sldNum" sz="quarter" idx="10"/>
-          </p:nvPr>
-        </p:nvSpPr>
-        <p:spPr/>
-        <p:txBody>
-          <a:bodyPr/>
-          <a:lstStyle/>
-          <a:p>
-            <a:fld id="{F7021451-1387-4CA6-816F-3879F97B5CBC}" type="slidenum">
-              <a:rPr lang="en-US"/>
-              <a:t>13</a:t>
             </a:fld>
             <a:endParaRPr lang="en-US"/>
           </a:p>
@@ -1000,7 +730,7 @@
           <a:p>
             <a:r>
               <a:rPr lang="en-US" dirty="0"/>
-              <a:t>Біль реальний: у сервісних бізнесах до чверті записів не доходять, а адміністратор вручну перевіряє правила й переносить записи. Боти тут не допомагають — вони не мають доступу до системи.</a:t>
+              <a:t>Біль реальний: до чверті записів не доходять, а адміністратор вручну перевіряє правила й переносить записи. Боти не допомагають — вони не мають доступу до системи. Ми зробили платформу для бізнесів за записом і агента, який працює поверх неї: читає правила саме цього бізнесу й виконує дії, а ризикові рішення віддає людині.</a:t>
             </a:r>
             <a:endParaRPr lang="en-US" dirty="0"/>
           </a:p>
@@ -1088,7 +818,7 @@
           <a:p>
             <a:r>
               <a:rPr lang="en-US" dirty="0"/>
-              <a:t>Дві частини, з'єднані API та MCP. Платформа — реальний продукт з даними і правилами. Агент працює поверх неї: читає правила саме цього бізнесу і виконує дії через інструменти.</a:t>
+              <a:t>Кожне повідомлення спершу проходить тріаж: що людина хоче, у якому вона стані, чи це терміново. Прості питання дешево закриває Gemma 4. Усе, що змінює дані, йде через агента, а кожна дія перевіряється правилами бізнесу — модель не може обійти permission engine.</a:t>
             </a:r>
             <a:endParaRPr lang="en-US" dirty="0"/>
           </a:p>
@@ -1176,7 +906,8 @@
           <a:p>
             <a:r>
               <a:rPr lang="en-US" dirty="0"/>
-              <a:t>Кожне повідомлення спершу проходить тріаж: що людина хоче, у якому вона стані, чи це терміново. Прості питання дешево закриває Gemma 4. Усе, що змінює дані, йде через агента, а кожна дія перевіряється правилами бізнесу — модель не може обійти permission engine.</a:t>
+              <a:t>Агент не просто співчуває — він бачить, що це лояльна клієнтка, а політика салону дозволяє один виняток на пів року без погодження. Тому сам переносить і зберігає передоплату. В copilot видно кожен виклик інструмента.
+Відео: presentation/videos/scene-A.mp4</a:t>
             </a:r>
             <a:endParaRPr lang="en-US" dirty="0"/>
           </a:p>
@@ -1264,8 +995,8 @@
           <a:p>
             <a:r>
               <a:rPr lang="en-US" dirty="0"/>
-              <a:t>Найчастіші звернення — довідкові. Їх закриває легка модель за секунди, не витрачаючи дорогий цикл агента.
-Відео: presentation/videos/scene-Q.mp4</a:t>
+              <a:t>Однакове звернення — інше рішення, бо інший контекст. Агент чесно пояснює клієнту, що чекає на рішення, а адміністратор отримує готовий розбір і кнопку «схвалити».
+Відео: presentation/videos/scene-B.mp4</a:t>
             </a:r>
             <a:endParaRPr lang="en-US" dirty="0"/>
           </a:p>
@@ -1353,8 +1084,8 @@
           <a:p>
             <a:r>
               <a:rPr lang="en-US" dirty="0"/>
-              <a:t>Агент не просто співчуває — він бачить, що це лояльна клієнтка, а політика салону дозволяє один виняток на пів року без погодження. Тому сам переносить і зберігає передоплату. В copilot видно кожен виклик інструмента.
-Відео: presentation/videos/scene-A.mp4</a:t>
+              <a:t>Той самий агент у іншому бізнесі поводиться обережніше, бо правила інші. Він розбиває задачу на дві дії, кожну погоджує людина, і тримає клієнта в курсі.
+Відео: presentation/videos/scene-C.mp4</a:t>
             </a:r>
             <a:endParaRPr lang="en-US" dirty="0"/>
           </a:p>
@@ -1442,8 +1173,7 @@
           <a:p>
             <a:r>
               <a:rPr lang="en-US" dirty="0"/>
-              <a:t>Однакове звернення — інше рішення, бо інший контекст. Агент чесно пояснює клієнту, що чекає на рішення, а адміністратор отримує готовий розбір і кнопку «схвалити».
-Відео: presentation/videos/scene-B.mp4</a:t>
+              <a:t>Це головна ідея повторного використання: агент не захардкожений під салон. Власник у налаштуваннях вирішує, що AI робить сам, а що лише з погодженням. Тому однакове звернення в салоні й клініці закінчується по-різному.</a:t>
             </a:r>
             <a:endParaRPr lang="en-US" dirty="0"/>
           </a:p>
@@ -1531,8 +1261,7 @@
           <a:p>
             <a:r>
               <a:rPr lang="en-US" dirty="0"/>
-              <a:t>Той самий агент у іншому бізнесі поводиться обережніше, бо правила інші. Він розбиває задачу на дві дії, кожну погоджує людина, і тримає клієнта в курсі.
-Відео: presentation/videos/scene-C.mp4</a:t>
+              <a:t>Під агентом — працююча платформа: мульти-тенант, PostgreSQL, Docker, 119 тестів бекенду. Будь-який салон чи клініка реєструється, налаштовує правила — і AI-підтримка працює одразу. Відео: presentation/videos/product-tour.mp4</a:t>
             </a:r>
             <a:endParaRPr lang="en-US" dirty="0"/>
           </a:p>
@@ -1620,7 +1349,7 @@
           <a:p>
             <a:r>
               <a:rPr lang="en-US" dirty="0"/>
-              <a:t>Це головна ідея повторного використання: агент не захардкожений під салон. Власник у налаштуваннях вирішує, що AI робить сам, а що лише з погодженням. Тому однакове звернення в салоні й клініці закінчується по-різному.</a:t>
+              <a:t>Цифри з демо: 500 грн Олени і 400 грн Максима збережено, 800 грн Петру повернено. Адміністратор не робить рутину руками, а лише погоджує те, що справді потребує людини. Далі коротко по п'яти критеріях з ТЗ. Прості питання (ціна, адреса) закриває Gemma 4 без дій — відео scene-Q.mp4 є як запасне.</a:t>
             </a:r>
             <a:endParaRPr lang="en-US" dirty="0"/>
           </a:p>
@@ -2606,1814 +2335,6 @@
         </p:nvSpPr>
         <p:spPr>
           <a:xfrm>
-            <a:off x="548640" y="365760"/>
-            <a:ext cx="11094415" cy="731520"/>
-          </a:xfrm>
-          <a:prstGeom prst="rect">
-            <a:avLst/>
-          </a:prstGeom>
-          <a:noFill/>
-          <a:ln/>
-        </p:spPr>
-        <p:txBody>
-          <a:bodyPr wrap="square" lIns="0" tIns="0" rIns="0" bIns="0" rtlCol="0" anchor="ctr"/>
-          <a:lstStyle/>
-          <a:p>
-            <a:pPr algn="l" indent="0" marL="0">
-              <a:buNone/>
-            </a:pPr>
-            <a:r>
-              <a:rPr lang="en-US" sz="3200" b="1" dirty="0">
-                <a:solidFill>
-                  <a:schemeClr val="tx1"/>
-                </a:solidFill>
-              </a:rPr>
-              <a:t>Справжній продукт, а не макет</a:t>
-            </a:r>
-            <a:endParaRPr lang="en-US" sz="3200" dirty="0"/>
-          </a:p>
-        </p:txBody>
-      </p:sp>
-      <p:pic>
-        <p:nvPicPr>
-          <p:cNvPr id="3" name="video product-tour.mp4" descr="Кадр з відео product-tour.mp4">    </p:cNvPr>
-          <p:cNvPicPr>
-            <a:picLocks noChangeAspect="1"/>
-          </p:cNvPicPr>
-          <p:nvPr/>
-        </p:nvPicPr>
-        <p:blipFill>
-          <a:blip r:embed="rId1"/>
-          <a:stretch>
-            <a:fillRect/>
-          </a:stretch>
-        </p:blipFill>
-        <p:spPr>
-          <a:xfrm>
-            <a:off x="548640" y="1417320"/>
-            <a:ext cx="6949440" cy="4343400"/>
-          </a:xfrm>
-          <a:prstGeom prst="rect">
-            <a:avLst/>
-          </a:prstGeom>
-        </p:spPr>
-      </p:pic>
-      <p:sp>
-        <p:nvSpPr>
-          <p:cNvPr id="4" name="insert video badge"/>
-          <p:cNvSpPr/>
-          <p:nvPr/>
-        </p:nvSpPr>
-        <p:spPr>
-          <a:xfrm>
-            <a:off x="2560320" y="3314700"/>
-            <a:ext cx="2926080" cy="548640"/>
-          </a:xfrm>
-          <a:prstGeom prst="roundRect">
-            <a:avLst>
-              <a:gd name="adj" fmla="val 50000"/>
-            </a:avLst>
-          </a:prstGeom>
-          <a:solidFill>
-            <a:schemeClr val="tx1">
-              <a:alpha val="85000"/>
-            </a:schemeClr>
-          </a:solidFill>
-          <a:ln/>
-        </p:spPr>
-      </p:sp>
-      <p:sp>
-        <p:nvSpPr>
-          <p:cNvPr id="5" name="insert video label"/>
-          <p:cNvSpPr txBox="1"/>
-          <p:nvPr/>
-        </p:nvSpPr>
-        <p:spPr>
-          <a:xfrm>
-            <a:off x="2560320" y="3314700"/>
-            <a:ext cx="2926080" cy="548640"/>
-          </a:xfrm>
-          <a:prstGeom prst="rect">
-            <a:avLst/>
-          </a:prstGeom>
-          <a:noFill/>
-          <a:ln/>
-        </p:spPr>
-        <p:txBody>
-          <a:bodyPr wrap="square" lIns="0" tIns="0" rIns="0" bIns="0" rtlCol="0" anchor="ctr"/>
-          <a:lstStyle/>
-          <a:p>
-            <a:pPr algn="ctr" indent="0" marL="0">
-              <a:buNone/>
-            </a:pPr>
-            <a:r>
-              <a:rPr lang="en-US" sz="1400" b="1" dirty="0">
-                <a:solidFill>
-                  <a:schemeClr val="bg1"/>
-                </a:solidFill>
-              </a:rPr>
-              <a:t>▶  вставити product-tour.mp4</a:t>
-            </a:r>
-            <a:endParaRPr lang="en-US" sz="1400" dirty="0"/>
-          </a:p>
-        </p:txBody>
-      </p:sp>
-      <p:sp>
-        <p:nvSpPr>
-          <p:cNvPr id="6" name="tour icon bg 0"/>
-          <p:cNvSpPr/>
-          <p:nvPr/>
-        </p:nvSpPr>
-        <p:spPr>
-          <a:xfrm>
-            <a:off x="7863840" y="1417320"/>
-            <a:ext cx="566928" cy="566928"/>
-          </a:xfrm>
-          <a:prstGeom prst="ellipse">
-            <a:avLst/>
-          </a:prstGeom>
-          <a:solidFill>
-            <a:schemeClr val="bg2"/>
-          </a:solidFill>
-          <a:ln/>
-        </p:spPr>
-      </p:sp>
-      <p:pic>
-        <p:nvPicPr>
-          <p:cNvPr id="7" name="tour icon 0" descr="preencoded.png">    </p:cNvPr>
-          <p:cNvPicPr>
-            <a:picLocks noChangeAspect="1"/>
-          </p:cNvPicPr>
-          <p:nvPr/>
-        </p:nvPicPr>
-        <p:blipFill>
-          <a:blip r:embed="rId2"/>
-          <a:stretch>
-            <a:fillRect/>
-          </a:stretch>
-        </p:blipFill>
-        <p:spPr>
-          <a:xfrm>
-            <a:off x="7991856" y="1545336"/>
-            <a:ext cx="310896" cy="310896"/>
-          </a:xfrm>
-          <a:prstGeom prst="rect">
-            <a:avLst/>
-          </a:prstGeom>
-        </p:spPr>
-      </p:pic>
-      <p:sp>
-        <p:nvSpPr>
-          <p:cNvPr id="8" name="tour head 0"/>
-          <p:cNvSpPr txBox="1"/>
-          <p:nvPr/>
-        </p:nvSpPr>
-        <p:spPr>
-          <a:xfrm>
-            <a:off x="8641080" y="1417320"/>
-            <a:ext cx="3001975" cy="365760"/>
-          </a:xfrm>
-          <a:prstGeom prst="rect">
-            <a:avLst/>
-          </a:prstGeom>
-          <a:noFill/>
-          <a:ln/>
-        </p:spPr>
-        <p:txBody>
-          <a:bodyPr wrap="square" lIns="0" tIns="0" rIns="0" bIns="0" rtlCol="0" anchor="ctr"/>
-          <a:lstStyle/>
-          <a:p>
-            <a:pPr indent="0" marL="0">
-              <a:buNone/>
-            </a:pPr>
-            <a:r>
-              <a:rPr lang="en-US" sz="1700" b="1" dirty="0">
-                <a:solidFill>
-                  <a:schemeClr val="tx1"/>
-                </a:solidFill>
-              </a:rPr>
-              <a:t>Сторінка бізнесу і запис</a:t>
-            </a:r>
-            <a:endParaRPr lang="en-US" sz="1700" dirty="0"/>
-          </a:p>
-        </p:txBody>
-      </p:sp>
-      <p:sp>
-        <p:nvSpPr>
-          <p:cNvPr id="9" name="tour text 0"/>
-          <p:cNvSpPr txBox="1"/>
-          <p:nvPr/>
-        </p:nvSpPr>
-        <p:spPr>
-          <a:xfrm>
-            <a:off x="8641080" y="1801368"/>
-            <a:ext cx="3001975" cy="822960"/>
-          </a:xfrm>
-          <a:prstGeom prst="rect">
-            <a:avLst/>
-          </a:prstGeom>
-          <a:noFill/>
-          <a:ln/>
-        </p:spPr>
-        <p:txBody>
-          <a:bodyPr wrap="square" lIns="0" tIns="0" rIns="0" bIns="0" rtlCol="0" anchor="t"/>
-          <a:lstStyle/>
-          <a:p>
-            <a:pPr indent="0" marL="0">
-              <a:buNone/>
-            </a:pPr>
-            <a:r>
-              <a:rPr lang="en-US" sz="1400" dirty="0">
-                <a:solidFill>
-                  <a:schemeClr val="tx2"/>
-                </a:solidFill>
-              </a:rPr>
-              <a:t>Послуги, майстри, правила, вільні слоти, передоплата</a:t>
-            </a:r>
-            <a:endParaRPr lang="en-US" sz="1400" dirty="0"/>
-          </a:p>
-        </p:txBody>
-      </p:sp>
-      <p:sp>
-        <p:nvSpPr>
-          <p:cNvPr id="10" name="tour icon bg 1"/>
-          <p:cNvSpPr/>
-          <p:nvPr/>
-        </p:nvSpPr>
-        <p:spPr>
-          <a:xfrm>
-            <a:off x="7863840" y="2880360"/>
-            <a:ext cx="566928" cy="566928"/>
-          </a:xfrm>
-          <a:prstGeom prst="ellipse">
-            <a:avLst/>
-          </a:prstGeom>
-          <a:solidFill>
-            <a:schemeClr val="bg2"/>
-          </a:solidFill>
-          <a:ln/>
-        </p:spPr>
-      </p:sp>
-      <p:pic>
-        <p:nvPicPr>
-          <p:cNvPr id="11" name="tour icon 1" descr="preencoded.png">    </p:cNvPr>
-          <p:cNvPicPr>
-            <a:picLocks noChangeAspect="1"/>
-          </p:cNvPicPr>
-          <p:nvPr/>
-        </p:nvPicPr>
-        <p:blipFill>
-          <a:blip r:embed="rId3"/>
-          <a:stretch>
-            <a:fillRect/>
-          </a:stretch>
-        </p:blipFill>
-        <p:spPr>
-          <a:xfrm>
-            <a:off x="7991856" y="3008376"/>
-            <a:ext cx="310896" cy="310896"/>
-          </a:xfrm>
-          <a:prstGeom prst="rect">
-            <a:avLst/>
-          </a:prstGeom>
-        </p:spPr>
-      </p:pic>
-      <p:sp>
-        <p:nvSpPr>
-          <p:cNvPr id="12" name="tour head 1"/>
-          <p:cNvSpPr txBox="1"/>
-          <p:nvPr/>
-        </p:nvSpPr>
-        <p:spPr>
-          <a:xfrm>
-            <a:off x="8641080" y="2880360"/>
-            <a:ext cx="3001975" cy="365760"/>
-          </a:xfrm>
-          <a:prstGeom prst="rect">
-            <a:avLst/>
-          </a:prstGeom>
-          <a:noFill/>
-          <a:ln/>
-        </p:spPr>
-        <p:txBody>
-          <a:bodyPr wrap="square" lIns="0" tIns="0" rIns="0" bIns="0" rtlCol="0" anchor="ctr"/>
-          <a:lstStyle/>
-          <a:p>
-            <a:pPr indent="0" marL="0">
-              <a:buNone/>
-            </a:pPr>
-            <a:r>
-              <a:rPr lang="en-US" sz="1700" b="1" dirty="0">
-                <a:solidFill>
-                  <a:schemeClr val="tx1"/>
-                </a:solidFill>
-              </a:rPr>
-              <a:t>Адмінка</a:t>
-            </a:r>
-            <a:endParaRPr lang="en-US" sz="1700" dirty="0"/>
-          </a:p>
-        </p:txBody>
-      </p:sp>
-      <p:sp>
-        <p:nvSpPr>
-          <p:cNvPr id="13" name="tour text 1"/>
-          <p:cNvSpPr txBox="1"/>
-          <p:nvPr/>
-        </p:nvSpPr>
-        <p:spPr>
-          <a:xfrm>
-            <a:off x="8641080" y="3264408"/>
-            <a:ext cx="3001975" cy="822960"/>
-          </a:xfrm>
-          <a:prstGeom prst="rect">
-            <a:avLst/>
-          </a:prstGeom>
-          <a:noFill/>
-          <a:ln/>
-        </p:spPr>
-        <p:txBody>
-          <a:bodyPr wrap="square" lIns="0" tIns="0" rIns="0" bIns="0" rtlCol="0" anchor="t"/>
-          <a:lstStyle/>
-          <a:p>
-            <a:pPr indent="0" marL="0">
-              <a:buNone/>
-            </a:pPr>
-            <a:r>
-              <a:rPr lang="en-US" sz="1400" dirty="0">
-                <a:solidFill>
-                  <a:schemeClr val="tx2"/>
-                </a:solidFill>
-              </a:rPr>
-              <a:t>Тиждень бронювань, дії агента з міткою «AI», клієнти, майстри, послуги</a:t>
-            </a:r>
-            <a:endParaRPr lang="en-US" sz="1400" dirty="0"/>
-          </a:p>
-        </p:txBody>
-      </p:sp>
-      <p:sp>
-        <p:nvSpPr>
-          <p:cNvPr id="14" name="tour icon bg 2"/>
-          <p:cNvSpPr/>
-          <p:nvPr/>
-        </p:nvSpPr>
-        <p:spPr>
-          <a:xfrm>
-            <a:off x="7863840" y="4343400"/>
-            <a:ext cx="566928" cy="566928"/>
-          </a:xfrm>
-          <a:prstGeom prst="ellipse">
-            <a:avLst/>
-          </a:prstGeom>
-          <a:solidFill>
-            <a:schemeClr val="bg2"/>
-          </a:solidFill>
-          <a:ln/>
-        </p:spPr>
-      </p:sp>
-      <p:pic>
-        <p:nvPicPr>
-          <p:cNvPr id="15" name="tour icon 2" descr="preencoded.png">    </p:cNvPr>
-          <p:cNvPicPr>
-            <a:picLocks noChangeAspect="1"/>
-          </p:cNvPicPr>
-          <p:nvPr/>
-        </p:nvPicPr>
-        <p:blipFill>
-          <a:blip r:embed="rId4"/>
-          <a:stretch>
-            <a:fillRect/>
-          </a:stretch>
-        </p:blipFill>
-        <p:spPr>
-          <a:xfrm>
-            <a:off x="7991856" y="4471416"/>
-            <a:ext cx="310896" cy="310896"/>
-          </a:xfrm>
-          <a:prstGeom prst="rect">
-            <a:avLst/>
-          </a:prstGeom>
-        </p:spPr>
-      </p:pic>
-      <p:sp>
-        <p:nvSpPr>
-          <p:cNvPr id="16" name="tour head 2"/>
-          <p:cNvSpPr txBox="1"/>
-          <p:nvPr/>
-        </p:nvSpPr>
-        <p:spPr>
-          <a:xfrm>
-            <a:off x="8641080" y="4343400"/>
-            <a:ext cx="3001975" cy="365760"/>
-          </a:xfrm>
-          <a:prstGeom prst="rect">
-            <a:avLst/>
-          </a:prstGeom>
-          <a:noFill/>
-          <a:ln/>
-        </p:spPr>
-        <p:txBody>
-          <a:bodyPr wrap="square" lIns="0" tIns="0" rIns="0" bIns="0" rtlCol="0" anchor="ctr"/>
-          <a:lstStyle/>
-          <a:p>
-            <a:pPr indent="0" marL="0">
-              <a:buNone/>
-            </a:pPr>
-            <a:r>
-              <a:rPr lang="en-US" sz="1700" b="1" dirty="0">
-                <a:solidFill>
-                  <a:schemeClr val="tx1"/>
-                </a:solidFill>
-              </a:rPr>
-              <a:t>Відкриті інтеграції</a:t>
-            </a:r>
-            <a:endParaRPr lang="en-US" sz="1700" dirty="0"/>
-          </a:p>
-        </p:txBody>
-      </p:sp>
-      <p:sp>
-        <p:nvSpPr>
-          <p:cNvPr id="17" name="tour text 2"/>
-          <p:cNvSpPr txBox="1"/>
-          <p:nvPr/>
-        </p:nvSpPr>
-        <p:spPr>
-          <a:xfrm>
-            <a:off x="8641080" y="4727448"/>
-            <a:ext cx="3001975" cy="822960"/>
-          </a:xfrm>
-          <a:prstGeom prst="rect">
-            <a:avLst/>
-          </a:prstGeom>
-          <a:noFill/>
-          <a:ln/>
-        </p:spPr>
-        <p:txBody>
-          <a:bodyPr wrap="square" lIns="0" tIns="0" rIns="0" bIns="0" rtlCol="0" anchor="t"/>
-          <a:lstStyle/>
-          <a:p>
-            <a:pPr indent="0" marL="0">
-              <a:buNone/>
-            </a:pPr>
-            <a:r>
-              <a:rPr lang="en-US" sz="1400" dirty="0">
-                <a:solidFill>
-                  <a:schemeClr val="tx2"/>
-                </a:solidFill>
-              </a:rPr>
-              <a:t>HTTP API, MCP-сервер для агента, віджет одним рядком коду</a:t>
-            </a:r>
-            <a:endParaRPr lang="en-US" sz="1400" dirty="0"/>
-          </a:p>
-        </p:txBody>
-      </p:sp>
-      <p:sp>
-        <p:nvSpPr>
-          <p:cNvPr id="25" name="Slide Number Placeholder 0"/>
-          <p:cNvSpPr>
-            <a:spLocks noGrp="1"/>
-          </p:cNvSpPr>
-          <p:nvPr>
-            <p:ph type="sldNum" sz="quarter" idx="4294967295"/>
-          </p:nvPr>
-        </p:nvSpPr>
-        <p:spPr>
-          <a:xfrm>
-            <a:off x="11185855" y="6446520"/>
-            <a:ext cx="457200" cy="274320"/>
-          </a:xfrm>
-          <a:prstGeom prst="rect">
-            <a:avLst/>
-          </a:prstGeom>
-          <a:extLst>
-            <a:ext uri="{C572A759-6A51-4108-AA02-DFA0A04FC94B}">
-              <ma14:wrappingTextBoxFlag xmlns:ma14="http://schemas.microsoft.com/office/mac/drawingml/2011/main" val="0"/>
-            </a:ext>
-          </a:extLst>
-        </p:spPr>
-        <p:txBody>
-          <a:bodyPr/>
-          <a:lstStyle>
-            <a:lvl1pPr>
-              <a:defRPr sz="1000">
-                <a:solidFill>
-                  <a:schemeClr val="accent5"/>
-                </a:solidFill>
-              </a:defRPr>
-            </a:lvl1pPr>
-          </a:lstStyle>
-          <a:p>
-            <a:pPr algn="r"/>
-            <a:fld id="{F7021451-1387-4CA6-816F-3879F97B5CBC}" type="slidenum">
-              <a:rPr b="0" lang="en-US"/>
-              <a:t>10</a:t>
-            </a:fld>
-            <a:endParaRPr lang="en-US"/>
-          </a:p>
-        </p:txBody>
-      </p:sp>
-    </p:spTree>
-  </p:cSld>
-  <p:clrMapOvr>
-    <a:masterClrMapping/>
-  </p:clrMapOvr>
-</p:sld>
-</file>
-
-<file path=ppt/slides/slide11.xml><?xml version="1.0" encoding="utf-8"?>
-<p:sld xmlns:a="http://schemas.openxmlformats.org/drawingml/2006/main" xmlns:r="http://schemas.openxmlformats.org/officeDocument/2006/relationships" xmlns:p="http://schemas.openxmlformats.org/presentationml/2006/main">
-  <p:cSld name="Slide 11">
-    <p:spTree>
-      <p:nvGrpSpPr>
-        <p:cNvPr id="1" name=""/>
-        <p:cNvGrpSpPr/>
-        <p:nvPr/>
-      </p:nvGrpSpPr>
-      <p:grpSpPr>
-        <a:xfrm>
-          <a:off x="0" y="0"/>
-          <a:ext cx="0" cy="0"/>
-          <a:chOff x="0" y="0"/>
-          <a:chExt cx="0" cy="0"/>
-        </a:xfrm>
-      </p:grpSpPr>
-      <p:sp>
-        <p:nvSpPr>
-          <p:cNvPr id="2" name="Text 0"/>
-          <p:cNvSpPr/>
-          <p:nvPr>
-            <p:ph idx="100" type="title" hasCustomPrompt="1"/>
-          </p:nvPr>
-        </p:nvSpPr>
-        <p:spPr>
-          <a:xfrm>
-            <a:off x="548640" y="365760"/>
-            <a:ext cx="11094415" cy="731520"/>
-          </a:xfrm>
-          <a:prstGeom prst="rect">
-            <a:avLst/>
-          </a:prstGeom>
-          <a:noFill/>
-          <a:ln/>
-        </p:spPr>
-        <p:txBody>
-          <a:bodyPr wrap="square" lIns="0" tIns="0" rIns="0" bIns="0" rtlCol="0" anchor="ctr"/>
-          <a:lstStyle/>
-          <a:p>
-            <a:pPr algn="l" indent="0" marL="0">
-              <a:buNone/>
-            </a:pPr>
-            <a:r>
-              <a:rPr lang="en-US" sz="3200" b="1" dirty="0">
-                <a:solidFill>
-                  <a:schemeClr val="tx1"/>
-                </a:solidFill>
-              </a:rPr>
-              <a:t>Що отримує команда підтримки</a:t>
-            </a:r>
-            <a:endParaRPr lang="en-US" sz="3200" dirty="0"/>
-          </a:p>
-        </p:txBody>
-      </p:sp>
-      <p:sp>
-        <p:nvSpPr>
-          <p:cNvPr id="3" name="stat 0"/>
-          <p:cNvSpPr/>
-          <p:nvPr/>
-        </p:nvSpPr>
-        <p:spPr>
-          <a:xfrm>
-            <a:off x="548640" y="1463040"/>
-            <a:ext cx="3515258" cy="2103120"/>
-          </a:xfrm>
-          <a:prstGeom prst="roundRect">
-            <a:avLst>
-              <a:gd name="adj" fmla="val 5217"/>
-            </a:avLst>
-          </a:prstGeom>
-          <a:solidFill>
-            <a:schemeClr val="bg2"/>
-          </a:solidFill>
-          <a:ln/>
-        </p:spPr>
-      </p:sp>
-      <p:sp>
-        <p:nvSpPr>
-          <p:cNvPr id="4" name="stat 0 value"/>
-          <p:cNvSpPr txBox="1"/>
-          <p:nvPr/>
-        </p:nvSpPr>
-        <p:spPr>
-          <a:xfrm>
-            <a:off x="822960" y="1645920"/>
-            <a:ext cx="2966618" cy="914400"/>
-          </a:xfrm>
-          <a:prstGeom prst="rect">
-            <a:avLst/>
-          </a:prstGeom>
-          <a:noFill/>
-          <a:ln/>
-        </p:spPr>
-        <p:txBody>
-          <a:bodyPr wrap="square" lIns="0" tIns="0" rIns="0" bIns="0" rtlCol="0" anchor="ctr"/>
-          <a:lstStyle/>
-          <a:p>
-            <a:pPr indent="0" marL="0">
-              <a:buNone/>
-            </a:pPr>
-            <a:r>
-              <a:rPr lang="en-US" sz="4800" b="1" dirty="0">
-                <a:solidFill>
-                  <a:schemeClr val="accent1"/>
-                </a:solidFill>
-              </a:rPr>
-              <a:t>4 з 4</a:t>
-            </a:r>
-            <a:endParaRPr lang="en-US" sz="4800" dirty="0"/>
-          </a:p>
-        </p:txBody>
-      </p:sp>
-      <p:sp>
-        <p:nvSpPr>
-          <p:cNvPr id="5" name="stat 0 label"/>
-          <p:cNvSpPr txBox="1"/>
-          <p:nvPr/>
-        </p:nvSpPr>
-        <p:spPr>
-          <a:xfrm>
-            <a:off x="822960" y="2606040"/>
-            <a:ext cx="2966618" cy="822960"/>
-          </a:xfrm>
-          <a:prstGeom prst="rect">
-            <a:avLst/>
-          </a:prstGeom>
-          <a:noFill/>
-          <a:ln/>
-        </p:spPr>
-        <p:txBody>
-          <a:bodyPr wrap="square" lIns="0" tIns="0" rIns="0" bIns="0" rtlCol="0" anchor="t"/>
-          <a:lstStyle/>
-          <a:p>
-            <a:pPr indent="0" marL="0">
-              <a:buNone/>
-            </a:pPr>
-            <a:r>
-              <a:rPr lang="en-US" sz="1400" dirty="0">
-                <a:solidFill>
-                  <a:schemeClr val="tx2"/>
-                </a:solidFill>
-              </a:rPr>
-              <a:t>демо-звернення вирішено до кінця, а не лише відповіддю</a:t>
-            </a:r>
-            <a:endParaRPr lang="en-US" sz="1400" dirty="0"/>
-          </a:p>
-        </p:txBody>
-      </p:sp>
-      <p:sp>
-        <p:nvSpPr>
-          <p:cNvPr id="6" name="stat 1"/>
-          <p:cNvSpPr/>
-          <p:nvPr/>
-        </p:nvSpPr>
-        <p:spPr>
-          <a:xfrm>
-            <a:off x="4338218" y="1463040"/>
-            <a:ext cx="3515258" cy="2103120"/>
-          </a:xfrm>
-          <a:prstGeom prst="roundRect">
-            <a:avLst>
-              <a:gd name="adj" fmla="val 5217"/>
-            </a:avLst>
-          </a:prstGeom>
-          <a:solidFill>
-            <a:schemeClr val="bg2"/>
-          </a:solidFill>
-          <a:ln/>
-        </p:spPr>
-      </p:sp>
-      <p:sp>
-        <p:nvSpPr>
-          <p:cNvPr id="7" name="stat 1 value"/>
-          <p:cNvSpPr txBox="1"/>
-          <p:nvPr/>
-        </p:nvSpPr>
-        <p:spPr>
-          <a:xfrm>
-            <a:off x="4612538" y="1645920"/>
-            <a:ext cx="2966618" cy="914400"/>
-          </a:xfrm>
-          <a:prstGeom prst="rect">
-            <a:avLst/>
-          </a:prstGeom>
-          <a:noFill/>
-          <a:ln/>
-        </p:spPr>
-        <p:txBody>
-          <a:bodyPr wrap="square" lIns="0" tIns="0" rIns="0" bIns="0" rtlCol="0" anchor="ctr"/>
-          <a:lstStyle/>
-          <a:p>
-            <a:pPr indent="0" marL="0">
-              <a:buNone/>
-            </a:pPr>
-            <a:r>
-              <a:rPr lang="en-US" sz="4800" b="1" dirty="0">
-                <a:solidFill>
-                  <a:schemeClr val="accent4"/>
-                </a:solidFill>
-              </a:rPr>
-              <a:t>1 клік</a:t>
-            </a:r>
-            <a:endParaRPr lang="en-US" sz="4800" dirty="0"/>
-          </a:p>
-        </p:txBody>
-      </p:sp>
-      <p:sp>
-        <p:nvSpPr>
-          <p:cNvPr id="8" name="stat 1 label"/>
-          <p:cNvSpPr txBox="1"/>
-          <p:nvPr/>
-        </p:nvSpPr>
-        <p:spPr>
-          <a:xfrm>
-            <a:off x="4612538" y="2606040"/>
-            <a:ext cx="2966618" cy="822960"/>
-          </a:xfrm>
-          <a:prstGeom prst="rect">
-            <a:avLst/>
-          </a:prstGeom>
-          <a:noFill/>
-          <a:ln/>
-        </p:spPr>
-        <p:txBody>
-          <a:bodyPr wrap="square" lIns="0" tIns="0" rIns="0" bIns="0" rtlCol="0" anchor="t"/>
-          <a:lstStyle/>
-          <a:p>
-            <a:pPr indent="0" marL="0">
-              <a:buNone/>
-            </a:pPr>
-            <a:r>
-              <a:rPr lang="en-US" sz="1400" dirty="0">
-                <a:solidFill>
-                  <a:schemeClr val="tx2"/>
-                </a:solidFill>
-              </a:rPr>
-              <a:t>щоб адміністратор погодив ризикову дію з готовим розбором</a:t>
-            </a:r>
-            <a:endParaRPr lang="en-US" sz="1400" dirty="0"/>
-          </a:p>
-        </p:txBody>
-      </p:sp>
-      <p:sp>
-        <p:nvSpPr>
-          <p:cNvPr id="9" name="stat 2"/>
-          <p:cNvSpPr/>
-          <p:nvPr/>
-        </p:nvSpPr>
-        <p:spPr>
-          <a:xfrm>
-            <a:off x="8127797" y="1463040"/>
-            <a:ext cx="3515258" cy="2103120"/>
-          </a:xfrm>
-          <a:prstGeom prst="roundRect">
-            <a:avLst>
-              <a:gd name="adj" fmla="val 5217"/>
-            </a:avLst>
-          </a:prstGeom>
-          <a:solidFill>
-            <a:schemeClr val="bg2"/>
-          </a:solidFill>
-          <a:ln/>
-        </p:spPr>
-      </p:sp>
-      <p:sp>
-        <p:nvSpPr>
-          <p:cNvPr id="10" name="stat 2 value"/>
-          <p:cNvSpPr txBox="1"/>
-          <p:nvPr/>
-        </p:nvSpPr>
-        <p:spPr>
-          <a:xfrm>
-            <a:off x="8402117" y="1645920"/>
-            <a:ext cx="2966618" cy="914400"/>
-          </a:xfrm>
-          <a:prstGeom prst="rect">
-            <a:avLst/>
-          </a:prstGeom>
-          <a:noFill/>
-          <a:ln/>
-        </p:spPr>
-        <p:txBody>
-          <a:bodyPr wrap="square" lIns="0" tIns="0" rIns="0" bIns="0" rtlCol="0" anchor="ctr"/>
-          <a:lstStyle/>
-          <a:p>
-            <a:pPr indent="0" marL="0">
-              <a:buNone/>
-            </a:pPr>
-            <a:r>
-              <a:rPr lang="en-US" sz="4800" b="1" dirty="0">
-                <a:solidFill>
-                  <a:schemeClr val="accent3"/>
-                </a:solidFill>
-              </a:rPr>
-              <a:t>1 700 грн</a:t>
-            </a:r>
-            <a:endParaRPr lang="en-US" sz="4800" dirty="0"/>
-          </a:p>
-        </p:txBody>
-      </p:sp>
-      <p:sp>
-        <p:nvSpPr>
-          <p:cNvPr id="11" name="stat 2 label"/>
-          <p:cNvSpPr txBox="1"/>
-          <p:nvPr/>
-        </p:nvSpPr>
-        <p:spPr>
-          <a:xfrm>
-            <a:off x="8402117" y="2606040"/>
-            <a:ext cx="2966618" cy="822960"/>
-          </a:xfrm>
-          <a:prstGeom prst="rect">
-            <a:avLst/>
-          </a:prstGeom>
-          <a:noFill/>
-          <a:ln/>
-        </p:spPr>
-        <p:txBody>
-          <a:bodyPr wrap="square" lIns="0" tIns="0" rIns="0" bIns="0" rtlCol="0" anchor="t"/>
-          <a:lstStyle/>
-          <a:p>
-            <a:pPr indent="0" marL="0">
-              <a:buNone/>
-            </a:pPr>
-            <a:r>
-              <a:rPr lang="en-US" sz="1400" dirty="0">
-                <a:solidFill>
-                  <a:schemeClr val="tx2"/>
-                </a:solidFill>
-              </a:rPr>
-              <a:t>передоплат збережено або повернено клієнтам у демо</a:t>
-            </a:r>
-            <a:endParaRPr lang="en-US" sz="1400" dirty="0"/>
-          </a:p>
-        </p:txBody>
-      </p:sp>
-      <p:sp>
-        <p:nvSpPr>
-          <p:cNvPr id="12" name="analytics card"/>
-          <p:cNvSpPr/>
-          <p:nvPr/>
-        </p:nvSpPr>
-        <p:spPr>
-          <a:xfrm>
-            <a:off x="548640" y="3840480"/>
-            <a:ext cx="5410048" cy="2377440"/>
-          </a:xfrm>
-          <a:prstGeom prst="roundRect">
-            <a:avLst>
-              <a:gd name="adj" fmla="val 4615"/>
-            </a:avLst>
-          </a:prstGeom>
-          <a:solidFill>
-            <a:schemeClr val="bg1"/>
-          </a:solidFill>
-          <a:ln w="9525">
-            <a:solidFill>
-              <a:schemeClr val="bg2"/>
-            </a:solidFill>
-            <a:prstDash val="solid"/>
-          </a:ln>
-          <a:effectLst>
-            <a:outerShdw sx="100000" sy="100000" kx="0" ky="0" algn="bl" rotWithShape="0" blurRad="101600" dist="25400" dir="5400000">
-              <a:srgbClr val="16163A">
-                <a:alpha val="12000"/>
-              </a:srgbClr>
-            </a:outerShdw>
-          </a:effectLst>
-        </p:spPr>
-      </p:sp>
-      <p:sp>
-        <p:nvSpPr>
-          <p:cNvPr id="13" name="analytics icon bg"/>
-          <p:cNvSpPr/>
-          <p:nvPr/>
-        </p:nvSpPr>
-        <p:spPr>
-          <a:xfrm>
-            <a:off x="822960" y="4114800"/>
-            <a:ext cx="566928" cy="566928"/>
-          </a:xfrm>
-          <a:prstGeom prst="ellipse">
-            <a:avLst/>
-          </a:prstGeom>
-          <a:solidFill>
-            <a:schemeClr val="bg2"/>
-          </a:solidFill>
-          <a:ln/>
-        </p:spPr>
-      </p:sp>
-      <p:pic>
-        <p:nvPicPr>
-          <p:cNvPr id="14" name="analytics icon" descr="preencoded.png">    </p:cNvPr>
-          <p:cNvPicPr>
-            <a:picLocks noChangeAspect="1"/>
-          </p:cNvPicPr>
-          <p:nvPr/>
-        </p:nvPicPr>
-        <p:blipFill>
-          <a:blip r:embed="rId1"/>
-          <a:stretch>
-            <a:fillRect/>
-          </a:stretch>
-        </p:blipFill>
-        <p:spPr>
-          <a:xfrm>
-            <a:off x="950976" y="4242816"/>
-            <a:ext cx="310896" cy="310896"/>
-          </a:xfrm>
-          <a:prstGeom prst="rect">
-            <a:avLst/>
-          </a:prstGeom>
-        </p:spPr>
-      </p:pic>
-      <p:sp>
-        <p:nvSpPr>
-          <p:cNvPr id="15" name="analytics head"/>
-          <p:cNvSpPr txBox="1"/>
-          <p:nvPr/>
-        </p:nvSpPr>
-        <p:spPr>
-          <a:xfrm>
-            <a:off x="822960" y="4864608"/>
-            <a:ext cx="4861408" cy="457200"/>
-          </a:xfrm>
-          <a:prstGeom prst="rect">
-            <a:avLst/>
-          </a:prstGeom>
-          <a:noFill/>
-          <a:ln/>
-        </p:spPr>
-        <p:txBody>
-          <a:bodyPr wrap="square" lIns="0" tIns="0" rIns="0" bIns="0" rtlCol="0" anchor="t"/>
-          <a:lstStyle/>
-          <a:p>
-            <a:pPr indent="0" marL="0">
-              <a:buNone/>
-            </a:pPr>
-            <a:r>
-              <a:rPr lang="en-US" sz="1800" b="1" dirty="0">
-                <a:solidFill>
-                  <a:schemeClr val="tx1"/>
-                </a:solidFill>
-              </a:rPr>
-              <a:t>Аналітика взаємодій</a:t>
-            </a:r>
-            <a:endParaRPr lang="en-US" sz="1800" dirty="0"/>
-          </a:p>
-        </p:txBody>
-      </p:sp>
-      <p:sp>
-        <p:nvSpPr>
-          <p:cNvPr id="16" name="analytics text"/>
-          <p:cNvSpPr txBox="1"/>
-          <p:nvPr/>
-        </p:nvSpPr>
-        <p:spPr>
-          <a:xfrm>
-            <a:off x="822960" y="5413248"/>
-            <a:ext cx="4861408" cy="621792"/>
-          </a:xfrm>
-          <a:prstGeom prst="rect">
-            <a:avLst/>
-          </a:prstGeom>
-          <a:noFill/>
-          <a:ln/>
-        </p:spPr>
-        <p:txBody>
-          <a:bodyPr wrap="square" lIns="0" tIns="0" rIns="0" bIns="0" rtlCol="0" anchor="t"/>
-          <a:lstStyle/>
-          <a:p>
-            <a:pPr indent="0" marL="0">
-              <a:buNone/>
-            </a:pPr>
-            <a:r>
-              <a:rPr lang="en-US" sz="1400" dirty="0">
-                <a:solidFill>
-                  <a:schemeClr val="tx2"/>
-                </a:solidFill>
-              </a:rPr>
-              <a:t>Copilot рахує наміри, емоції, авто-дії, погодження, ескалації та збережені гроші — видно, де AI закриває звернення сам.</a:t>
-            </a:r>
-            <a:endParaRPr lang="en-US" sz="1400" dirty="0"/>
-          </a:p>
-        </p:txBody>
-      </p:sp>
-      <p:sp>
-        <p:nvSpPr>
-          <p:cNvPr id="17" name="channels card"/>
-          <p:cNvSpPr/>
-          <p:nvPr/>
-        </p:nvSpPr>
-        <p:spPr>
-          <a:xfrm>
-            <a:off x="6233008" y="3840480"/>
-            <a:ext cx="5410048" cy="2377440"/>
-          </a:xfrm>
-          <a:prstGeom prst="roundRect">
-            <a:avLst>
-              <a:gd name="adj" fmla="val 4615"/>
-            </a:avLst>
-          </a:prstGeom>
-          <a:solidFill>
-            <a:schemeClr val="bg1"/>
-          </a:solidFill>
-          <a:ln w="9525">
-            <a:solidFill>
-              <a:schemeClr val="bg2"/>
-            </a:solidFill>
-            <a:prstDash val="solid"/>
-          </a:ln>
-          <a:effectLst>
-            <a:outerShdw sx="100000" sy="100000" kx="0" ky="0" algn="bl" rotWithShape="0" blurRad="101600" dist="25400" dir="5400000">
-              <a:srgbClr val="16163A">
-                <a:alpha val="12000"/>
-              </a:srgbClr>
-            </a:outerShdw>
-          </a:effectLst>
-        </p:spPr>
-      </p:sp>
-      <p:sp>
-        <p:nvSpPr>
-          <p:cNvPr id="18" name="channels icon bg"/>
-          <p:cNvSpPr/>
-          <p:nvPr/>
-        </p:nvSpPr>
-        <p:spPr>
-          <a:xfrm>
-            <a:off x="6507328" y="4114800"/>
-            <a:ext cx="566928" cy="566928"/>
-          </a:xfrm>
-          <a:prstGeom prst="ellipse">
-            <a:avLst/>
-          </a:prstGeom>
-          <a:solidFill>
-            <a:schemeClr val="bg2"/>
-          </a:solidFill>
-          <a:ln/>
-        </p:spPr>
-      </p:sp>
-      <p:pic>
-        <p:nvPicPr>
-          <p:cNvPr id="19" name="channels icon" descr="preencoded.png">    </p:cNvPr>
-          <p:cNvPicPr>
-            <a:picLocks noChangeAspect="1"/>
-          </p:cNvPicPr>
-          <p:nvPr/>
-        </p:nvPicPr>
-        <p:blipFill>
-          <a:blip r:embed="rId2"/>
-          <a:stretch>
-            <a:fillRect/>
-          </a:stretch>
-        </p:blipFill>
-        <p:spPr>
-          <a:xfrm>
-            <a:off x="6635344" y="4242816"/>
-            <a:ext cx="310896" cy="310896"/>
-          </a:xfrm>
-          <a:prstGeom prst="rect">
-            <a:avLst/>
-          </a:prstGeom>
-        </p:spPr>
-      </p:pic>
-      <p:sp>
-        <p:nvSpPr>
-          <p:cNvPr id="20" name="channels head"/>
-          <p:cNvSpPr txBox="1"/>
-          <p:nvPr/>
-        </p:nvSpPr>
-        <p:spPr>
-          <a:xfrm>
-            <a:off x="6507328" y="4864608"/>
-            <a:ext cx="4861408" cy="457200"/>
-          </a:xfrm>
-          <a:prstGeom prst="rect">
-            <a:avLst/>
-          </a:prstGeom>
-          <a:noFill/>
-          <a:ln/>
-        </p:spPr>
-        <p:txBody>
-          <a:bodyPr wrap="square" lIns="0" tIns="0" rIns="0" bIns="0" rtlCol="0" anchor="t"/>
-          <a:lstStyle/>
-          <a:p>
-            <a:pPr indent="0" marL="0">
-              <a:buNone/>
-            </a:pPr>
-            <a:r>
-              <a:rPr lang="en-US" sz="1800" b="1" dirty="0">
-                <a:solidFill>
-                  <a:schemeClr val="tx1"/>
-                </a:solidFill>
-              </a:rPr>
-              <a:t>Будь-який канал</a:t>
-            </a:r>
-            <a:endParaRPr lang="en-US" sz="1800" dirty="0"/>
-          </a:p>
-        </p:txBody>
-      </p:sp>
-      <p:sp>
-        <p:nvSpPr>
-          <p:cNvPr id="21" name="channels text"/>
-          <p:cNvSpPr txBox="1"/>
-          <p:nvPr/>
-        </p:nvSpPr>
-        <p:spPr>
-          <a:xfrm>
-            <a:off x="6507328" y="5413248"/>
-            <a:ext cx="4861408" cy="621792"/>
-          </a:xfrm>
-          <a:prstGeom prst="rect">
-            <a:avLst/>
-          </a:prstGeom>
-          <a:noFill/>
-          <a:ln/>
-        </p:spPr>
-        <p:txBody>
-          <a:bodyPr wrap="square" lIns="0" tIns="0" rIns="0" bIns="0" rtlCol="0" anchor="t"/>
-          <a:lstStyle/>
-          <a:p>
-            <a:pPr indent="0" marL="0">
-              <a:buNone/>
-            </a:pPr>
-            <a:r>
-              <a:rPr lang="en-US" sz="1400" dirty="0">
-                <a:solidFill>
-                  <a:schemeClr val="tx2"/>
-                </a:solidFill>
-              </a:rPr>
-              <a:t>Чат на сайті, віджет на сайті бізнесу, телефон через Vapi — однакові інструменти й правила, одна черга погоджень.</a:t>
-            </a:r>
-            <a:endParaRPr lang="en-US" sz="1400" dirty="0"/>
-          </a:p>
-        </p:txBody>
-      </p:sp>
-      <p:sp>
-        <p:nvSpPr>
-          <p:cNvPr id="25" name="Slide Number Placeholder 0"/>
-          <p:cNvSpPr>
-            <a:spLocks noGrp="1"/>
-          </p:cNvSpPr>
-          <p:nvPr>
-            <p:ph type="sldNum" sz="quarter" idx="4294967295"/>
-          </p:nvPr>
-        </p:nvSpPr>
-        <p:spPr>
-          <a:xfrm>
-            <a:off x="11185855" y="6446520"/>
-            <a:ext cx="457200" cy="274320"/>
-          </a:xfrm>
-          <a:prstGeom prst="rect">
-            <a:avLst/>
-          </a:prstGeom>
-          <a:extLst>
-            <a:ext uri="{C572A759-6A51-4108-AA02-DFA0A04FC94B}">
-              <ma14:wrappingTextBoxFlag xmlns:ma14="http://schemas.microsoft.com/office/mac/drawingml/2011/main" val="0"/>
-            </a:ext>
-          </a:extLst>
-        </p:spPr>
-        <p:txBody>
-          <a:bodyPr/>
-          <a:lstStyle>
-            <a:lvl1pPr>
-              <a:defRPr sz="1000">
-                <a:solidFill>
-                  <a:schemeClr val="accent5"/>
-                </a:solidFill>
-              </a:defRPr>
-            </a:lvl1pPr>
-          </a:lstStyle>
-          <a:p>
-            <a:pPr algn="r"/>
-            <a:fld id="{F7021451-1387-4CA6-816F-3879F97B5CBC}" type="slidenum">
-              <a:rPr b="0" lang="en-US"/>
-              <a:t>11</a:t>
-            </a:fld>
-            <a:endParaRPr lang="en-US"/>
-          </a:p>
-        </p:txBody>
-      </p:sp>
-    </p:spTree>
-  </p:cSld>
-  <p:clrMapOvr>
-    <a:masterClrMapping/>
-  </p:clrMapOvr>
-</p:sld>
-</file>
-
-<file path=ppt/slides/slide12.xml><?xml version="1.0" encoding="utf-8"?>
-<p:sld xmlns:a="http://schemas.openxmlformats.org/drawingml/2006/main" xmlns:r="http://schemas.openxmlformats.org/officeDocument/2006/relationships" xmlns:p="http://schemas.openxmlformats.org/presentationml/2006/main">
-  <p:cSld name="Slide 12">
-    <p:spTree>
-      <p:nvGrpSpPr>
-        <p:cNvPr id="1" name=""/>
-        <p:cNvGrpSpPr/>
-        <p:nvPr/>
-      </p:nvGrpSpPr>
-      <p:grpSpPr>
-        <a:xfrm>
-          <a:off x="0" y="0"/>
-          <a:ext cx="0" cy="0"/>
-          <a:chOff x="0" y="0"/>
-          <a:chExt cx="0" cy="0"/>
-        </a:xfrm>
-      </p:grpSpPr>
-      <p:sp>
-        <p:nvSpPr>
-          <p:cNvPr id="2" name="Text 0"/>
-          <p:cNvSpPr/>
-          <p:nvPr>
-            <p:ph idx="100" type="title" hasCustomPrompt="1"/>
-          </p:nvPr>
-        </p:nvSpPr>
-        <p:spPr>
-          <a:xfrm>
-            <a:off x="548640" y="365760"/>
-            <a:ext cx="11094415" cy="731520"/>
-          </a:xfrm>
-          <a:prstGeom prst="rect">
-            <a:avLst/>
-          </a:prstGeom>
-          <a:noFill/>
-          <a:ln/>
-        </p:spPr>
-        <p:txBody>
-          <a:bodyPr wrap="square" lIns="0" tIns="0" rIns="0" bIns="0" rtlCol="0" anchor="ctr"/>
-          <a:lstStyle/>
-          <a:p>
-            <a:pPr algn="l" indent="0" marL="0">
-              <a:buNone/>
-            </a:pPr>
-            <a:r>
-              <a:rPr lang="en-US" sz="3200" b="1" dirty="0">
-                <a:solidFill>
-                  <a:schemeClr val="tx1"/>
-                </a:solidFill>
-              </a:rPr>
-              <a:t>Як ми закриваємо критерії оцінювання</a:t>
-            </a:r>
-            <a:endParaRPr lang="en-US" sz="3200" dirty="0"/>
-          </a:p>
-        </p:txBody>
-      </p:sp>
-      <p:sp>
-        <p:nvSpPr>
-          <p:cNvPr id="3" name="criterion 0"/>
-          <p:cNvSpPr/>
-          <p:nvPr/>
-        </p:nvSpPr>
-        <p:spPr>
-          <a:xfrm>
-            <a:off x="548640" y="1371600"/>
-            <a:ext cx="11094415" cy="749808"/>
-          </a:xfrm>
-          <a:prstGeom prst="roundRect">
-            <a:avLst>
-              <a:gd name="adj" fmla="val 12195"/>
-            </a:avLst>
-          </a:prstGeom>
-          <a:solidFill>
-            <a:schemeClr val="bg2"/>
-          </a:solidFill>
-          <a:ln/>
-        </p:spPr>
-      </p:sp>
-      <p:sp>
-        <p:nvSpPr>
-          <p:cNvPr id="4" name="criterion 0 name"/>
-          <p:cNvSpPr txBox="1"/>
-          <p:nvPr/>
-        </p:nvSpPr>
-        <p:spPr>
-          <a:xfrm>
-            <a:off x="822960" y="1371600"/>
-            <a:ext cx="3108960" cy="749808"/>
-          </a:xfrm>
-          <a:prstGeom prst="rect">
-            <a:avLst/>
-          </a:prstGeom>
-          <a:noFill/>
-          <a:ln/>
-        </p:spPr>
-        <p:txBody>
-          <a:bodyPr wrap="square" lIns="0" tIns="0" rIns="0" bIns="0" rtlCol="0" anchor="ctr"/>
-          <a:lstStyle/>
-          <a:p>
-            <a:pPr indent="0" marL="0">
-              <a:buNone/>
-            </a:pPr>
-            <a:r>
-              <a:rPr lang="en-US" sz="1700" b="1" dirty="0">
-                <a:solidFill>
-                  <a:schemeClr val="accent1"/>
-                </a:solidFill>
-              </a:rPr>
-              <a:t>Operational Impact</a:t>
-            </a:r>
-            <a:endParaRPr lang="en-US" sz="1700" dirty="0"/>
-          </a:p>
-        </p:txBody>
-      </p:sp>
-      <p:sp>
-        <p:nvSpPr>
-          <p:cNvPr id="5" name="criterion 0 text"/>
-          <p:cNvSpPr txBox="1"/>
-          <p:nvPr/>
-        </p:nvSpPr>
-        <p:spPr>
-          <a:xfrm>
-            <a:off x="4023360" y="1371600"/>
-            <a:ext cx="7345375" cy="749808"/>
-          </a:xfrm>
-          <a:prstGeom prst="rect">
-            <a:avLst/>
-          </a:prstGeom>
-          <a:noFill/>
-          <a:ln/>
-        </p:spPr>
-        <p:txBody>
-          <a:bodyPr wrap="square" lIns="0" tIns="0" rIns="0" bIns="0" rtlCol="0" anchor="ctr"/>
-          <a:lstStyle/>
-          <a:p>
-            <a:pPr indent="0" marL="0">
-              <a:buNone/>
-            </a:pPr>
-            <a:r>
-              <a:rPr lang="en-US" sz="1500" dirty="0">
-                <a:solidFill>
-                  <a:schemeClr val="tx1"/>
-                </a:solidFill>
-              </a:rPr>
-              <a:t>Звернення закриваються діями в системі; людина — лише для ризикових рішень</a:t>
-            </a:r>
-            <a:endParaRPr lang="en-US" sz="1500" dirty="0"/>
-          </a:p>
-        </p:txBody>
-      </p:sp>
-      <p:sp>
-        <p:nvSpPr>
-          <p:cNvPr id="6" name="criterion 1"/>
-          <p:cNvSpPr/>
-          <p:nvPr/>
-        </p:nvSpPr>
-        <p:spPr>
-          <a:xfrm>
-            <a:off x="548640" y="2286000"/>
-            <a:ext cx="11094415" cy="749808"/>
-          </a:xfrm>
-          <a:prstGeom prst="roundRect">
-            <a:avLst>
-              <a:gd name="adj" fmla="val 12195"/>
-            </a:avLst>
-          </a:prstGeom>
-          <a:solidFill>
-            <a:schemeClr val="bg1"/>
-          </a:solidFill>
-          <a:ln/>
-        </p:spPr>
-      </p:sp>
-      <p:sp>
-        <p:nvSpPr>
-          <p:cNvPr id="7" name="criterion 1 name"/>
-          <p:cNvSpPr txBox="1"/>
-          <p:nvPr/>
-        </p:nvSpPr>
-        <p:spPr>
-          <a:xfrm>
-            <a:off x="822960" y="2286000"/>
-            <a:ext cx="3108960" cy="749808"/>
-          </a:xfrm>
-          <a:prstGeom prst="rect">
-            <a:avLst/>
-          </a:prstGeom>
-          <a:noFill/>
-          <a:ln/>
-        </p:spPr>
-        <p:txBody>
-          <a:bodyPr wrap="square" lIns="0" tIns="0" rIns="0" bIns="0" rtlCol="0" anchor="ctr"/>
-          <a:lstStyle/>
-          <a:p>
-            <a:pPr indent="0" marL="0">
-              <a:buNone/>
-            </a:pPr>
-            <a:r>
-              <a:rPr lang="en-US" sz="1700" b="1" dirty="0">
-                <a:solidFill>
-                  <a:schemeClr val="accent1"/>
-                </a:solidFill>
-              </a:rPr>
-              <a:t>Innovation</a:t>
-            </a:r>
-            <a:endParaRPr lang="en-US" sz="1700" dirty="0"/>
-          </a:p>
-        </p:txBody>
-      </p:sp>
-      <p:sp>
-        <p:nvSpPr>
-          <p:cNvPr id="8" name="criterion 1 text"/>
-          <p:cNvSpPr txBox="1"/>
-          <p:nvPr/>
-        </p:nvSpPr>
-        <p:spPr>
-          <a:xfrm>
-            <a:off x="4023360" y="2286000"/>
-            <a:ext cx="7345375" cy="749808"/>
-          </a:xfrm>
-          <a:prstGeom prst="rect">
-            <a:avLst/>
-          </a:prstGeom>
-          <a:noFill/>
-          <a:ln/>
-        </p:spPr>
-        <p:txBody>
-          <a:bodyPr wrap="square" lIns="0" tIns="0" rIns="0" bIns="0" rtlCol="0" anchor="ctr"/>
-          <a:lstStyle/>
-          <a:p>
-            <a:pPr indent="0" marL="0">
-              <a:buNone/>
-            </a:pPr>
-            <a:r>
-              <a:rPr lang="en-US" sz="1500" dirty="0">
-                <a:solidFill>
-                  <a:schemeClr val="tx1"/>
-                </a:solidFill>
-              </a:rPr>
-              <a:t>Permission engine, який налаштовує власник, і один агент для будь-якого бізнесу</a:t>
-            </a:r>
-            <a:endParaRPr lang="en-US" sz="1500" dirty="0"/>
-          </a:p>
-        </p:txBody>
-      </p:sp>
-      <p:sp>
-        <p:nvSpPr>
-          <p:cNvPr id="9" name="criterion 2"/>
-          <p:cNvSpPr/>
-          <p:nvPr/>
-        </p:nvSpPr>
-        <p:spPr>
-          <a:xfrm>
-            <a:off x="548640" y="3200400"/>
-            <a:ext cx="11094415" cy="749808"/>
-          </a:xfrm>
-          <a:prstGeom prst="roundRect">
-            <a:avLst>
-              <a:gd name="adj" fmla="val 12195"/>
-            </a:avLst>
-          </a:prstGeom>
-          <a:solidFill>
-            <a:schemeClr val="bg2"/>
-          </a:solidFill>
-          <a:ln/>
-        </p:spPr>
-      </p:sp>
-      <p:sp>
-        <p:nvSpPr>
-          <p:cNvPr id="10" name="criterion 2 name"/>
-          <p:cNvSpPr txBox="1"/>
-          <p:nvPr/>
-        </p:nvSpPr>
-        <p:spPr>
-          <a:xfrm>
-            <a:off x="822960" y="3200400"/>
-            <a:ext cx="3108960" cy="749808"/>
-          </a:xfrm>
-          <a:prstGeom prst="rect">
-            <a:avLst/>
-          </a:prstGeom>
-          <a:noFill/>
-          <a:ln/>
-        </p:spPr>
-        <p:txBody>
-          <a:bodyPr wrap="square" lIns="0" tIns="0" rIns="0" bIns="0" rtlCol="0" anchor="ctr"/>
-          <a:lstStyle/>
-          <a:p>
-            <a:pPr indent="0" marL="0">
-              <a:buNone/>
-            </a:pPr>
-            <a:r>
-              <a:rPr lang="en-US" sz="1700" b="1" dirty="0">
-                <a:solidFill>
-                  <a:schemeClr val="accent1"/>
-                </a:solidFill>
-              </a:rPr>
-              <a:t>Use of AI</a:t>
-            </a:r>
-            <a:endParaRPr lang="en-US" sz="1700" dirty="0"/>
-          </a:p>
-        </p:txBody>
-      </p:sp>
-      <p:sp>
-        <p:nvSpPr>
-          <p:cNvPr id="11" name="criterion 2 text"/>
-          <p:cNvSpPr txBox="1"/>
-          <p:nvPr/>
-        </p:nvSpPr>
-        <p:spPr>
-          <a:xfrm>
-            <a:off x="4023360" y="3200400"/>
-            <a:ext cx="7345375" cy="749808"/>
-          </a:xfrm>
-          <a:prstGeom prst="rect">
-            <a:avLst/>
-          </a:prstGeom>
-          <a:noFill/>
-          <a:ln/>
-        </p:spPr>
-        <p:txBody>
-          <a:bodyPr wrap="square" lIns="0" tIns="0" rIns="0" bIns="0" rtlCol="0" anchor="ctr"/>
-          <a:lstStyle/>
-          <a:p>
-            <a:pPr indent="0" marL="0">
-              <a:buNone/>
-            </a:pPr>
-            <a:r>
-              <a:rPr lang="en-US" sz="1500" dirty="0">
-                <a:solidFill>
-                  <a:schemeClr val="tx1"/>
-                </a:solidFill>
-              </a:rPr>
-              <a:t>Оркестратор Claude Sonnet, Gemma 4 для простих питань, агент з інструментами</a:t>
-            </a:r>
-            <a:endParaRPr lang="en-US" sz="1500" dirty="0"/>
-          </a:p>
-        </p:txBody>
-      </p:sp>
-      <p:sp>
-        <p:nvSpPr>
-          <p:cNvPr id="12" name="criterion 3"/>
-          <p:cNvSpPr/>
-          <p:nvPr/>
-        </p:nvSpPr>
-        <p:spPr>
-          <a:xfrm>
-            <a:off x="548640" y="4114800"/>
-            <a:ext cx="11094415" cy="749808"/>
-          </a:xfrm>
-          <a:prstGeom prst="roundRect">
-            <a:avLst>
-              <a:gd name="adj" fmla="val 12195"/>
-            </a:avLst>
-          </a:prstGeom>
-          <a:solidFill>
-            <a:schemeClr val="bg1"/>
-          </a:solidFill>
-          <a:ln/>
-        </p:spPr>
-      </p:sp>
-      <p:sp>
-        <p:nvSpPr>
-          <p:cNvPr id="13" name="criterion 3 name"/>
-          <p:cNvSpPr txBox="1"/>
-          <p:nvPr/>
-        </p:nvSpPr>
-        <p:spPr>
-          <a:xfrm>
-            <a:off x="822960" y="4114800"/>
-            <a:ext cx="3108960" cy="749808"/>
-          </a:xfrm>
-          <a:prstGeom prst="rect">
-            <a:avLst/>
-          </a:prstGeom>
-          <a:noFill/>
-          <a:ln/>
-        </p:spPr>
-        <p:txBody>
-          <a:bodyPr wrap="square" lIns="0" tIns="0" rIns="0" bIns="0" rtlCol="0" anchor="ctr"/>
-          <a:lstStyle/>
-          <a:p>
-            <a:pPr indent="0" marL="0">
-              <a:buNone/>
-            </a:pPr>
-            <a:r>
-              <a:rPr lang="en-US" sz="1700" b="1" dirty="0">
-                <a:solidFill>
-                  <a:schemeClr val="accent1"/>
-                </a:solidFill>
-              </a:rPr>
-              <a:t>Reasoning &amp; Context</a:t>
-            </a:r>
-            <a:endParaRPr lang="en-US" sz="1700" dirty="0"/>
-          </a:p>
-        </p:txBody>
-      </p:sp>
-      <p:sp>
-        <p:nvSpPr>
-          <p:cNvPr id="14" name="criterion 3 text"/>
-          <p:cNvSpPr txBox="1"/>
-          <p:nvPr/>
-        </p:nvSpPr>
-        <p:spPr>
-          <a:xfrm>
-            <a:off x="4023360" y="4114800"/>
-            <a:ext cx="7345375" cy="749808"/>
-          </a:xfrm>
-          <a:prstGeom prst="rect">
-            <a:avLst/>
-          </a:prstGeom>
-          <a:noFill/>
-          <a:ln/>
-        </p:spPr>
-        <p:txBody>
-          <a:bodyPr wrap="square" lIns="0" tIns="0" rIns="0" bIns="0" rtlCol="0" anchor="ctr"/>
-          <a:lstStyle/>
-          <a:p>
-            <a:pPr indent="0" marL="0">
-              <a:buNone/>
-            </a:pPr>
-            <a:r>
-              <a:rPr lang="en-US" sz="1500" dirty="0">
-                <a:solidFill>
-                  <a:schemeClr val="tx1"/>
-                </a:solidFill>
-              </a:rPr>
-              <a:t>Рішення залежить від історії клієнта, правил бізнесу та емоції звернення</a:t>
-            </a:r>
-            <a:endParaRPr lang="en-US" sz="1500" dirty="0"/>
-          </a:p>
-        </p:txBody>
-      </p:sp>
-      <p:sp>
-        <p:nvSpPr>
-          <p:cNvPr id="15" name="criterion 4"/>
-          <p:cNvSpPr/>
-          <p:nvPr/>
-        </p:nvSpPr>
-        <p:spPr>
-          <a:xfrm>
-            <a:off x="548640" y="5029200"/>
-            <a:ext cx="11094415" cy="749808"/>
-          </a:xfrm>
-          <a:prstGeom prst="roundRect">
-            <a:avLst>
-              <a:gd name="adj" fmla="val 12195"/>
-            </a:avLst>
-          </a:prstGeom>
-          <a:solidFill>
-            <a:schemeClr val="bg2"/>
-          </a:solidFill>
-          <a:ln/>
-        </p:spPr>
-      </p:sp>
-      <p:sp>
-        <p:nvSpPr>
-          <p:cNvPr id="16" name="criterion 4 name"/>
-          <p:cNvSpPr txBox="1"/>
-          <p:nvPr/>
-        </p:nvSpPr>
-        <p:spPr>
-          <a:xfrm>
-            <a:off x="822960" y="5029200"/>
-            <a:ext cx="3108960" cy="749808"/>
-          </a:xfrm>
-          <a:prstGeom prst="rect">
-            <a:avLst/>
-          </a:prstGeom>
-          <a:noFill/>
-          <a:ln/>
-        </p:spPr>
-        <p:txBody>
-          <a:bodyPr wrap="square" lIns="0" tIns="0" rIns="0" bIns="0" rtlCol="0" anchor="ctr"/>
-          <a:lstStyle/>
-          <a:p>
-            <a:pPr indent="0" marL="0">
-              <a:buNone/>
-            </a:pPr>
-            <a:r>
-              <a:rPr lang="en-US" sz="1700" b="1" dirty="0">
-                <a:solidFill>
-                  <a:schemeClr val="accent1"/>
-                </a:solidFill>
-              </a:rPr>
-              <a:t>Presentation &amp; Demo</a:t>
-            </a:r>
-            <a:endParaRPr lang="en-US" sz="1700" dirty="0"/>
-          </a:p>
-        </p:txBody>
-      </p:sp>
-      <p:sp>
-        <p:nvSpPr>
-          <p:cNvPr id="17" name="criterion 4 text"/>
-          <p:cNvSpPr txBox="1"/>
-          <p:nvPr/>
-        </p:nvSpPr>
-        <p:spPr>
-          <a:xfrm>
-            <a:off x="4023360" y="5029200"/>
-            <a:ext cx="7345375" cy="749808"/>
-          </a:xfrm>
-          <a:prstGeom prst="rect">
-            <a:avLst/>
-          </a:prstGeom>
-          <a:noFill/>
-          <a:ln/>
-        </p:spPr>
-        <p:txBody>
-          <a:bodyPr wrap="square" lIns="0" tIns="0" rIns="0" bIns="0" rtlCol="0" anchor="ctr"/>
-          <a:lstStyle/>
-          <a:p>
-            <a:pPr indent="0" marL="0">
-              <a:buNone/>
-            </a:pPr>
-            <a:r>
-              <a:rPr lang="en-US" sz="1500" dirty="0">
-                <a:solidFill>
-                  <a:schemeClr val="tx1"/>
-                </a:solidFill>
-              </a:rPr>
-              <a:t>Працюючий продукт: сайт, адмінка, API, MCP, телефон — усе на відео</a:t>
-            </a:r>
-            <a:endParaRPr lang="en-US" sz="1500" dirty="0"/>
-          </a:p>
-        </p:txBody>
-      </p:sp>
-      <p:sp>
-        <p:nvSpPr>
-          <p:cNvPr id="25" name="Slide Number Placeholder 0"/>
-          <p:cNvSpPr>
-            <a:spLocks noGrp="1"/>
-          </p:cNvSpPr>
-          <p:nvPr>
-            <p:ph type="sldNum" sz="quarter" idx="4294967295"/>
-          </p:nvPr>
-        </p:nvSpPr>
-        <p:spPr>
-          <a:xfrm>
-            <a:off x="11185855" y="6446520"/>
-            <a:ext cx="457200" cy="274320"/>
-          </a:xfrm>
-          <a:prstGeom prst="rect">
-            <a:avLst/>
-          </a:prstGeom>
-          <a:extLst>
-            <a:ext uri="{C572A759-6A51-4108-AA02-DFA0A04FC94B}">
-              <ma14:wrappingTextBoxFlag xmlns:ma14="http://schemas.microsoft.com/office/mac/drawingml/2011/main" val="0"/>
-            </a:ext>
-          </a:extLst>
-        </p:spPr>
-        <p:txBody>
-          <a:bodyPr/>
-          <a:lstStyle>
-            <a:lvl1pPr>
-              <a:defRPr sz="1000">
-                <a:solidFill>
-                  <a:schemeClr val="accent5"/>
-                </a:solidFill>
-              </a:defRPr>
-            </a:lvl1pPr>
-          </a:lstStyle>
-          <a:p>
-            <a:pPr algn="r"/>
-            <a:fld id="{F7021451-1387-4CA6-816F-3879F97B5CBC}" type="slidenum">
-              <a:rPr b="0" lang="en-US"/>
-              <a:t>12</a:t>
-            </a:fld>
-            <a:endParaRPr lang="en-US"/>
-          </a:p>
-        </p:txBody>
-      </p:sp>
-    </p:spTree>
-  </p:cSld>
-  <p:clrMapOvr>
-    <a:masterClrMapping/>
-  </p:clrMapOvr>
-</p:sld>
-</file>
-
-<file path=ppt/slides/slide13.xml><?xml version="1.0" encoding="utf-8"?>
-<p:sld xmlns:a="http://schemas.openxmlformats.org/drawingml/2006/main" xmlns:r="http://schemas.openxmlformats.org/officeDocument/2006/relationships" xmlns:p="http://schemas.openxmlformats.org/presentationml/2006/main">
-  <p:cSld name="Slide 13">
-    <p:spTree>
-      <p:nvGrpSpPr>
-        <p:cNvPr id="1" name=""/>
-        <p:cNvGrpSpPr/>
-        <p:nvPr/>
-      </p:nvGrpSpPr>
-      <p:grpSpPr>
-        <a:xfrm>
-          <a:off x="0" y="0"/>
-          <a:ext cx="0" cy="0"/>
-          <a:chOff x="0" y="0"/>
-          <a:chExt cx="0" cy="0"/>
-        </a:xfrm>
-      </p:grpSpPr>
-      <p:sp>
-        <p:nvSpPr>
-          <p:cNvPr id="2" name="Text 0"/>
-          <p:cNvSpPr/>
-          <p:nvPr>
-            <p:ph idx="100" type="title" hasCustomPrompt="1"/>
-          </p:nvPr>
-        </p:nvSpPr>
-        <p:spPr>
-          <a:xfrm>
             <a:off x="548640" y="2011680"/>
             <a:ext cx="8686800" cy="1463040"/>
           </a:xfrm>
@@ -4573,7 +2494,7 @@
                   <a:schemeClr val="tx1"/>
                 </a:solidFill>
               </a:rPr>
-              <a:t>Підтримка салонів і клінік тоне в рутині</a:t>
+              <a:t>Рутина підтримки → AI, який сам діє в системі</a:t>
             </a:r>
             <a:endParaRPr lang="en-US" sz="3200" dirty="0"/>
           </a:p>
@@ -4581,18 +2502,504 @@
       </p:sp>
       <p:sp>
         <p:nvSpPr>
-          <p:cNvPr id="3" name="pain 1 card"/>
+          <p:cNvPr id="3" name="problem label"/>
+          <p:cNvSpPr txBox="1"/>
+          <p:nvPr/>
+        </p:nvSpPr>
+        <p:spPr>
+          <a:xfrm>
+            <a:off x="548640" y="1280160"/>
+            <a:ext cx="5212080" cy="274320"/>
+          </a:xfrm>
+          <a:prstGeom prst="rect">
+            <a:avLst/>
+          </a:prstGeom>
+          <a:noFill/>
+          <a:ln/>
+        </p:spPr>
+        <p:txBody>
+          <a:bodyPr wrap="square" lIns="0" tIns="0" rIns="0" bIns="0" rtlCol="0" anchor="ctr"/>
+          <a:lstStyle/>
+          <a:p>
+            <a:pPr indent="0" marL="0">
+              <a:buNone/>
+            </a:pPr>
+            <a:r>
+              <a:rPr lang="en-US" sz="1200" b="1" dirty="0">
+                <a:solidFill>
+                  <a:schemeClr val="accent2"/>
+                </a:solidFill>
+              </a:rPr>
+              <a:t>ПРОБЛЕМА</a:t>
+            </a:r>
+            <a:endParaRPr lang="en-US" sz="1200" dirty="0"/>
+          </a:p>
+        </p:txBody>
+      </p:sp>
+      <p:sp>
+        <p:nvSpPr>
+          <p:cNvPr id="4" name="pain 1"/>
           <p:cNvSpPr/>
           <p:nvPr/>
         </p:nvSpPr>
         <p:spPr>
           <a:xfrm>
-            <a:off x="548640" y="1463040"/>
-            <a:ext cx="3515258" cy="3246120"/>
+            <a:off x="548640" y="1691640"/>
+            <a:ext cx="5212080" cy="1051560"/>
           </a:xfrm>
           <a:prstGeom prst="roundRect">
             <a:avLst>
-              <a:gd name="adj" fmla="val 3380"/>
+              <a:gd name="adj" fmla="val 8696"/>
+            </a:avLst>
+          </a:prstGeom>
+          <a:solidFill>
+            <a:schemeClr val="bg2"/>
+          </a:solidFill>
+          <a:ln/>
+        </p:spPr>
+      </p:sp>
+      <p:sp>
+        <p:nvSpPr>
+          <p:cNvPr id="5" name="pain 1 icon bg"/>
+          <p:cNvSpPr/>
+          <p:nvPr/>
+        </p:nvSpPr>
+        <p:spPr>
+          <a:xfrm>
+            <a:off x="777240" y="1938528"/>
+            <a:ext cx="566928" cy="566928"/>
+          </a:xfrm>
+          <a:prstGeom prst="ellipse">
+            <a:avLst/>
+          </a:prstGeom>
+          <a:solidFill>
+            <a:schemeClr val="bg1"/>
+          </a:solidFill>
+          <a:ln/>
+        </p:spPr>
+      </p:sp>
+      <p:pic>
+        <p:nvPicPr>
+          <p:cNvPr id="6" name="pain 1 icon" descr="preencoded.png">    </p:cNvPr>
+          <p:cNvPicPr>
+            <a:picLocks noChangeAspect="1"/>
+          </p:cNvPicPr>
+          <p:nvPr/>
+        </p:nvPicPr>
+        <p:blipFill>
+          <a:blip r:embed="rId1"/>
+          <a:stretch>
+            <a:fillRect/>
+          </a:stretch>
+        </p:blipFill>
+        <p:spPr>
+          <a:xfrm>
+            <a:off x="905256" y="2066544"/>
+            <a:ext cx="310896" cy="310896"/>
+          </a:xfrm>
+          <a:prstGeom prst="rect">
+            <a:avLst/>
+          </a:prstGeom>
+        </p:spPr>
+      </p:pic>
+      <p:sp>
+        <p:nvSpPr>
+          <p:cNvPr id="7" name="pain 1 head"/>
+          <p:cNvSpPr txBox="1"/>
+          <p:nvPr/>
+        </p:nvSpPr>
+        <p:spPr>
+          <a:xfrm>
+            <a:off x="1554480" y="1828800"/>
+            <a:ext cx="4023360" cy="384048"/>
+          </a:xfrm>
+          <a:prstGeom prst="rect">
+            <a:avLst/>
+          </a:prstGeom>
+          <a:noFill/>
+          <a:ln/>
+        </p:spPr>
+        <p:txBody>
+          <a:bodyPr wrap="square" lIns="0" tIns="0" rIns="0" bIns="0" rtlCol="0" anchor="ctr"/>
+          <a:lstStyle/>
+          <a:p>
+            <a:pPr indent="0" marL="0">
+              <a:buNone/>
+            </a:pPr>
+            <a:r>
+              <a:rPr lang="en-US" sz="1700" b="1" dirty="0">
+                <a:solidFill>
+                  <a:schemeClr val="tx1"/>
+                </a:solidFill>
+              </a:rPr>
+              <a:t>«Перенесіть», «поверніть»</a:t>
+            </a:r>
+            <a:endParaRPr lang="en-US" sz="1700" dirty="0"/>
+          </a:p>
+        </p:txBody>
+      </p:sp>
+      <p:sp>
+        <p:nvSpPr>
+          <p:cNvPr id="8" name="pain 1 text"/>
+          <p:cNvSpPr txBox="1"/>
+          <p:nvPr/>
+        </p:nvSpPr>
+        <p:spPr>
+          <a:xfrm>
+            <a:off x="1554480" y="2212848"/>
+            <a:ext cx="4023360" cy="411480"/>
+          </a:xfrm>
+          <a:prstGeom prst="rect">
+            <a:avLst/>
+          </a:prstGeom>
+          <a:noFill/>
+          <a:ln/>
+        </p:spPr>
+        <p:txBody>
+          <a:bodyPr wrap="square" lIns="0" tIns="0" rIns="0" bIns="0" rtlCol="0" anchor="t"/>
+          <a:lstStyle/>
+          <a:p>
+            <a:pPr indent="0" marL="0">
+              <a:buNone/>
+            </a:pPr>
+            <a:r>
+              <a:rPr lang="en-US" sz="1400" dirty="0">
+                <a:solidFill>
+                  <a:schemeClr val="tx2"/>
+                </a:solidFill>
+              </a:rPr>
+              <a:t>Адміністратор цілий день робить однакові дії вручну</a:t>
+            </a:r>
+            <a:endParaRPr lang="en-US" sz="1400" dirty="0"/>
+          </a:p>
+        </p:txBody>
+      </p:sp>
+      <p:sp>
+        <p:nvSpPr>
+          <p:cNvPr id="9" name="pain 2"/>
+          <p:cNvSpPr/>
+          <p:nvPr/>
+        </p:nvSpPr>
+        <p:spPr>
+          <a:xfrm>
+            <a:off x="548640" y="2926080"/>
+            <a:ext cx="5212080" cy="1051560"/>
+          </a:xfrm>
+          <a:prstGeom prst="roundRect">
+            <a:avLst>
+              <a:gd name="adj" fmla="val 8696"/>
+            </a:avLst>
+          </a:prstGeom>
+          <a:solidFill>
+            <a:schemeClr val="bg2"/>
+          </a:solidFill>
+          <a:ln/>
+        </p:spPr>
+      </p:sp>
+      <p:sp>
+        <p:nvSpPr>
+          <p:cNvPr id="10" name="pain 2 icon bg"/>
+          <p:cNvSpPr/>
+          <p:nvPr/>
+        </p:nvSpPr>
+        <p:spPr>
+          <a:xfrm>
+            <a:off x="777240" y="3172968"/>
+            <a:ext cx="566928" cy="566928"/>
+          </a:xfrm>
+          <a:prstGeom prst="ellipse">
+            <a:avLst/>
+          </a:prstGeom>
+          <a:solidFill>
+            <a:schemeClr val="bg1"/>
+          </a:solidFill>
+          <a:ln/>
+        </p:spPr>
+      </p:sp>
+      <p:pic>
+        <p:nvPicPr>
+          <p:cNvPr id="11" name="pain 2 icon" descr="preencoded.png">    </p:cNvPr>
+          <p:cNvPicPr>
+            <a:picLocks noChangeAspect="1"/>
+          </p:cNvPicPr>
+          <p:nvPr/>
+        </p:nvPicPr>
+        <p:blipFill>
+          <a:blip r:embed="rId2"/>
+          <a:stretch>
+            <a:fillRect/>
+          </a:stretch>
+        </p:blipFill>
+        <p:spPr>
+          <a:xfrm>
+            <a:off x="905256" y="3300984"/>
+            <a:ext cx="310896" cy="310896"/>
+          </a:xfrm>
+          <a:prstGeom prst="rect">
+            <a:avLst/>
+          </a:prstGeom>
+        </p:spPr>
+      </p:pic>
+      <p:sp>
+        <p:nvSpPr>
+          <p:cNvPr id="12" name="pain 2 head"/>
+          <p:cNvSpPr txBox="1"/>
+          <p:nvPr/>
+        </p:nvSpPr>
+        <p:spPr>
+          <a:xfrm>
+            <a:off x="1554480" y="3063240"/>
+            <a:ext cx="4023360" cy="384048"/>
+          </a:xfrm>
+          <a:prstGeom prst="rect">
+            <a:avLst/>
+          </a:prstGeom>
+          <a:noFill/>
+          <a:ln/>
+        </p:spPr>
+        <p:txBody>
+          <a:bodyPr wrap="square" lIns="0" tIns="0" rIns="0" bIns="0" rtlCol="0" anchor="ctr"/>
+          <a:lstStyle/>
+          <a:p>
+            <a:pPr indent="0" marL="0">
+              <a:buNone/>
+            </a:pPr>
+            <a:r>
+              <a:rPr lang="en-US" sz="1700" b="1" dirty="0">
+                <a:solidFill>
+                  <a:schemeClr val="tx1"/>
+                </a:solidFill>
+              </a:rPr>
+              <a:t>15–23% записів — неявки</a:t>
+            </a:r>
+            <a:endParaRPr lang="en-US" sz="1700" dirty="0"/>
+          </a:p>
+        </p:txBody>
+      </p:sp>
+      <p:sp>
+        <p:nvSpPr>
+          <p:cNvPr id="13" name="pain 2 text"/>
+          <p:cNvSpPr txBox="1"/>
+          <p:nvPr/>
+        </p:nvSpPr>
+        <p:spPr>
+          <a:xfrm>
+            <a:off x="1554480" y="3447288"/>
+            <a:ext cx="4023360" cy="411480"/>
+          </a:xfrm>
+          <a:prstGeom prst="rect">
+            <a:avLst/>
+          </a:prstGeom>
+          <a:noFill/>
+          <a:ln/>
+        </p:spPr>
+        <p:txBody>
+          <a:bodyPr wrap="square" lIns="0" tIns="0" rIns="0" bIns="0" rtlCol="0" anchor="t"/>
+          <a:lstStyle/>
+          <a:p>
+            <a:pPr indent="0" marL="0">
+              <a:buNone/>
+            </a:pPr>
+            <a:r>
+              <a:rPr lang="en-US" sz="1400" dirty="0">
+                <a:solidFill>
+                  <a:schemeClr val="tx2"/>
+                </a:solidFill>
+              </a:rPr>
+              <a:t>Передоплати, штрафи й винятки перевіряють вручну</a:t>
+            </a:r>
+            <a:endParaRPr lang="en-US" sz="1400" dirty="0"/>
+          </a:p>
+        </p:txBody>
+      </p:sp>
+      <p:sp>
+        <p:nvSpPr>
+          <p:cNvPr id="14" name="pain 3"/>
+          <p:cNvSpPr/>
+          <p:nvPr/>
+        </p:nvSpPr>
+        <p:spPr>
+          <a:xfrm>
+            <a:off x="548640" y="4160520"/>
+            <a:ext cx="5212080" cy="1051560"/>
+          </a:xfrm>
+          <a:prstGeom prst="roundRect">
+            <a:avLst>
+              <a:gd name="adj" fmla="val 8696"/>
+            </a:avLst>
+          </a:prstGeom>
+          <a:solidFill>
+            <a:schemeClr val="bg2"/>
+          </a:solidFill>
+          <a:ln/>
+        </p:spPr>
+      </p:sp>
+      <p:sp>
+        <p:nvSpPr>
+          <p:cNvPr id="15" name="pain 3 icon bg"/>
+          <p:cNvSpPr/>
+          <p:nvPr/>
+        </p:nvSpPr>
+        <p:spPr>
+          <a:xfrm>
+            <a:off x="777240" y="4407408"/>
+            <a:ext cx="566928" cy="566928"/>
+          </a:xfrm>
+          <a:prstGeom prst="ellipse">
+            <a:avLst/>
+          </a:prstGeom>
+          <a:solidFill>
+            <a:schemeClr val="bg1"/>
+          </a:solidFill>
+          <a:ln/>
+        </p:spPr>
+      </p:sp>
+      <p:pic>
+        <p:nvPicPr>
+          <p:cNvPr id="16" name="pain 3 icon" descr="preencoded.png">    </p:cNvPr>
+          <p:cNvPicPr>
+            <a:picLocks noChangeAspect="1"/>
+          </p:cNvPicPr>
+          <p:nvPr/>
+        </p:nvPicPr>
+        <p:blipFill>
+          <a:blip r:embed="rId3"/>
+          <a:stretch>
+            <a:fillRect/>
+          </a:stretch>
+        </p:blipFill>
+        <p:spPr>
+          <a:xfrm>
+            <a:off x="905256" y="4535424"/>
+            <a:ext cx="310896" cy="310896"/>
+          </a:xfrm>
+          <a:prstGeom prst="rect">
+            <a:avLst/>
+          </a:prstGeom>
+        </p:spPr>
+      </p:pic>
+      <p:sp>
+        <p:nvSpPr>
+          <p:cNvPr id="17" name="pain 3 head"/>
+          <p:cNvSpPr txBox="1"/>
+          <p:nvPr/>
+        </p:nvSpPr>
+        <p:spPr>
+          <a:xfrm>
+            <a:off x="1554480" y="4297680"/>
+            <a:ext cx="4023360" cy="384048"/>
+          </a:xfrm>
+          <a:prstGeom prst="rect">
+            <a:avLst/>
+          </a:prstGeom>
+          <a:noFill/>
+          <a:ln/>
+        </p:spPr>
+        <p:txBody>
+          <a:bodyPr wrap="square" lIns="0" tIns="0" rIns="0" bIns="0" rtlCol="0" anchor="ctr"/>
+          <a:lstStyle/>
+          <a:p>
+            <a:pPr indent="0" marL="0">
+              <a:buNone/>
+            </a:pPr>
+            <a:r>
+              <a:rPr lang="en-US" sz="1700" b="1" dirty="0">
+                <a:solidFill>
+                  <a:schemeClr val="tx1"/>
+                </a:solidFill>
+              </a:rPr>
+              <a:t>Боти лише пояснюють</a:t>
+            </a:r>
+            <a:endParaRPr lang="en-US" sz="1700" dirty="0"/>
+          </a:p>
+        </p:txBody>
+      </p:sp>
+      <p:sp>
+        <p:nvSpPr>
+          <p:cNvPr id="18" name="pain 3 text"/>
+          <p:cNvSpPr txBox="1"/>
+          <p:nvPr/>
+        </p:nvSpPr>
+        <p:spPr>
+          <a:xfrm>
+            <a:off x="1554480" y="4681728"/>
+            <a:ext cx="4023360" cy="411480"/>
+          </a:xfrm>
+          <a:prstGeom prst="rect">
+            <a:avLst/>
+          </a:prstGeom>
+          <a:noFill/>
+          <a:ln/>
+        </p:spPr>
+        <p:txBody>
+          <a:bodyPr wrap="square" lIns="0" tIns="0" rIns="0" bIns="0" rtlCol="0" anchor="t"/>
+          <a:lstStyle/>
+          <a:p>
+            <a:pPr indent="0" marL="0">
+              <a:buNone/>
+            </a:pPr>
+            <a:r>
+              <a:rPr lang="en-US" sz="1400" dirty="0">
+                <a:solidFill>
+                  <a:schemeClr val="tx2"/>
+                </a:solidFill>
+              </a:rPr>
+              <a:t>Розкажуть правила, але не перенесуть і не повернуть гроші</a:t>
+            </a:r>
+            <a:endParaRPr lang="en-US" sz="1400" dirty="0"/>
+          </a:p>
+        </p:txBody>
+      </p:sp>
+      <p:sp>
+        <p:nvSpPr>
+          <p:cNvPr id="19" name="solution label"/>
+          <p:cNvSpPr txBox="1"/>
+          <p:nvPr/>
+        </p:nvSpPr>
+        <p:spPr>
+          <a:xfrm>
+            <a:off x="6126480" y="1280160"/>
+            <a:ext cx="5516575" cy="274320"/>
+          </a:xfrm>
+          <a:prstGeom prst="rect">
+            <a:avLst/>
+          </a:prstGeom>
+          <a:noFill/>
+          <a:ln/>
+        </p:spPr>
+        <p:txBody>
+          <a:bodyPr wrap="square" lIns="0" tIns="0" rIns="0" bIns="0" rtlCol="0" anchor="ctr"/>
+          <a:lstStyle/>
+          <a:p>
+            <a:pPr indent="0" marL="0">
+              <a:buNone/>
+            </a:pPr>
+            <a:r>
+              <a:rPr lang="en-US" sz="1200" b="1" dirty="0">
+                <a:solidFill>
+                  <a:schemeClr val="accent1"/>
+                </a:solidFill>
+              </a:rPr>
+              <a:t>РІШЕННЯ</a:t>
+            </a:r>
+            <a:endParaRPr lang="en-US" sz="1200" dirty="0"/>
+          </a:p>
+        </p:txBody>
+      </p:sp>
+      <p:sp>
+        <p:nvSpPr>
+          <p:cNvPr id="20" name="solution card"/>
+          <p:cNvSpPr/>
+          <p:nvPr/>
+        </p:nvSpPr>
+        <p:spPr>
+          <a:xfrm>
+            <a:off x="6126480" y="1691640"/>
+            <a:ext cx="5516575" cy="3520440"/>
+          </a:xfrm>
+          <a:prstGeom prst="roundRect">
+            <a:avLst>
+              <a:gd name="adj" fmla="val 3117"/>
             </a:avLst>
           </a:prstGeom>
           <a:solidFill>
@@ -4615,13 +3022,13 @@
       </p:sp>
       <p:sp>
         <p:nvSpPr>
-          <p:cNvPr id="4" name="pain 1 icon bg"/>
+          <p:cNvPr id="21" name="solution icon bg"/>
           <p:cNvSpPr/>
           <p:nvPr/>
         </p:nvSpPr>
         <p:spPr>
           <a:xfrm>
-            <a:off x="822960" y="1737360"/>
+            <a:off x="6400800" y="1965960"/>
             <a:ext cx="566928" cy="566928"/>
           </a:xfrm>
           <a:prstGeom prst="ellipse">
@@ -4635,21 +3042,21 @@
       </p:sp>
       <p:pic>
         <p:nvPicPr>
-          <p:cNvPr id="5" name="pain 1 icon" descr="preencoded.png">    </p:cNvPr>
+          <p:cNvPr id="22" name="solution icon" descr="preencoded.png">    </p:cNvPr>
           <p:cNvPicPr>
             <a:picLocks noChangeAspect="1"/>
           </p:cNvPicPr>
           <p:nvPr/>
         </p:nvPicPr>
         <p:blipFill>
-          <a:blip r:embed="rId1"/>
+          <a:blip r:embed="rId4"/>
           <a:stretch>
             <a:fillRect/>
           </a:stretch>
         </p:blipFill>
         <p:spPr>
           <a:xfrm>
-            <a:off x="950976" y="1865376"/>
+            <a:off x="6528816" y="2093976"/>
             <a:ext cx="310896" cy="310896"/>
           </a:xfrm>
           <a:prstGeom prst="rect">
@@ -4659,14 +3066,14 @@
       </p:pic>
       <p:sp>
         <p:nvSpPr>
-          <p:cNvPr id="6" name="pain 1 head"/>
+          <p:cNvPr id="23" name="solution head"/>
           <p:cNvSpPr txBox="1"/>
           <p:nvPr/>
         </p:nvSpPr>
         <p:spPr>
           <a:xfrm>
-            <a:off x="822960" y="2487168"/>
-            <a:ext cx="2966618" cy="731520"/>
+            <a:off x="6400800" y="2715768"/>
+            <a:ext cx="4967935" cy="457200"/>
           </a:xfrm>
           <a:prstGeom prst="rect">
             <a:avLst/>
@@ -4687,7 +3094,7 @@
                   <a:schemeClr val="tx1"/>
                 </a:solidFill>
               </a:rPr>
-              <a:t>«Перенесіть», «поверніть»</a:t>
+              <a:t>Bookly + AI-агент підтримки</a:t>
             </a:r>
             <a:endParaRPr lang="en-US" sz="1800" dirty="0"/>
           </a:p>
@@ -4695,14 +3102,14 @@
       </p:sp>
       <p:sp>
         <p:nvSpPr>
-          <p:cNvPr id="7" name="pain 1 text"/>
+          <p:cNvPr id="24" name="solution text"/>
           <p:cNvSpPr txBox="1"/>
           <p:nvPr/>
         </p:nvSpPr>
         <p:spPr>
           <a:xfrm>
-            <a:off x="822960" y="3310128"/>
-            <a:ext cx="2966618" cy="1216152"/>
+            <a:off x="6400800" y="3264408"/>
+            <a:ext cx="4967935" cy="1764792"/>
           </a:xfrm>
           <a:prstGeom prst="rect">
             <a:avLst/>
@@ -4714,130 +3121,109 @@
           <a:bodyPr wrap="square" lIns="0" tIns="0" rIns="0" bIns="0" rtlCol="0" anchor="t"/>
           <a:lstStyle/>
           <a:p>
+            <a:pPr marL="342900" indent="-342900">
+              <a:buSzPct val="100000"/>
+              <a:buChar char="•"/>
+            </a:pPr>
+            <a:r>
+              <a:rPr lang="en-US" sz="1500" dirty="0">
+                <a:solidFill>
+                  <a:schemeClr val="tx2"/>
+                </a:solidFill>
+              </a:rPr>
+              <a:t>Платформа для салонів і клінік: запис, передоплата, адмінка, правила бізнесу</a:t>
+            </a:r>
+            <a:endParaRPr lang="en-US" sz="1500" dirty="0"/>
+          </a:p>
+          <a:p>
+            <a:pPr marL="342900" indent="-342900">
+              <a:buSzPct val="100000"/>
+              <a:buChar char="•"/>
+            </a:pPr>
+            <a:r>
+              <a:rPr lang="en-US" sz="1500" dirty="0">
+                <a:solidFill>
+                  <a:schemeClr val="tx2"/>
+                </a:solidFill>
+              </a:rPr>
+              <a:t>Агент розуміє намір і емоцію та діє інструментами: переносить, скасовує, повертає</a:t>
+            </a:r>
+            <a:endParaRPr lang="en-US" sz="1500" dirty="0"/>
+          </a:p>
+          <a:p>
+            <a:pPr marL="342900" indent="-342900">
+              <a:buSzPct val="100000"/>
+              <a:buChar char="•"/>
+            </a:pPr>
+            <a:r>
+              <a:rPr lang="en-US" sz="1500" dirty="0">
+                <a:solidFill>
+                  <a:schemeClr val="tx2"/>
+                </a:solidFill>
+              </a:rPr>
+              <a:t>Власник налаштовує, що AI робить сам, а що лише з погодженням</a:t>
+            </a:r>
+            <a:endParaRPr lang="en-US" sz="1500" dirty="0"/>
+          </a:p>
+          <a:p>
+            <a:pPr marL="342900" indent="-342900">
+              <a:buSzPct val="100000"/>
+              <a:buChar char="•"/>
+            </a:pPr>
+            <a:r>
+              <a:rPr lang="en-US" sz="1500" dirty="0">
+                <a:solidFill>
+                  <a:schemeClr val="tx2"/>
+                </a:solidFill>
+              </a:rPr>
+              <a:t>Чат на сайті, віджет, телефон — одні правила й одна черга погоджень</a:t>
+            </a:r>
+            <a:endParaRPr lang="en-US" sz="1500" dirty="0"/>
+          </a:p>
+        </p:txBody>
+      </p:sp>
+      <p:sp>
+        <p:nvSpPr>
+          <p:cNvPr id="25" name="key question"/>
+          <p:cNvSpPr txBox="1"/>
+          <p:nvPr/>
+        </p:nvSpPr>
+        <p:spPr>
+          <a:xfrm>
+            <a:off x="548640" y="5486400"/>
+            <a:ext cx="11094415" cy="457200"/>
+          </a:xfrm>
+          <a:prstGeom prst="rect">
+            <a:avLst/>
+          </a:prstGeom>
+          <a:noFill/>
+          <a:ln/>
+        </p:spPr>
+        <p:txBody>
+          <a:bodyPr wrap="square" lIns="0" tIns="0" rIns="0" bIns="0" rtlCol="0" anchor="ctr"/>
+          <a:lstStyle/>
+          <a:p>
             <a:pPr indent="0" marL="0">
               <a:buNone/>
             </a:pPr>
             <a:r>
-              <a:rPr lang="en-US" sz="1400" dirty="0">
-                <a:solidFill>
-                  <a:schemeClr val="tx2"/>
-                </a:solidFill>
-              </a:rPr>
-              <a:t>Адміністратор цілий день відповідає в директі й телефоні на однакові запити, які потребують лише кількох дій у системі.</a:t>
-            </a:r>
-            <a:endParaRPr lang="en-US" sz="1400" dirty="0"/>
-          </a:p>
-        </p:txBody>
-      </p:sp>
-      <p:sp>
-        <p:nvSpPr>
-          <p:cNvPr id="8" name="pain 2 card"/>
-          <p:cNvSpPr/>
-          <p:nvPr/>
-        </p:nvSpPr>
-        <p:spPr>
-          <a:xfrm>
-            <a:off x="4338218" y="1463040"/>
-            <a:ext cx="3515258" cy="3246120"/>
-          </a:xfrm>
-          <a:prstGeom prst="roundRect">
-            <a:avLst>
-              <a:gd name="adj" fmla="val 3380"/>
-            </a:avLst>
-          </a:prstGeom>
-          <a:solidFill>
-            <a:schemeClr val="bg1"/>
-          </a:solidFill>
-          <a:ln w="9525">
-            <a:solidFill>
-              <a:schemeClr val="bg2"/>
-            </a:solidFill>
-            <a:prstDash val="solid"/>
-          </a:ln>
-          <a:effectLst>
-            <a:outerShdw sx="100000" sy="100000" kx="0" ky="0" algn="bl" rotWithShape="0" blurRad="101600" dist="25400" dir="5400000">
-              <a:srgbClr val="16163A">
-                <a:alpha val="12000"/>
-              </a:srgbClr>
-            </a:outerShdw>
-          </a:effectLst>
-        </p:spPr>
-      </p:sp>
-      <p:sp>
-        <p:nvSpPr>
-          <p:cNvPr id="9" name="pain 2 icon bg"/>
-          <p:cNvSpPr/>
-          <p:nvPr/>
-        </p:nvSpPr>
-        <p:spPr>
-          <a:xfrm>
-            <a:off x="4612538" y="1737360"/>
-            <a:ext cx="566928" cy="566928"/>
-          </a:xfrm>
-          <a:prstGeom prst="ellipse">
-            <a:avLst/>
-          </a:prstGeom>
-          <a:solidFill>
-            <a:schemeClr val="bg2"/>
-          </a:solidFill>
-          <a:ln/>
-        </p:spPr>
-      </p:sp>
-      <p:pic>
-        <p:nvPicPr>
-          <p:cNvPr id="10" name="pain 2 icon" descr="preencoded.png">    </p:cNvPr>
-          <p:cNvPicPr>
-            <a:picLocks noChangeAspect="1"/>
-          </p:cNvPicPr>
-          <p:nvPr/>
-        </p:nvPicPr>
-        <p:blipFill>
-          <a:blip r:embed="rId2"/>
-          <a:stretch>
-            <a:fillRect/>
-          </a:stretch>
-        </p:blipFill>
-        <p:spPr>
-          <a:xfrm>
-            <a:off x="4740554" y="1865376"/>
-            <a:ext cx="310896" cy="310896"/>
-          </a:xfrm>
-          <a:prstGeom prst="rect">
-            <a:avLst/>
-          </a:prstGeom>
-        </p:spPr>
-      </p:pic>
-      <p:sp>
-        <p:nvSpPr>
-          <p:cNvPr id="11" name="pain 2 head"/>
-          <p:cNvSpPr txBox="1"/>
-          <p:nvPr/>
-        </p:nvSpPr>
-        <p:spPr>
-          <a:xfrm>
-            <a:off x="4612538" y="2487168"/>
-            <a:ext cx="2966618" cy="731520"/>
-          </a:xfrm>
-          <a:prstGeom prst="rect">
-            <a:avLst/>
-          </a:prstGeom>
-          <a:noFill/>
-          <a:ln/>
-        </p:spPr>
-        <p:txBody>
-          <a:bodyPr wrap="square" lIns="0" tIns="0" rIns="0" bIns="0" rtlCol="0" anchor="t"/>
-          <a:lstStyle/>
-          <a:p>
+              <a:rPr lang="en-US" sz="1800" b="1" dirty="0">
+                <a:solidFill>
+                  <a:schemeClr val="tx1"/>
+                </a:solidFill>
+              </a:rPr>
+              <a:t>Питання не в тому, як швидше відповісти, </a:t>
+            </a:r>
             <a:pPr indent="0" marL="0">
               <a:buNone/>
             </a:pPr>
             <a:r>
               <a:rPr lang="en-US" sz="1800" b="1" dirty="0">
                 <a:solidFill>
-                  <a:schemeClr val="tx1"/>
-                </a:solidFill>
-              </a:rPr>
-              <a:t>Неявки й пізні скасування</a:t>
+                  <a:schemeClr val="accent1"/>
+                </a:solidFill>
+              </a:rPr>
+              <a:t>а в тому, як вирішити проблему.</a:t>
             </a:r>
             <a:endParaRPr lang="en-US" sz="1800" dirty="0"/>
           </a:p>
@@ -4845,240 +3231,7 @@
       </p:sp>
       <p:sp>
         <p:nvSpPr>
-          <p:cNvPr id="12" name="pain 2 text"/>
-          <p:cNvSpPr txBox="1"/>
-          <p:nvPr/>
-        </p:nvSpPr>
-        <p:spPr>
-          <a:xfrm>
-            <a:off x="4612538" y="3310128"/>
-            <a:ext cx="2966618" cy="1216152"/>
-          </a:xfrm>
-          <a:prstGeom prst="rect">
-            <a:avLst/>
-          </a:prstGeom>
-          <a:noFill/>
-          <a:ln/>
-        </p:spPr>
-        <p:txBody>
-          <a:bodyPr wrap="square" lIns="0" tIns="0" rIns="0" bIns="0" rtlCol="0" anchor="t"/>
-          <a:lstStyle/>
-          <a:p>
-            <a:pPr indent="0" marL="0">
-              <a:buNone/>
-            </a:pPr>
-            <a:r>
-              <a:rPr lang="en-US" sz="1400" dirty="0">
-                <a:solidFill>
-                  <a:schemeClr val="tx2"/>
-                </a:solidFill>
-              </a:rPr>
-              <a:t>15–23% записаних клієнтів у сервісних бізнесах не приходять. Кожне правило (передоплата, штраф, виняток) перевіряють вручну.</a:t>
-            </a:r>
-            <a:endParaRPr lang="en-US" sz="1400" dirty="0"/>
-          </a:p>
-        </p:txBody>
-      </p:sp>
-      <p:sp>
-        <p:nvSpPr>
-          <p:cNvPr id="13" name="pain 3 card"/>
-          <p:cNvSpPr/>
-          <p:nvPr/>
-        </p:nvSpPr>
-        <p:spPr>
-          <a:xfrm>
-            <a:off x="8127797" y="1463040"/>
-            <a:ext cx="3515258" cy="3246120"/>
-          </a:xfrm>
-          <a:prstGeom prst="roundRect">
-            <a:avLst>
-              <a:gd name="adj" fmla="val 3380"/>
-            </a:avLst>
-          </a:prstGeom>
-          <a:solidFill>
-            <a:schemeClr val="bg1"/>
-          </a:solidFill>
-          <a:ln w="9525">
-            <a:solidFill>
-              <a:schemeClr val="bg2"/>
-            </a:solidFill>
-            <a:prstDash val="solid"/>
-          </a:ln>
-          <a:effectLst>
-            <a:outerShdw sx="100000" sy="100000" kx="0" ky="0" algn="bl" rotWithShape="0" blurRad="101600" dist="25400" dir="5400000">
-              <a:srgbClr val="16163A">
-                <a:alpha val="12000"/>
-              </a:srgbClr>
-            </a:outerShdw>
-          </a:effectLst>
-        </p:spPr>
-      </p:sp>
-      <p:sp>
-        <p:nvSpPr>
-          <p:cNvPr id="14" name="pain 3 icon bg"/>
-          <p:cNvSpPr/>
-          <p:nvPr/>
-        </p:nvSpPr>
-        <p:spPr>
-          <a:xfrm>
-            <a:off x="8402117" y="1737360"/>
-            <a:ext cx="566928" cy="566928"/>
-          </a:xfrm>
-          <a:prstGeom prst="ellipse">
-            <a:avLst/>
-          </a:prstGeom>
-          <a:solidFill>
-            <a:schemeClr val="bg2"/>
-          </a:solidFill>
-          <a:ln/>
-        </p:spPr>
-      </p:sp>
-      <p:pic>
-        <p:nvPicPr>
-          <p:cNvPr id="15" name="pain 3 icon" descr="preencoded.png">    </p:cNvPr>
-          <p:cNvPicPr>
-            <a:picLocks noChangeAspect="1"/>
-          </p:cNvPicPr>
-          <p:nvPr/>
-        </p:nvPicPr>
-        <p:blipFill>
-          <a:blip r:embed="rId3"/>
-          <a:stretch>
-            <a:fillRect/>
-          </a:stretch>
-        </p:blipFill>
-        <p:spPr>
-          <a:xfrm>
-            <a:off x="8530133" y="1865376"/>
-            <a:ext cx="310896" cy="310896"/>
-          </a:xfrm>
-          <a:prstGeom prst="rect">
-            <a:avLst/>
-          </a:prstGeom>
-        </p:spPr>
-      </p:pic>
-      <p:sp>
-        <p:nvSpPr>
-          <p:cNvPr id="16" name="pain 3 head"/>
-          <p:cNvSpPr txBox="1"/>
-          <p:nvPr/>
-        </p:nvSpPr>
-        <p:spPr>
-          <a:xfrm>
-            <a:off x="8402117" y="2487168"/>
-            <a:ext cx="2966618" cy="731520"/>
-          </a:xfrm>
-          <a:prstGeom prst="rect">
-            <a:avLst/>
-          </a:prstGeom>
-          <a:noFill/>
-          <a:ln/>
-        </p:spPr>
-        <p:txBody>
-          <a:bodyPr wrap="square" lIns="0" tIns="0" rIns="0" bIns="0" rtlCol="0" anchor="t"/>
-          <a:lstStyle/>
-          <a:p>
-            <a:pPr indent="0" marL="0">
-              <a:buNone/>
-            </a:pPr>
-            <a:r>
-              <a:rPr lang="en-US" sz="1800" b="1" dirty="0">
-                <a:solidFill>
-                  <a:schemeClr val="tx1"/>
-                </a:solidFill>
-              </a:rPr>
-              <a:t>Боти лише пояснюють</a:t>
-            </a:r>
-            <a:endParaRPr lang="en-US" sz="1800" dirty="0"/>
-          </a:p>
-        </p:txBody>
-      </p:sp>
-      <p:sp>
-        <p:nvSpPr>
-          <p:cNvPr id="17" name="pain 3 text"/>
-          <p:cNvSpPr txBox="1"/>
-          <p:nvPr/>
-        </p:nvSpPr>
-        <p:spPr>
-          <a:xfrm>
-            <a:off x="8402117" y="3310128"/>
-            <a:ext cx="2966618" cy="1216152"/>
-          </a:xfrm>
-          <a:prstGeom prst="rect">
-            <a:avLst/>
-          </a:prstGeom>
-          <a:noFill/>
-          <a:ln/>
-        </p:spPr>
-        <p:txBody>
-          <a:bodyPr wrap="square" lIns="0" tIns="0" rIns="0" bIns="0" rtlCol="0" anchor="t"/>
-          <a:lstStyle/>
-          <a:p>
-            <a:pPr indent="0" marL="0">
-              <a:buNone/>
-            </a:pPr>
-            <a:r>
-              <a:rPr lang="en-US" sz="1400" dirty="0">
-                <a:solidFill>
-                  <a:schemeClr val="tx2"/>
-                </a:solidFill>
-              </a:rPr>
-              <a:t>Звичайний чат-бот розповість про правила скасування, але не перенесе запис і не поверне передоплату.</a:t>
-            </a:r>
-            <a:endParaRPr lang="en-US" sz="1400" dirty="0"/>
-          </a:p>
-        </p:txBody>
-      </p:sp>
-      <p:sp>
-        <p:nvSpPr>
-          <p:cNvPr id="18" name="key question"/>
-          <p:cNvSpPr txBox="1"/>
-          <p:nvPr/>
-        </p:nvSpPr>
-        <p:spPr>
-          <a:xfrm>
-            <a:off x="548640" y="5029200"/>
-            <a:ext cx="11094415" cy="548640"/>
-          </a:xfrm>
-          <a:prstGeom prst="rect">
-            <a:avLst/>
-          </a:prstGeom>
-          <a:noFill/>
-          <a:ln/>
-        </p:spPr>
-        <p:txBody>
-          <a:bodyPr wrap="square" lIns="0" tIns="0" rIns="0" bIns="0" rtlCol="0" anchor="ctr"/>
-          <a:lstStyle/>
-          <a:p>
-            <a:pPr indent="0" marL="0">
-              <a:buNone/>
-            </a:pPr>
-            <a:r>
-              <a:rPr lang="en-US" sz="1800" b="1" dirty="0">
-                <a:solidFill>
-                  <a:schemeClr val="tx1"/>
-                </a:solidFill>
-              </a:rPr>
-              <a:t>Питання не в тому, як швидше відповісти. </a:t>
-            </a:r>
-            <a:pPr indent="0" marL="0">
-              <a:buNone/>
-            </a:pPr>
-            <a:r>
-              <a:rPr lang="en-US" sz="1800" b="1" dirty="0">
-                <a:solidFill>
-                  <a:schemeClr val="accent1"/>
-                </a:solidFill>
-              </a:rPr>
-              <a:t>Питання в тому, як зробити так, щоб проблема була вирішена.</a:t>
-            </a:r>
-            <a:endParaRPr lang="en-US" sz="1800" dirty="0"/>
-          </a:p>
-        </p:txBody>
-      </p:sp>
-      <p:sp>
-        <p:nvSpPr>
-          <p:cNvPr id="19" name="source"/>
+          <p:cNvPr id="26" name="source"/>
           <p:cNvSpPr txBox="1"/>
           <p:nvPr/>
         </p:nvSpPr>
@@ -5106,7 +3259,7 @@
                   <a:schemeClr val="accent5"/>
                 </a:solidFill>
               </a:rPr>
-              <a:t>Джерело частки неявок: SchedulingKit, Appointment No-Show Statistics 2026 (оцінки вендора).</a:t>
+              <a:t>Частка неявок: SchedulingKit, Appointment No-Show Statistics 2026 (оцінки вендора).</a:t>
             </a:r>
             <a:endParaRPr lang="en-US" sz="1000" dirty="0"/>
           </a:p>
@@ -5214,7 +3367,7 @@
                   <a:schemeClr val="tx1"/>
                 </a:solidFill>
               </a:rPr>
-              <a:t>Наше рішення: агент, який має руки в системі бізнесу</a:t>
+              <a:t>Як агент приймає рішення</a:t>
             </a:r>
             <a:endParaRPr lang="en-US" sz="3200" dirty="0"/>
           </a:p>
@@ -5222,18 +3375,18 @@
       </p:sp>
       <p:sp>
         <p:nvSpPr>
-          <p:cNvPr id="3" name="platform card"/>
+          <p:cNvPr id="3" name="flow 1 card"/>
           <p:cNvSpPr/>
           <p:nvPr/>
         </p:nvSpPr>
         <p:spPr>
           <a:xfrm>
-            <a:off x="548640" y="1463040"/>
-            <a:ext cx="5410048" cy="3840480"/>
+            <a:off x="548640" y="1554480"/>
+            <a:ext cx="1965960" cy="2651760"/>
           </a:xfrm>
           <a:prstGeom prst="roundRect">
             <a:avLst>
-              <a:gd name="adj" fmla="val 2857"/>
+              <a:gd name="adj" fmla="val 5581"/>
             </a:avLst>
           </a:prstGeom>
           <a:solidFill>
@@ -5256,13 +3409,13 @@
       </p:sp>
       <p:sp>
         <p:nvSpPr>
-          <p:cNvPr id="4" name="platform icon bg"/>
+          <p:cNvPr id="4" name="flow 1 icon bg"/>
           <p:cNvSpPr/>
           <p:nvPr/>
         </p:nvSpPr>
         <p:spPr>
           <a:xfrm>
-            <a:off x="822960" y="1737360"/>
+            <a:off x="822960" y="1828800"/>
             <a:ext cx="566928" cy="566928"/>
           </a:xfrm>
           <a:prstGeom prst="ellipse">
@@ -5276,7 +3429,7 @@
       </p:sp>
       <p:pic>
         <p:nvPicPr>
-          <p:cNvPr id="5" name="platform icon" descr="preencoded.png">    </p:cNvPr>
+          <p:cNvPr id="5" name="flow 1 icon" descr="preencoded.png">    </p:cNvPr>
           <p:cNvPicPr>
             <a:picLocks noChangeAspect="1"/>
           </p:cNvPicPr>
@@ -5290,7 +3443,7 @@
         </p:blipFill>
         <p:spPr>
           <a:xfrm>
-            <a:off x="950976" y="1865376"/>
+            <a:off x="950976" y="1956816"/>
             <a:ext cx="310896" cy="310896"/>
           </a:xfrm>
           <a:prstGeom prst="rect">
@@ -5300,14 +3453,14 @@
       </p:pic>
       <p:sp>
         <p:nvSpPr>
-          <p:cNvPr id="6" name="platform head"/>
+          <p:cNvPr id="6" name="flow 1 head"/>
           <p:cNvSpPr txBox="1"/>
           <p:nvPr/>
         </p:nvSpPr>
         <p:spPr>
           <a:xfrm>
-            <a:off x="822960" y="2487168"/>
-            <a:ext cx="4861408" cy="731520"/>
+            <a:off x="822960" y="2578608"/>
+            <a:ext cx="1417320" cy="594360"/>
           </a:xfrm>
           <a:prstGeom prst="rect">
             <a:avLst/>
@@ -5323,27 +3476,27 @@
               <a:buNone/>
             </a:pPr>
             <a:r>
-              <a:rPr lang="en-US" sz="1800" b="1" dirty="0">
+              <a:rPr lang="en-US" sz="1400" b="1" dirty="0">
                 <a:solidFill>
                   <a:schemeClr val="tx1"/>
                 </a:solidFill>
               </a:rPr>
-              <a:t>Bookly — платформа для бізнесів за записом</a:t>
-            </a:r>
-            <a:endParaRPr lang="en-US" sz="1800" dirty="0"/>
-          </a:p>
-        </p:txBody>
-      </p:sp>
-      <p:sp>
-        <p:nvSpPr>
-          <p:cNvPr id="7" name="platform text"/>
+              <a:t>Клієнт пише</a:t>
+            </a:r>
+            <a:endParaRPr lang="en-US" sz="1400" dirty="0"/>
+          </a:p>
+        </p:txBody>
+      </p:sp>
+      <p:sp>
+        <p:nvSpPr>
+          <p:cNvPr id="7" name="flow 1 text"/>
           <p:cNvSpPr txBox="1"/>
           <p:nvPr/>
         </p:nvSpPr>
         <p:spPr>
           <a:xfrm>
-            <a:off x="822960" y="3310128"/>
-            <a:ext cx="4861408" cy="1810512"/>
+            <a:off x="822960" y="3264408"/>
+            <a:ext cx="1417320" cy="758952"/>
           </a:xfrm>
           <a:prstGeom prst="rect">
             <a:avLst/>
@@ -5355,96 +3508,71 @@
           <a:bodyPr wrap="square" lIns="0" tIns="0" rIns="0" bIns="0" rtlCol="0" anchor="t"/>
           <a:lstStyle/>
           <a:p>
-            <a:pPr marL="342900" indent="-342900">
-              <a:buSzPct val="100000"/>
-              <a:buChar char="•"/>
-            </a:pPr>
-            <a:r>
-              <a:rPr lang="en-US" sz="1500" dirty="0">
+            <a:pPr indent="0" marL="0">
+              <a:buNone/>
+            </a:pPr>
+            <a:r>
+              <a:rPr lang="en-US" sz="1300" dirty="0">
                 <a:solidFill>
                   <a:schemeClr val="tx2"/>
                 </a:solidFill>
               </a:rPr>
-              <a:t>Сторінка бізнесу, онлайн-запис із передоплатою</a:t>
-            </a:r>
-            <a:endParaRPr lang="en-US" sz="1500" dirty="0"/>
-          </a:p>
-          <a:p>
-            <a:pPr marL="342900" indent="-342900">
-              <a:buSzPct val="100000"/>
-              <a:buChar char="•"/>
-            </a:pPr>
-            <a:r>
-              <a:rPr lang="en-US" sz="1500" dirty="0">
-                <a:solidFill>
-                  <a:schemeClr val="tx2"/>
-                </a:solidFill>
-              </a:rPr>
-              <a:t>Адмінка: бронювання, клієнти, майстри, послуги</a:t>
-            </a:r>
-            <a:endParaRPr lang="en-US" sz="1500" dirty="0"/>
-          </a:p>
-          <a:p>
-            <a:pPr marL="342900" indent="-342900">
-              <a:buSzPct val="100000"/>
-              <a:buChar char="•"/>
-            </a:pPr>
-            <a:r>
-              <a:rPr lang="en-US" sz="1500" dirty="0">
-                <a:solidFill>
-                  <a:schemeClr val="tx2"/>
-                </a:solidFill>
-              </a:rPr>
-              <a:t>Правила кожного бізнесу: вікно скасування, штраф, передоплата</a:t>
-            </a:r>
-            <a:endParaRPr lang="en-US" sz="1500" dirty="0"/>
-          </a:p>
-          <a:p>
-            <a:pPr marL="342900" indent="-342900">
-              <a:buSzPct val="100000"/>
-              <a:buChar char="•"/>
-            </a:pPr>
-            <a:r>
-              <a:rPr lang="en-US" sz="1500" dirty="0">
-                <a:solidFill>
-                  <a:schemeClr val="tx2"/>
-                </a:solidFill>
-              </a:rPr>
-              <a:t>Чат підтримки на сайті та віджет для будь-якого сайту</a:t>
-            </a:r>
-            <a:endParaRPr lang="en-US" sz="1500" dirty="0"/>
-          </a:p>
-          <a:p>
-            <a:pPr marL="342900" indent="-342900">
-              <a:buSzPct val="100000"/>
-              <a:buChar char="•"/>
-            </a:pPr>
-            <a:r>
-              <a:rPr lang="en-US" sz="1500" dirty="0">
-                <a:solidFill>
-                  <a:schemeClr val="tx2"/>
-                </a:solidFill>
-              </a:rPr>
-              <a:t>Один салон чи клініка підключається без коду</a:t>
-            </a:r>
-            <a:endParaRPr lang="en-US" sz="1500" dirty="0"/>
-          </a:p>
-        </p:txBody>
-      </p:sp>
-      <p:sp>
-        <p:nvSpPr>
-          <p:cNvPr id="8" name="agent card"/>
+              <a:t>Чат на сайті, віджет або дзвінок</a:t>
+            </a:r>
+            <a:endParaRPr lang="en-US" sz="1300" dirty="0"/>
+          </a:p>
+        </p:txBody>
+      </p:sp>
+      <p:sp>
+        <p:nvSpPr>
+          <p:cNvPr id="8" name="flow arrow 1"/>
+          <p:cNvSpPr txBox="1"/>
+          <p:nvPr/>
+        </p:nvSpPr>
+        <p:spPr>
+          <a:xfrm>
+            <a:off x="2514600" y="2651760"/>
+            <a:ext cx="316154" cy="457200"/>
+          </a:xfrm>
+          <a:prstGeom prst="rect">
+            <a:avLst/>
+          </a:prstGeom>
+          <a:noFill/>
+          <a:ln/>
+        </p:spPr>
+        <p:txBody>
+          <a:bodyPr wrap="square" lIns="0" tIns="0" rIns="0" bIns="0" rtlCol="0" anchor="ctr"/>
+          <a:lstStyle/>
+          <a:p>
+            <a:pPr algn="ctr" indent="0" marL="0">
+              <a:buNone/>
+            </a:pPr>
+            <a:r>
+              <a:rPr lang="en-US" sz="2000" b="1" dirty="0">
+                <a:solidFill>
+                  <a:schemeClr val="accent1"/>
+                </a:solidFill>
+              </a:rPr>
+              <a:t>→</a:t>
+            </a:r>
+            <a:endParaRPr lang="en-US" sz="2000" dirty="0"/>
+          </a:p>
+        </p:txBody>
+      </p:sp>
+      <p:sp>
+        <p:nvSpPr>
+          <p:cNvPr id="9" name="flow 2 card"/>
           <p:cNvSpPr/>
           <p:nvPr/>
         </p:nvSpPr>
         <p:spPr>
           <a:xfrm>
-            <a:off x="6233008" y="1463040"/>
-            <a:ext cx="5410048" cy="3840480"/>
+            <a:off x="2830754" y="1554480"/>
+            <a:ext cx="1965960" cy="2651760"/>
           </a:xfrm>
           <a:prstGeom prst="roundRect">
             <a:avLst>
-              <a:gd name="adj" fmla="val 2857"/>
+              <a:gd name="adj" fmla="val 5581"/>
             </a:avLst>
           </a:prstGeom>
           <a:solidFill>
@@ -5467,13 +3595,13 @@
       </p:sp>
       <p:sp>
         <p:nvSpPr>
-          <p:cNvPr id="9" name="agent icon bg"/>
+          <p:cNvPr id="10" name="flow 2 icon bg"/>
           <p:cNvSpPr/>
           <p:nvPr/>
         </p:nvSpPr>
         <p:spPr>
           <a:xfrm>
-            <a:off x="6507328" y="1737360"/>
+            <a:off x="3105074" y="1828800"/>
             <a:ext cx="566928" cy="566928"/>
           </a:xfrm>
           <a:prstGeom prst="ellipse">
@@ -5487,7 +3615,7 @@
       </p:sp>
       <p:pic>
         <p:nvPicPr>
-          <p:cNvPr id="10" name="agent icon" descr="preencoded.png">    </p:cNvPr>
+          <p:cNvPr id="11" name="flow 2 icon" descr="preencoded.png">    </p:cNvPr>
           <p:cNvPicPr>
             <a:picLocks noChangeAspect="1"/>
           </p:cNvPicPr>
@@ -5501,7 +3629,7 @@
         </p:blipFill>
         <p:spPr>
           <a:xfrm>
-            <a:off x="6635344" y="1865376"/>
+            <a:off x="3233090" y="1956816"/>
             <a:ext cx="310896" cy="310896"/>
           </a:xfrm>
           <a:prstGeom prst="rect">
@@ -5511,14 +3639,14 @@
       </p:pic>
       <p:sp>
         <p:nvSpPr>
-          <p:cNvPr id="11" name="agent head"/>
+          <p:cNvPr id="12" name="flow 2 head"/>
           <p:cNvSpPr txBox="1"/>
           <p:nvPr/>
         </p:nvSpPr>
         <p:spPr>
           <a:xfrm>
-            <a:off x="6507328" y="2487168"/>
-            <a:ext cx="4861408" cy="731520"/>
+            <a:off x="3105074" y="2578608"/>
+            <a:ext cx="1417320" cy="594360"/>
           </a:xfrm>
           <a:prstGeom prst="rect">
             <a:avLst/>
@@ -5534,27 +3662,27 @@
               <a:buNone/>
             </a:pPr>
             <a:r>
-              <a:rPr lang="en-US" sz="1800" b="1" dirty="0">
+              <a:rPr lang="en-US" sz="1400" b="1" dirty="0">
                 <a:solidFill>
                   <a:schemeClr val="tx1"/>
                 </a:solidFill>
               </a:rPr>
-              <a:t>AI-агент підтримки</a:t>
-            </a:r>
-            <a:endParaRPr lang="en-US" sz="1800" dirty="0"/>
-          </a:p>
-        </p:txBody>
-      </p:sp>
-      <p:sp>
-        <p:nvSpPr>
-          <p:cNvPr id="12" name="agent text"/>
+              <a:t>Оркестратор</a:t>
+            </a:r>
+            <a:endParaRPr lang="en-US" sz="1400" dirty="0"/>
+          </a:p>
+        </p:txBody>
+      </p:sp>
+      <p:sp>
+        <p:nvSpPr>
+          <p:cNvPr id="13" name="flow 2 text"/>
           <p:cNvSpPr txBox="1"/>
           <p:nvPr/>
         </p:nvSpPr>
         <p:spPr>
           <a:xfrm>
-            <a:off x="6507328" y="3310128"/>
-            <a:ext cx="4861408" cy="1810512"/>
+            <a:off x="3105074" y="3264408"/>
+            <a:ext cx="1417320" cy="758952"/>
           </a:xfrm>
           <a:prstGeom prst="rect">
             <a:avLst/>
@@ -5566,113 +3694,687 @@
           <a:bodyPr wrap="square" lIns="0" tIns="0" rIns="0" bIns="0" rtlCol="0" anchor="t"/>
           <a:lstStyle/>
           <a:p>
-            <a:pPr marL="342900" indent="-342900">
-              <a:buSzPct val="100000"/>
-              <a:buChar char="•"/>
-            </a:pPr>
-            <a:r>
-              <a:rPr lang="en-US" sz="1500" dirty="0">
+            <a:pPr indent="0" marL="0">
+              <a:buNone/>
+            </a:pPr>
+            <a:r>
+              <a:rPr lang="en-US" sz="1300" dirty="0">
                 <a:solidFill>
                   <a:schemeClr val="tx2"/>
                 </a:solidFill>
               </a:rPr>
-              <a:t>Розуміє намір, емоцію і терміновість звернення</a:t>
-            </a:r>
-            <a:endParaRPr lang="en-US" sz="1500" dirty="0"/>
-          </a:p>
-          <a:p>
-            <a:pPr marL="342900" indent="-342900">
-              <a:buSzPct val="100000"/>
-              <a:buChar char="•"/>
-            </a:pPr>
-            <a:r>
-              <a:rPr lang="en-US" sz="1500" dirty="0">
+              <a:t>Claude Sonnet: намір, емоція, терміновість, маршрут</a:t>
+            </a:r>
+            <a:endParaRPr lang="en-US" sz="1300" dirty="0"/>
+          </a:p>
+        </p:txBody>
+      </p:sp>
+      <p:sp>
+        <p:nvSpPr>
+          <p:cNvPr id="14" name="flow arrow 2"/>
+          <p:cNvSpPr txBox="1"/>
+          <p:nvPr/>
+        </p:nvSpPr>
+        <p:spPr>
+          <a:xfrm>
+            <a:off x="4796714" y="2651760"/>
+            <a:ext cx="316154" cy="457200"/>
+          </a:xfrm>
+          <a:prstGeom prst="rect">
+            <a:avLst/>
+          </a:prstGeom>
+          <a:noFill/>
+          <a:ln/>
+        </p:spPr>
+        <p:txBody>
+          <a:bodyPr wrap="square" lIns="0" tIns="0" rIns="0" bIns="0" rtlCol="0" anchor="ctr"/>
+          <a:lstStyle/>
+          <a:p>
+            <a:pPr algn="ctr" indent="0" marL="0">
+              <a:buNone/>
+            </a:pPr>
+            <a:r>
+              <a:rPr lang="en-US" sz="2000" b="1" dirty="0">
+                <a:solidFill>
+                  <a:schemeClr val="accent1"/>
+                </a:solidFill>
+              </a:rPr>
+              <a:t>→</a:t>
+            </a:r>
+            <a:endParaRPr lang="en-US" sz="2000" dirty="0"/>
+          </a:p>
+        </p:txBody>
+      </p:sp>
+      <p:sp>
+        <p:nvSpPr>
+          <p:cNvPr id="15" name="flow 3 card"/>
+          <p:cNvSpPr/>
+          <p:nvPr/>
+        </p:nvSpPr>
+        <p:spPr>
+          <a:xfrm>
+            <a:off x="5112868" y="1554480"/>
+            <a:ext cx="1965960" cy="2651760"/>
+          </a:xfrm>
+          <a:prstGeom prst="roundRect">
+            <a:avLst>
+              <a:gd name="adj" fmla="val 5581"/>
+            </a:avLst>
+          </a:prstGeom>
+          <a:solidFill>
+            <a:schemeClr val="bg1"/>
+          </a:solidFill>
+          <a:ln w="9525">
+            <a:solidFill>
+              <a:schemeClr val="bg2"/>
+            </a:solidFill>
+            <a:prstDash val="solid"/>
+          </a:ln>
+          <a:effectLst>
+            <a:outerShdw sx="100000" sy="100000" kx="0" ky="0" algn="bl" rotWithShape="0" blurRad="101600" dist="25400" dir="5400000">
+              <a:srgbClr val="16163A">
+                <a:alpha val="12000"/>
+              </a:srgbClr>
+            </a:outerShdw>
+          </a:effectLst>
+        </p:spPr>
+      </p:sp>
+      <p:sp>
+        <p:nvSpPr>
+          <p:cNvPr id="16" name="flow 3 icon bg"/>
+          <p:cNvSpPr/>
+          <p:nvPr/>
+        </p:nvSpPr>
+        <p:spPr>
+          <a:xfrm>
+            <a:off x="5387188" y="1828800"/>
+            <a:ext cx="566928" cy="566928"/>
+          </a:xfrm>
+          <a:prstGeom prst="ellipse">
+            <a:avLst/>
+          </a:prstGeom>
+          <a:solidFill>
+            <a:schemeClr val="bg2"/>
+          </a:solidFill>
+          <a:ln/>
+        </p:spPr>
+      </p:sp>
+      <p:pic>
+        <p:nvPicPr>
+          <p:cNvPr id="17" name="flow 3 icon" descr="preencoded.png">    </p:cNvPr>
+          <p:cNvPicPr>
+            <a:picLocks noChangeAspect="1"/>
+          </p:cNvPicPr>
+          <p:nvPr/>
+        </p:nvPicPr>
+        <p:blipFill>
+          <a:blip r:embed="rId3"/>
+          <a:stretch>
+            <a:fillRect/>
+          </a:stretch>
+        </p:blipFill>
+        <p:spPr>
+          <a:xfrm>
+            <a:off x="5515204" y="1956816"/>
+            <a:ext cx="310896" cy="310896"/>
+          </a:xfrm>
+          <a:prstGeom prst="rect">
+            <a:avLst/>
+          </a:prstGeom>
+        </p:spPr>
+      </p:pic>
+      <p:sp>
+        <p:nvSpPr>
+          <p:cNvPr id="18" name="flow 3 head"/>
+          <p:cNvSpPr txBox="1"/>
+          <p:nvPr/>
+        </p:nvSpPr>
+        <p:spPr>
+          <a:xfrm>
+            <a:off x="5387188" y="2578608"/>
+            <a:ext cx="1417320" cy="594360"/>
+          </a:xfrm>
+          <a:prstGeom prst="rect">
+            <a:avLst/>
+          </a:prstGeom>
+          <a:noFill/>
+          <a:ln/>
+        </p:spPr>
+        <p:txBody>
+          <a:bodyPr wrap="square" lIns="0" tIns="0" rIns="0" bIns="0" rtlCol="0" anchor="t"/>
+          <a:lstStyle/>
+          <a:p>
+            <a:pPr indent="0" marL="0">
+              <a:buNone/>
+            </a:pPr>
+            <a:r>
+              <a:rPr lang="en-US" sz="1400" b="1" dirty="0">
+                <a:solidFill>
+                  <a:schemeClr val="tx1"/>
+                </a:solidFill>
+              </a:rPr>
+              <a:t>Агент-виконавець</a:t>
+            </a:r>
+            <a:endParaRPr lang="en-US" sz="1400" dirty="0"/>
+          </a:p>
+        </p:txBody>
+      </p:sp>
+      <p:sp>
+        <p:nvSpPr>
+          <p:cNvPr id="19" name="flow 3 text"/>
+          <p:cNvSpPr txBox="1"/>
+          <p:nvPr/>
+        </p:nvSpPr>
+        <p:spPr>
+          <a:xfrm>
+            <a:off x="5387188" y="3264408"/>
+            <a:ext cx="1417320" cy="758952"/>
+          </a:xfrm>
+          <a:prstGeom prst="rect">
+            <a:avLst/>
+          </a:prstGeom>
+          <a:noFill/>
+          <a:ln/>
+        </p:spPr>
+        <p:txBody>
+          <a:bodyPr wrap="square" lIns="0" tIns="0" rIns="0" bIns="0" rtlCol="0" anchor="t"/>
+          <a:lstStyle/>
+          <a:p>
+            <a:pPr indent="0" marL="0">
+              <a:buNone/>
+            </a:pPr>
+            <a:r>
+              <a:rPr lang="en-US" sz="1300" dirty="0">
                 <a:solidFill>
                   <a:schemeClr val="tx2"/>
                 </a:solidFill>
               </a:rPr>
-              <a:t>Діє через інструменти: переносить, скасовує, повертає, знімає штраф</a:t>
-            </a:r>
-            <a:endParaRPr lang="en-US" sz="1500" dirty="0"/>
-          </a:p>
-          <a:p>
-            <a:pPr marL="342900" indent="-342900">
-              <a:buSzPct val="100000"/>
-              <a:buChar char="•"/>
-            </a:pPr>
-            <a:r>
-              <a:rPr lang="en-US" sz="1500" dirty="0">
+              <a:t>Читає профіль і правила, викликає інструменти</a:t>
+            </a:r>
+            <a:endParaRPr lang="en-US" sz="1300" dirty="0"/>
+          </a:p>
+        </p:txBody>
+      </p:sp>
+      <p:sp>
+        <p:nvSpPr>
+          <p:cNvPr id="20" name="flow arrow 3"/>
+          <p:cNvSpPr txBox="1"/>
+          <p:nvPr/>
+        </p:nvSpPr>
+        <p:spPr>
+          <a:xfrm>
+            <a:off x="7078828" y="2651760"/>
+            <a:ext cx="316154" cy="457200"/>
+          </a:xfrm>
+          <a:prstGeom prst="rect">
+            <a:avLst/>
+          </a:prstGeom>
+          <a:noFill/>
+          <a:ln/>
+        </p:spPr>
+        <p:txBody>
+          <a:bodyPr wrap="square" lIns="0" tIns="0" rIns="0" bIns="0" rtlCol="0" anchor="ctr"/>
+          <a:lstStyle/>
+          <a:p>
+            <a:pPr algn="ctr" indent="0" marL="0">
+              <a:buNone/>
+            </a:pPr>
+            <a:r>
+              <a:rPr lang="en-US" sz="2000" b="1" dirty="0">
+                <a:solidFill>
+                  <a:schemeClr val="accent1"/>
+                </a:solidFill>
+              </a:rPr>
+              <a:t>→</a:t>
+            </a:r>
+            <a:endParaRPr lang="en-US" sz="2000" dirty="0"/>
+          </a:p>
+        </p:txBody>
+      </p:sp>
+      <p:sp>
+        <p:nvSpPr>
+          <p:cNvPr id="21" name="flow 4 card"/>
+          <p:cNvSpPr/>
+          <p:nvPr/>
+        </p:nvSpPr>
+        <p:spPr>
+          <a:xfrm>
+            <a:off x="7394981" y="1554480"/>
+            <a:ext cx="1965960" cy="2651760"/>
+          </a:xfrm>
+          <a:prstGeom prst="roundRect">
+            <a:avLst>
+              <a:gd name="adj" fmla="val 5581"/>
+            </a:avLst>
+          </a:prstGeom>
+          <a:solidFill>
+            <a:schemeClr val="bg1"/>
+          </a:solidFill>
+          <a:ln w="9525">
+            <a:solidFill>
+              <a:schemeClr val="bg2"/>
+            </a:solidFill>
+            <a:prstDash val="solid"/>
+          </a:ln>
+          <a:effectLst>
+            <a:outerShdw sx="100000" sy="100000" kx="0" ky="0" algn="bl" rotWithShape="0" blurRad="101600" dist="25400" dir="5400000">
+              <a:srgbClr val="16163A">
+                <a:alpha val="12000"/>
+              </a:srgbClr>
+            </a:outerShdw>
+          </a:effectLst>
+        </p:spPr>
+      </p:sp>
+      <p:sp>
+        <p:nvSpPr>
+          <p:cNvPr id="22" name="flow 4 icon bg"/>
+          <p:cNvSpPr/>
+          <p:nvPr/>
+        </p:nvSpPr>
+        <p:spPr>
+          <a:xfrm>
+            <a:off x="7669301" y="1828800"/>
+            <a:ext cx="566928" cy="566928"/>
+          </a:xfrm>
+          <a:prstGeom prst="ellipse">
+            <a:avLst/>
+          </a:prstGeom>
+          <a:solidFill>
+            <a:schemeClr val="bg2"/>
+          </a:solidFill>
+          <a:ln/>
+        </p:spPr>
+      </p:sp>
+      <p:pic>
+        <p:nvPicPr>
+          <p:cNvPr id="23" name="flow 4 icon" descr="preencoded.png">    </p:cNvPr>
+          <p:cNvPicPr>
+            <a:picLocks noChangeAspect="1"/>
+          </p:cNvPicPr>
+          <p:nvPr/>
+        </p:nvPicPr>
+        <p:blipFill>
+          <a:blip r:embed="rId4"/>
+          <a:stretch>
+            <a:fillRect/>
+          </a:stretch>
+        </p:blipFill>
+        <p:spPr>
+          <a:xfrm>
+            <a:off x="7797317" y="1956816"/>
+            <a:ext cx="310896" cy="310896"/>
+          </a:xfrm>
+          <a:prstGeom prst="rect">
+            <a:avLst/>
+          </a:prstGeom>
+        </p:spPr>
+      </p:pic>
+      <p:sp>
+        <p:nvSpPr>
+          <p:cNvPr id="24" name="flow 4 head"/>
+          <p:cNvSpPr txBox="1"/>
+          <p:nvPr/>
+        </p:nvSpPr>
+        <p:spPr>
+          <a:xfrm>
+            <a:off x="7669301" y="2578608"/>
+            <a:ext cx="1417320" cy="594360"/>
+          </a:xfrm>
+          <a:prstGeom prst="rect">
+            <a:avLst/>
+          </a:prstGeom>
+          <a:noFill/>
+          <a:ln/>
+        </p:spPr>
+        <p:txBody>
+          <a:bodyPr wrap="square" lIns="0" tIns="0" rIns="0" bIns="0" rtlCol="0" anchor="t"/>
+          <a:lstStyle/>
+          <a:p>
+            <a:pPr indent="0" marL="0">
+              <a:buNone/>
+            </a:pPr>
+            <a:r>
+              <a:rPr lang="en-US" sz="1400" b="1" dirty="0">
+                <a:solidFill>
+                  <a:schemeClr val="tx1"/>
+                </a:solidFill>
+              </a:rPr>
+              <a:t>Permission engine</a:t>
+            </a:r>
+            <a:endParaRPr lang="en-US" sz="1400" dirty="0"/>
+          </a:p>
+        </p:txBody>
+      </p:sp>
+      <p:sp>
+        <p:nvSpPr>
+          <p:cNvPr id="25" name="flow 4 text"/>
+          <p:cNvSpPr txBox="1"/>
+          <p:nvPr/>
+        </p:nvSpPr>
+        <p:spPr>
+          <a:xfrm>
+            <a:off x="7669301" y="3264408"/>
+            <a:ext cx="1417320" cy="758952"/>
+          </a:xfrm>
+          <a:prstGeom prst="rect">
+            <a:avLst/>
+          </a:prstGeom>
+          <a:noFill/>
+          <a:ln/>
+        </p:spPr>
+        <p:txBody>
+          <a:bodyPr wrap="square" lIns="0" tIns="0" rIns="0" bIns="0" rtlCol="0" anchor="t"/>
+          <a:lstStyle/>
+          <a:p>
+            <a:pPr indent="0" marL="0">
+              <a:buNone/>
+            </a:pPr>
+            <a:r>
+              <a:rPr lang="en-US" sz="1300" dirty="0">
                 <a:solidFill>
                   <a:schemeClr val="tx2"/>
                 </a:solidFill>
               </a:rPr>
-              <a:t>Permission engine: сам / з погодженням / заборонено — налаштовує власник</a:t>
-            </a:r>
-            <a:endParaRPr lang="en-US" sz="1500" dirty="0"/>
-          </a:p>
-          <a:p>
-            <a:pPr marL="342900" indent="-342900">
-              <a:buSzPct val="100000"/>
-              <a:buChar char="•"/>
-            </a:pPr>
-            <a:r>
-              <a:rPr lang="en-US" sz="1500" dirty="0">
+              <a:t>Сам · з погодженням · заборонено</a:t>
+            </a:r>
+            <a:endParaRPr lang="en-US" sz="1300" dirty="0"/>
+          </a:p>
+        </p:txBody>
+      </p:sp>
+      <p:sp>
+        <p:nvSpPr>
+          <p:cNvPr id="26" name="flow arrow 4"/>
+          <p:cNvSpPr txBox="1"/>
+          <p:nvPr/>
+        </p:nvSpPr>
+        <p:spPr>
+          <a:xfrm>
+            <a:off x="9360941" y="2651760"/>
+            <a:ext cx="316154" cy="457200"/>
+          </a:xfrm>
+          <a:prstGeom prst="rect">
+            <a:avLst/>
+          </a:prstGeom>
+          <a:noFill/>
+          <a:ln/>
+        </p:spPr>
+        <p:txBody>
+          <a:bodyPr wrap="square" lIns="0" tIns="0" rIns="0" bIns="0" rtlCol="0" anchor="ctr"/>
+          <a:lstStyle/>
+          <a:p>
+            <a:pPr algn="ctr" indent="0" marL="0">
+              <a:buNone/>
+            </a:pPr>
+            <a:r>
+              <a:rPr lang="en-US" sz="2000" b="1" dirty="0">
+                <a:solidFill>
+                  <a:schemeClr val="accent1"/>
+                </a:solidFill>
+              </a:rPr>
+              <a:t>→</a:t>
+            </a:r>
+            <a:endParaRPr lang="en-US" sz="2000" dirty="0"/>
+          </a:p>
+        </p:txBody>
+      </p:sp>
+      <p:sp>
+        <p:nvSpPr>
+          <p:cNvPr id="27" name="flow 5 card"/>
+          <p:cNvSpPr/>
+          <p:nvPr/>
+        </p:nvSpPr>
+        <p:spPr>
+          <a:xfrm>
+            <a:off x="9677095" y="1554480"/>
+            <a:ext cx="1965960" cy="2651760"/>
+          </a:xfrm>
+          <a:prstGeom prst="roundRect">
+            <a:avLst>
+              <a:gd name="adj" fmla="val 5581"/>
+            </a:avLst>
+          </a:prstGeom>
+          <a:solidFill>
+            <a:schemeClr val="bg1"/>
+          </a:solidFill>
+          <a:ln w="9525">
+            <a:solidFill>
+              <a:schemeClr val="bg2"/>
+            </a:solidFill>
+            <a:prstDash val="solid"/>
+          </a:ln>
+          <a:effectLst>
+            <a:outerShdw sx="100000" sy="100000" kx="0" ky="0" algn="bl" rotWithShape="0" blurRad="101600" dist="25400" dir="5400000">
+              <a:srgbClr val="16163A">
+                <a:alpha val="12000"/>
+              </a:srgbClr>
+            </a:outerShdw>
+          </a:effectLst>
+        </p:spPr>
+      </p:sp>
+      <p:sp>
+        <p:nvSpPr>
+          <p:cNvPr id="28" name="flow 5 icon bg"/>
+          <p:cNvSpPr/>
+          <p:nvPr/>
+        </p:nvSpPr>
+        <p:spPr>
+          <a:xfrm>
+            <a:off x="9951415" y="1828800"/>
+            <a:ext cx="566928" cy="566928"/>
+          </a:xfrm>
+          <a:prstGeom prst="ellipse">
+            <a:avLst/>
+          </a:prstGeom>
+          <a:solidFill>
+            <a:schemeClr val="bg2"/>
+          </a:solidFill>
+          <a:ln/>
+        </p:spPr>
+      </p:sp>
+      <p:pic>
+        <p:nvPicPr>
+          <p:cNvPr id="29" name="flow 5 icon" descr="preencoded.png">    </p:cNvPr>
+          <p:cNvPicPr>
+            <a:picLocks noChangeAspect="1"/>
+          </p:cNvPicPr>
+          <p:nvPr/>
+        </p:nvPicPr>
+        <p:blipFill>
+          <a:blip r:embed="rId5"/>
+          <a:stretch>
+            <a:fillRect/>
+          </a:stretch>
+        </p:blipFill>
+        <p:spPr>
+          <a:xfrm>
+            <a:off x="10079431" y="1956816"/>
+            <a:ext cx="310896" cy="310896"/>
+          </a:xfrm>
+          <a:prstGeom prst="rect">
+            <a:avLst/>
+          </a:prstGeom>
+        </p:spPr>
+      </p:pic>
+      <p:sp>
+        <p:nvSpPr>
+          <p:cNvPr id="30" name="flow 5 head"/>
+          <p:cNvSpPr txBox="1"/>
+          <p:nvPr/>
+        </p:nvSpPr>
+        <p:spPr>
+          <a:xfrm>
+            <a:off x="9951415" y="2578608"/>
+            <a:ext cx="1417320" cy="594360"/>
+          </a:xfrm>
+          <a:prstGeom prst="rect">
+            <a:avLst/>
+          </a:prstGeom>
+          <a:noFill/>
+          <a:ln/>
+        </p:spPr>
+        <p:txBody>
+          <a:bodyPr wrap="square" lIns="0" tIns="0" rIns="0" bIns="0" rtlCol="0" anchor="t"/>
+          <a:lstStyle/>
+          <a:p>
+            <a:pPr indent="0" marL="0">
+              <a:buNone/>
+            </a:pPr>
+            <a:r>
+              <a:rPr lang="en-US" sz="1400" b="1" dirty="0">
+                <a:solidFill>
+                  <a:schemeClr val="tx1"/>
+                </a:solidFill>
+              </a:rPr>
+              <a:t>Платформа</a:t>
+            </a:r>
+            <a:endParaRPr lang="en-US" sz="1400" dirty="0"/>
+          </a:p>
+        </p:txBody>
+      </p:sp>
+      <p:sp>
+        <p:nvSpPr>
+          <p:cNvPr id="31" name="flow 5 text"/>
+          <p:cNvSpPr txBox="1"/>
+          <p:nvPr/>
+        </p:nvSpPr>
+        <p:spPr>
+          <a:xfrm>
+            <a:off x="9951415" y="3264408"/>
+            <a:ext cx="1417320" cy="758952"/>
+          </a:xfrm>
+          <a:prstGeom prst="rect">
+            <a:avLst/>
+          </a:prstGeom>
+          <a:noFill/>
+          <a:ln/>
+        </p:spPr>
+        <p:txBody>
+          <a:bodyPr wrap="square" lIns="0" tIns="0" rIns="0" bIns="0" rtlCol="0" anchor="t"/>
+          <a:lstStyle/>
+          <a:p>
+            <a:pPr indent="0" marL="0">
+              <a:buNone/>
+            </a:pPr>
+            <a:r>
+              <a:rPr lang="en-US" sz="1300" dirty="0">
                 <a:solidFill>
                   <a:schemeClr val="tx2"/>
                 </a:solidFill>
               </a:rPr>
-              <a:t>Copilot: адміністратор бачить хід думок, дії й погоджує ризикові</a:t>
-            </a:r>
-            <a:endParaRPr lang="en-US" sz="1500" dirty="0"/>
-          </a:p>
-          <a:p>
-            <a:pPr marL="342900" indent="-342900">
-              <a:buSzPct val="100000"/>
-              <a:buChar char="•"/>
-            </a:pPr>
-            <a:r>
-              <a:rPr lang="en-US" sz="1500" dirty="0">
+              <a:t>API / MCP: зміни в реальних даних</a:t>
+            </a:r>
+            <a:endParaRPr lang="en-US" sz="1300" dirty="0"/>
+          </a:p>
+        </p:txBody>
+      </p:sp>
+      <p:sp>
+        <p:nvSpPr>
+          <p:cNvPr id="32" name="routing box"/>
+          <p:cNvSpPr/>
+          <p:nvPr/>
+        </p:nvSpPr>
+        <p:spPr>
+          <a:xfrm>
+            <a:off x="548640" y="4572000"/>
+            <a:ext cx="11094415" cy="1325880"/>
+          </a:xfrm>
+          <a:prstGeom prst="roundRect">
+            <a:avLst>
+              <a:gd name="adj" fmla="val 8276"/>
+            </a:avLst>
+          </a:prstGeom>
+          <a:solidFill>
+            <a:schemeClr val="bg2"/>
+          </a:solidFill>
+          <a:ln/>
+        </p:spPr>
+      </p:sp>
+      <p:sp>
+        <p:nvSpPr>
+          <p:cNvPr id="33" name="routing text"/>
+          <p:cNvSpPr txBox="1"/>
+          <p:nvPr/>
+        </p:nvSpPr>
+        <p:spPr>
+          <a:xfrm>
+            <a:off x="822960" y="4572000"/>
+            <a:ext cx="10545775" cy="1325880"/>
+          </a:xfrm>
+          <a:prstGeom prst="rect">
+            <a:avLst/>
+          </a:prstGeom>
+          <a:noFill/>
+          <a:ln/>
+        </p:spPr>
+        <p:txBody>
+          <a:bodyPr wrap="square" lIns="0" tIns="0" rIns="0" bIns="0" rtlCol="0" anchor="ctr"/>
+          <a:lstStyle/>
+          <a:p>
+            <a:pPr indent="0" marL="0">
+              <a:buNone/>
+            </a:pPr>
+            <a:r>
+              <a:rPr lang="en-US" sz="1600" b="1" dirty="0">
+                <a:solidFill>
+                  <a:schemeClr val="tx1"/>
+                </a:solidFill>
+              </a:rPr>
+              <a:t>Просте питання </a:t>
+            </a:r>
+            <a:pPr indent="0" marL="0">
+              <a:buNone/>
+            </a:pPr>
+            <a:r>
+              <a:rPr lang="en-US" sz="1600" dirty="0">
                 <a:solidFill>
                   <a:schemeClr val="tx2"/>
                 </a:solidFill>
               </a:rPr>
-              <a:t>Канали: чат на сайті, віджет, телефон (Vapi)</a:t>
-            </a:r>
-            <a:endParaRPr lang="en-US" sz="1500" dirty="0"/>
-          </a:p>
-        </p:txBody>
-      </p:sp>
-      <p:sp>
-        <p:nvSpPr>
-          <p:cNvPr id="13" name="link line"/>
-          <p:cNvSpPr txBox="1"/>
-          <p:nvPr/>
-        </p:nvSpPr>
-        <p:spPr>
-          <a:xfrm>
-            <a:off x="548640" y="5577840"/>
-            <a:ext cx="11094415" cy="457200"/>
-          </a:xfrm>
-          <a:prstGeom prst="rect">
-            <a:avLst/>
-          </a:prstGeom>
-          <a:noFill/>
-          <a:ln/>
-        </p:spPr>
-        <p:txBody>
-          <a:bodyPr wrap="square" lIns="0" tIns="0" rIns="0" bIns="0" rtlCol="0" anchor="ctr"/>
-          <a:lstStyle/>
-          <a:p>
+              <a:t>(ціна, адреса) → відповідає Gemma 4, без дій.   </a:t>
+            </a:r>
             <a:pPr indent="0" marL="0">
               <a:buNone/>
             </a:pPr>
             <a:r>
               <a:rPr lang="en-US" sz="1600" b="1" dirty="0">
                 <a:solidFill>
-                  <a:schemeClr val="accent1"/>
-                </a:solidFill>
-              </a:rPr>
-              <a:t>Дві частини з'єднані HTTP API та MCP: агент бачить і змінює ті самі дані, що й адміністратор</a:t>
+                  <a:schemeClr val="tx1"/>
+                </a:solidFill>
+              </a:rPr>
+              <a:t>Дія із записом </a:t>
+            </a:r>
+            <a:pPr indent="0" marL="0">
+              <a:buNone/>
+            </a:pPr>
+            <a:r>
+              <a:rPr lang="en-US" sz="1600" dirty="0">
+                <a:solidFill>
+                  <a:schemeClr val="tx2"/>
+                </a:solidFill>
+              </a:rPr>
+              <a:t>→ завжди через агента й permission engine.   </a:t>
+            </a:r>
+            <a:pPr indent="0" marL="0">
+              <a:buNone/>
+            </a:pPr>
+            <a:r>
+              <a:rPr lang="en-US" sz="1600" b="1" dirty="0">
+                <a:solidFill>
+                  <a:schemeClr val="tx1"/>
+                </a:solidFill>
+              </a:rPr>
+              <a:t>Гнів чи терміновість </a:t>
+            </a:r>
+            <a:pPr indent="0" marL="0">
+              <a:buNone/>
+            </a:pPr>
+            <a:r>
+              <a:rPr lang="en-US" sz="1600" dirty="0">
+                <a:solidFill>
+                  <a:schemeClr val="tx2"/>
+                </a:solidFill>
+              </a:rPr>
+              <a:t>→ ескалація людині.</a:t>
             </a:r>
             <a:endParaRPr lang="en-US" sz="1600" dirty="0"/>
           </a:p>
@@ -5758,8 +4460,8 @@
         </p:nvSpPr>
         <p:spPr>
           <a:xfrm>
-            <a:off x="548640" y="365760"/>
-            <a:ext cx="11094415" cy="731520"/>
+            <a:off x="548640" y="320040"/>
+            <a:ext cx="11094415" cy="640080"/>
           </a:xfrm>
           <a:prstGeom prst="rect">
             <a:avLst/>
@@ -5775,42 +4477,231 @@
               <a:buNone/>
             </a:pPr>
             <a:r>
-              <a:rPr lang="en-US" sz="3200" b="1" dirty="0">
+              <a:rPr lang="en-US" sz="3000" b="1" dirty="0">
                 <a:solidFill>
                   <a:schemeClr val="tx1"/>
                 </a:solidFill>
               </a:rPr>
-              <a:t>Як агент приймає рішення</a:t>
-            </a:r>
-            <a:endParaRPr lang="en-US" sz="3200" dirty="0"/>
-          </a:p>
-        </p:txBody>
-      </p:sp>
-      <p:sp>
-        <p:nvSpPr>
-          <p:cNvPr id="3" name="flow 1 card"/>
+              <a:t>Демо 1. Олена: агент сам рятує передоплату</a:t>
+            </a:r>
+            <a:endParaRPr lang="en-US" sz="3000" dirty="0"/>
+          </a:p>
+        </p:txBody>
+      </p:sp>
+      <p:sp>
+        <p:nvSpPr>
+          <p:cNvPr id="3" name="Text 0"/>
           <p:cNvSpPr/>
-          <p:nvPr/>
-        </p:nvSpPr>
-        <p:spPr>
-          <a:xfrm>
-            <a:off x="548640" y="1554480"/>
-            <a:ext cx="1965960" cy="2651760"/>
+          <p:nvPr>
+            <p:ph idx="101" type="body" hasCustomPrompt="1"/>
+          </p:nvPr>
+        </p:nvSpPr>
+        <p:spPr>
+          <a:xfrm>
+            <a:off x="548640" y="960120"/>
+            <a:ext cx="11094415" cy="411480"/>
+          </a:xfrm>
+          <a:prstGeom prst="rect">
+            <a:avLst/>
+          </a:prstGeom>
+          <a:noFill/>
+          <a:ln/>
+        </p:spPr>
+        <p:txBody>
+          <a:bodyPr wrap="square" lIns="0" tIns="0" rIns="0" bIns="0" rtlCol="0" anchor="t"/>
+          <a:lstStyle/>
+          <a:p>
+            <a:pPr indent="0" marL="0">
+              <a:buNone/>
+            </a:pPr>
+            <a:r>
+              <a:rPr lang="en-US" sz="1600" dirty="0">
+                <a:solidFill>
+                  <a:schemeClr val="tx2"/>
+                </a:solidFill>
+              </a:rPr>
+              <a:t>«Дитина захворіла, не встигаю завтра на 10». Пізнє перенесення — за правилами передоплата згорає.</a:t>
+            </a:r>
+            <a:endParaRPr lang="en-US" sz="1600" dirty="0"/>
+          </a:p>
+        </p:txBody>
+      </p:sp>
+      <p:pic>
+        <p:nvPicPr>
+          <p:cNvPr id="4" name="video scene-A.mp4" descr="Кадр з відео scene-A.mp4">    </p:cNvPr>
+          <p:cNvPicPr>
+            <a:picLocks noChangeAspect="1"/>
+          </p:cNvPicPr>
+          <p:nvPr/>
+        </p:nvPicPr>
+        <p:blipFill>
+          <a:blip r:embed="rId1"/>
+          <a:stretch>
+            <a:fillRect/>
+          </a:stretch>
+        </p:blipFill>
+        <p:spPr>
+          <a:xfrm>
+            <a:off x="548640" y="1737360"/>
+            <a:ext cx="11094415" cy="3467005"/>
+          </a:xfrm>
+          <a:prstGeom prst="rect">
+            <a:avLst/>
+          </a:prstGeom>
+        </p:spPr>
+      </p:pic>
+      <p:sp>
+        <p:nvSpPr>
+          <p:cNvPr id="5" name="insert video badge"/>
+          <p:cNvSpPr/>
+          <p:nvPr/>
+        </p:nvSpPr>
+        <p:spPr>
+          <a:xfrm>
+            <a:off x="4632808" y="3196542"/>
+            <a:ext cx="2926080" cy="548640"/>
           </a:xfrm>
           <a:prstGeom prst="roundRect">
             <a:avLst>
-              <a:gd name="adj" fmla="val 5581"/>
+              <a:gd name="adj" fmla="val 50000"/>
+            </a:avLst>
+          </a:prstGeom>
+          <a:solidFill>
+            <a:schemeClr val="tx1">
+              <a:alpha val="85000"/>
+            </a:schemeClr>
+          </a:solidFill>
+          <a:ln/>
+        </p:spPr>
+      </p:sp>
+      <p:sp>
+        <p:nvSpPr>
+          <p:cNvPr id="6" name="insert video label"/>
+          <p:cNvSpPr txBox="1"/>
+          <p:nvPr/>
+        </p:nvSpPr>
+        <p:spPr>
+          <a:xfrm>
+            <a:off x="4632808" y="3196542"/>
+            <a:ext cx="2926080" cy="548640"/>
+          </a:xfrm>
+          <a:prstGeom prst="rect">
+            <a:avLst/>
+          </a:prstGeom>
+          <a:noFill/>
+          <a:ln/>
+        </p:spPr>
+        <p:txBody>
+          <a:bodyPr wrap="square" lIns="0" tIns="0" rIns="0" bIns="0" rtlCol="0" anchor="ctr"/>
+          <a:lstStyle/>
+          <a:p>
+            <a:pPr algn="ctr" indent="0" marL="0">
+              <a:buNone/>
+            </a:pPr>
+            <a:r>
+              <a:rPr lang="en-US" sz="1400" b="1" dirty="0">
+                <a:solidFill>
+                  <a:schemeClr val="bg1"/>
+                </a:solidFill>
+              </a:rPr>
+              <a:t>▶  вставити scene-A.mp4</a:t>
+            </a:r>
+            <a:endParaRPr lang="en-US" sz="1400" dirty="0"/>
+          </a:p>
+        </p:txBody>
+      </p:sp>
+      <p:sp>
+        <p:nvSpPr>
+          <p:cNvPr id="7" name="video label 0"/>
+          <p:cNvSpPr txBox="1"/>
+          <p:nvPr/>
+        </p:nvSpPr>
+        <p:spPr>
+          <a:xfrm>
+            <a:off x="548640" y="1444752"/>
+            <a:ext cx="5547208" cy="256032"/>
+          </a:xfrm>
+          <a:prstGeom prst="rect">
+            <a:avLst/>
+          </a:prstGeom>
+          <a:noFill/>
+          <a:ln/>
+        </p:spPr>
+        <p:txBody>
+          <a:bodyPr wrap="square" lIns="0" tIns="0" rIns="0" bIns="0" rtlCol="0" anchor="ctr"/>
+          <a:lstStyle/>
+          <a:p>
+            <a:pPr algn="ctr" indent="0" marL="0">
+              <a:buNone/>
+            </a:pPr>
+            <a:r>
+              <a:rPr lang="en-US" sz="1200" b="1" dirty="0">
+                <a:solidFill>
+                  <a:schemeClr val="accent5"/>
+                </a:solidFill>
+              </a:rPr>
+              <a:t>Клієнт на сайті Bookly</a:t>
+            </a:r>
+            <a:endParaRPr lang="en-US" sz="1200" dirty="0"/>
+          </a:p>
+        </p:txBody>
+      </p:sp>
+      <p:sp>
+        <p:nvSpPr>
+          <p:cNvPr id="8" name="video label 1"/>
+          <p:cNvSpPr txBox="1"/>
+          <p:nvPr/>
+        </p:nvSpPr>
+        <p:spPr>
+          <a:xfrm>
+            <a:off x="6095848" y="1444752"/>
+            <a:ext cx="5547208" cy="256032"/>
+          </a:xfrm>
+          <a:prstGeom prst="rect">
+            <a:avLst/>
+          </a:prstGeom>
+          <a:noFill/>
+          <a:ln/>
+        </p:spPr>
+        <p:txBody>
+          <a:bodyPr wrap="square" lIns="0" tIns="0" rIns="0" bIns="0" rtlCol="0" anchor="ctr"/>
+          <a:lstStyle/>
+          <a:p>
+            <a:pPr algn="ctr" indent="0" marL="0">
+              <a:buNone/>
+            </a:pPr>
+            <a:r>
+              <a:rPr lang="en-US" sz="1200" b="1" dirty="0">
+                <a:solidFill>
+                  <a:schemeClr val="accent5"/>
+                </a:solidFill>
+              </a:rPr>
+              <a:t>Чат і copilot адміністратора</a:t>
+            </a:r>
+            <a:endParaRPr lang="en-US" sz="1200" dirty="0"/>
+          </a:p>
+        </p:txBody>
+      </p:sp>
+      <p:sp>
+        <p:nvSpPr>
+          <p:cNvPr id="9" name="step 1"/>
+          <p:cNvSpPr/>
+          <p:nvPr/>
+        </p:nvSpPr>
+        <p:spPr>
+          <a:xfrm>
+            <a:off x="548640" y="5303520"/>
+            <a:ext cx="3515258" cy="1005840"/>
+          </a:xfrm>
+          <a:prstGeom prst="roundRect">
+            <a:avLst>
+              <a:gd name="adj" fmla="val 9091"/>
             </a:avLst>
           </a:prstGeom>
           <a:solidFill>
             <a:schemeClr val="bg1"/>
           </a:solidFill>
-          <a:ln w="9525">
-            <a:solidFill>
-              <a:schemeClr val="bg2"/>
-            </a:solidFill>
-            <a:prstDash val="solid"/>
-          </a:ln>
+          <a:ln/>
           <a:effectLst>
             <a:outerShdw sx="100000" sy="100000" kx="0" ky="0" algn="bl" rotWithShape="0" blurRad="101600" dist="25400" dir="5400000">
               <a:srgbClr val="16163A">
@@ -5822,58 +4713,106 @@
       </p:sp>
       <p:sp>
         <p:nvSpPr>
-          <p:cNvPr id="4" name="flow 1 icon bg"/>
+          <p:cNvPr id="10" name="step 1 dot"/>
           <p:cNvSpPr/>
           <p:nvPr/>
         </p:nvSpPr>
         <p:spPr>
           <a:xfrm>
-            <a:off x="822960" y="1828800"/>
-            <a:ext cx="566928" cy="566928"/>
+            <a:off x="749808" y="5504688"/>
+            <a:ext cx="365760" cy="365760"/>
           </a:xfrm>
           <a:prstGeom prst="ellipse">
             <a:avLst/>
           </a:prstGeom>
           <a:solidFill>
-            <a:schemeClr val="bg2"/>
+            <a:schemeClr val="accent1"/>
           </a:solidFill>
           <a:ln/>
         </p:spPr>
       </p:sp>
-      <p:pic>
-        <p:nvPicPr>
-          <p:cNvPr id="5" name="flow 1 icon" descr="preencoded.png">    </p:cNvPr>
-          <p:cNvPicPr>
-            <a:picLocks noChangeAspect="1"/>
-          </p:cNvPicPr>
-          <p:nvPr/>
-        </p:nvPicPr>
-        <p:blipFill>
-          <a:blip r:embed="rId1"/>
-          <a:stretch>
-            <a:fillRect/>
-          </a:stretch>
-        </p:blipFill>
-        <p:spPr>
-          <a:xfrm>
-            <a:off x="950976" y="1956816"/>
-            <a:ext cx="310896" cy="310896"/>
-          </a:xfrm>
-          <a:prstGeom prst="rect">
-            <a:avLst/>
-          </a:prstGeom>
-        </p:spPr>
-      </p:pic>
-      <p:sp>
-        <p:nvSpPr>
-          <p:cNvPr id="6" name="flow 1 head"/>
+      <p:sp>
+        <p:nvSpPr>
+          <p:cNvPr id="11" name="step 1 number"/>
           <p:cNvSpPr txBox="1"/>
           <p:nvPr/>
         </p:nvSpPr>
         <p:spPr>
           <a:xfrm>
-            <a:off x="822960" y="2578608"/>
-            <a:ext cx="1417320" cy="594360"/>
+            <a:off x="749808" y="5504688"/>
+            <a:ext cx="365760" cy="365760"/>
+          </a:xfrm>
+          <a:prstGeom prst="rect">
+            <a:avLst/>
+          </a:prstGeom>
+          <a:noFill/>
+          <a:ln/>
+        </p:spPr>
+        <p:txBody>
+          <a:bodyPr wrap="square" lIns="0" tIns="0" rIns="0" bIns="0" rtlCol="0" anchor="ctr"/>
+          <a:lstStyle/>
+          <a:p>
+            <a:pPr algn="ctr" indent="0" marL="0">
+              <a:buNone/>
+            </a:pPr>
+            <a:r>
+              <a:rPr lang="en-US" sz="1400" b="1" dirty="0">
+                <a:solidFill>
+                  <a:schemeClr val="bg1"/>
+                </a:solidFill>
+              </a:rPr>
+              <a:t>1</a:t>
+            </a:r>
+            <a:endParaRPr lang="en-US" sz="1400" dirty="0"/>
+          </a:p>
+        </p:txBody>
+      </p:sp>
+      <p:sp>
+        <p:nvSpPr>
+          <p:cNvPr id="12" name="step 1 head"/>
+          <p:cNvSpPr txBox="1"/>
+          <p:nvPr/>
+        </p:nvSpPr>
+        <p:spPr>
+          <a:xfrm>
+            <a:off x="1234440" y="5468112"/>
+            <a:ext cx="2646578" cy="411480"/>
+          </a:xfrm>
+          <a:prstGeom prst="rect">
+            <a:avLst/>
+          </a:prstGeom>
+          <a:noFill/>
+          <a:ln/>
+        </p:spPr>
+        <p:txBody>
+          <a:bodyPr wrap="square" lIns="0" tIns="0" rIns="0" bIns="0" rtlCol="0" anchor="ctr"/>
+          <a:lstStyle/>
+          <a:p>
+            <a:pPr indent="0" marL="0">
+              <a:buNone/>
+            </a:pPr>
+            <a:r>
+              <a:rPr lang="en-US" sz="1500" b="1" dirty="0">
+                <a:solidFill>
+                  <a:schemeClr val="tx1"/>
+                </a:solidFill>
+              </a:rPr>
+              <a:t>Контекст</a:t>
+            </a:r>
+            <a:endParaRPr lang="en-US" sz="1500" dirty="0"/>
+          </a:p>
+        </p:txBody>
+      </p:sp>
+      <p:sp>
+        <p:nvSpPr>
+          <p:cNvPr id="13" name="step 1 text"/>
+          <p:cNvSpPr txBox="1"/>
+          <p:nvPr/>
+        </p:nvSpPr>
+        <p:spPr>
+          <a:xfrm>
+            <a:off x="1234440" y="5870448"/>
+            <a:ext cx="2646578" cy="502920"/>
           </a:xfrm>
           <a:prstGeom prst="rect">
             <a:avLst/>
@@ -5889,114 +4828,37 @@
               <a:buNone/>
             </a:pPr>
             <a:r>
-              <a:rPr lang="en-US" sz="1400" b="1" dirty="0">
-                <a:solidFill>
-                  <a:schemeClr val="tx1"/>
-                </a:solidFill>
-              </a:rPr>
-              <a:t>Клієнт пише</a:t>
-            </a:r>
-            <a:endParaRPr lang="en-US" sz="1400" dirty="0"/>
-          </a:p>
-        </p:txBody>
-      </p:sp>
-      <p:sp>
-        <p:nvSpPr>
-          <p:cNvPr id="7" name="flow 1 text"/>
-          <p:cNvSpPr txBox="1"/>
-          <p:nvPr/>
-        </p:nvSpPr>
-        <p:spPr>
-          <a:xfrm>
-            <a:off x="822960" y="3264408"/>
-            <a:ext cx="1417320" cy="758952"/>
-          </a:xfrm>
-          <a:prstGeom prst="rect">
-            <a:avLst/>
-          </a:prstGeom>
-          <a:noFill/>
-          <a:ln/>
-        </p:spPr>
-        <p:txBody>
-          <a:bodyPr wrap="square" lIns="0" tIns="0" rIns="0" bIns="0" rtlCol="0" anchor="t"/>
-          <a:lstStyle/>
-          <a:p>
-            <a:pPr indent="0" marL="0">
-              <a:buNone/>
-            </a:pPr>
-            <a:r>
-              <a:rPr lang="en-US" sz="1300" dirty="0">
+              <a:rPr lang="en-US" sz="1200" dirty="0">
                 <a:solidFill>
                   <a:schemeClr val="tx2"/>
                 </a:solidFill>
               </a:rPr>
-              <a:t>Чат на сайті, віджет або дзвінок</a:t>
-            </a:r>
-            <a:endParaRPr lang="en-US" sz="1300" dirty="0"/>
-          </a:p>
-        </p:txBody>
-      </p:sp>
-      <p:sp>
-        <p:nvSpPr>
-          <p:cNvPr id="8" name="flow arrow 1"/>
-          <p:cNvSpPr txBox="1"/>
-          <p:nvPr/>
-        </p:nvSpPr>
-        <p:spPr>
-          <a:xfrm>
-            <a:off x="2514600" y="2651760"/>
-            <a:ext cx="316154" cy="457200"/>
-          </a:xfrm>
-          <a:prstGeom prst="rect">
-            <a:avLst/>
-          </a:prstGeom>
-          <a:noFill/>
-          <a:ln/>
-        </p:spPr>
-        <p:txBody>
-          <a:bodyPr wrap="square" lIns="0" tIns="0" rIns="0" bIns="0" rtlCol="0" anchor="ctr"/>
-          <a:lstStyle/>
-          <a:p>
-            <a:pPr algn="ctr" indent="0" marL="0">
-              <a:buNone/>
-            </a:pPr>
-            <a:r>
-              <a:rPr lang="en-US" sz="2000" b="1" dirty="0">
-                <a:solidFill>
-                  <a:schemeClr val="accent1"/>
-                </a:solidFill>
-              </a:rPr>
-              <a:t>→</a:t>
-            </a:r>
-            <a:endParaRPr lang="en-US" sz="2000" dirty="0"/>
-          </a:p>
-        </p:txBody>
-      </p:sp>
-      <p:sp>
-        <p:nvSpPr>
-          <p:cNvPr id="9" name="flow 2 card"/>
+              <a:t>12 візитів, 0 неявок, винятків ще не було</a:t>
+            </a:r>
+            <a:endParaRPr lang="en-US" sz="1200" dirty="0"/>
+          </a:p>
+        </p:txBody>
+      </p:sp>
+      <p:sp>
+        <p:nvSpPr>
+          <p:cNvPr id="14" name="step 2"/>
           <p:cNvSpPr/>
           <p:nvPr/>
         </p:nvSpPr>
         <p:spPr>
           <a:xfrm>
-            <a:off x="2830754" y="1554480"/>
-            <a:ext cx="1965960" cy="2651760"/>
+            <a:off x="4338218" y="5303520"/>
+            <a:ext cx="3515258" cy="1005840"/>
           </a:xfrm>
           <a:prstGeom prst="roundRect">
             <a:avLst>
-              <a:gd name="adj" fmla="val 5581"/>
+              <a:gd name="adj" fmla="val 9091"/>
             </a:avLst>
           </a:prstGeom>
           <a:solidFill>
             <a:schemeClr val="bg1"/>
           </a:solidFill>
-          <a:ln w="9525">
-            <a:solidFill>
-              <a:schemeClr val="bg2"/>
-            </a:solidFill>
-            <a:prstDash val="solid"/>
-          </a:ln>
+          <a:ln/>
           <a:effectLst>
             <a:outerShdw sx="100000" sy="100000" kx="0" ky="0" algn="bl" rotWithShape="0" blurRad="101600" dist="25400" dir="5400000">
               <a:srgbClr val="16163A">
@@ -6008,58 +4870,106 @@
       </p:sp>
       <p:sp>
         <p:nvSpPr>
-          <p:cNvPr id="10" name="flow 2 icon bg"/>
+          <p:cNvPr id="15" name="step 2 dot"/>
           <p:cNvSpPr/>
           <p:nvPr/>
         </p:nvSpPr>
         <p:spPr>
           <a:xfrm>
-            <a:off x="3105074" y="1828800"/>
-            <a:ext cx="566928" cy="566928"/>
+            <a:off x="4539386" y="5504688"/>
+            <a:ext cx="365760" cy="365760"/>
           </a:xfrm>
           <a:prstGeom prst="ellipse">
             <a:avLst/>
           </a:prstGeom>
           <a:solidFill>
-            <a:schemeClr val="bg2"/>
+            <a:srgbClr val="12B886"/>
           </a:solidFill>
           <a:ln/>
         </p:spPr>
       </p:sp>
-      <p:pic>
-        <p:nvPicPr>
-          <p:cNvPr id="11" name="flow 2 icon" descr="preencoded.png">    </p:cNvPr>
-          <p:cNvPicPr>
-            <a:picLocks noChangeAspect="1"/>
-          </p:cNvPicPr>
-          <p:nvPr/>
-        </p:nvPicPr>
-        <p:blipFill>
-          <a:blip r:embed="rId2"/>
-          <a:stretch>
-            <a:fillRect/>
-          </a:stretch>
-        </p:blipFill>
-        <p:spPr>
-          <a:xfrm>
-            <a:off x="3233090" y="1956816"/>
-            <a:ext cx="310896" cy="310896"/>
-          </a:xfrm>
-          <a:prstGeom prst="rect">
-            <a:avLst/>
-          </a:prstGeom>
-        </p:spPr>
-      </p:pic>
-      <p:sp>
-        <p:nvSpPr>
-          <p:cNvPr id="12" name="flow 2 head"/>
+      <p:sp>
+        <p:nvSpPr>
+          <p:cNvPr id="16" name="step 2 number"/>
           <p:cNvSpPr txBox="1"/>
           <p:nvPr/>
         </p:nvSpPr>
         <p:spPr>
           <a:xfrm>
-            <a:off x="3105074" y="2578608"/>
-            <a:ext cx="1417320" cy="594360"/>
+            <a:off x="4539386" y="5504688"/>
+            <a:ext cx="365760" cy="365760"/>
+          </a:xfrm>
+          <a:prstGeom prst="rect">
+            <a:avLst/>
+          </a:prstGeom>
+          <a:noFill/>
+          <a:ln/>
+        </p:spPr>
+        <p:txBody>
+          <a:bodyPr wrap="square" lIns="0" tIns="0" rIns="0" bIns="0" rtlCol="0" anchor="ctr"/>
+          <a:lstStyle/>
+          <a:p>
+            <a:pPr algn="ctr" indent="0" marL="0">
+              <a:buNone/>
+            </a:pPr>
+            <a:r>
+              <a:rPr lang="en-US" sz="1400" b="1" dirty="0">
+                <a:solidFill>
+                  <a:schemeClr val="bg1"/>
+                </a:solidFill>
+              </a:rPr>
+              <a:t>2</a:t>
+            </a:r>
+            <a:endParaRPr lang="en-US" sz="1400" dirty="0"/>
+          </a:p>
+        </p:txBody>
+      </p:sp>
+      <p:sp>
+        <p:nvSpPr>
+          <p:cNvPr id="17" name="step 2 head"/>
+          <p:cNvSpPr txBox="1"/>
+          <p:nvPr/>
+        </p:nvSpPr>
+        <p:spPr>
+          <a:xfrm>
+            <a:off x="5024018" y="5468112"/>
+            <a:ext cx="2646578" cy="411480"/>
+          </a:xfrm>
+          <a:prstGeom prst="rect">
+            <a:avLst/>
+          </a:prstGeom>
+          <a:noFill/>
+          <a:ln/>
+        </p:spPr>
+        <p:txBody>
+          <a:bodyPr wrap="square" lIns="0" tIns="0" rIns="0" bIns="0" rtlCol="0" anchor="ctr"/>
+          <a:lstStyle/>
+          <a:p>
+            <a:pPr indent="0" marL="0">
+              <a:buNone/>
+            </a:pPr>
+            <a:r>
+              <a:rPr lang="en-US" sz="1500" b="1" dirty="0">
+                <a:solidFill>
+                  <a:schemeClr val="tx1"/>
+                </a:solidFill>
+              </a:rPr>
+              <a:t>Рішення сам</a:t>
+            </a:r>
+            <a:endParaRPr lang="en-US" sz="1500" dirty="0"/>
+          </a:p>
+        </p:txBody>
+      </p:sp>
+      <p:sp>
+        <p:nvSpPr>
+          <p:cNvPr id="18" name="step 2 text"/>
+          <p:cNvSpPr txBox="1"/>
+          <p:nvPr/>
+        </p:nvSpPr>
+        <p:spPr>
+          <a:xfrm>
+            <a:off x="5024018" y="5870448"/>
+            <a:ext cx="2646578" cy="502920"/>
           </a:xfrm>
           <a:prstGeom prst="rect">
             <a:avLst/>
@@ -6075,114 +4985,37 @@
               <a:buNone/>
             </a:pPr>
             <a:r>
-              <a:rPr lang="en-US" sz="1400" b="1" dirty="0">
-                <a:solidFill>
-                  <a:schemeClr val="tx1"/>
-                </a:solidFill>
-              </a:rPr>
-              <a:t>Оркестратор</a:t>
-            </a:r>
-            <a:endParaRPr lang="en-US" sz="1400" dirty="0"/>
-          </a:p>
-        </p:txBody>
-      </p:sp>
-      <p:sp>
-        <p:nvSpPr>
-          <p:cNvPr id="13" name="flow 2 text"/>
-          <p:cNvSpPr txBox="1"/>
-          <p:nvPr/>
-        </p:nvSpPr>
-        <p:spPr>
-          <a:xfrm>
-            <a:off x="3105074" y="3264408"/>
-            <a:ext cx="1417320" cy="758952"/>
-          </a:xfrm>
-          <a:prstGeom prst="rect">
-            <a:avLst/>
-          </a:prstGeom>
-          <a:noFill/>
-          <a:ln/>
-        </p:spPr>
-        <p:txBody>
-          <a:bodyPr wrap="square" lIns="0" tIns="0" rIns="0" bIns="0" rtlCol="0" anchor="t"/>
-          <a:lstStyle/>
-          <a:p>
-            <a:pPr indent="0" marL="0">
-              <a:buNone/>
-            </a:pPr>
-            <a:r>
-              <a:rPr lang="en-US" sz="1300" dirty="0">
+              <a:rPr lang="en-US" sz="1200" dirty="0">
                 <a:solidFill>
                   <a:schemeClr val="tx2"/>
                 </a:solidFill>
               </a:rPr>
-              <a:t>Claude Sonnet: намір, емоція, терміновість, маршрут</a:t>
-            </a:r>
-            <a:endParaRPr lang="en-US" sz="1300" dirty="0"/>
-          </a:p>
-        </p:txBody>
-      </p:sp>
-      <p:sp>
-        <p:nvSpPr>
-          <p:cNvPr id="14" name="flow arrow 2"/>
-          <p:cNvSpPr txBox="1"/>
-          <p:nvPr/>
-        </p:nvSpPr>
-        <p:spPr>
-          <a:xfrm>
-            <a:off x="4796714" y="2651760"/>
-            <a:ext cx="316154" cy="457200"/>
-          </a:xfrm>
-          <a:prstGeom prst="rect">
-            <a:avLst/>
-          </a:prstGeom>
-          <a:noFill/>
-          <a:ln/>
-        </p:spPr>
-        <p:txBody>
-          <a:bodyPr wrap="square" lIns="0" tIns="0" rIns="0" bIns="0" rtlCol="0" anchor="ctr"/>
-          <a:lstStyle/>
-          <a:p>
-            <a:pPr algn="ctr" indent="0" marL="0">
-              <a:buNone/>
-            </a:pPr>
-            <a:r>
-              <a:rPr lang="en-US" sz="2000" b="1" dirty="0">
-                <a:solidFill>
-                  <a:schemeClr val="accent1"/>
-                </a:solidFill>
-              </a:rPr>
-              <a:t>→</a:t>
-            </a:r>
-            <a:endParaRPr lang="en-US" sz="2000" dirty="0"/>
-          </a:p>
-        </p:txBody>
-      </p:sp>
-      <p:sp>
-        <p:nvSpPr>
-          <p:cNvPr id="15" name="flow 3 card"/>
+              <a:t>Правило салону дозволяє виняток автоматично</a:t>
+            </a:r>
+            <a:endParaRPr lang="en-US" sz="1200" dirty="0"/>
+          </a:p>
+        </p:txBody>
+      </p:sp>
+      <p:sp>
+        <p:nvSpPr>
+          <p:cNvPr id="19" name="step 3"/>
           <p:cNvSpPr/>
           <p:nvPr/>
         </p:nvSpPr>
         <p:spPr>
           <a:xfrm>
-            <a:off x="5112868" y="1554480"/>
-            <a:ext cx="1965960" cy="2651760"/>
+            <a:off x="8127797" y="5303520"/>
+            <a:ext cx="3515258" cy="1005840"/>
           </a:xfrm>
           <a:prstGeom prst="roundRect">
             <a:avLst>
-              <a:gd name="adj" fmla="val 5581"/>
+              <a:gd name="adj" fmla="val 9091"/>
             </a:avLst>
           </a:prstGeom>
           <a:solidFill>
             <a:schemeClr val="bg1"/>
           </a:solidFill>
-          <a:ln w="9525">
-            <a:solidFill>
-              <a:schemeClr val="bg2"/>
-            </a:solidFill>
-            <a:prstDash val="solid"/>
-          </a:ln>
+          <a:ln/>
           <a:effectLst>
             <a:outerShdw sx="100000" sy="100000" kx="0" ky="0" algn="bl" rotWithShape="0" blurRad="101600" dist="25400" dir="5400000">
               <a:srgbClr val="16163A">
@@ -6194,58 +5027,106 @@
       </p:sp>
       <p:sp>
         <p:nvSpPr>
-          <p:cNvPr id="16" name="flow 3 icon bg"/>
+          <p:cNvPr id="20" name="step 3 dot"/>
           <p:cNvSpPr/>
           <p:nvPr/>
         </p:nvSpPr>
         <p:spPr>
           <a:xfrm>
-            <a:off x="5387188" y="1828800"/>
-            <a:ext cx="566928" cy="566928"/>
+            <a:off x="8328965" y="5504688"/>
+            <a:ext cx="365760" cy="365760"/>
           </a:xfrm>
           <a:prstGeom prst="ellipse">
             <a:avLst/>
           </a:prstGeom>
           <a:solidFill>
-            <a:schemeClr val="bg2"/>
+            <a:schemeClr val="accent1"/>
           </a:solidFill>
           <a:ln/>
         </p:spPr>
       </p:sp>
-      <p:pic>
-        <p:nvPicPr>
-          <p:cNvPr id="17" name="flow 3 icon" descr="preencoded.png">    </p:cNvPr>
-          <p:cNvPicPr>
-            <a:picLocks noChangeAspect="1"/>
-          </p:cNvPicPr>
-          <p:nvPr/>
-        </p:nvPicPr>
-        <p:blipFill>
-          <a:blip r:embed="rId3"/>
-          <a:stretch>
-            <a:fillRect/>
-          </a:stretch>
-        </p:blipFill>
-        <p:spPr>
-          <a:xfrm>
-            <a:off x="5515204" y="1956816"/>
-            <a:ext cx="310896" cy="310896"/>
-          </a:xfrm>
-          <a:prstGeom prst="rect">
-            <a:avLst/>
-          </a:prstGeom>
-        </p:spPr>
-      </p:pic>
-      <p:sp>
-        <p:nvSpPr>
-          <p:cNvPr id="18" name="flow 3 head"/>
+      <p:sp>
+        <p:nvSpPr>
+          <p:cNvPr id="21" name="step 3 number"/>
           <p:cNvSpPr txBox="1"/>
           <p:nvPr/>
         </p:nvSpPr>
         <p:spPr>
           <a:xfrm>
-            <a:off x="5387188" y="2578608"/>
-            <a:ext cx="1417320" cy="594360"/>
+            <a:off x="8328965" y="5504688"/>
+            <a:ext cx="365760" cy="365760"/>
+          </a:xfrm>
+          <a:prstGeom prst="rect">
+            <a:avLst/>
+          </a:prstGeom>
+          <a:noFill/>
+          <a:ln/>
+        </p:spPr>
+        <p:txBody>
+          <a:bodyPr wrap="square" lIns="0" tIns="0" rIns="0" bIns="0" rtlCol="0" anchor="ctr"/>
+          <a:lstStyle/>
+          <a:p>
+            <a:pPr algn="ctr" indent="0" marL="0">
+              <a:buNone/>
+            </a:pPr>
+            <a:r>
+              <a:rPr lang="en-US" sz="1400" b="1" dirty="0">
+                <a:solidFill>
+                  <a:schemeClr val="bg1"/>
+                </a:solidFill>
+              </a:rPr>
+              <a:t>3</a:t>
+            </a:r>
+            <a:endParaRPr lang="en-US" sz="1400" dirty="0"/>
+          </a:p>
+        </p:txBody>
+      </p:sp>
+      <p:sp>
+        <p:nvSpPr>
+          <p:cNvPr id="22" name="step 3 head"/>
+          <p:cNvSpPr txBox="1"/>
+          <p:nvPr/>
+        </p:nvSpPr>
+        <p:spPr>
+          <a:xfrm>
+            <a:off x="8813597" y="5468112"/>
+            <a:ext cx="2646578" cy="411480"/>
+          </a:xfrm>
+          <a:prstGeom prst="rect">
+            <a:avLst/>
+          </a:prstGeom>
+          <a:noFill/>
+          <a:ln/>
+        </p:spPr>
+        <p:txBody>
+          <a:bodyPr wrap="square" lIns="0" tIns="0" rIns="0" bIns="0" rtlCol="0" anchor="ctr"/>
+          <a:lstStyle/>
+          <a:p>
+            <a:pPr indent="0" marL="0">
+              <a:buNone/>
+            </a:pPr>
+            <a:r>
+              <a:rPr lang="en-US" sz="1500" b="1" dirty="0">
+                <a:solidFill>
+                  <a:schemeClr val="tx1"/>
+                </a:solidFill>
+              </a:rPr>
+              <a:t>Дія</a:t>
+            </a:r>
+            <a:endParaRPr lang="en-US" sz="1500" dirty="0"/>
+          </a:p>
+        </p:txBody>
+      </p:sp>
+      <p:sp>
+        <p:nvSpPr>
+          <p:cNvPr id="23" name="step 3 text"/>
+          <p:cNvSpPr txBox="1"/>
+          <p:nvPr/>
+        </p:nvSpPr>
+        <p:spPr>
+          <a:xfrm>
+            <a:off x="8813597" y="5870448"/>
+            <a:ext cx="2646578" cy="502920"/>
           </a:xfrm>
           <a:prstGeom prst="rect">
             <a:avLst/>
@@ -6261,535 +5142,14 @@
               <a:buNone/>
             </a:pPr>
             <a:r>
-              <a:rPr lang="en-US" sz="1400" b="1" dirty="0">
-                <a:solidFill>
-                  <a:schemeClr val="tx1"/>
-                </a:solidFill>
-              </a:rPr>
-              <a:t>Агент-виконавець</a:t>
-            </a:r>
-            <a:endParaRPr lang="en-US" sz="1400" dirty="0"/>
-          </a:p>
-        </p:txBody>
-      </p:sp>
-      <p:sp>
-        <p:nvSpPr>
-          <p:cNvPr id="19" name="flow 3 text"/>
-          <p:cNvSpPr txBox="1"/>
-          <p:nvPr/>
-        </p:nvSpPr>
-        <p:spPr>
-          <a:xfrm>
-            <a:off x="5387188" y="3264408"/>
-            <a:ext cx="1417320" cy="758952"/>
-          </a:xfrm>
-          <a:prstGeom prst="rect">
-            <a:avLst/>
-          </a:prstGeom>
-          <a:noFill/>
-          <a:ln/>
-        </p:spPr>
-        <p:txBody>
-          <a:bodyPr wrap="square" lIns="0" tIns="0" rIns="0" bIns="0" rtlCol="0" anchor="t"/>
-          <a:lstStyle/>
-          <a:p>
-            <a:pPr indent="0" marL="0">
-              <a:buNone/>
-            </a:pPr>
-            <a:r>
-              <a:rPr lang="en-US" sz="1300" dirty="0">
+              <a:rPr lang="en-US" sz="1200" dirty="0">
                 <a:solidFill>
                   <a:schemeClr val="tx2"/>
                 </a:solidFill>
               </a:rPr>
-              <a:t>Читає профіль і правила, викликає інструменти</a:t>
-            </a:r>
-            <a:endParaRPr lang="en-US" sz="1300" dirty="0"/>
-          </a:p>
-        </p:txBody>
-      </p:sp>
-      <p:sp>
-        <p:nvSpPr>
-          <p:cNvPr id="20" name="flow arrow 3"/>
-          <p:cNvSpPr txBox="1"/>
-          <p:nvPr/>
-        </p:nvSpPr>
-        <p:spPr>
-          <a:xfrm>
-            <a:off x="7078828" y="2651760"/>
-            <a:ext cx="316154" cy="457200"/>
-          </a:xfrm>
-          <a:prstGeom prst="rect">
-            <a:avLst/>
-          </a:prstGeom>
-          <a:noFill/>
-          <a:ln/>
-        </p:spPr>
-        <p:txBody>
-          <a:bodyPr wrap="square" lIns="0" tIns="0" rIns="0" bIns="0" rtlCol="0" anchor="ctr"/>
-          <a:lstStyle/>
-          <a:p>
-            <a:pPr algn="ctr" indent="0" marL="0">
-              <a:buNone/>
-            </a:pPr>
-            <a:r>
-              <a:rPr lang="en-US" sz="2000" b="1" dirty="0">
-                <a:solidFill>
-                  <a:schemeClr val="accent1"/>
-                </a:solidFill>
-              </a:rPr>
-              <a:t>→</a:t>
-            </a:r>
-            <a:endParaRPr lang="en-US" sz="2000" dirty="0"/>
-          </a:p>
-        </p:txBody>
-      </p:sp>
-      <p:sp>
-        <p:nvSpPr>
-          <p:cNvPr id="21" name="flow 4 card"/>
-          <p:cNvSpPr/>
-          <p:nvPr/>
-        </p:nvSpPr>
-        <p:spPr>
-          <a:xfrm>
-            <a:off x="7394981" y="1554480"/>
-            <a:ext cx="1965960" cy="2651760"/>
-          </a:xfrm>
-          <a:prstGeom prst="roundRect">
-            <a:avLst>
-              <a:gd name="adj" fmla="val 5581"/>
-            </a:avLst>
-          </a:prstGeom>
-          <a:solidFill>
-            <a:schemeClr val="bg1"/>
-          </a:solidFill>
-          <a:ln w="9525">
-            <a:solidFill>
-              <a:schemeClr val="bg2"/>
-            </a:solidFill>
-            <a:prstDash val="solid"/>
-          </a:ln>
-          <a:effectLst>
-            <a:outerShdw sx="100000" sy="100000" kx="0" ky="0" algn="bl" rotWithShape="0" blurRad="101600" dist="25400" dir="5400000">
-              <a:srgbClr val="16163A">
-                <a:alpha val="12000"/>
-              </a:srgbClr>
-            </a:outerShdw>
-          </a:effectLst>
-        </p:spPr>
-      </p:sp>
-      <p:sp>
-        <p:nvSpPr>
-          <p:cNvPr id="22" name="flow 4 icon bg"/>
-          <p:cNvSpPr/>
-          <p:nvPr/>
-        </p:nvSpPr>
-        <p:spPr>
-          <a:xfrm>
-            <a:off x="7669301" y="1828800"/>
-            <a:ext cx="566928" cy="566928"/>
-          </a:xfrm>
-          <a:prstGeom prst="ellipse">
-            <a:avLst/>
-          </a:prstGeom>
-          <a:solidFill>
-            <a:schemeClr val="bg2"/>
-          </a:solidFill>
-          <a:ln/>
-        </p:spPr>
-      </p:sp>
-      <p:pic>
-        <p:nvPicPr>
-          <p:cNvPr id="23" name="flow 4 icon" descr="preencoded.png">    </p:cNvPr>
-          <p:cNvPicPr>
-            <a:picLocks noChangeAspect="1"/>
-          </p:cNvPicPr>
-          <p:nvPr/>
-        </p:nvPicPr>
-        <p:blipFill>
-          <a:blip r:embed="rId4"/>
-          <a:stretch>
-            <a:fillRect/>
-          </a:stretch>
-        </p:blipFill>
-        <p:spPr>
-          <a:xfrm>
-            <a:off x="7797317" y="1956816"/>
-            <a:ext cx="310896" cy="310896"/>
-          </a:xfrm>
-          <a:prstGeom prst="rect">
-            <a:avLst/>
-          </a:prstGeom>
-        </p:spPr>
-      </p:pic>
-      <p:sp>
-        <p:nvSpPr>
-          <p:cNvPr id="24" name="flow 4 head"/>
-          <p:cNvSpPr txBox="1"/>
-          <p:nvPr/>
-        </p:nvSpPr>
-        <p:spPr>
-          <a:xfrm>
-            <a:off x="7669301" y="2578608"/>
-            <a:ext cx="1417320" cy="594360"/>
-          </a:xfrm>
-          <a:prstGeom prst="rect">
-            <a:avLst/>
-          </a:prstGeom>
-          <a:noFill/>
-          <a:ln/>
-        </p:spPr>
-        <p:txBody>
-          <a:bodyPr wrap="square" lIns="0" tIns="0" rIns="0" bIns="0" rtlCol="0" anchor="t"/>
-          <a:lstStyle/>
-          <a:p>
-            <a:pPr indent="0" marL="0">
-              <a:buNone/>
-            </a:pPr>
-            <a:r>
-              <a:rPr lang="en-US" sz="1400" b="1" dirty="0">
-                <a:solidFill>
-                  <a:schemeClr val="tx1"/>
-                </a:solidFill>
-              </a:rPr>
-              <a:t>Permission engine</a:t>
-            </a:r>
-            <a:endParaRPr lang="en-US" sz="1400" dirty="0"/>
-          </a:p>
-        </p:txBody>
-      </p:sp>
-      <p:sp>
-        <p:nvSpPr>
-          <p:cNvPr id="25" name="flow 4 text"/>
-          <p:cNvSpPr txBox="1"/>
-          <p:nvPr/>
-        </p:nvSpPr>
-        <p:spPr>
-          <a:xfrm>
-            <a:off x="7669301" y="3264408"/>
-            <a:ext cx="1417320" cy="758952"/>
-          </a:xfrm>
-          <a:prstGeom prst="rect">
-            <a:avLst/>
-          </a:prstGeom>
-          <a:noFill/>
-          <a:ln/>
-        </p:spPr>
-        <p:txBody>
-          <a:bodyPr wrap="square" lIns="0" tIns="0" rIns="0" bIns="0" rtlCol="0" anchor="t"/>
-          <a:lstStyle/>
-          <a:p>
-            <a:pPr indent="0" marL="0">
-              <a:buNone/>
-            </a:pPr>
-            <a:r>
-              <a:rPr lang="en-US" sz="1300" dirty="0">
-                <a:solidFill>
-                  <a:schemeClr val="tx2"/>
-                </a:solidFill>
-              </a:rPr>
-              <a:t>Сам · з погодженням · заборонено</a:t>
-            </a:r>
-            <a:endParaRPr lang="en-US" sz="1300" dirty="0"/>
-          </a:p>
-        </p:txBody>
-      </p:sp>
-      <p:sp>
-        <p:nvSpPr>
-          <p:cNvPr id="26" name="flow arrow 4"/>
-          <p:cNvSpPr txBox="1"/>
-          <p:nvPr/>
-        </p:nvSpPr>
-        <p:spPr>
-          <a:xfrm>
-            <a:off x="9360941" y="2651760"/>
-            <a:ext cx="316154" cy="457200"/>
-          </a:xfrm>
-          <a:prstGeom prst="rect">
-            <a:avLst/>
-          </a:prstGeom>
-          <a:noFill/>
-          <a:ln/>
-        </p:spPr>
-        <p:txBody>
-          <a:bodyPr wrap="square" lIns="0" tIns="0" rIns="0" bIns="0" rtlCol="0" anchor="ctr"/>
-          <a:lstStyle/>
-          <a:p>
-            <a:pPr algn="ctr" indent="0" marL="0">
-              <a:buNone/>
-            </a:pPr>
-            <a:r>
-              <a:rPr lang="en-US" sz="2000" b="1" dirty="0">
-                <a:solidFill>
-                  <a:schemeClr val="accent1"/>
-                </a:solidFill>
-              </a:rPr>
-              <a:t>→</a:t>
-            </a:r>
-            <a:endParaRPr lang="en-US" sz="2000" dirty="0"/>
-          </a:p>
-        </p:txBody>
-      </p:sp>
-      <p:sp>
-        <p:nvSpPr>
-          <p:cNvPr id="27" name="flow 5 card"/>
-          <p:cNvSpPr/>
-          <p:nvPr/>
-        </p:nvSpPr>
-        <p:spPr>
-          <a:xfrm>
-            <a:off x="9677095" y="1554480"/>
-            <a:ext cx="1965960" cy="2651760"/>
-          </a:xfrm>
-          <a:prstGeom prst="roundRect">
-            <a:avLst>
-              <a:gd name="adj" fmla="val 5581"/>
-            </a:avLst>
-          </a:prstGeom>
-          <a:solidFill>
-            <a:schemeClr val="bg1"/>
-          </a:solidFill>
-          <a:ln w="9525">
-            <a:solidFill>
-              <a:schemeClr val="bg2"/>
-            </a:solidFill>
-            <a:prstDash val="solid"/>
-          </a:ln>
-          <a:effectLst>
-            <a:outerShdw sx="100000" sy="100000" kx="0" ky="0" algn="bl" rotWithShape="0" blurRad="101600" dist="25400" dir="5400000">
-              <a:srgbClr val="16163A">
-                <a:alpha val="12000"/>
-              </a:srgbClr>
-            </a:outerShdw>
-          </a:effectLst>
-        </p:spPr>
-      </p:sp>
-      <p:sp>
-        <p:nvSpPr>
-          <p:cNvPr id="28" name="flow 5 icon bg"/>
-          <p:cNvSpPr/>
-          <p:nvPr/>
-        </p:nvSpPr>
-        <p:spPr>
-          <a:xfrm>
-            <a:off x="9951415" y="1828800"/>
-            <a:ext cx="566928" cy="566928"/>
-          </a:xfrm>
-          <a:prstGeom prst="ellipse">
-            <a:avLst/>
-          </a:prstGeom>
-          <a:solidFill>
-            <a:schemeClr val="bg2"/>
-          </a:solidFill>
-          <a:ln/>
-        </p:spPr>
-      </p:sp>
-      <p:pic>
-        <p:nvPicPr>
-          <p:cNvPr id="29" name="flow 5 icon" descr="preencoded.png">    </p:cNvPr>
-          <p:cNvPicPr>
-            <a:picLocks noChangeAspect="1"/>
-          </p:cNvPicPr>
-          <p:nvPr/>
-        </p:nvPicPr>
-        <p:blipFill>
-          <a:blip r:embed="rId5"/>
-          <a:stretch>
-            <a:fillRect/>
-          </a:stretch>
-        </p:blipFill>
-        <p:spPr>
-          <a:xfrm>
-            <a:off x="10079431" y="1956816"/>
-            <a:ext cx="310896" cy="310896"/>
-          </a:xfrm>
-          <a:prstGeom prst="rect">
-            <a:avLst/>
-          </a:prstGeom>
-        </p:spPr>
-      </p:pic>
-      <p:sp>
-        <p:nvSpPr>
-          <p:cNvPr id="30" name="flow 5 head"/>
-          <p:cNvSpPr txBox="1"/>
-          <p:nvPr/>
-        </p:nvSpPr>
-        <p:spPr>
-          <a:xfrm>
-            <a:off x="9951415" y="2578608"/>
-            <a:ext cx="1417320" cy="594360"/>
-          </a:xfrm>
-          <a:prstGeom prst="rect">
-            <a:avLst/>
-          </a:prstGeom>
-          <a:noFill/>
-          <a:ln/>
-        </p:spPr>
-        <p:txBody>
-          <a:bodyPr wrap="square" lIns="0" tIns="0" rIns="0" bIns="0" rtlCol="0" anchor="t"/>
-          <a:lstStyle/>
-          <a:p>
-            <a:pPr indent="0" marL="0">
-              <a:buNone/>
-            </a:pPr>
-            <a:r>
-              <a:rPr lang="en-US" sz="1400" b="1" dirty="0">
-                <a:solidFill>
-                  <a:schemeClr val="tx1"/>
-                </a:solidFill>
-              </a:rPr>
-              <a:t>Платформа</a:t>
-            </a:r>
-            <a:endParaRPr lang="en-US" sz="1400" dirty="0"/>
-          </a:p>
-        </p:txBody>
-      </p:sp>
-      <p:sp>
-        <p:nvSpPr>
-          <p:cNvPr id="31" name="flow 5 text"/>
-          <p:cNvSpPr txBox="1"/>
-          <p:nvPr/>
-        </p:nvSpPr>
-        <p:spPr>
-          <a:xfrm>
-            <a:off x="9951415" y="3264408"/>
-            <a:ext cx="1417320" cy="758952"/>
-          </a:xfrm>
-          <a:prstGeom prst="rect">
-            <a:avLst/>
-          </a:prstGeom>
-          <a:noFill/>
-          <a:ln/>
-        </p:spPr>
-        <p:txBody>
-          <a:bodyPr wrap="square" lIns="0" tIns="0" rIns="0" bIns="0" rtlCol="0" anchor="t"/>
-          <a:lstStyle/>
-          <a:p>
-            <a:pPr indent="0" marL="0">
-              <a:buNone/>
-            </a:pPr>
-            <a:r>
-              <a:rPr lang="en-US" sz="1300" dirty="0">
-                <a:solidFill>
-                  <a:schemeClr val="tx2"/>
-                </a:solidFill>
-              </a:rPr>
-              <a:t>API / MCP: зміни в реальних даних</a:t>
-            </a:r>
-            <a:endParaRPr lang="en-US" sz="1300" dirty="0"/>
-          </a:p>
-        </p:txBody>
-      </p:sp>
-      <p:sp>
-        <p:nvSpPr>
-          <p:cNvPr id="32" name="routing box"/>
-          <p:cNvSpPr/>
-          <p:nvPr/>
-        </p:nvSpPr>
-        <p:spPr>
-          <a:xfrm>
-            <a:off x="548640" y="4572000"/>
-            <a:ext cx="11094415" cy="1325880"/>
-          </a:xfrm>
-          <a:prstGeom prst="roundRect">
-            <a:avLst>
-              <a:gd name="adj" fmla="val 8276"/>
-            </a:avLst>
-          </a:prstGeom>
-          <a:solidFill>
-            <a:schemeClr val="bg2"/>
-          </a:solidFill>
-          <a:ln/>
-        </p:spPr>
-      </p:sp>
-      <p:sp>
-        <p:nvSpPr>
-          <p:cNvPr id="33" name="routing text"/>
-          <p:cNvSpPr txBox="1"/>
-          <p:nvPr/>
-        </p:nvSpPr>
-        <p:spPr>
-          <a:xfrm>
-            <a:off x="822960" y="4572000"/>
-            <a:ext cx="10545775" cy="1325880"/>
-          </a:xfrm>
-          <a:prstGeom prst="rect">
-            <a:avLst/>
-          </a:prstGeom>
-          <a:noFill/>
-          <a:ln/>
-        </p:spPr>
-        <p:txBody>
-          <a:bodyPr wrap="square" lIns="0" tIns="0" rIns="0" bIns="0" rtlCol="0" anchor="ctr"/>
-          <a:lstStyle/>
-          <a:p>
-            <a:pPr indent="0" marL="0">
-              <a:buNone/>
-            </a:pPr>
-            <a:r>
-              <a:rPr lang="en-US" sz="1600" b="1" dirty="0">
-                <a:solidFill>
-                  <a:schemeClr val="tx1"/>
-                </a:solidFill>
-              </a:rPr>
-              <a:t>Просте питання </a:t>
-            </a:r>
-            <a:pPr indent="0" marL="0">
-              <a:buNone/>
-            </a:pPr>
-            <a:r>
-              <a:rPr lang="en-US" sz="1600" dirty="0">
-                <a:solidFill>
-                  <a:schemeClr val="tx2"/>
-                </a:solidFill>
-              </a:rPr>
-              <a:t>(ціна, адреса) → відповідає Gemma 4, без дій.   </a:t>
-            </a:r>
-            <a:pPr indent="0" marL="0">
-              <a:buNone/>
-            </a:pPr>
-            <a:r>
-              <a:rPr lang="en-US" sz="1600" b="1" dirty="0">
-                <a:solidFill>
-                  <a:schemeClr val="tx1"/>
-                </a:solidFill>
-              </a:rPr>
-              <a:t>Дія із записом </a:t>
-            </a:r>
-            <a:pPr indent="0" marL="0">
-              <a:buNone/>
-            </a:pPr>
-            <a:r>
-              <a:rPr lang="en-US" sz="1600" dirty="0">
-                <a:solidFill>
-                  <a:schemeClr val="tx2"/>
-                </a:solidFill>
-              </a:rPr>
-              <a:t>→ завжди через агента й permission engine.   </a:t>
-            </a:r>
-            <a:pPr indent="0" marL="0">
-              <a:buNone/>
-            </a:pPr>
-            <a:r>
-              <a:rPr lang="en-US" sz="1600" b="1" dirty="0">
-                <a:solidFill>
-                  <a:schemeClr val="tx1"/>
-                </a:solidFill>
-              </a:rPr>
-              <a:t>Гнів чи терміновість </a:t>
-            </a:r>
-            <a:pPr indent="0" marL="0">
-              <a:buNone/>
-            </a:pPr>
-            <a:r>
-              <a:rPr lang="en-US" sz="1600" dirty="0">
-                <a:solidFill>
-                  <a:schemeClr val="tx2"/>
-                </a:solidFill>
-              </a:rPr>
-              <a:t>→ ескалація людині.</a:t>
-            </a:r>
-            <a:endParaRPr lang="en-US" sz="1600" dirty="0"/>
+              <a:t>Знаходить слоти, переносить, 500 грн збережено</a:t>
+            </a:r>
+            <a:endParaRPr lang="en-US" sz="1200" dirty="0"/>
           </a:p>
         </p:txBody>
       </p:sp>
@@ -6895,7 +5255,7 @@
                   <a:schemeClr val="tx1"/>
                 </a:solidFill>
               </a:rPr>
-              <a:t>Демо 1. Просте питання — миттєва відповідь</a:t>
+              <a:t>Демо 2. Максим: ризикове рішення — людині</a:t>
             </a:r>
             <a:endParaRPr lang="en-US" sz="3000" dirty="0"/>
           </a:p>
@@ -6933,7 +5293,7 @@
                   <a:schemeClr val="tx2"/>
                 </a:solidFill>
               </a:rPr>
-              <a:t>Клієнт питає ціну й адресу. Оркестратор бачить просте питання, відповідає Gemma 4 без жодних дій.</a:t>
+              <a:t>Той самий запит, але в клієнта 2 неявки. Агент не вирішує сам, а просить адміністратора.</a:t>
             </a:r>
             <a:endParaRPr lang="en-US" sz="1600" dirty="0"/>
           </a:p>
@@ -6941,7 +5301,7 @@
       </p:sp>
       <p:pic>
         <p:nvPicPr>
-          <p:cNvPr id="4" name="video scene-Q.mp4" descr="Кадр з відео scene-Q.mp4">    </p:cNvPr>
+          <p:cNvPr id="4" name="video scene-B.mp4" descr="Кадр з відео scene-B.mp4">    </p:cNvPr>
           <p:cNvPicPr>
             <a:picLocks noChangeAspect="1"/>
           </p:cNvPicPr>
@@ -7017,7 +5377,7 @@
                   <a:schemeClr val="bg1"/>
                 </a:solidFill>
               </a:rPr>
-              <a:t>▶  вставити scene-Q.mp4</a:t>
+              <a:t>▶  вставити scene-B.mp4</a:t>
             </a:r>
             <a:endParaRPr lang="en-US" sz="1400" dirty="0"/>
           </a:p>
@@ -7139,7 +5499,7 @@
             <a:avLst/>
           </a:prstGeom>
           <a:solidFill>
-            <a:schemeClr val="accent1"/>
+            <a:srgbClr val="F59F00"/>
           </a:solidFill>
           <a:ln/>
         </p:spPr>
@@ -7210,7 +5570,7 @@
                   <a:schemeClr val="tx1"/>
                 </a:solidFill>
               </a:rPr>
-              <a:t>Тріаж</a:t>
+              <a:t>Контекст</a:t>
             </a:r>
             <a:endParaRPr lang="en-US" sz="1500" dirty="0"/>
           </a:p>
@@ -7246,7 +5606,7 @@
                   <a:schemeClr val="tx2"/>
                 </a:solidFill>
               </a:rPr>
-              <a:t>Намір «питання», терміновість низька</a:t>
+              <a:t>2 неявки — автоматичний виняток не дозволено</a:t>
             </a:r>
             <a:endParaRPr lang="en-US" sz="1200" dirty="0"/>
           </a:p>
@@ -7296,7 +5656,7 @@
             <a:avLst/>
           </a:prstGeom>
           <a:solidFill>
-            <a:schemeClr val="accent1"/>
+            <a:srgbClr val="F59F00"/>
           </a:solidFill>
           <a:ln/>
         </p:spPr>
@@ -7367,7 +5727,7 @@
                   <a:schemeClr val="tx1"/>
                 </a:solidFill>
               </a:rPr>
-              <a:t>Gemma 4</a:t>
+              <a:t>Погодження</a:t>
             </a:r>
             <a:endParaRPr lang="en-US" sz="1500" dirty="0"/>
           </a:p>
@@ -7403,7 +5763,7 @@
                   <a:schemeClr val="tx2"/>
                 </a:solidFill>
               </a:rPr>
-              <a:t>Відповідь з фактів бізнесу: послуги, ціни, контакти</a:t>
+              <a:t>Адміністратор схвалює в copilot одним кліком</a:t>
             </a:r>
             <a:endParaRPr lang="en-US" sz="1200" dirty="0"/>
           </a:p>
@@ -7453,7 +5813,7 @@
             <a:avLst/>
           </a:prstGeom>
           <a:solidFill>
-            <a:srgbClr val="12B886"/>
+            <a:schemeClr val="accent1"/>
           </a:solidFill>
           <a:ln/>
         </p:spPr>
@@ -7524,7 +5884,7 @@
                   <a:schemeClr val="tx1"/>
                 </a:solidFill>
               </a:rPr>
-              <a:t>Нуль ризику</a:t>
+              <a:t>Дія</a:t>
             </a:r>
             <a:endParaRPr lang="en-US" sz="1500" dirty="0"/>
           </a:p>
@@ -7560,7 +5920,7 @@
                   <a:schemeClr val="tx2"/>
                 </a:solidFill>
               </a:rPr>
-              <a:t>Дані не змінюються, адміністратор не потрібен</a:t>
+              <a:t>Агент сам повертається до клієнта й переносить</a:t>
             </a:r>
             <a:endParaRPr lang="en-US" sz="1200" dirty="0"/>
           </a:p>
@@ -7668,7 +6028,7 @@
                   <a:schemeClr val="tx1"/>
                 </a:solidFill>
               </a:rPr>
-              <a:t>Демо 2. Олена: агент сам рятує передоплату</a:t>
+              <a:t>Демо 3. Петро в клініці: суворі правила, дві дії</a:t>
             </a:r>
             <a:endParaRPr lang="en-US" sz="3000" dirty="0"/>
           </a:p>
@@ -7706,7 +6066,7 @@
                   <a:schemeClr val="tx2"/>
                 </a:solidFill>
               </a:rPr>
-              <a:t>«Дитина захворіла, не встигаю завтра на 10». Пізнє перенесення — за правилами передоплата згорає.</a:t>
+              <a:t>«Хочу скасувати запис і повернути гроші». У клініці правила суворіші: усе через погодження.</a:t>
             </a:r>
             <a:endParaRPr lang="en-US" sz="1600" dirty="0"/>
           </a:p>
@@ -7714,7 +6074,7 @@
       </p:sp>
       <p:pic>
         <p:nvPicPr>
-          <p:cNvPr id="4" name="video scene-A.mp4" descr="Кадр з відео scene-A.mp4">    </p:cNvPr>
+          <p:cNvPr id="4" name="video scene-C.mp4" descr="Кадр з відео scene-C.mp4">    </p:cNvPr>
           <p:cNvPicPr>
             <a:picLocks noChangeAspect="1"/>
           </p:cNvPicPr>
@@ -7790,7 +6150,7 @@
                   <a:schemeClr val="bg1"/>
                 </a:solidFill>
               </a:rPr>
-              <a:t>▶  вставити scene-A.mp4</a:t>
+              <a:t>▶  вставити scene-C.mp4</a:t>
             </a:r>
             <a:endParaRPr lang="en-US" sz="1400" dirty="0"/>
           </a:p>
@@ -7983,7 +6343,7 @@
                   <a:schemeClr val="tx1"/>
                 </a:solidFill>
               </a:rPr>
-              <a:t>Контекст</a:t>
+              <a:t>Правила клініки</a:t>
             </a:r>
             <a:endParaRPr lang="en-US" sz="1500" dirty="0"/>
           </a:p>
@@ -8019,7 +6379,7 @@
                   <a:schemeClr val="tx2"/>
                 </a:solidFill>
               </a:rPr>
-              <a:t>12 візитів, 0 неявок, винятків ще не було</a:t>
+              <a:t>Пізніше 48 год — передоплата 800 грн згорає</a:t>
             </a:r>
             <a:endParaRPr lang="en-US" sz="1200" dirty="0"/>
           </a:p>
@@ -8069,7 +6429,7 @@
             <a:avLst/>
           </a:prstGeom>
           <a:solidFill>
-            <a:srgbClr val="12B886"/>
+            <a:srgbClr val="F59F00"/>
           </a:solidFill>
           <a:ln/>
         </p:spPr>
@@ -8140,7 +6500,7 @@
                   <a:schemeClr val="tx1"/>
                 </a:solidFill>
               </a:rPr>
-              <a:t>Рішення сам</a:t>
+              <a:t>Два погодження</a:t>
             </a:r>
             <a:endParaRPr lang="en-US" sz="1500" dirty="0"/>
           </a:p>
@@ -8176,7 +6536,7 @@
                   <a:schemeClr val="tx2"/>
                 </a:solidFill>
               </a:rPr>
-              <a:t>Правило салону дозволяє виняток автоматично</a:t>
+              <a:t>Спершу повернення, потім скасування</a:t>
             </a:r>
             <a:endParaRPr lang="en-US" sz="1200" dirty="0"/>
           </a:p>
@@ -8226,7 +6586,7 @@
             <a:avLst/>
           </a:prstGeom>
           <a:solidFill>
-            <a:schemeClr val="accent1"/>
+            <a:srgbClr val="12B886"/>
           </a:solidFill>
           <a:ln/>
         </p:spPr>
@@ -8297,7 +6657,7 @@
                   <a:schemeClr val="tx1"/>
                 </a:solidFill>
               </a:rPr>
-              <a:t>Дія</a:t>
+              <a:t>Результат</a:t>
             </a:r>
             <a:endParaRPr lang="en-US" sz="1500" dirty="0"/>
           </a:p>
@@ -8333,7 +6693,7 @@
                   <a:schemeClr val="tx2"/>
                 </a:solidFill>
               </a:rPr>
-              <a:t>Знаходить слоти, переносить, 500 грн збережено</a:t>
+              <a:t>Запис скасовано, 800 грн повернено</a:t>
             </a:r>
             <a:endParaRPr lang="en-US" sz="1200" dirty="0"/>
           </a:p>
@@ -8419,1552 +6779,6 @@
         </p:nvSpPr>
         <p:spPr>
           <a:xfrm>
-            <a:off x="548640" y="320040"/>
-            <a:ext cx="11094415" cy="640080"/>
-          </a:xfrm>
-          <a:prstGeom prst="rect">
-            <a:avLst/>
-          </a:prstGeom>
-          <a:noFill/>
-          <a:ln/>
-        </p:spPr>
-        <p:txBody>
-          <a:bodyPr wrap="square" lIns="0" tIns="0" rIns="0" bIns="0" rtlCol="0" anchor="ctr"/>
-          <a:lstStyle/>
-          <a:p>
-            <a:pPr algn="l" indent="0" marL="0">
-              <a:buNone/>
-            </a:pPr>
-            <a:r>
-              <a:rPr lang="en-US" sz="3000" b="1" dirty="0">
-                <a:solidFill>
-                  <a:schemeClr val="tx1"/>
-                </a:solidFill>
-              </a:rPr>
-              <a:t>Демо 3. Максим: ризикове рішення — людині</a:t>
-            </a:r>
-            <a:endParaRPr lang="en-US" sz="3000" dirty="0"/>
-          </a:p>
-        </p:txBody>
-      </p:sp>
-      <p:sp>
-        <p:nvSpPr>
-          <p:cNvPr id="3" name="Text 0"/>
-          <p:cNvSpPr/>
-          <p:nvPr>
-            <p:ph idx="101" type="body" hasCustomPrompt="1"/>
-          </p:nvPr>
-        </p:nvSpPr>
-        <p:spPr>
-          <a:xfrm>
-            <a:off x="548640" y="960120"/>
-            <a:ext cx="11094415" cy="411480"/>
-          </a:xfrm>
-          <a:prstGeom prst="rect">
-            <a:avLst/>
-          </a:prstGeom>
-          <a:noFill/>
-          <a:ln/>
-        </p:spPr>
-        <p:txBody>
-          <a:bodyPr wrap="square" lIns="0" tIns="0" rIns="0" bIns="0" rtlCol="0" anchor="t"/>
-          <a:lstStyle/>
-          <a:p>
-            <a:pPr indent="0" marL="0">
-              <a:buNone/>
-            </a:pPr>
-            <a:r>
-              <a:rPr lang="en-US" sz="1600" dirty="0">
-                <a:solidFill>
-                  <a:schemeClr val="tx2"/>
-                </a:solidFill>
-              </a:rPr>
-              <a:t>Той самий запит, але в клієнта 2 неявки. Агент не вирішує сам, а просить адміністратора.</a:t>
-            </a:r>
-            <a:endParaRPr lang="en-US" sz="1600" dirty="0"/>
-          </a:p>
-        </p:txBody>
-      </p:sp>
-      <p:pic>
-        <p:nvPicPr>
-          <p:cNvPr id="4" name="video scene-B.mp4" descr="Кадр з відео scene-B.mp4">    </p:cNvPr>
-          <p:cNvPicPr>
-            <a:picLocks noChangeAspect="1"/>
-          </p:cNvPicPr>
-          <p:nvPr/>
-        </p:nvPicPr>
-        <p:blipFill>
-          <a:blip r:embed="rId1"/>
-          <a:stretch>
-            <a:fillRect/>
-          </a:stretch>
-        </p:blipFill>
-        <p:spPr>
-          <a:xfrm>
-            <a:off x="548640" y="1737360"/>
-            <a:ext cx="11094415" cy="3467005"/>
-          </a:xfrm>
-          <a:prstGeom prst="rect">
-            <a:avLst/>
-          </a:prstGeom>
-        </p:spPr>
-      </p:pic>
-      <p:sp>
-        <p:nvSpPr>
-          <p:cNvPr id="5" name="insert video badge"/>
-          <p:cNvSpPr/>
-          <p:nvPr/>
-        </p:nvSpPr>
-        <p:spPr>
-          <a:xfrm>
-            <a:off x="4632808" y="3196542"/>
-            <a:ext cx="2926080" cy="548640"/>
-          </a:xfrm>
-          <a:prstGeom prst="roundRect">
-            <a:avLst>
-              <a:gd name="adj" fmla="val 50000"/>
-            </a:avLst>
-          </a:prstGeom>
-          <a:solidFill>
-            <a:schemeClr val="tx1">
-              <a:alpha val="85000"/>
-            </a:schemeClr>
-          </a:solidFill>
-          <a:ln/>
-        </p:spPr>
-      </p:sp>
-      <p:sp>
-        <p:nvSpPr>
-          <p:cNvPr id="6" name="insert video label"/>
-          <p:cNvSpPr txBox="1"/>
-          <p:nvPr/>
-        </p:nvSpPr>
-        <p:spPr>
-          <a:xfrm>
-            <a:off x="4632808" y="3196542"/>
-            <a:ext cx="2926080" cy="548640"/>
-          </a:xfrm>
-          <a:prstGeom prst="rect">
-            <a:avLst/>
-          </a:prstGeom>
-          <a:noFill/>
-          <a:ln/>
-        </p:spPr>
-        <p:txBody>
-          <a:bodyPr wrap="square" lIns="0" tIns="0" rIns="0" bIns="0" rtlCol="0" anchor="ctr"/>
-          <a:lstStyle/>
-          <a:p>
-            <a:pPr algn="ctr" indent="0" marL="0">
-              <a:buNone/>
-            </a:pPr>
-            <a:r>
-              <a:rPr lang="en-US" sz="1400" b="1" dirty="0">
-                <a:solidFill>
-                  <a:schemeClr val="bg1"/>
-                </a:solidFill>
-              </a:rPr>
-              <a:t>▶  вставити scene-B.mp4</a:t>
-            </a:r>
-            <a:endParaRPr lang="en-US" sz="1400" dirty="0"/>
-          </a:p>
-        </p:txBody>
-      </p:sp>
-      <p:sp>
-        <p:nvSpPr>
-          <p:cNvPr id="7" name="video label 0"/>
-          <p:cNvSpPr txBox="1"/>
-          <p:nvPr/>
-        </p:nvSpPr>
-        <p:spPr>
-          <a:xfrm>
-            <a:off x="548640" y="1444752"/>
-            <a:ext cx="5547208" cy="256032"/>
-          </a:xfrm>
-          <a:prstGeom prst="rect">
-            <a:avLst/>
-          </a:prstGeom>
-          <a:noFill/>
-          <a:ln/>
-        </p:spPr>
-        <p:txBody>
-          <a:bodyPr wrap="square" lIns="0" tIns="0" rIns="0" bIns="0" rtlCol="0" anchor="ctr"/>
-          <a:lstStyle/>
-          <a:p>
-            <a:pPr algn="ctr" indent="0" marL="0">
-              <a:buNone/>
-            </a:pPr>
-            <a:r>
-              <a:rPr lang="en-US" sz="1200" b="1" dirty="0">
-                <a:solidFill>
-                  <a:schemeClr val="accent5"/>
-                </a:solidFill>
-              </a:rPr>
-              <a:t>Клієнт на сайті Bookly</a:t>
-            </a:r>
-            <a:endParaRPr lang="en-US" sz="1200" dirty="0"/>
-          </a:p>
-        </p:txBody>
-      </p:sp>
-      <p:sp>
-        <p:nvSpPr>
-          <p:cNvPr id="8" name="video label 1"/>
-          <p:cNvSpPr txBox="1"/>
-          <p:nvPr/>
-        </p:nvSpPr>
-        <p:spPr>
-          <a:xfrm>
-            <a:off x="6095848" y="1444752"/>
-            <a:ext cx="5547208" cy="256032"/>
-          </a:xfrm>
-          <a:prstGeom prst="rect">
-            <a:avLst/>
-          </a:prstGeom>
-          <a:noFill/>
-          <a:ln/>
-        </p:spPr>
-        <p:txBody>
-          <a:bodyPr wrap="square" lIns="0" tIns="0" rIns="0" bIns="0" rtlCol="0" anchor="ctr"/>
-          <a:lstStyle/>
-          <a:p>
-            <a:pPr algn="ctr" indent="0" marL="0">
-              <a:buNone/>
-            </a:pPr>
-            <a:r>
-              <a:rPr lang="en-US" sz="1200" b="1" dirty="0">
-                <a:solidFill>
-                  <a:schemeClr val="accent5"/>
-                </a:solidFill>
-              </a:rPr>
-              <a:t>Чат і copilot адміністратора</a:t>
-            </a:r>
-            <a:endParaRPr lang="en-US" sz="1200" dirty="0"/>
-          </a:p>
-        </p:txBody>
-      </p:sp>
-      <p:sp>
-        <p:nvSpPr>
-          <p:cNvPr id="9" name="step 1"/>
-          <p:cNvSpPr/>
-          <p:nvPr/>
-        </p:nvSpPr>
-        <p:spPr>
-          <a:xfrm>
-            <a:off x="548640" y="5303520"/>
-            <a:ext cx="3515258" cy="1005840"/>
-          </a:xfrm>
-          <a:prstGeom prst="roundRect">
-            <a:avLst>
-              <a:gd name="adj" fmla="val 9091"/>
-            </a:avLst>
-          </a:prstGeom>
-          <a:solidFill>
-            <a:schemeClr val="bg1"/>
-          </a:solidFill>
-          <a:ln/>
-          <a:effectLst>
-            <a:outerShdw sx="100000" sy="100000" kx="0" ky="0" algn="bl" rotWithShape="0" blurRad="101600" dist="25400" dir="5400000">
-              <a:srgbClr val="16163A">
-                <a:alpha val="12000"/>
-              </a:srgbClr>
-            </a:outerShdw>
-          </a:effectLst>
-        </p:spPr>
-      </p:sp>
-      <p:sp>
-        <p:nvSpPr>
-          <p:cNvPr id="10" name="step 1 dot"/>
-          <p:cNvSpPr/>
-          <p:nvPr/>
-        </p:nvSpPr>
-        <p:spPr>
-          <a:xfrm>
-            <a:off x="749808" y="5504688"/>
-            <a:ext cx="365760" cy="365760"/>
-          </a:xfrm>
-          <a:prstGeom prst="ellipse">
-            <a:avLst/>
-          </a:prstGeom>
-          <a:solidFill>
-            <a:srgbClr val="F59F00"/>
-          </a:solidFill>
-          <a:ln/>
-        </p:spPr>
-      </p:sp>
-      <p:sp>
-        <p:nvSpPr>
-          <p:cNvPr id="11" name="step 1 number"/>
-          <p:cNvSpPr txBox="1"/>
-          <p:nvPr/>
-        </p:nvSpPr>
-        <p:spPr>
-          <a:xfrm>
-            <a:off x="749808" y="5504688"/>
-            <a:ext cx="365760" cy="365760"/>
-          </a:xfrm>
-          <a:prstGeom prst="rect">
-            <a:avLst/>
-          </a:prstGeom>
-          <a:noFill/>
-          <a:ln/>
-        </p:spPr>
-        <p:txBody>
-          <a:bodyPr wrap="square" lIns="0" tIns="0" rIns="0" bIns="0" rtlCol="0" anchor="ctr"/>
-          <a:lstStyle/>
-          <a:p>
-            <a:pPr algn="ctr" indent="0" marL="0">
-              <a:buNone/>
-            </a:pPr>
-            <a:r>
-              <a:rPr lang="en-US" sz="1400" b="1" dirty="0">
-                <a:solidFill>
-                  <a:schemeClr val="bg1"/>
-                </a:solidFill>
-              </a:rPr>
-              <a:t>1</a:t>
-            </a:r>
-            <a:endParaRPr lang="en-US" sz="1400" dirty="0"/>
-          </a:p>
-        </p:txBody>
-      </p:sp>
-      <p:sp>
-        <p:nvSpPr>
-          <p:cNvPr id="12" name="step 1 head"/>
-          <p:cNvSpPr txBox="1"/>
-          <p:nvPr/>
-        </p:nvSpPr>
-        <p:spPr>
-          <a:xfrm>
-            <a:off x="1234440" y="5468112"/>
-            <a:ext cx="2646578" cy="411480"/>
-          </a:xfrm>
-          <a:prstGeom prst="rect">
-            <a:avLst/>
-          </a:prstGeom>
-          <a:noFill/>
-          <a:ln/>
-        </p:spPr>
-        <p:txBody>
-          <a:bodyPr wrap="square" lIns="0" tIns="0" rIns="0" bIns="0" rtlCol="0" anchor="ctr"/>
-          <a:lstStyle/>
-          <a:p>
-            <a:pPr indent="0" marL="0">
-              <a:buNone/>
-            </a:pPr>
-            <a:r>
-              <a:rPr lang="en-US" sz="1500" b="1" dirty="0">
-                <a:solidFill>
-                  <a:schemeClr val="tx1"/>
-                </a:solidFill>
-              </a:rPr>
-              <a:t>Контекст</a:t>
-            </a:r>
-            <a:endParaRPr lang="en-US" sz="1500" dirty="0"/>
-          </a:p>
-        </p:txBody>
-      </p:sp>
-      <p:sp>
-        <p:nvSpPr>
-          <p:cNvPr id="13" name="step 1 text"/>
-          <p:cNvSpPr txBox="1"/>
-          <p:nvPr/>
-        </p:nvSpPr>
-        <p:spPr>
-          <a:xfrm>
-            <a:off x="1234440" y="5870448"/>
-            <a:ext cx="2646578" cy="502920"/>
-          </a:xfrm>
-          <a:prstGeom prst="rect">
-            <a:avLst/>
-          </a:prstGeom>
-          <a:noFill/>
-          <a:ln/>
-        </p:spPr>
-        <p:txBody>
-          <a:bodyPr wrap="square" lIns="0" tIns="0" rIns="0" bIns="0" rtlCol="0" anchor="t"/>
-          <a:lstStyle/>
-          <a:p>
-            <a:pPr indent="0" marL="0">
-              <a:buNone/>
-            </a:pPr>
-            <a:r>
-              <a:rPr lang="en-US" sz="1200" dirty="0">
-                <a:solidFill>
-                  <a:schemeClr val="tx2"/>
-                </a:solidFill>
-              </a:rPr>
-              <a:t>2 неявки — автоматичний виняток не дозволено</a:t>
-            </a:r>
-            <a:endParaRPr lang="en-US" sz="1200" dirty="0"/>
-          </a:p>
-        </p:txBody>
-      </p:sp>
-      <p:sp>
-        <p:nvSpPr>
-          <p:cNvPr id="14" name="step 2"/>
-          <p:cNvSpPr/>
-          <p:nvPr/>
-        </p:nvSpPr>
-        <p:spPr>
-          <a:xfrm>
-            <a:off x="4338218" y="5303520"/>
-            <a:ext cx="3515258" cy="1005840"/>
-          </a:xfrm>
-          <a:prstGeom prst="roundRect">
-            <a:avLst>
-              <a:gd name="adj" fmla="val 9091"/>
-            </a:avLst>
-          </a:prstGeom>
-          <a:solidFill>
-            <a:schemeClr val="bg1"/>
-          </a:solidFill>
-          <a:ln/>
-          <a:effectLst>
-            <a:outerShdw sx="100000" sy="100000" kx="0" ky="0" algn="bl" rotWithShape="0" blurRad="101600" dist="25400" dir="5400000">
-              <a:srgbClr val="16163A">
-                <a:alpha val="12000"/>
-              </a:srgbClr>
-            </a:outerShdw>
-          </a:effectLst>
-        </p:spPr>
-      </p:sp>
-      <p:sp>
-        <p:nvSpPr>
-          <p:cNvPr id="15" name="step 2 dot"/>
-          <p:cNvSpPr/>
-          <p:nvPr/>
-        </p:nvSpPr>
-        <p:spPr>
-          <a:xfrm>
-            <a:off x="4539386" y="5504688"/>
-            <a:ext cx="365760" cy="365760"/>
-          </a:xfrm>
-          <a:prstGeom prst="ellipse">
-            <a:avLst/>
-          </a:prstGeom>
-          <a:solidFill>
-            <a:srgbClr val="F59F00"/>
-          </a:solidFill>
-          <a:ln/>
-        </p:spPr>
-      </p:sp>
-      <p:sp>
-        <p:nvSpPr>
-          <p:cNvPr id="16" name="step 2 number"/>
-          <p:cNvSpPr txBox="1"/>
-          <p:nvPr/>
-        </p:nvSpPr>
-        <p:spPr>
-          <a:xfrm>
-            <a:off x="4539386" y="5504688"/>
-            <a:ext cx="365760" cy="365760"/>
-          </a:xfrm>
-          <a:prstGeom prst="rect">
-            <a:avLst/>
-          </a:prstGeom>
-          <a:noFill/>
-          <a:ln/>
-        </p:spPr>
-        <p:txBody>
-          <a:bodyPr wrap="square" lIns="0" tIns="0" rIns="0" bIns="0" rtlCol="0" anchor="ctr"/>
-          <a:lstStyle/>
-          <a:p>
-            <a:pPr algn="ctr" indent="0" marL="0">
-              <a:buNone/>
-            </a:pPr>
-            <a:r>
-              <a:rPr lang="en-US" sz="1400" b="1" dirty="0">
-                <a:solidFill>
-                  <a:schemeClr val="bg1"/>
-                </a:solidFill>
-              </a:rPr>
-              <a:t>2</a:t>
-            </a:r>
-            <a:endParaRPr lang="en-US" sz="1400" dirty="0"/>
-          </a:p>
-        </p:txBody>
-      </p:sp>
-      <p:sp>
-        <p:nvSpPr>
-          <p:cNvPr id="17" name="step 2 head"/>
-          <p:cNvSpPr txBox="1"/>
-          <p:nvPr/>
-        </p:nvSpPr>
-        <p:spPr>
-          <a:xfrm>
-            <a:off x="5024018" y="5468112"/>
-            <a:ext cx="2646578" cy="411480"/>
-          </a:xfrm>
-          <a:prstGeom prst="rect">
-            <a:avLst/>
-          </a:prstGeom>
-          <a:noFill/>
-          <a:ln/>
-        </p:spPr>
-        <p:txBody>
-          <a:bodyPr wrap="square" lIns="0" tIns="0" rIns="0" bIns="0" rtlCol="0" anchor="ctr"/>
-          <a:lstStyle/>
-          <a:p>
-            <a:pPr indent="0" marL="0">
-              <a:buNone/>
-            </a:pPr>
-            <a:r>
-              <a:rPr lang="en-US" sz="1500" b="1" dirty="0">
-                <a:solidFill>
-                  <a:schemeClr val="tx1"/>
-                </a:solidFill>
-              </a:rPr>
-              <a:t>Погодження</a:t>
-            </a:r>
-            <a:endParaRPr lang="en-US" sz="1500" dirty="0"/>
-          </a:p>
-        </p:txBody>
-      </p:sp>
-      <p:sp>
-        <p:nvSpPr>
-          <p:cNvPr id="18" name="step 2 text"/>
-          <p:cNvSpPr txBox="1"/>
-          <p:nvPr/>
-        </p:nvSpPr>
-        <p:spPr>
-          <a:xfrm>
-            <a:off x="5024018" y="5870448"/>
-            <a:ext cx="2646578" cy="502920"/>
-          </a:xfrm>
-          <a:prstGeom prst="rect">
-            <a:avLst/>
-          </a:prstGeom>
-          <a:noFill/>
-          <a:ln/>
-        </p:spPr>
-        <p:txBody>
-          <a:bodyPr wrap="square" lIns="0" tIns="0" rIns="0" bIns="0" rtlCol="0" anchor="t"/>
-          <a:lstStyle/>
-          <a:p>
-            <a:pPr indent="0" marL="0">
-              <a:buNone/>
-            </a:pPr>
-            <a:r>
-              <a:rPr lang="en-US" sz="1200" dirty="0">
-                <a:solidFill>
-                  <a:schemeClr val="tx2"/>
-                </a:solidFill>
-              </a:rPr>
-              <a:t>Адміністратор схвалює в copilot одним кліком</a:t>
-            </a:r>
-            <a:endParaRPr lang="en-US" sz="1200" dirty="0"/>
-          </a:p>
-        </p:txBody>
-      </p:sp>
-      <p:sp>
-        <p:nvSpPr>
-          <p:cNvPr id="19" name="step 3"/>
-          <p:cNvSpPr/>
-          <p:nvPr/>
-        </p:nvSpPr>
-        <p:spPr>
-          <a:xfrm>
-            <a:off x="8127797" y="5303520"/>
-            <a:ext cx="3515258" cy="1005840"/>
-          </a:xfrm>
-          <a:prstGeom prst="roundRect">
-            <a:avLst>
-              <a:gd name="adj" fmla="val 9091"/>
-            </a:avLst>
-          </a:prstGeom>
-          <a:solidFill>
-            <a:schemeClr val="bg1"/>
-          </a:solidFill>
-          <a:ln/>
-          <a:effectLst>
-            <a:outerShdw sx="100000" sy="100000" kx="0" ky="0" algn="bl" rotWithShape="0" blurRad="101600" dist="25400" dir="5400000">
-              <a:srgbClr val="16163A">
-                <a:alpha val="12000"/>
-              </a:srgbClr>
-            </a:outerShdw>
-          </a:effectLst>
-        </p:spPr>
-      </p:sp>
-      <p:sp>
-        <p:nvSpPr>
-          <p:cNvPr id="20" name="step 3 dot"/>
-          <p:cNvSpPr/>
-          <p:nvPr/>
-        </p:nvSpPr>
-        <p:spPr>
-          <a:xfrm>
-            <a:off x="8328965" y="5504688"/>
-            <a:ext cx="365760" cy="365760"/>
-          </a:xfrm>
-          <a:prstGeom prst="ellipse">
-            <a:avLst/>
-          </a:prstGeom>
-          <a:solidFill>
-            <a:schemeClr val="accent1"/>
-          </a:solidFill>
-          <a:ln/>
-        </p:spPr>
-      </p:sp>
-      <p:sp>
-        <p:nvSpPr>
-          <p:cNvPr id="21" name="step 3 number"/>
-          <p:cNvSpPr txBox="1"/>
-          <p:nvPr/>
-        </p:nvSpPr>
-        <p:spPr>
-          <a:xfrm>
-            <a:off x="8328965" y="5504688"/>
-            <a:ext cx="365760" cy="365760"/>
-          </a:xfrm>
-          <a:prstGeom prst="rect">
-            <a:avLst/>
-          </a:prstGeom>
-          <a:noFill/>
-          <a:ln/>
-        </p:spPr>
-        <p:txBody>
-          <a:bodyPr wrap="square" lIns="0" tIns="0" rIns="0" bIns="0" rtlCol="0" anchor="ctr"/>
-          <a:lstStyle/>
-          <a:p>
-            <a:pPr algn="ctr" indent="0" marL="0">
-              <a:buNone/>
-            </a:pPr>
-            <a:r>
-              <a:rPr lang="en-US" sz="1400" b="1" dirty="0">
-                <a:solidFill>
-                  <a:schemeClr val="bg1"/>
-                </a:solidFill>
-              </a:rPr>
-              <a:t>3</a:t>
-            </a:r>
-            <a:endParaRPr lang="en-US" sz="1400" dirty="0"/>
-          </a:p>
-        </p:txBody>
-      </p:sp>
-      <p:sp>
-        <p:nvSpPr>
-          <p:cNvPr id="22" name="step 3 head"/>
-          <p:cNvSpPr txBox="1"/>
-          <p:nvPr/>
-        </p:nvSpPr>
-        <p:spPr>
-          <a:xfrm>
-            <a:off x="8813597" y="5468112"/>
-            <a:ext cx="2646578" cy="411480"/>
-          </a:xfrm>
-          <a:prstGeom prst="rect">
-            <a:avLst/>
-          </a:prstGeom>
-          <a:noFill/>
-          <a:ln/>
-        </p:spPr>
-        <p:txBody>
-          <a:bodyPr wrap="square" lIns="0" tIns="0" rIns="0" bIns="0" rtlCol="0" anchor="ctr"/>
-          <a:lstStyle/>
-          <a:p>
-            <a:pPr indent="0" marL="0">
-              <a:buNone/>
-            </a:pPr>
-            <a:r>
-              <a:rPr lang="en-US" sz="1500" b="1" dirty="0">
-                <a:solidFill>
-                  <a:schemeClr val="tx1"/>
-                </a:solidFill>
-              </a:rPr>
-              <a:t>Дія</a:t>
-            </a:r>
-            <a:endParaRPr lang="en-US" sz="1500" dirty="0"/>
-          </a:p>
-        </p:txBody>
-      </p:sp>
-      <p:sp>
-        <p:nvSpPr>
-          <p:cNvPr id="23" name="step 3 text"/>
-          <p:cNvSpPr txBox="1"/>
-          <p:nvPr/>
-        </p:nvSpPr>
-        <p:spPr>
-          <a:xfrm>
-            <a:off x="8813597" y="5870448"/>
-            <a:ext cx="2646578" cy="502920"/>
-          </a:xfrm>
-          <a:prstGeom prst="rect">
-            <a:avLst/>
-          </a:prstGeom>
-          <a:noFill/>
-          <a:ln/>
-        </p:spPr>
-        <p:txBody>
-          <a:bodyPr wrap="square" lIns="0" tIns="0" rIns="0" bIns="0" rtlCol="0" anchor="t"/>
-          <a:lstStyle/>
-          <a:p>
-            <a:pPr indent="0" marL="0">
-              <a:buNone/>
-            </a:pPr>
-            <a:r>
-              <a:rPr lang="en-US" sz="1200" dirty="0">
-                <a:solidFill>
-                  <a:schemeClr val="tx2"/>
-                </a:solidFill>
-              </a:rPr>
-              <a:t>Агент сам повертається до клієнта й переносить</a:t>
-            </a:r>
-            <a:endParaRPr lang="en-US" sz="1200" dirty="0"/>
-          </a:p>
-        </p:txBody>
-      </p:sp>
-      <p:sp>
-        <p:nvSpPr>
-          <p:cNvPr id="25" name="Slide Number Placeholder 0"/>
-          <p:cNvSpPr>
-            <a:spLocks noGrp="1"/>
-          </p:cNvSpPr>
-          <p:nvPr>
-            <p:ph type="sldNum" sz="quarter" idx="4294967295"/>
-          </p:nvPr>
-        </p:nvSpPr>
-        <p:spPr>
-          <a:xfrm>
-            <a:off x="11185855" y="6446520"/>
-            <a:ext cx="457200" cy="274320"/>
-          </a:xfrm>
-          <a:prstGeom prst="rect">
-            <a:avLst/>
-          </a:prstGeom>
-          <a:extLst>
-            <a:ext uri="{C572A759-6A51-4108-AA02-DFA0A04FC94B}">
-              <ma14:wrappingTextBoxFlag xmlns:ma14="http://schemas.microsoft.com/office/mac/drawingml/2011/main" val="0"/>
-            </a:ext>
-          </a:extLst>
-        </p:spPr>
-        <p:txBody>
-          <a:bodyPr/>
-          <a:lstStyle>
-            <a:lvl1pPr>
-              <a:defRPr sz="1000">
-                <a:solidFill>
-                  <a:schemeClr val="accent5"/>
-                </a:solidFill>
-              </a:defRPr>
-            </a:lvl1pPr>
-          </a:lstStyle>
-          <a:p>
-            <a:pPr algn="r"/>
-            <a:fld id="{F7021451-1387-4CA6-816F-3879F97B5CBC}" type="slidenum">
-              <a:rPr b="0" lang="en-US"/>
-              <a:t>7</a:t>
-            </a:fld>
-            <a:endParaRPr lang="en-US"/>
-          </a:p>
-        </p:txBody>
-      </p:sp>
-    </p:spTree>
-  </p:cSld>
-  <p:clrMapOvr>
-    <a:masterClrMapping/>
-  </p:clrMapOvr>
-</p:sld>
-</file>
-
-<file path=ppt/slides/slide8.xml><?xml version="1.0" encoding="utf-8"?>
-<p:sld xmlns:a="http://schemas.openxmlformats.org/drawingml/2006/main" xmlns:r="http://schemas.openxmlformats.org/officeDocument/2006/relationships" xmlns:p="http://schemas.openxmlformats.org/presentationml/2006/main">
-  <p:cSld name="Slide 8">
-    <p:spTree>
-      <p:nvGrpSpPr>
-        <p:cNvPr id="1" name=""/>
-        <p:cNvGrpSpPr/>
-        <p:nvPr/>
-      </p:nvGrpSpPr>
-      <p:grpSpPr>
-        <a:xfrm>
-          <a:off x="0" y="0"/>
-          <a:ext cx="0" cy="0"/>
-          <a:chOff x="0" y="0"/>
-          <a:chExt cx="0" cy="0"/>
-        </a:xfrm>
-      </p:grpSpPr>
-      <p:sp>
-        <p:nvSpPr>
-          <p:cNvPr id="2" name="Text 0"/>
-          <p:cNvSpPr/>
-          <p:nvPr>
-            <p:ph idx="100" type="title" hasCustomPrompt="1"/>
-          </p:nvPr>
-        </p:nvSpPr>
-        <p:spPr>
-          <a:xfrm>
-            <a:off x="548640" y="320040"/>
-            <a:ext cx="11094415" cy="640080"/>
-          </a:xfrm>
-          <a:prstGeom prst="rect">
-            <a:avLst/>
-          </a:prstGeom>
-          <a:noFill/>
-          <a:ln/>
-        </p:spPr>
-        <p:txBody>
-          <a:bodyPr wrap="square" lIns="0" tIns="0" rIns="0" bIns="0" rtlCol="0" anchor="ctr"/>
-          <a:lstStyle/>
-          <a:p>
-            <a:pPr algn="l" indent="0" marL="0">
-              <a:buNone/>
-            </a:pPr>
-            <a:r>
-              <a:rPr lang="en-US" sz="3000" b="1" dirty="0">
-                <a:solidFill>
-                  <a:schemeClr val="tx1"/>
-                </a:solidFill>
-              </a:rPr>
-              <a:t>Демо 4. Петро в клініці: суворі правила, дві дії</a:t>
-            </a:r>
-            <a:endParaRPr lang="en-US" sz="3000" dirty="0"/>
-          </a:p>
-        </p:txBody>
-      </p:sp>
-      <p:sp>
-        <p:nvSpPr>
-          <p:cNvPr id="3" name="Text 0"/>
-          <p:cNvSpPr/>
-          <p:nvPr>
-            <p:ph idx="101" type="body" hasCustomPrompt="1"/>
-          </p:nvPr>
-        </p:nvSpPr>
-        <p:spPr>
-          <a:xfrm>
-            <a:off x="548640" y="960120"/>
-            <a:ext cx="11094415" cy="411480"/>
-          </a:xfrm>
-          <a:prstGeom prst="rect">
-            <a:avLst/>
-          </a:prstGeom>
-          <a:noFill/>
-          <a:ln/>
-        </p:spPr>
-        <p:txBody>
-          <a:bodyPr wrap="square" lIns="0" tIns="0" rIns="0" bIns="0" rtlCol="0" anchor="t"/>
-          <a:lstStyle/>
-          <a:p>
-            <a:pPr indent="0" marL="0">
-              <a:buNone/>
-            </a:pPr>
-            <a:r>
-              <a:rPr lang="en-US" sz="1600" dirty="0">
-                <a:solidFill>
-                  <a:schemeClr val="tx2"/>
-                </a:solidFill>
-              </a:rPr>
-              <a:t>«Хочу скасувати запис і повернути гроші». У клініці правила суворіші: усе через погодження.</a:t>
-            </a:r>
-            <a:endParaRPr lang="en-US" sz="1600" dirty="0"/>
-          </a:p>
-        </p:txBody>
-      </p:sp>
-      <p:pic>
-        <p:nvPicPr>
-          <p:cNvPr id="4" name="video scene-C.mp4" descr="Кадр з відео scene-C.mp4">    </p:cNvPr>
-          <p:cNvPicPr>
-            <a:picLocks noChangeAspect="1"/>
-          </p:cNvPicPr>
-          <p:nvPr/>
-        </p:nvPicPr>
-        <p:blipFill>
-          <a:blip r:embed="rId1"/>
-          <a:stretch>
-            <a:fillRect/>
-          </a:stretch>
-        </p:blipFill>
-        <p:spPr>
-          <a:xfrm>
-            <a:off x="548640" y="1737360"/>
-            <a:ext cx="11094415" cy="3467005"/>
-          </a:xfrm>
-          <a:prstGeom prst="rect">
-            <a:avLst/>
-          </a:prstGeom>
-        </p:spPr>
-      </p:pic>
-      <p:sp>
-        <p:nvSpPr>
-          <p:cNvPr id="5" name="insert video badge"/>
-          <p:cNvSpPr/>
-          <p:nvPr/>
-        </p:nvSpPr>
-        <p:spPr>
-          <a:xfrm>
-            <a:off x="4632808" y="3196542"/>
-            <a:ext cx="2926080" cy="548640"/>
-          </a:xfrm>
-          <a:prstGeom prst="roundRect">
-            <a:avLst>
-              <a:gd name="adj" fmla="val 50000"/>
-            </a:avLst>
-          </a:prstGeom>
-          <a:solidFill>
-            <a:schemeClr val="tx1">
-              <a:alpha val="85000"/>
-            </a:schemeClr>
-          </a:solidFill>
-          <a:ln/>
-        </p:spPr>
-      </p:sp>
-      <p:sp>
-        <p:nvSpPr>
-          <p:cNvPr id="6" name="insert video label"/>
-          <p:cNvSpPr txBox="1"/>
-          <p:nvPr/>
-        </p:nvSpPr>
-        <p:spPr>
-          <a:xfrm>
-            <a:off x="4632808" y="3196542"/>
-            <a:ext cx="2926080" cy="548640"/>
-          </a:xfrm>
-          <a:prstGeom prst="rect">
-            <a:avLst/>
-          </a:prstGeom>
-          <a:noFill/>
-          <a:ln/>
-        </p:spPr>
-        <p:txBody>
-          <a:bodyPr wrap="square" lIns="0" tIns="0" rIns="0" bIns="0" rtlCol="0" anchor="ctr"/>
-          <a:lstStyle/>
-          <a:p>
-            <a:pPr algn="ctr" indent="0" marL="0">
-              <a:buNone/>
-            </a:pPr>
-            <a:r>
-              <a:rPr lang="en-US" sz="1400" b="1" dirty="0">
-                <a:solidFill>
-                  <a:schemeClr val="bg1"/>
-                </a:solidFill>
-              </a:rPr>
-              <a:t>▶  вставити scene-C.mp4</a:t>
-            </a:r>
-            <a:endParaRPr lang="en-US" sz="1400" dirty="0"/>
-          </a:p>
-        </p:txBody>
-      </p:sp>
-      <p:sp>
-        <p:nvSpPr>
-          <p:cNvPr id="7" name="video label 0"/>
-          <p:cNvSpPr txBox="1"/>
-          <p:nvPr/>
-        </p:nvSpPr>
-        <p:spPr>
-          <a:xfrm>
-            <a:off x="548640" y="1444752"/>
-            <a:ext cx="5547208" cy="256032"/>
-          </a:xfrm>
-          <a:prstGeom prst="rect">
-            <a:avLst/>
-          </a:prstGeom>
-          <a:noFill/>
-          <a:ln/>
-        </p:spPr>
-        <p:txBody>
-          <a:bodyPr wrap="square" lIns="0" tIns="0" rIns="0" bIns="0" rtlCol="0" anchor="ctr"/>
-          <a:lstStyle/>
-          <a:p>
-            <a:pPr algn="ctr" indent="0" marL="0">
-              <a:buNone/>
-            </a:pPr>
-            <a:r>
-              <a:rPr lang="en-US" sz="1200" b="1" dirty="0">
-                <a:solidFill>
-                  <a:schemeClr val="accent5"/>
-                </a:solidFill>
-              </a:rPr>
-              <a:t>Клієнт на сайті Bookly</a:t>
-            </a:r>
-            <a:endParaRPr lang="en-US" sz="1200" dirty="0"/>
-          </a:p>
-        </p:txBody>
-      </p:sp>
-      <p:sp>
-        <p:nvSpPr>
-          <p:cNvPr id="8" name="video label 1"/>
-          <p:cNvSpPr txBox="1"/>
-          <p:nvPr/>
-        </p:nvSpPr>
-        <p:spPr>
-          <a:xfrm>
-            <a:off x="6095848" y="1444752"/>
-            <a:ext cx="5547208" cy="256032"/>
-          </a:xfrm>
-          <a:prstGeom prst="rect">
-            <a:avLst/>
-          </a:prstGeom>
-          <a:noFill/>
-          <a:ln/>
-        </p:spPr>
-        <p:txBody>
-          <a:bodyPr wrap="square" lIns="0" tIns="0" rIns="0" bIns="0" rtlCol="0" anchor="ctr"/>
-          <a:lstStyle/>
-          <a:p>
-            <a:pPr algn="ctr" indent="0" marL="0">
-              <a:buNone/>
-            </a:pPr>
-            <a:r>
-              <a:rPr lang="en-US" sz="1200" b="1" dirty="0">
-                <a:solidFill>
-                  <a:schemeClr val="accent5"/>
-                </a:solidFill>
-              </a:rPr>
-              <a:t>Чат і copilot адміністратора</a:t>
-            </a:r>
-            <a:endParaRPr lang="en-US" sz="1200" dirty="0"/>
-          </a:p>
-        </p:txBody>
-      </p:sp>
-      <p:sp>
-        <p:nvSpPr>
-          <p:cNvPr id="9" name="step 1"/>
-          <p:cNvSpPr/>
-          <p:nvPr/>
-        </p:nvSpPr>
-        <p:spPr>
-          <a:xfrm>
-            <a:off x="548640" y="5303520"/>
-            <a:ext cx="3515258" cy="1005840"/>
-          </a:xfrm>
-          <a:prstGeom prst="roundRect">
-            <a:avLst>
-              <a:gd name="adj" fmla="val 9091"/>
-            </a:avLst>
-          </a:prstGeom>
-          <a:solidFill>
-            <a:schemeClr val="bg1"/>
-          </a:solidFill>
-          <a:ln/>
-          <a:effectLst>
-            <a:outerShdw sx="100000" sy="100000" kx="0" ky="0" algn="bl" rotWithShape="0" blurRad="101600" dist="25400" dir="5400000">
-              <a:srgbClr val="16163A">
-                <a:alpha val="12000"/>
-              </a:srgbClr>
-            </a:outerShdw>
-          </a:effectLst>
-        </p:spPr>
-      </p:sp>
-      <p:sp>
-        <p:nvSpPr>
-          <p:cNvPr id="10" name="step 1 dot"/>
-          <p:cNvSpPr/>
-          <p:nvPr/>
-        </p:nvSpPr>
-        <p:spPr>
-          <a:xfrm>
-            <a:off x="749808" y="5504688"/>
-            <a:ext cx="365760" cy="365760"/>
-          </a:xfrm>
-          <a:prstGeom prst="ellipse">
-            <a:avLst/>
-          </a:prstGeom>
-          <a:solidFill>
-            <a:schemeClr val="accent1"/>
-          </a:solidFill>
-          <a:ln/>
-        </p:spPr>
-      </p:sp>
-      <p:sp>
-        <p:nvSpPr>
-          <p:cNvPr id="11" name="step 1 number"/>
-          <p:cNvSpPr txBox="1"/>
-          <p:nvPr/>
-        </p:nvSpPr>
-        <p:spPr>
-          <a:xfrm>
-            <a:off x="749808" y="5504688"/>
-            <a:ext cx="365760" cy="365760"/>
-          </a:xfrm>
-          <a:prstGeom prst="rect">
-            <a:avLst/>
-          </a:prstGeom>
-          <a:noFill/>
-          <a:ln/>
-        </p:spPr>
-        <p:txBody>
-          <a:bodyPr wrap="square" lIns="0" tIns="0" rIns="0" bIns="0" rtlCol="0" anchor="ctr"/>
-          <a:lstStyle/>
-          <a:p>
-            <a:pPr algn="ctr" indent="0" marL="0">
-              <a:buNone/>
-            </a:pPr>
-            <a:r>
-              <a:rPr lang="en-US" sz="1400" b="1" dirty="0">
-                <a:solidFill>
-                  <a:schemeClr val="bg1"/>
-                </a:solidFill>
-              </a:rPr>
-              <a:t>1</a:t>
-            </a:r>
-            <a:endParaRPr lang="en-US" sz="1400" dirty="0"/>
-          </a:p>
-        </p:txBody>
-      </p:sp>
-      <p:sp>
-        <p:nvSpPr>
-          <p:cNvPr id="12" name="step 1 head"/>
-          <p:cNvSpPr txBox="1"/>
-          <p:nvPr/>
-        </p:nvSpPr>
-        <p:spPr>
-          <a:xfrm>
-            <a:off x="1234440" y="5468112"/>
-            <a:ext cx="2646578" cy="411480"/>
-          </a:xfrm>
-          <a:prstGeom prst="rect">
-            <a:avLst/>
-          </a:prstGeom>
-          <a:noFill/>
-          <a:ln/>
-        </p:spPr>
-        <p:txBody>
-          <a:bodyPr wrap="square" lIns="0" tIns="0" rIns="0" bIns="0" rtlCol="0" anchor="ctr"/>
-          <a:lstStyle/>
-          <a:p>
-            <a:pPr indent="0" marL="0">
-              <a:buNone/>
-            </a:pPr>
-            <a:r>
-              <a:rPr lang="en-US" sz="1500" b="1" dirty="0">
-                <a:solidFill>
-                  <a:schemeClr val="tx1"/>
-                </a:solidFill>
-              </a:rPr>
-              <a:t>Правила клініки</a:t>
-            </a:r>
-            <a:endParaRPr lang="en-US" sz="1500" dirty="0"/>
-          </a:p>
-        </p:txBody>
-      </p:sp>
-      <p:sp>
-        <p:nvSpPr>
-          <p:cNvPr id="13" name="step 1 text"/>
-          <p:cNvSpPr txBox="1"/>
-          <p:nvPr/>
-        </p:nvSpPr>
-        <p:spPr>
-          <a:xfrm>
-            <a:off x="1234440" y="5870448"/>
-            <a:ext cx="2646578" cy="502920"/>
-          </a:xfrm>
-          <a:prstGeom prst="rect">
-            <a:avLst/>
-          </a:prstGeom>
-          <a:noFill/>
-          <a:ln/>
-        </p:spPr>
-        <p:txBody>
-          <a:bodyPr wrap="square" lIns="0" tIns="0" rIns="0" bIns="0" rtlCol="0" anchor="t"/>
-          <a:lstStyle/>
-          <a:p>
-            <a:pPr indent="0" marL="0">
-              <a:buNone/>
-            </a:pPr>
-            <a:r>
-              <a:rPr lang="en-US" sz="1200" dirty="0">
-                <a:solidFill>
-                  <a:schemeClr val="tx2"/>
-                </a:solidFill>
-              </a:rPr>
-              <a:t>Пізніше 48 год — передоплата 800 грн згорає</a:t>
-            </a:r>
-            <a:endParaRPr lang="en-US" sz="1200" dirty="0"/>
-          </a:p>
-        </p:txBody>
-      </p:sp>
-      <p:sp>
-        <p:nvSpPr>
-          <p:cNvPr id="14" name="step 2"/>
-          <p:cNvSpPr/>
-          <p:nvPr/>
-        </p:nvSpPr>
-        <p:spPr>
-          <a:xfrm>
-            <a:off x="4338218" y="5303520"/>
-            <a:ext cx="3515258" cy="1005840"/>
-          </a:xfrm>
-          <a:prstGeom prst="roundRect">
-            <a:avLst>
-              <a:gd name="adj" fmla="val 9091"/>
-            </a:avLst>
-          </a:prstGeom>
-          <a:solidFill>
-            <a:schemeClr val="bg1"/>
-          </a:solidFill>
-          <a:ln/>
-          <a:effectLst>
-            <a:outerShdw sx="100000" sy="100000" kx="0" ky="0" algn="bl" rotWithShape="0" blurRad="101600" dist="25400" dir="5400000">
-              <a:srgbClr val="16163A">
-                <a:alpha val="12000"/>
-              </a:srgbClr>
-            </a:outerShdw>
-          </a:effectLst>
-        </p:spPr>
-      </p:sp>
-      <p:sp>
-        <p:nvSpPr>
-          <p:cNvPr id="15" name="step 2 dot"/>
-          <p:cNvSpPr/>
-          <p:nvPr/>
-        </p:nvSpPr>
-        <p:spPr>
-          <a:xfrm>
-            <a:off x="4539386" y="5504688"/>
-            <a:ext cx="365760" cy="365760"/>
-          </a:xfrm>
-          <a:prstGeom prst="ellipse">
-            <a:avLst/>
-          </a:prstGeom>
-          <a:solidFill>
-            <a:srgbClr val="F59F00"/>
-          </a:solidFill>
-          <a:ln/>
-        </p:spPr>
-      </p:sp>
-      <p:sp>
-        <p:nvSpPr>
-          <p:cNvPr id="16" name="step 2 number"/>
-          <p:cNvSpPr txBox="1"/>
-          <p:nvPr/>
-        </p:nvSpPr>
-        <p:spPr>
-          <a:xfrm>
-            <a:off x="4539386" y="5504688"/>
-            <a:ext cx="365760" cy="365760"/>
-          </a:xfrm>
-          <a:prstGeom prst="rect">
-            <a:avLst/>
-          </a:prstGeom>
-          <a:noFill/>
-          <a:ln/>
-        </p:spPr>
-        <p:txBody>
-          <a:bodyPr wrap="square" lIns="0" tIns="0" rIns="0" bIns="0" rtlCol="0" anchor="ctr"/>
-          <a:lstStyle/>
-          <a:p>
-            <a:pPr algn="ctr" indent="0" marL="0">
-              <a:buNone/>
-            </a:pPr>
-            <a:r>
-              <a:rPr lang="en-US" sz="1400" b="1" dirty="0">
-                <a:solidFill>
-                  <a:schemeClr val="bg1"/>
-                </a:solidFill>
-              </a:rPr>
-              <a:t>2</a:t>
-            </a:r>
-            <a:endParaRPr lang="en-US" sz="1400" dirty="0"/>
-          </a:p>
-        </p:txBody>
-      </p:sp>
-      <p:sp>
-        <p:nvSpPr>
-          <p:cNvPr id="17" name="step 2 head"/>
-          <p:cNvSpPr txBox="1"/>
-          <p:nvPr/>
-        </p:nvSpPr>
-        <p:spPr>
-          <a:xfrm>
-            <a:off x="5024018" y="5468112"/>
-            <a:ext cx="2646578" cy="411480"/>
-          </a:xfrm>
-          <a:prstGeom prst="rect">
-            <a:avLst/>
-          </a:prstGeom>
-          <a:noFill/>
-          <a:ln/>
-        </p:spPr>
-        <p:txBody>
-          <a:bodyPr wrap="square" lIns="0" tIns="0" rIns="0" bIns="0" rtlCol="0" anchor="ctr"/>
-          <a:lstStyle/>
-          <a:p>
-            <a:pPr indent="0" marL="0">
-              <a:buNone/>
-            </a:pPr>
-            <a:r>
-              <a:rPr lang="en-US" sz="1500" b="1" dirty="0">
-                <a:solidFill>
-                  <a:schemeClr val="tx1"/>
-                </a:solidFill>
-              </a:rPr>
-              <a:t>Два погодження</a:t>
-            </a:r>
-            <a:endParaRPr lang="en-US" sz="1500" dirty="0"/>
-          </a:p>
-        </p:txBody>
-      </p:sp>
-      <p:sp>
-        <p:nvSpPr>
-          <p:cNvPr id="18" name="step 2 text"/>
-          <p:cNvSpPr txBox="1"/>
-          <p:nvPr/>
-        </p:nvSpPr>
-        <p:spPr>
-          <a:xfrm>
-            <a:off x="5024018" y="5870448"/>
-            <a:ext cx="2646578" cy="502920"/>
-          </a:xfrm>
-          <a:prstGeom prst="rect">
-            <a:avLst/>
-          </a:prstGeom>
-          <a:noFill/>
-          <a:ln/>
-        </p:spPr>
-        <p:txBody>
-          <a:bodyPr wrap="square" lIns="0" tIns="0" rIns="0" bIns="0" rtlCol="0" anchor="t"/>
-          <a:lstStyle/>
-          <a:p>
-            <a:pPr indent="0" marL="0">
-              <a:buNone/>
-            </a:pPr>
-            <a:r>
-              <a:rPr lang="en-US" sz="1200" dirty="0">
-                <a:solidFill>
-                  <a:schemeClr val="tx2"/>
-                </a:solidFill>
-              </a:rPr>
-              <a:t>Спершу повернення, потім скасування</a:t>
-            </a:r>
-            <a:endParaRPr lang="en-US" sz="1200" dirty="0"/>
-          </a:p>
-        </p:txBody>
-      </p:sp>
-      <p:sp>
-        <p:nvSpPr>
-          <p:cNvPr id="19" name="step 3"/>
-          <p:cNvSpPr/>
-          <p:nvPr/>
-        </p:nvSpPr>
-        <p:spPr>
-          <a:xfrm>
-            <a:off x="8127797" y="5303520"/>
-            <a:ext cx="3515258" cy="1005840"/>
-          </a:xfrm>
-          <a:prstGeom prst="roundRect">
-            <a:avLst>
-              <a:gd name="adj" fmla="val 9091"/>
-            </a:avLst>
-          </a:prstGeom>
-          <a:solidFill>
-            <a:schemeClr val="bg1"/>
-          </a:solidFill>
-          <a:ln/>
-          <a:effectLst>
-            <a:outerShdw sx="100000" sy="100000" kx="0" ky="0" algn="bl" rotWithShape="0" blurRad="101600" dist="25400" dir="5400000">
-              <a:srgbClr val="16163A">
-                <a:alpha val="12000"/>
-              </a:srgbClr>
-            </a:outerShdw>
-          </a:effectLst>
-        </p:spPr>
-      </p:sp>
-      <p:sp>
-        <p:nvSpPr>
-          <p:cNvPr id="20" name="step 3 dot"/>
-          <p:cNvSpPr/>
-          <p:nvPr/>
-        </p:nvSpPr>
-        <p:spPr>
-          <a:xfrm>
-            <a:off x="8328965" y="5504688"/>
-            <a:ext cx="365760" cy="365760"/>
-          </a:xfrm>
-          <a:prstGeom prst="ellipse">
-            <a:avLst/>
-          </a:prstGeom>
-          <a:solidFill>
-            <a:srgbClr val="12B886"/>
-          </a:solidFill>
-          <a:ln/>
-        </p:spPr>
-      </p:sp>
-      <p:sp>
-        <p:nvSpPr>
-          <p:cNvPr id="21" name="step 3 number"/>
-          <p:cNvSpPr txBox="1"/>
-          <p:nvPr/>
-        </p:nvSpPr>
-        <p:spPr>
-          <a:xfrm>
-            <a:off x="8328965" y="5504688"/>
-            <a:ext cx="365760" cy="365760"/>
-          </a:xfrm>
-          <a:prstGeom prst="rect">
-            <a:avLst/>
-          </a:prstGeom>
-          <a:noFill/>
-          <a:ln/>
-        </p:spPr>
-        <p:txBody>
-          <a:bodyPr wrap="square" lIns="0" tIns="0" rIns="0" bIns="0" rtlCol="0" anchor="ctr"/>
-          <a:lstStyle/>
-          <a:p>
-            <a:pPr algn="ctr" indent="0" marL="0">
-              <a:buNone/>
-            </a:pPr>
-            <a:r>
-              <a:rPr lang="en-US" sz="1400" b="1" dirty="0">
-                <a:solidFill>
-                  <a:schemeClr val="bg1"/>
-                </a:solidFill>
-              </a:rPr>
-              <a:t>3</a:t>
-            </a:r>
-            <a:endParaRPr lang="en-US" sz="1400" dirty="0"/>
-          </a:p>
-        </p:txBody>
-      </p:sp>
-      <p:sp>
-        <p:nvSpPr>
-          <p:cNvPr id="22" name="step 3 head"/>
-          <p:cNvSpPr txBox="1"/>
-          <p:nvPr/>
-        </p:nvSpPr>
-        <p:spPr>
-          <a:xfrm>
-            <a:off x="8813597" y="5468112"/>
-            <a:ext cx="2646578" cy="411480"/>
-          </a:xfrm>
-          <a:prstGeom prst="rect">
-            <a:avLst/>
-          </a:prstGeom>
-          <a:noFill/>
-          <a:ln/>
-        </p:spPr>
-        <p:txBody>
-          <a:bodyPr wrap="square" lIns="0" tIns="0" rIns="0" bIns="0" rtlCol="0" anchor="ctr"/>
-          <a:lstStyle/>
-          <a:p>
-            <a:pPr indent="0" marL="0">
-              <a:buNone/>
-            </a:pPr>
-            <a:r>
-              <a:rPr lang="en-US" sz="1500" b="1" dirty="0">
-                <a:solidFill>
-                  <a:schemeClr val="tx1"/>
-                </a:solidFill>
-              </a:rPr>
-              <a:t>Результат</a:t>
-            </a:r>
-            <a:endParaRPr lang="en-US" sz="1500" dirty="0"/>
-          </a:p>
-        </p:txBody>
-      </p:sp>
-      <p:sp>
-        <p:nvSpPr>
-          <p:cNvPr id="23" name="step 3 text"/>
-          <p:cNvSpPr txBox="1"/>
-          <p:nvPr/>
-        </p:nvSpPr>
-        <p:spPr>
-          <a:xfrm>
-            <a:off x="8813597" y="5870448"/>
-            <a:ext cx="2646578" cy="502920"/>
-          </a:xfrm>
-          <a:prstGeom prst="rect">
-            <a:avLst/>
-          </a:prstGeom>
-          <a:noFill/>
-          <a:ln/>
-        </p:spPr>
-        <p:txBody>
-          <a:bodyPr wrap="square" lIns="0" tIns="0" rIns="0" bIns="0" rtlCol="0" anchor="t"/>
-          <a:lstStyle/>
-          <a:p>
-            <a:pPr indent="0" marL="0">
-              <a:buNone/>
-            </a:pPr>
-            <a:r>
-              <a:rPr lang="en-US" sz="1200" dirty="0">
-                <a:solidFill>
-                  <a:schemeClr val="tx2"/>
-                </a:solidFill>
-              </a:rPr>
-              <a:t>Запис скасовано, 800 грн повернено</a:t>
-            </a:r>
-            <a:endParaRPr lang="en-US" sz="1200" dirty="0"/>
-          </a:p>
-        </p:txBody>
-      </p:sp>
-      <p:sp>
-        <p:nvSpPr>
-          <p:cNvPr id="25" name="Slide Number Placeholder 0"/>
-          <p:cNvSpPr>
-            <a:spLocks noGrp="1"/>
-          </p:cNvSpPr>
-          <p:nvPr>
-            <p:ph type="sldNum" sz="quarter" idx="4294967295"/>
-          </p:nvPr>
-        </p:nvSpPr>
-        <p:spPr>
-          <a:xfrm>
-            <a:off x="11185855" y="6446520"/>
-            <a:ext cx="457200" cy="274320"/>
-          </a:xfrm>
-          <a:prstGeom prst="rect">
-            <a:avLst/>
-          </a:prstGeom>
-          <a:extLst>
-            <a:ext uri="{C572A759-6A51-4108-AA02-DFA0A04FC94B}">
-              <ma14:wrappingTextBoxFlag xmlns:ma14="http://schemas.microsoft.com/office/mac/drawingml/2011/main" val="0"/>
-            </a:ext>
-          </a:extLst>
-        </p:spPr>
-        <p:txBody>
-          <a:bodyPr/>
-          <a:lstStyle>
-            <a:lvl1pPr>
-              <a:defRPr sz="1000">
-                <a:solidFill>
-                  <a:schemeClr val="accent5"/>
-                </a:solidFill>
-              </a:defRPr>
-            </a:lvl1pPr>
-          </a:lstStyle>
-          <a:p>
-            <a:pPr algn="r"/>
-            <a:fld id="{F7021451-1387-4CA6-816F-3879F97B5CBC}" type="slidenum">
-              <a:rPr b="0" lang="en-US"/>
-              <a:t>8</a:t>
-            </a:fld>
-            <a:endParaRPr lang="en-US"/>
-          </a:p>
-        </p:txBody>
-      </p:sp>
-    </p:spTree>
-  </p:cSld>
-  <p:clrMapOvr>
-    <a:masterClrMapping/>
-  </p:clrMapOvr>
-</p:sld>
-</file>
-
-<file path=ppt/slides/slide9.xml><?xml version="1.0" encoding="utf-8"?>
-<p:sld xmlns:a="http://schemas.openxmlformats.org/drawingml/2006/main" xmlns:r="http://schemas.openxmlformats.org/officeDocument/2006/relationships" xmlns:p="http://schemas.openxmlformats.org/presentationml/2006/main">
-  <p:cSld name="Slide 9">
-    <p:spTree>
-      <p:nvGrpSpPr>
-        <p:cNvPr id="1" name=""/>
-        <p:cNvGrpSpPr/>
-        <p:nvPr/>
-      </p:nvGrpSpPr>
-      <p:grpSpPr>
-        <a:xfrm>
-          <a:off x="0" y="0"/>
-          <a:ext cx="0" cy="0"/>
-          <a:chOff x="0" y="0"/>
-          <a:chExt cx="0" cy="0"/>
-        </a:xfrm>
-      </p:grpSpPr>
-      <p:sp>
-        <p:nvSpPr>
-          <p:cNvPr id="2" name="Text 0"/>
-          <p:cNvSpPr/>
-          <p:nvPr>
-            <p:ph idx="100" type="title" hasCustomPrompt="1"/>
-          </p:nvPr>
-        </p:nvSpPr>
-        <p:spPr>
-          <a:xfrm>
             <a:off x="548640" y="365760"/>
             <a:ext cx="11094415" cy="731520"/>
           </a:xfrm>
@@ -9995,7 +6809,7 @@
       </p:sp>
       <p:graphicFrame>
         <p:nvGraphicFramePr>
-          <p:cNvPr id="10" name="policy table"/>
+          <p:cNvPr id="8" name="policy table"/>
           <p:cNvGraphicFramePr>
             <a:graphicFrameLocks noGrp="1"/>
           </p:cNvGraphicFramePr>
@@ -11693,6 +8507,1406 @@
             <a:pPr algn="r"/>
             <a:fld id="{F7021451-1387-4CA6-816F-3879F97B5CBC}" type="slidenum">
               <a:rPr b="0" lang="en-US"/>
+              <a:t>7</a:t>
+            </a:fld>
+            <a:endParaRPr lang="en-US"/>
+          </a:p>
+        </p:txBody>
+      </p:sp>
+    </p:spTree>
+  </p:cSld>
+  <p:clrMapOvr>
+    <a:masterClrMapping/>
+  </p:clrMapOvr>
+</p:sld>
+</file>
+
+<file path=ppt/slides/slide8.xml><?xml version="1.0" encoding="utf-8"?>
+<p:sld xmlns:a="http://schemas.openxmlformats.org/drawingml/2006/main" xmlns:r="http://schemas.openxmlformats.org/officeDocument/2006/relationships" xmlns:p="http://schemas.openxmlformats.org/presentationml/2006/main">
+  <p:cSld name="Slide 8">
+    <p:spTree>
+      <p:nvGrpSpPr>
+        <p:cNvPr id="1" name=""/>
+        <p:cNvGrpSpPr/>
+        <p:nvPr/>
+      </p:nvGrpSpPr>
+      <p:grpSpPr>
+        <a:xfrm>
+          <a:off x="0" y="0"/>
+          <a:ext cx="0" cy="0"/>
+          <a:chOff x="0" y="0"/>
+          <a:chExt cx="0" cy="0"/>
+        </a:xfrm>
+      </p:grpSpPr>
+      <p:sp>
+        <p:nvSpPr>
+          <p:cNvPr id="2" name="Text 0"/>
+          <p:cNvSpPr/>
+          <p:nvPr>
+            <p:ph idx="100" type="title" hasCustomPrompt="1"/>
+          </p:nvPr>
+        </p:nvSpPr>
+        <p:spPr>
+          <a:xfrm>
+            <a:off x="548640" y="365760"/>
+            <a:ext cx="11094415" cy="731520"/>
+          </a:xfrm>
+          <a:prstGeom prst="rect">
+            <a:avLst/>
+          </a:prstGeom>
+          <a:noFill/>
+          <a:ln/>
+        </p:spPr>
+        <p:txBody>
+          <a:bodyPr wrap="square" lIns="0" tIns="0" rIns="0" bIns="0" rtlCol="0" anchor="ctr"/>
+          <a:lstStyle/>
+          <a:p>
+            <a:pPr algn="l" indent="0" marL="0">
+              <a:buNone/>
+            </a:pPr>
+            <a:r>
+              <a:rPr lang="en-US" sz="3200" b="1" dirty="0">
+                <a:solidFill>
+                  <a:schemeClr val="tx1"/>
+                </a:solidFill>
+              </a:rPr>
+              <a:t>Справжній продукт, а не макет</a:t>
+            </a:r>
+            <a:endParaRPr lang="en-US" sz="3200" dirty="0"/>
+          </a:p>
+        </p:txBody>
+      </p:sp>
+      <p:pic>
+        <p:nvPicPr>
+          <p:cNvPr id="3" name="video product-tour.mp4" descr="Кадр з відео product-tour.mp4">    </p:cNvPr>
+          <p:cNvPicPr>
+            <a:picLocks noChangeAspect="1"/>
+          </p:cNvPicPr>
+          <p:nvPr/>
+        </p:nvPicPr>
+        <p:blipFill>
+          <a:blip r:embed="rId1"/>
+          <a:stretch>
+            <a:fillRect/>
+          </a:stretch>
+        </p:blipFill>
+        <p:spPr>
+          <a:xfrm>
+            <a:off x="548640" y="1417320"/>
+            <a:ext cx="6949440" cy="4343400"/>
+          </a:xfrm>
+          <a:prstGeom prst="rect">
+            <a:avLst/>
+          </a:prstGeom>
+        </p:spPr>
+      </p:pic>
+      <p:sp>
+        <p:nvSpPr>
+          <p:cNvPr id="4" name="insert video badge"/>
+          <p:cNvSpPr/>
+          <p:nvPr/>
+        </p:nvSpPr>
+        <p:spPr>
+          <a:xfrm>
+            <a:off x="2560320" y="3314700"/>
+            <a:ext cx="2926080" cy="548640"/>
+          </a:xfrm>
+          <a:prstGeom prst="roundRect">
+            <a:avLst>
+              <a:gd name="adj" fmla="val 50000"/>
+            </a:avLst>
+          </a:prstGeom>
+          <a:solidFill>
+            <a:schemeClr val="tx1">
+              <a:alpha val="85000"/>
+            </a:schemeClr>
+          </a:solidFill>
+          <a:ln/>
+        </p:spPr>
+      </p:sp>
+      <p:sp>
+        <p:nvSpPr>
+          <p:cNvPr id="5" name="insert video label"/>
+          <p:cNvSpPr txBox="1"/>
+          <p:nvPr/>
+        </p:nvSpPr>
+        <p:spPr>
+          <a:xfrm>
+            <a:off x="2560320" y="3314700"/>
+            <a:ext cx="2926080" cy="548640"/>
+          </a:xfrm>
+          <a:prstGeom prst="rect">
+            <a:avLst/>
+          </a:prstGeom>
+          <a:noFill/>
+          <a:ln/>
+        </p:spPr>
+        <p:txBody>
+          <a:bodyPr wrap="square" lIns="0" tIns="0" rIns="0" bIns="0" rtlCol="0" anchor="ctr"/>
+          <a:lstStyle/>
+          <a:p>
+            <a:pPr algn="ctr" indent="0" marL="0">
+              <a:buNone/>
+            </a:pPr>
+            <a:r>
+              <a:rPr lang="en-US" sz="1400" b="1" dirty="0">
+                <a:solidFill>
+                  <a:schemeClr val="bg1"/>
+                </a:solidFill>
+              </a:rPr>
+              <a:t>▶  вставити product-tour.mp4</a:t>
+            </a:r>
+            <a:endParaRPr lang="en-US" sz="1400" dirty="0"/>
+          </a:p>
+        </p:txBody>
+      </p:sp>
+      <p:sp>
+        <p:nvSpPr>
+          <p:cNvPr id="6" name="tour icon bg 0"/>
+          <p:cNvSpPr/>
+          <p:nvPr/>
+        </p:nvSpPr>
+        <p:spPr>
+          <a:xfrm>
+            <a:off x="7863840" y="1417320"/>
+            <a:ext cx="566928" cy="566928"/>
+          </a:xfrm>
+          <a:prstGeom prst="ellipse">
+            <a:avLst/>
+          </a:prstGeom>
+          <a:solidFill>
+            <a:schemeClr val="bg2"/>
+          </a:solidFill>
+          <a:ln/>
+        </p:spPr>
+      </p:sp>
+      <p:pic>
+        <p:nvPicPr>
+          <p:cNvPr id="7" name="tour icon 0" descr="preencoded.png">    </p:cNvPr>
+          <p:cNvPicPr>
+            <a:picLocks noChangeAspect="1"/>
+          </p:cNvPicPr>
+          <p:nvPr/>
+        </p:nvPicPr>
+        <p:blipFill>
+          <a:blip r:embed="rId2"/>
+          <a:stretch>
+            <a:fillRect/>
+          </a:stretch>
+        </p:blipFill>
+        <p:spPr>
+          <a:xfrm>
+            <a:off x="7991856" y="1545336"/>
+            <a:ext cx="310896" cy="310896"/>
+          </a:xfrm>
+          <a:prstGeom prst="rect">
+            <a:avLst/>
+          </a:prstGeom>
+        </p:spPr>
+      </p:pic>
+      <p:sp>
+        <p:nvSpPr>
+          <p:cNvPr id="8" name="tour head 0"/>
+          <p:cNvSpPr txBox="1"/>
+          <p:nvPr/>
+        </p:nvSpPr>
+        <p:spPr>
+          <a:xfrm>
+            <a:off x="8641080" y="1417320"/>
+            <a:ext cx="3001975" cy="365760"/>
+          </a:xfrm>
+          <a:prstGeom prst="rect">
+            <a:avLst/>
+          </a:prstGeom>
+          <a:noFill/>
+          <a:ln/>
+        </p:spPr>
+        <p:txBody>
+          <a:bodyPr wrap="square" lIns="0" tIns="0" rIns="0" bIns="0" rtlCol="0" anchor="ctr"/>
+          <a:lstStyle/>
+          <a:p>
+            <a:pPr indent="0" marL="0">
+              <a:buNone/>
+            </a:pPr>
+            <a:r>
+              <a:rPr lang="en-US" sz="1700" b="1" dirty="0">
+                <a:solidFill>
+                  <a:schemeClr val="tx1"/>
+                </a:solidFill>
+              </a:rPr>
+              <a:t>Сторінка бізнесу і запис</a:t>
+            </a:r>
+            <a:endParaRPr lang="en-US" sz="1700" dirty="0"/>
+          </a:p>
+        </p:txBody>
+      </p:sp>
+      <p:sp>
+        <p:nvSpPr>
+          <p:cNvPr id="9" name="tour text 0"/>
+          <p:cNvSpPr txBox="1"/>
+          <p:nvPr/>
+        </p:nvSpPr>
+        <p:spPr>
+          <a:xfrm>
+            <a:off x="8641080" y="1801368"/>
+            <a:ext cx="3001975" cy="822960"/>
+          </a:xfrm>
+          <a:prstGeom prst="rect">
+            <a:avLst/>
+          </a:prstGeom>
+          <a:noFill/>
+          <a:ln/>
+        </p:spPr>
+        <p:txBody>
+          <a:bodyPr wrap="square" lIns="0" tIns="0" rIns="0" bIns="0" rtlCol="0" anchor="t"/>
+          <a:lstStyle/>
+          <a:p>
+            <a:pPr indent="0" marL="0">
+              <a:buNone/>
+            </a:pPr>
+            <a:r>
+              <a:rPr lang="en-US" sz="1400" dirty="0">
+                <a:solidFill>
+                  <a:schemeClr val="tx2"/>
+                </a:solidFill>
+              </a:rPr>
+              <a:t>Послуги, майстри, правила, вільні слоти, передоплата</a:t>
+            </a:r>
+            <a:endParaRPr lang="en-US" sz="1400" dirty="0"/>
+          </a:p>
+        </p:txBody>
+      </p:sp>
+      <p:sp>
+        <p:nvSpPr>
+          <p:cNvPr id="10" name="tour icon bg 1"/>
+          <p:cNvSpPr/>
+          <p:nvPr/>
+        </p:nvSpPr>
+        <p:spPr>
+          <a:xfrm>
+            <a:off x="7863840" y="2880360"/>
+            <a:ext cx="566928" cy="566928"/>
+          </a:xfrm>
+          <a:prstGeom prst="ellipse">
+            <a:avLst/>
+          </a:prstGeom>
+          <a:solidFill>
+            <a:schemeClr val="bg2"/>
+          </a:solidFill>
+          <a:ln/>
+        </p:spPr>
+      </p:sp>
+      <p:pic>
+        <p:nvPicPr>
+          <p:cNvPr id="11" name="tour icon 1" descr="preencoded.png">    </p:cNvPr>
+          <p:cNvPicPr>
+            <a:picLocks noChangeAspect="1"/>
+          </p:cNvPicPr>
+          <p:nvPr/>
+        </p:nvPicPr>
+        <p:blipFill>
+          <a:blip r:embed="rId3"/>
+          <a:stretch>
+            <a:fillRect/>
+          </a:stretch>
+        </p:blipFill>
+        <p:spPr>
+          <a:xfrm>
+            <a:off x="7991856" y="3008376"/>
+            <a:ext cx="310896" cy="310896"/>
+          </a:xfrm>
+          <a:prstGeom prst="rect">
+            <a:avLst/>
+          </a:prstGeom>
+        </p:spPr>
+      </p:pic>
+      <p:sp>
+        <p:nvSpPr>
+          <p:cNvPr id="12" name="tour head 1"/>
+          <p:cNvSpPr txBox="1"/>
+          <p:nvPr/>
+        </p:nvSpPr>
+        <p:spPr>
+          <a:xfrm>
+            <a:off x="8641080" y="2880360"/>
+            <a:ext cx="3001975" cy="365760"/>
+          </a:xfrm>
+          <a:prstGeom prst="rect">
+            <a:avLst/>
+          </a:prstGeom>
+          <a:noFill/>
+          <a:ln/>
+        </p:spPr>
+        <p:txBody>
+          <a:bodyPr wrap="square" lIns="0" tIns="0" rIns="0" bIns="0" rtlCol="0" anchor="ctr"/>
+          <a:lstStyle/>
+          <a:p>
+            <a:pPr indent="0" marL="0">
+              <a:buNone/>
+            </a:pPr>
+            <a:r>
+              <a:rPr lang="en-US" sz="1700" b="1" dirty="0">
+                <a:solidFill>
+                  <a:schemeClr val="tx1"/>
+                </a:solidFill>
+              </a:rPr>
+              <a:t>Адмінка</a:t>
+            </a:r>
+            <a:endParaRPr lang="en-US" sz="1700" dirty="0"/>
+          </a:p>
+        </p:txBody>
+      </p:sp>
+      <p:sp>
+        <p:nvSpPr>
+          <p:cNvPr id="13" name="tour text 1"/>
+          <p:cNvSpPr txBox="1"/>
+          <p:nvPr/>
+        </p:nvSpPr>
+        <p:spPr>
+          <a:xfrm>
+            <a:off x="8641080" y="3264408"/>
+            <a:ext cx="3001975" cy="822960"/>
+          </a:xfrm>
+          <a:prstGeom prst="rect">
+            <a:avLst/>
+          </a:prstGeom>
+          <a:noFill/>
+          <a:ln/>
+        </p:spPr>
+        <p:txBody>
+          <a:bodyPr wrap="square" lIns="0" tIns="0" rIns="0" bIns="0" rtlCol="0" anchor="t"/>
+          <a:lstStyle/>
+          <a:p>
+            <a:pPr indent="0" marL="0">
+              <a:buNone/>
+            </a:pPr>
+            <a:r>
+              <a:rPr lang="en-US" sz="1400" dirty="0">
+                <a:solidFill>
+                  <a:schemeClr val="tx2"/>
+                </a:solidFill>
+              </a:rPr>
+              <a:t>Тиждень бронювань, дії агента з міткою «AI», клієнти, майстри, послуги</a:t>
+            </a:r>
+            <a:endParaRPr lang="en-US" sz="1400" dirty="0"/>
+          </a:p>
+        </p:txBody>
+      </p:sp>
+      <p:sp>
+        <p:nvSpPr>
+          <p:cNvPr id="14" name="tour icon bg 2"/>
+          <p:cNvSpPr/>
+          <p:nvPr/>
+        </p:nvSpPr>
+        <p:spPr>
+          <a:xfrm>
+            <a:off x="7863840" y="4343400"/>
+            <a:ext cx="566928" cy="566928"/>
+          </a:xfrm>
+          <a:prstGeom prst="ellipse">
+            <a:avLst/>
+          </a:prstGeom>
+          <a:solidFill>
+            <a:schemeClr val="bg2"/>
+          </a:solidFill>
+          <a:ln/>
+        </p:spPr>
+      </p:sp>
+      <p:pic>
+        <p:nvPicPr>
+          <p:cNvPr id="15" name="tour icon 2" descr="preencoded.png">    </p:cNvPr>
+          <p:cNvPicPr>
+            <a:picLocks noChangeAspect="1"/>
+          </p:cNvPicPr>
+          <p:nvPr/>
+        </p:nvPicPr>
+        <p:blipFill>
+          <a:blip r:embed="rId4"/>
+          <a:stretch>
+            <a:fillRect/>
+          </a:stretch>
+        </p:blipFill>
+        <p:spPr>
+          <a:xfrm>
+            <a:off x="7991856" y="4471416"/>
+            <a:ext cx="310896" cy="310896"/>
+          </a:xfrm>
+          <a:prstGeom prst="rect">
+            <a:avLst/>
+          </a:prstGeom>
+        </p:spPr>
+      </p:pic>
+      <p:sp>
+        <p:nvSpPr>
+          <p:cNvPr id="16" name="tour head 2"/>
+          <p:cNvSpPr txBox="1"/>
+          <p:nvPr/>
+        </p:nvSpPr>
+        <p:spPr>
+          <a:xfrm>
+            <a:off x="8641080" y="4343400"/>
+            <a:ext cx="3001975" cy="365760"/>
+          </a:xfrm>
+          <a:prstGeom prst="rect">
+            <a:avLst/>
+          </a:prstGeom>
+          <a:noFill/>
+          <a:ln/>
+        </p:spPr>
+        <p:txBody>
+          <a:bodyPr wrap="square" lIns="0" tIns="0" rIns="0" bIns="0" rtlCol="0" anchor="ctr"/>
+          <a:lstStyle/>
+          <a:p>
+            <a:pPr indent="0" marL="0">
+              <a:buNone/>
+            </a:pPr>
+            <a:r>
+              <a:rPr lang="en-US" sz="1700" b="1" dirty="0">
+                <a:solidFill>
+                  <a:schemeClr val="tx1"/>
+                </a:solidFill>
+              </a:rPr>
+              <a:t>Відкриті інтеграції</a:t>
+            </a:r>
+            <a:endParaRPr lang="en-US" sz="1700" dirty="0"/>
+          </a:p>
+        </p:txBody>
+      </p:sp>
+      <p:sp>
+        <p:nvSpPr>
+          <p:cNvPr id="17" name="tour text 2"/>
+          <p:cNvSpPr txBox="1"/>
+          <p:nvPr/>
+        </p:nvSpPr>
+        <p:spPr>
+          <a:xfrm>
+            <a:off x="8641080" y="4727448"/>
+            <a:ext cx="3001975" cy="822960"/>
+          </a:xfrm>
+          <a:prstGeom prst="rect">
+            <a:avLst/>
+          </a:prstGeom>
+          <a:noFill/>
+          <a:ln/>
+        </p:spPr>
+        <p:txBody>
+          <a:bodyPr wrap="square" lIns="0" tIns="0" rIns="0" bIns="0" rtlCol="0" anchor="t"/>
+          <a:lstStyle/>
+          <a:p>
+            <a:pPr indent="0" marL="0">
+              <a:buNone/>
+            </a:pPr>
+            <a:r>
+              <a:rPr lang="en-US" sz="1400" dirty="0">
+                <a:solidFill>
+                  <a:schemeClr val="tx2"/>
+                </a:solidFill>
+              </a:rPr>
+              <a:t>HTTP API, MCP-сервер для агента, віджет одним рядком коду</a:t>
+            </a:r>
+            <a:endParaRPr lang="en-US" sz="1400" dirty="0"/>
+          </a:p>
+        </p:txBody>
+      </p:sp>
+      <p:sp>
+        <p:nvSpPr>
+          <p:cNvPr id="25" name="Slide Number Placeholder 0"/>
+          <p:cNvSpPr>
+            <a:spLocks noGrp="1"/>
+          </p:cNvSpPr>
+          <p:nvPr>
+            <p:ph type="sldNum" sz="quarter" idx="4294967295"/>
+          </p:nvPr>
+        </p:nvSpPr>
+        <p:spPr>
+          <a:xfrm>
+            <a:off x="11185855" y="6446520"/>
+            <a:ext cx="457200" cy="274320"/>
+          </a:xfrm>
+          <a:prstGeom prst="rect">
+            <a:avLst/>
+          </a:prstGeom>
+          <a:extLst>
+            <a:ext uri="{C572A759-6A51-4108-AA02-DFA0A04FC94B}">
+              <ma14:wrappingTextBoxFlag xmlns:ma14="http://schemas.microsoft.com/office/mac/drawingml/2011/main" val="0"/>
+            </a:ext>
+          </a:extLst>
+        </p:spPr>
+        <p:txBody>
+          <a:bodyPr/>
+          <a:lstStyle>
+            <a:lvl1pPr>
+              <a:defRPr sz="1000">
+                <a:solidFill>
+                  <a:schemeClr val="accent5"/>
+                </a:solidFill>
+              </a:defRPr>
+            </a:lvl1pPr>
+          </a:lstStyle>
+          <a:p>
+            <a:pPr algn="r"/>
+            <a:fld id="{F7021451-1387-4CA6-816F-3879F97B5CBC}" type="slidenum">
+              <a:rPr b="0" lang="en-US"/>
+              <a:t>8</a:t>
+            </a:fld>
+            <a:endParaRPr lang="en-US"/>
+          </a:p>
+        </p:txBody>
+      </p:sp>
+    </p:spTree>
+  </p:cSld>
+  <p:clrMapOvr>
+    <a:masterClrMapping/>
+  </p:clrMapOvr>
+</p:sld>
+</file>
+
+<file path=ppt/slides/slide9.xml><?xml version="1.0" encoding="utf-8"?>
+<p:sld xmlns:a="http://schemas.openxmlformats.org/drawingml/2006/main" xmlns:r="http://schemas.openxmlformats.org/officeDocument/2006/relationships" xmlns:p="http://schemas.openxmlformats.org/presentationml/2006/main">
+  <p:cSld name="Slide 9">
+    <p:spTree>
+      <p:nvGrpSpPr>
+        <p:cNvPr id="1" name=""/>
+        <p:cNvGrpSpPr/>
+        <p:nvPr/>
+      </p:nvGrpSpPr>
+      <p:grpSpPr>
+        <a:xfrm>
+          <a:off x="0" y="0"/>
+          <a:ext cx="0" cy="0"/>
+          <a:chOff x="0" y="0"/>
+          <a:chExt cx="0" cy="0"/>
+        </a:xfrm>
+      </p:grpSpPr>
+      <p:sp>
+        <p:nvSpPr>
+          <p:cNvPr id="2" name="Text 0"/>
+          <p:cNvSpPr/>
+          <p:nvPr>
+            <p:ph idx="100" type="title" hasCustomPrompt="1"/>
+          </p:nvPr>
+        </p:nvSpPr>
+        <p:spPr>
+          <a:xfrm>
+            <a:off x="548640" y="365760"/>
+            <a:ext cx="11094415" cy="731520"/>
+          </a:xfrm>
+          <a:prstGeom prst="rect">
+            <a:avLst/>
+          </a:prstGeom>
+          <a:noFill/>
+          <a:ln/>
+        </p:spPr>
+        <p:txBody>
+          <a:bodyPr wrap="square" lIns="0" tIns="0" rIns="0" bIns="0" rtlCol="0" anchor="ctr"/>
+          <a:lstStyle/>
+          <a:p>
+            <a:pPr algn="l" indent="0" marL="0">
+              <a:buNone/>
+            </a:pPr>
+            <a:r>
+              <a:rPr lang="en-US" sz="3200" b="1" dirty="0">
+                <a:solidFill>
+                  <a:schemeClr val="tx1"/>
+                </a:solidFill>
+              </a:rPr>
+              <a:t>Що отримує підтримка і як ми закриваємо критерії</a:t>
+            </a:r>
+            <a:endParaRPr lang="en-US" sz="3200" dirty="0"/>
+          </a:p>
+        </p:txBody>
+      </p:sp>
+      <p:sp>
+        <p:nvSpPr>
+          <p:cNvPr id="3" name="stat 0"/>
+          <p:cNvSpPr/>
+          <p:nvPr/>
+        </p:nvSpPr>
+        <p:spPr>
+          <a:xfrm>
+            <a:off x="548640" y="1280160"/>
+            <a:ext cx="3515258" cy="1463040"/>
+          </a:xfrm>
+          <a:prstGeom prst="roundRect">
+            <a:avLst>
+              <a:gd name="adj" fmla="val 7500"/>
+            </a:avLst>
+          </a:prstGeom>
+          <a:solidFill>
+            <a:schemeClr val="bg2"/>
+          </a:solidFill>
+          <a:ln/>
+        </p:spPr>
+      </p:sp>
+      <p:sp>
+        <p:nvSpPr>
+          <p:cNvPr id="4" name="stat 0 value"/>
+          <p:cNvSpPr txBox="1"/>
+          <p:nvPr/>
+        </p:nvSpPr>
+        <p:spPr>
+          <a:xfrm>
+            <a:off x="822960" y="1371600"/>
+            <a:ext cx="2966618" cy="685800"/>
+          </a:xfrm>
+          <a:prstGeom prst="rect">
+            <a:avLst/>
+          </a:prstGeom>
+          <a:noFill/>
+          <a:ln/>
+        </p:spPr>
+        <p:txBody>
+          <a:bodyPr wrap="square" lIns="0" tIns="0" rIns="0" bIns="0" rtlCol="0" anchor="ctr"/>
+          <a:lstStyle/>
+          <a:p>
+            <a:pPr indent="0" marL="0">
+              <a:buNone/>
+            </a:pPr>
+            <a:r>
+              <a:rPr lang="en-US" sz="4000" b="1" dirty="0">
+                <a:solidFill>
+                  <a:schemeClr val="accent1"/>
+                </a:solidFill>
+              </a:rPr>
+              <a:t>3 з 3</a:t>
+            </a:r>
+            <a:endParaRPr lang="en-US" sz="4000" dirty="0"/>
+          </a:p>
+        </p:txBody>
+      </p:sp>
+      <p:sp>
+        <p:nvSpPr>
+          <p:cNvPr id="5" name="stat 0 label"/>
+          <p:cNvSpPr txBox="1"/>
+          <p:nvPr/>
+        </p:nvSpPr>
+        <p:spPr>
+          <a:xfrm>
+            <a:off x="822960" y="2084832"/>
+            <a:ext cx="2966618" cy="594360"/>
+          </a:xfrm>
+          <a:prstGeom prst="rect">
+            <a:avLst/>
+          </a:prstGeom>
+          <a:noFill/>
+          <a:ln/>
+        </p:spPr>
+        <p:txBody>
+          <a:bodyPr wrap="square" lIns="0" tIns="0" rIns="0" bIns="0" rtlCol="0" anchor="t"/>
+          <a:lstStyle/>
+          <a:p>
+            <a:pPr indent="0" marL="0">
+              <a:buNone/>
+            </a:pPr>
+            <a:r>
+              <a:rPr lang="en-US" sz="1300" dirty="0">
+                <a:solidFill>
+                  <a:schemeClr val="tx2"/>
+                </a:solidFill>
+              </a:rPr>
+              <a:t>сценаріїв вирішено діями в системі, а не лише відповіддю</a:t>
+            </a:r>
+            <a:endParaRPr lang="en-US" sz="1300" dirty="0"/>
+          </a:p>
+        </p:txBody>
+      </p:sp>
+      <p:sp>
+        <p:nvSpPr>
+          <p:cNvPr id="6" name="stat 1"/>
+          <p:cNvSpPr/>
+          <p:nvPr/>
+        </p:nvSpPr>
+        <p:spPr>
+          <a:xfrm>
+            <a:off x="4338218" y="1280160"/>
+            <a:ext cx="3515258" cy="1463040"/>
+          </a:xfrm>
+          <a:prstGeom prst="roundRect">
+            <a:avLst>
+              <a:gd name="adj" fmla="val 7500"/>
+            </a:avLst>
+          </a:prstGeom>
+          <a:solidFill>
+            <a:schemeClr val="bg2"/>
+          </a:solidFill>
+          <a:ln/>
+        </p:spPr>
+      </p:sp>
+      <p:sp>
+        <p:nvSpPr>
+          <p:cNvPr id="7" name="stat 1 value"/>
+          <p:cNvSpPr txBox="1"/>
+          <p:nvPr/>
+        </p:nvSpPr>
+        <p:spPr>
+          <a:xfrm>
+            <a:off x="4612538" y="1371600"/>
+            <a:ext cx="2966618" cy="685800"/>
+          </a:xfrm>
+          <a:prstGeom prst="rect">
+            <a:avLst/>
+          </a:prstGeom>
+          <a:noFill/>
+          <a:ln/>
+        </p:spPr>
+        <p:txBody>
+          <a:bodyPr wrap="square" lIns="0" tIns="0" rIns="0" bIns="0" rtlCol="0" anchor="ctr"/>
+          <a:lstStyle/>
+          <a:p>
+            <a:pPr indent="0" marL="0">
+              <a:buNone/>
+            </a:pPr>
+            <a:r>
+              <a:rPr lang="en-US" sz="4000" b="1" dirty="0">
+                <a:solidFill>
+                  <a:schemeClr val="accent4"/>
+                </a:solidFill>
+              </a:rPr>
+              <a:t>1 клік</a:t>
+            </a:r>
+            <a:endParaRPr lang="en-US" sz="4000" dirty="0"/>
+          </a:p>
+        </p:txBody>
+      </p:sp>
+      <p:sp>
+        <p:nvSpPr>
+          <p:cNvPr id="8" name="stat 1 label"/>
+          <p:cNvSpPr txBox="1"/>
+          <p:nvPr/>
+        </p:nvSpPr>
+        <p:spPr>
+          <a:xfrm>
+            <a:off x="4612538" y="2084832"/>
+            <a:ext cx="2966618" cy="594360"/>
+          </a:xfrm>
+          <a:prstGeom prst="rect">
+            <a:avLst/>
+          </a:prstGeom>
+          <a:noFill/>
+          <a:ln/>
+        </p:spPr>
+        <p:txBody>
+          <a:bodyPr wrap="square" lIns="0" tIns="0" rIns="0" bIns="0" rtlCol="0" anchor="t"/>
+          <a:lstStyle/>
+          <a:p>
+            <a:pPr indent="0" marL="0">
+              <a:buNone/>
+            </a:pPr>
+            <a:r>
+              <a:rPr lang="en-US" sz="1300" dirty="0">
+                <a:solidFill>
+                  <a:schemeClr val="tx2"/>
+                </a:solidFill>
+              </a:rPr>
+              <a:t>щоб адміністратор погодив ризикову дію з готовим розбором</a:t>
+            </a:r>
+            <a:endParaRPr lang="en-US" sz="1300" dirty="0"/>
+          </a:p>
+        </p:txBody>
+      </p:sp>
+      <p:sp>
+        <p:nvSpPr>
+          <p:cNvPr id="9" name="stat 2"/>
+          <p:cNvSpPr/>
+          <p:nvPr/>
+        </p:nvSpPr>
+        <p:spPr>
+          <a:xfrm>
+            <a:off x="8127797" y="1280160"/>
+            <a:ext cx="3515258" cy="1463040"/>
+          </a:xfrm>
+          <a:prstGeom prst="roundRect">
+            <a:avLst>
+              <a:gd name="adj" fmla="val 7500"/>
+            </a:avLst>
+          </a:prstGeom>
+          <a:solidFill>
+            <a:schemeClr val="bg2"/>
+          </a:solidFill>
+          <a:ln/>
+        </p:spPr>
+      </p:sp>
+      <p:sp>
+        <p:nvSpPr>
+          <p:cNvPr id="10" name="stat 2 value"/>
+          <p:cNvSpPr txBox="1"/>
+          <p:nvPr/>
+        </p:nvSpPr>
+        <p:spPr>
+          <a:xfrm>
+            <a:off x="8402117" y="1371600"/>
+            <a:ext cx="2966618" cy="685800"/>
+          </a:xfrm>
+          <a:prstGeom prst="rect">
+            <a:avLst/>
+          </a:prstGeom>
+          <a:noFill/>
+          <a:ln/>
+        </p:spPr>
+        <p:txBody>
+          <a:bodyPr wrap="square" lIns="0" tIns="0" rIns="0" bIns="0" rtlCol="0" anchor="ctr"/>
+          <a:lstStyle/>
+          <a:p>
+            <a:pPr indent="0" marL="0">
+              <a:buNone/>
+            </a:pPr>
+            <a:r>
+              <a:rPr lang="en-US" sz="4000" b="1" dirty="0">
+                <a:solidFill>
+                  <a:schemeClr val="accent3"/>
+                </a:solidFill>
+              </a:rPr>
+              <a:t>1 700 грн</a:t>
+            </a:r>
+            <a:endParaRPr lang="en-US" sz="4000" dirty="0"/>
+          </a:p>
+        </p:txBody>
+      </p:sp>
+      <p:sp>
+        <p:nvSpPr>
+          <p:cNvPr id="11" name="stat 2 label"/>
+          <p:cNvSpPr txBox="1"/>
+          <p:nvPr/>
+        </p:nvSpPr>
+        <p:spPr>
+          <a:xfrm>
+            <a:off x="8402117" y="2084832"/>
+            <a:ext cx="2966618" cy="594360"/>
+          </a:xfrm>
+          <a:prstGeom prst="rect">
+            <a:avLst/>
+          </a:prstGeom>
+          <a:noFill/>
+          <a:ln/>
+        </p:spPr>
+        <p:txBody>
+          <a:bodyPr wrap="square" lIns="0" tIns="0" rIns="0" bIns="0" rtlCol="0" anchor="t"/>
+          <a:lstStyle/>
+          <a:p>
+            <a:pPr indent="0" marL="0">
+              <a:buNone/>
+            </a:pPr>
+            <a:r>
+              <a:rPr lang="en-US" sz="1300" dirty="0">
+                <a:solidFill>
+                  <a:schemeClr val="tx2"/>
+                </a:solidFill>
+              </a:rPr>
+              <a:t>передоплат збережено або повернено клієнтам у демо</a:t>
+            </a:r>
+            <a:endParaRPr lang="en-US" sz="1300" dirty="0"/>
+          </a:p>
+        </p:txBody>
+      </p:sp>
+      <p:sp>
+        <p:nvSpPr>
+          <p:cNvPr id="12" name="criterion 0"/>
+          <p:cNvSpPr/>
+          <p:nvPr/>
+        </p:nvSpPr>
+        <p:spPr>
+          <a:xfrm>
+            <a:off x="548640" y="3017520"/>
+            <a:ext cx="11094415" cy="566928"/>
+          </a:xfrm>
+          <a:prstGeom prst="roundRect">
+            <a:avLst>
+              <a:gd name="adj" fmla="val 16129"/>
+            </a:avLst>
+          </a:prstGeom>
+          <a:solidFill>
+            <a:schemeClr val="bg2"/>
+          </a:solidFill>
+          <a:ln/>
+        </p:spPr>
+      </p:sp>
+      <p:sp>
+        <p:nvSpPr>
+          <p:cNvPr id="13" name="criterion 0 name"/>
+          <p:cNvSpPr txBox="1"/>
+          <p:nvPr/>
+        </p:nvSpPr>
+        <p:spPr>
+          <a:xfrm>
+            <a:off x="822960" y="3017520"/>
+            <a:ext cx="2926080" cy="566928"/>
+          </a:xfrm>
+          <a:prstGeom prst="rect">
+            <a:avLst/>
+          </a:prstGeom>
+          <a:noFill/>
+          <a:ln/>
+        </p:spPr>
+        <p:txBody>
+          <a:bodyPr wrap="square" lIns="0" tIns="0" rIns="0" bIns="0" rtlCol="0" anchor="ctr"/>
+          <a:lstStyle/>
+          <a:p>
+            <a:pPr indent="0" marL="0">
+              <a:buNone/>
+            </a:pPr>
+            <a:r>
+              <a:rPr lang="en-US" sz="1600" b="1" dirty="0">
+                <a:solidFill>
+                  <a:schemeClr val="accent1"/>
+                </a:solidFill>
+              </a:rPr>
+              <a:t>Operational Impact</a:t>
+            </a:r>
+            <a:endParaRPr lang="en-US" sz="1600" dirty="0"/>
+          </a:p>
+        </p:txBody>
+      </p:sp>
+      <p:sp>
+        <p:nvSpPr>
+          <p:cNvPr id="14" name="criterion 0 text"/>
+          <p:cNvSpPr txBox="1"/>
+          <p:nvPr/>
+        </p:nvSpPr>
+        <p:spPr>
+          <a:xfrm>
+            <a:off x="3840480" y="3017520"/>
+            <a:ext cx="7528255" cy="566928"/>
+          </a:xfrm>
+          <a:prstGeom prst="rect">
+            <a:avLst/>
+          </a:prstGeom>
+          <a:noFill/>
+          <a:ln/>
+        </p:spPr>
+        <p:txBody>
+          <a:bodyPr wrap="square" lIns="0" tIns="0" rIns="0" bIns="0" rtlCol="0" anchor="ctr"/>
+          <a:lstStyle/>
+          <a:p>
+            <a:pPr indent="0" marL="0">
+              <a:buNone/>
+            </a:pPr>
+            <a:r>
+              <a:rPr lang="en-US" sz="1500" dirty="0">
+                <a:solidFill>
+                  <a:schemeClr val="tx1"/>
+                </a:solidFill>
+              </a:rPr>
+              <a:t>Звернення закриваються діями в системі; людина — лише для ризикових рішень</a:t>
+            </a:r>
+            <a:endParaRPr lang="en-US" sz="1500" dirty="0"/>
+          </a:p>
+        </p:txBody>
+      </p:sp>
+      <p:sp>
+        <p:nvSpPr>
+          <p:cNvPr id="15" name="criterion 1"/>
+          <p:cNvSpPr/>
+          <p:nvPr/>
+        </p:nvSpPr>
+        <p:spPr>
+          <a:xfrm>
+            <a:off x="548640" y="3675888"/>
+            <a:ext cx="11094415" cy="566928"/>
+          </a:xfrm>
+          <a:prstGeom prst="roundRect">
+            <a:avLst>
+              <a:gd name="adj" fmla="val 16129"/>
+            </a:avLst>
+          </a:prstGeom>
+          <a:solidFill>
+            <a:schemeClr val="bg1"/>
+          </a:solidFill>
+          <a:ln/>
+        </p:spPr>
+      </p:sp>
+      <p:sp>
+        <p:nvSpPr>
+          <p:cNvPr id="16" name="criterion 1 name"/>
+          <p:cNvSpPr txBox="1"/>
+          <p:nvPr/>
+        </p:nvSpPr>
+        <p:spPr>
+          <a:xfrm>
+            <a:off x="822960" y="3675888"/>
+            <a:ext cx="2926080" cy="566928"/>
+          </a:xfrm>
+          <a:prstGeom prst="rect">
+            <a:avLst/>
+          </a:prstGeom>
+          <a:noFill/>
+          <a:ln/>
+        </p:spPr>
+        <p:txBody>
+          <a:bodyPr wrap="square" lIns="0" tIns="0" rIns="0" bIns="0" rtlCol="0" anchor="ctr"/>
+          <a:lstStyle/>
+          <a:p>
+            <a:pPr indent="0" marL="0">
+              <a:buNone/>
+            </a:pPr>
+            <a:r>
+              <a:rPr lang="en-US" sz="1600" b="1" dirty="0">
+                <a:solidFill>
+                  <a:schemeClr val="accent1"/>
+                </a:solidFill>
+              </a:rPr>
+              <a:t>Innovation</a:t>
+            </a:r>
+            <a:endParaRPr lang="en-US" sz="1600" dirty="0"/>
+          </a:p>
+        </p:txBody>
+      </p:sp>
+      <p:sp>
+        <p:nvSpPr>
+          <p:cNvPr id="17" name="criterion 1 text"/>
+          <p:cNvSpPr txBox="1"/>
+          <p:nvPr/>
+        </p:nvSpPr>
+        <p:spPr>
+          <a:xfrm>
+            <a:off x="3840480" y="3675888"/>
+            <a:ext cx="7528255" cy="566928"/>
+          </a:xfrm>
+          <a:prstGeom prst="rect">
+            <a:avLst/>
+          </a:prstGeom>
+          <a:noFill/>
+          <a:ln/>
+        </p:spPr>
+        <p:txBody>
+          <a:bodyPr wrap="square" lIns="0" tIns="0" rIns="0" bIns="0" rtlCol="0" anchor="ctr"/>
+          <a:lstStyle/>
+          <a:p>
+            <a:pPr indent="0" marL="0">
+              <a:buNone/>
+            </a:pPr>
+            <a:r>
+              <a:rPr lang="en-US" sz="1500" dirty="0">
+                <a:solidFill>
+                  <a:schemeClr val="tx1"/>
+                </a:solidFill>
+              </a:rPr>
+              <a:t>Permission engine, який налаштовує власник, і один агент для будь-якого бізнесу</a:t>
+            </a:r>
+            <a:endParaRPr lang="en-US" sz="1500" dirty="0"/>
+          </a:p>
+        </p:txBody>
+      </p:sp>
+      <p:sp>
+        <p:nvSpPr>
+          <p:cNvPr id="18" name="criterion 2"/>
+          <p:cNvSpPr/>
+          <p:nvPr/>
+        </p:nvSpPr>
+        <p:spPr>
+          <a:xfrm>
+            <a:off x="548640" y="4334256"/>
+            <a:ext cx="11094415" cy="566928"/>
+          </a:xfrm>
+          <a:prstGeom prst="roundRect">
+            <a:avLst>
+              <a:gd name="adj" fmla="val 16129"/>
+            </a:avLst>
+          </a:prstGeom>
+          <a:solidFill>
+            <a:schemeClr val="bg2"/>
+          </a:solidFill>
+          <a:ln/>
+        </p:spPr>
+      </p:sp>
+      <p:sp>
+        <p:nvSpPr>
+          <p:cNvPr id="19" name="criterion 2 name"/>
+          <p:cNvSpPr txBox="1"/>
+          <p:nvPr/>
+        </p:nvSpPr>
+        <p:spPr>
+          <a:xfrm>
+            <a:off x="822960" y="4334256"/>
+            <a:ext cx="2926080" cy="566928"/>
+          </a:xfrm>
+          <a:prstGeom prst="rect">
+            <a:avLst/>
+          </a:prstGeom>
+          <a:noFill/>
+          <a:ln/>
+        </p:spPr>
+        <p:txBody>
+          <a:bodyPr wrap="square" lIns="0" tIns="0" rIns="0" bIns="0" rtlCol="0" anchor="ctr"/>
+          <a:lstStyle/>
+          <a:p>
+            <a:pPr indent="0" marL="0">
+              <a:buNone/>
+            </a:pPr>
+            <a:r>
+              <a:rPr lang="en-US" sz="1600" b="1" dirty="0">
+                <a:solidFill>
+                  <a:schemeClr val="accent1"/>
+                </a:solidFill>
+              </a:rPr>
+              <a:t>Use of AI</a:t>
+            </a:r>
+            <a:endParaRPr lang="en-US" sz="1600" dirty="0"/>
+          </a:p>
+        </p:txBody>
+      </p:sp>
+      <p:sp>
+        <p:nvSpPr>
+          <p:cNvPr id="20" name="criterion 2 text"/>
+          <p:cNvSpPr txBox="1"/>
+          <p:nvPr/>
+        </p:nvSpPr>
+        <p:spPr>
+          <a:xfrm>
+            <a:off x="3840480" y="4334256"/>
+            <a:ext cx="7528255" cy="566928"/>
+          </a:xfrm>
+          <a:prstGeom prst="rect">
+            <a:avLst/>
+          </a:prstGeom>
+          <a:noFill/>
+          <a:ln/>
+        </p:spPr>
+        <p:txBody>
+          <a:bodyPr wrap="square" lIns="0" tIns="0" rIns="0" bIns="0" rtlCol="0" anchor="ctr"/>
+          <a:lstStyle/>
+          <a:p>
+            <a:pPr indent="0" marL="0">
+              <a:buNone/>
+            </a:pPr>
+            <a:r>
+              <a:rPr lang="en-US" sz="1500" dirty="0">
+                <a:solidFill>
+                  <a:schemeClr val="tx1"/>
+                </a:solidFill>
+              </a:rPr>
+              <a:t>Оркестратор Claude Sonnet, Gemma 4 для простих питань, агент з інструментами</a:t>
+            </a:r>
+            <a:endParaRPr lang="en-US" sz="1500" dirty="0"/>
+          </a:p>
+        </p:txBody>
+      </p:sp>
+      <p:sp>
+        <p:nvSpPr>
+          <p:cNvPr id="21" name="criterion 3"/>
+          <p:cNvSpPr/>
+          <p:nvPr/>
+        </p:nvSpPr>
+        <p:spPr>
+          <a:xfrm>
+            <a:off x="548640" y="4992624"/>
+            <a:ext cx="11094415" cy="566928"/>
+          </a:xfrm>
+          <a:prstGeom prst="roundRect">
+            <a:avLst>
+              <a:gd name="adj" fmla="val 16129"/>
+            </a:avLst>
+          </a:prstGeom>
+          <a:solidFill>
+            <a:schemeClr val="bg1"/>
+          </a:solidFill>
+          <a:ln/>
+        </p:spPr>
+      </p:sp>
+      <p:sp>
+        <p:nvSpPr>
+          <p:cNvPr id="22" name="criterion 3 name"/>
+          <p:cNvSpPr txBox="1"/>
+          <p:nvPr/>
+        </p:nvSpPr>
+        <p:spPr>
+          <a:xfrm>
+            <a:off x="822960" y="4992624"/>
+            <a:ext cx="2926080" cy="566928"/>
+          </a:xfrm>
+          <a:prstGeom prst="rect">
+            <a:avLst/>
+          </a:prstGeom>
+          <a:noFill/>
+          <a:ln/>
+        </p:spPr>
+        <p:txBody>
+          <a:bodyPr wrap="square" lIns="0" tIns="0" rIns="0" bIns="0" rtlCol="0" anchor="ctr"/>
+          <a:lstStyle/>
+          <a:p>
+            <a:pPr indent="0" marL="0">
+              <a:buNone/>
+            </a:pPr>
+            <a:r>
+              <a:rPr lang="en-US" sz="1600" b="1" dirty="0">
+                <a:solidFill>
+                  <a:schemeClr val="accent1"/>
+                </a:solidFill>
+              </a:rPr>
+              <a:t>Reasoning &amp; Context</a:t>
+            </a:r>
+            <a:endParaRPr lang="en-US" sz="1600" dirty="0"/>
+          </a:p>
+        </p:txBody>
+      </p:sp>
+      <p:sp>
+        <p:nvSpPr>
+          <p:cNvPr id="23" name="criterion 3 text"/>
+          <p:cNvSpPr txBox="1"/>
+          <p:nvPr/>
+        </p:nvSpPr>
+        <p:spPr>
+          <a:xfrm>
+            <a:off x="3840480" y="4992624"/>
+            <a:ext cx="7528255" cy="566928"/>
+          </a:xfrm>
+          <a:prstGeom prst="rect">
+            <a:avLst/>
+          </a:prstGeom>
+          <a:noFill/>
+          <a:ln/>
+        </p:spPr>
+        <p:txBody>
+          <a:bodyPr wrap="square" lIns="0" tIns="0" rIns="0" bIns="0" rtlCol="0" anchor="ctr"/>
+          <a:lstStyle/>
+          <a:p>
+            <a:pPr indent="0" marL="0">
+              <a:buNone/>
+            </a:pPr>
+            <a:r>
+              <a:rPr lang="en-US" sz="1500" dirty="0">
+                <a:solidFill>
+                  <a:schemeClr val="tx1"/>
+                </a:solidFill>
+              </a:rPr>
+              <a:t>Рішення залежить від історії клієнта, правил бізнесу та емоції звернення</a:t>
+            </a:r>
+            <a:endParaRPr lang="en-US" sz="1500" dirty="0"/>
+          </a:p>
+        </p:txBody>
+      </p:sp>
+      <p:sp>
+        <p:nvSpPr>
+          <p:cNvPr id="24" name="criterion 4"/>
+          <p:cNvSpPr/>
+          <p:nvPr/>
+        </p:nvSpPr>
+        <p:spPr>
+          <a:xfrm>
+            <a:off x="548640" y="5650992"/>
+            <a:ext cx="11094415" cy="566928"/>
+          </a:xfrm>
+          <a:prstGeom prst="roundRect">
+            <a:avLst>
+              <a:gd name="adj" fmla="val 16129"/>
+            </a:avLst>
+          </a:prstGeom>
+          <a:solidFill>
+            <a:schemeClr val="bg2"/>
+          </a:solidFill>
+          <a:ln/>
+        </p:spPr>
+      </p:sp>
+      <p:sp>
+        <p:nvSpPr>
+          <p:cNvPr id="25" name="criterion 4 name"/>
+          <p:cNvSpPr txBox="1"/>
+          <p:nvPr/>
+        </p:nvSpPr>
+        <p:spPr>
+          <a:xfrm>
+            <a:off x="822960" y="5650992"/>
+            <a:ext cx="2926080" cy="566928"/>
+          </a:xfrm>
+          <a:prstGeom prst="rect">
+            <a:avLst/>
+          </a:prstGeom>
+          <a:noFill/>
+          <a:ln/>
+        </p:spPr>
+        <p:txBody>
+          <a:bodyPr wrap="square" lIns="0" tIns="0" rIns="0" bIns="0" rtlCol="0" anchor="ctr"/>
+          <a:lstStyle/>
+          <a:p>
+            <a:pPr indent="0" marL="0">
+              <a:buNone/>
+            </a:pPr>
+            <a:r>
+              <a:rPr lang="en-US" sz="1600" b="1" dirty="0">
+                <a:solidFill>
+                  <a:schemeClr val="accent1"/>
+                </a:solidFill>
+              </a:rPr>
+              <a:t>Presentation &amp; Demo</a:t>
+            </a:r>
+            <a:endParaRPr lang="en-US" sz="1600" dirty="0"/>
+          </a:p>
+        </p:txBody>
+      </p:sp>
+      <p:sp>
+        <p:nvSpPr>
+          <p:cNvPr id="26" name="criterion 4 text"/>
+          <p:cNvSpPr txBox="1"/>
+          <p:nvPr/>
+        </p:nvSpPr>
+        <p:spPr>
+          <a:xfrm>
+            <a:off x="3840480" y="5650992"/>
+            <a:ext cx="7528255" cy="566928"/>
+          </a:xfrm>
+          <a:prstGeom prst="rect">
+            <a:avLst/>
+          </a:prstGeom>
+          <a:noFill/>
+          <a:ln/>
+        </p:spPr>
+        <p:txBody>
+          <a:bodyPr wrap="square" lIns="0" tIns="0" rIns="0" bIns="0" rtlCol="0" anchor="ctr"/>
+          <a:lstStyle/>
+          <a:p>
+            <a:pPr indent="0" marL="0">
+              <a:buNone/>
+            </a:pPr>
+            <a:r>
+              <a:rPr lang="en-US" sz="1500" dirty="0">
+                <a:solidFill>
+                  <a:schemeClr val="tx1"/>
+                </a:solidFill>
+              </a:rPr>
+              <a:t>Працюючий продукт: сайт, адмінка, API, MCP, телефон — усе на відео</a:t>
+            </a:r>
+            <a:endParaRPr lang="en-US" sz="1500" dirty="0"/>
+          </a:p>
+        </p:txBody>
+      </p:sp>
+      <p:sp>
+        <p:nvSpPr>
+          <p:cNvPr id="25" name="Slide Number Placeholder 0"/>
+          <p:cNvSpPr>
+            <a:spLocks noGrp="1"/>
+          </p:cNvSpPr>
+          <p:nvPr>
+            <p:ph type="sldNum" sz="quarter" idx="4294967295"/>
+          </p:nvPr>
+        </p:nvSpPr>
+        <p:spPr>
+          <a:xfrm>
+            <a:off x="11185855" y="6446520"/>
+            <a:ext cx="457200" cy="274320"/>
+          </a:xfrm>
+          <a:prstGeom prst="rect">
+            <a:avLst/>
+          </a:prstGeom>
+          <a:extLst>
+            <a:ext uri="{C572A759-6A51-4108-AA02-DFA0A04FC94B}">
+              <ma14:wrappingTextBoxFlag xmlns:ma14="http://schemas.microsoft.com/office/mac/drawingml/2011/main" val="0"/>
+            </a:ext>
+          </a:extLst>
+        </p:spPr>
+        <p:txBody>
+          <a:bodyPr/>
+          <a:lstStyle>
+            <a:lvl1pPr>
+              <a:defRPr sz="1000">
+                <a:solidFill>
+                  <a:schemeClr val="accent5"/>
+                </a:solidFill>
+              </a:defRPr>
+            </a:lvl1pPr>
+          </a:lstStyle>
+          <a:p>
+            <a:pPr algn="r"/>
+            <a:fld id="{F7021451-1387-4CA6-816F-3879F97B5CBC}" type="slidenum">
+              <a:rPr b="0" lang="en-US"/>
               <a:t>9</a:t>
             </a:fld>
             <a:endParaRPr lang="en-US"/>

--- a/presentation/Bookly-pitch.pptx
+++ b/presentation/Bookly-pitch.pptx
@@ -116,36 +116,36 @@
   <p:extLst>
     <p:ext uri="{521415D9-36F7-43E2-AB2F-B90AF26B5E84}">
       <p14:sectionLst xmlns:p14="http://schemas.microsoft.com/office/powerpoint/2010/main">
-        <p14:section name="Вступ" id="{d9b9f476-20f9-52f4-c1a7-9add09af9fc6}">
+        <p14:section name="Вступ" id="{436cbec5-e52d-d891-a31d-1e619f763091}">
           <p14:sldIdLst>
             <p14:sldId id="256"/>
           </p14:sldIdLst>
         </p14:section>
-        <p14:section name="Проблема і рішення" id="{53990c80-82ec-ae28-3c38-3b58afe01bd4}">
+        <p14:section name="Проблема і рішення" id="{d2272876-5f98-e091-d476-77ee517917c6}">
           <p14:sldIdLst>
             <p14:sldId id="257"/>
-          </p14:sldIdLst>
-        </p14:section>
-        <p14:section name="Як це працює" id="{55856757-7abf-6079-3efd-9d58a0054f74}">
-          <p14:sldIdLst>
             <p14:sldId id="258"/>
           </p14:sldIdLst>
         </p14:section>
-        <p14:section name="Демо" id="{e4ae56ed-4342-a248-a702-1fa86f4718f9}">
+        <p14:section name="Як це працює" id="{87db786e-1d74-946a-3510-1d6069b816d1}">
           <p14:sldIdLst>
             <p14:sldId id="259"/>
+          </p14:sldIdLst>
+        </p14:section>
+        <p14:section name="Демо" id="{c6d12330-3ad5-4ef2-9567-0b8925249dff}">
+          <p14:sldIdLst>
             <p14:sldId id="260"/>
             <p14:sldId id="261"/>
+            <p14:sldId id="262"/>
           </p14:sldIdLst>
         </p14:section>
-        <p14:section name="Чому це працює" id="{8bc77671-a8e4-09aa-7abd-ea31c1a2ce1f}">
+        <p14:section name="Чому це працює" id="{8d6172e8-f674-9bc7-742e-394bd88354f9}">
           <p14:sldIdLst>
-            <p14:sldId id="262"/>
             <p14:sldId id="263"/>
             <p14:sldId id="264"/>
           </p14:sldIdLst>
         </p14:section>
-        <p14:section name="Підсумок" id="{14544b80-21b1-5e6d-3a27-df410595974e}">
+        <p14:section name="Підсумок" id="{116006b1-b93d-f3fe-14cc-b22abbac3ae9}">
           <p14:sldIdLst>
             <p14:sldId id="265"/>
           </p14:sldIdLst>
@@ -642,7 +642,7 @@
           <a:p>
             <a:r>
               <a:rPr lang="en-US" dirty="0"/>
-              <a:t>Підсумок: AI тут не інтерфейс спілкування, а учасник операцій. Наступні кроки — інтеграції й прогнозування неявок на даних, які платформа вже збирає.</a:t>
+              <a:t>Цифри з демо: 500 грн Олени і 400 грн Максима збережено, 800 грн Петру повернено. Критерії: Operational Impact — звернення закриваються діями, людина лише для ризикових рішень; Innovation — permission engine, який налаштовує власник; Use of AI — оркестратор Claude Sonnet, Gemma 4, агент з інструментами; Reasoning &amp; Context — рішення залежить від історії клієнта й правил бізнесу; Demo — працюючий продукт. Підсумок: AI тут не інтерфейс спілкування, а учасник операцій. Наступні кроки — інтеграції й прогнозування неявок на даних, які платформа вже збирає.</a:t>
             </a:r>
             <a:endParaRPr lang="en-US" dirty="0"/>
           </a:p>
@@ -818,7 +818,7 @@
           <a:p>
             <a:r>
               <a:rPr lang="en-US" dirty="0"/>
-              <a:t>Кожне повідомлення спершу проходить тріаж: що людина хоче, у якому вона стані, чи це терміново. Прості питання дешево закриває Gemma 4. Усе, що змінює дані, йде через агента, а кожна дія перевіряється правилами бізнесу — модель не може обійти permission engine.</a:t>
+              <a:t>Ринок: у салонах близько 20% записів — неявки, це в середньому $3 600 втрат на місяць. Передоплата й чіткі правила скасування знижують неявки майже вдвічі — саме їх наш агент і застосовує автоматично. Конкуренти: Fresha вже має AI-консьєржа, але без налаштовуваних правил і погоджень; у Booksy власного AI-агента немає; Intercom Fin і Zendesk — загальні helpdesk-и, де за кожне рішення платять $0,99–2 і все треба інтегрувати самому. Ми — вертикальне рішення для бізнесів за записом, де AI діє за правилами власника. Цифри — оцінки вендорів, джерела внизу слайда.</a:t>
             </a:r>
             <a:endParaRPr lang="en-US" dirty="0"/>
           </a:p>
@@ -906,8 +906,7 @@
           <a:p>
             <a:r>
               <a:rPr lang="en-US" dirty="0"/>
-              <a:t>Агент не просто співчуває — він бачить, що це лояльна клієнтка, а політика салону дозволяє один виняток на пів року без погодження. Тому сам переносить і зберігає передоплату. В copilot видно кожен виклик інструмента.
-Відео: presentation/videos/scene-A.mp4</a:t>
+              <a:t>Кожне повідомлення спершу проходить тріаж: що людина хоче, у якому вона стані, чи це терміново. Прості питання дешево закриває Gemma 4. Усе, що змінює дані, йде через агента, а кожна дія перевіряється правилами бізнесу — модель не може обійти permission engine.</a:t>
             </a:r>
             <a:endParaRPr lang="en-US" dirty="0"/>
           </a:p>
@@ -995,8 +994,8 @@
           <a:p>
             <a:r>
               <a:rPr lang="en-US" dirty="0"/>
-              <a:t>Однакове звернення — інше рішення, бо інший контекст. Агент чесно пояснює клієнту, що чекає на рішення, а адміністратор отримує готовий розбір і кнопку «схвалити».
-Відео: presentation/videos/scene-B.mp4</a:t>
+              <a:t>Агент не просто співчуває — він бачить, що це лояльна клієнтка, а політика салону дозволяє один виняток на пів року без погодження. Тому сам переносить і зберігає передоплату. В copilot видно кожен виклик інструмента.
+Відео: presentation/videos/scene-A.mp4</a:t>
             </a:r>
             <a:endParaRPr lang="en-US" dirty="0"/>
           </a:p>
@@ -1084,8 +1083,8 @@
           <a:p>
             <a:r>
               <a:rPr lang="en-US" dirty="0"/>
-              <a:t>Той самий агент у іншому бізнесі поводиться обережніше, бо правила інші. Він розбиває задачу на дві дії, кожну погоджує людина, і тримає клієнта в курсі.
-Відео: presentation/videos/scene-C.mp4</a:t>
+              <a:t>Однакове звернення — інше рішення, бо інший контекст. Агент чесно пояснює клієнту, що чекає на рішення, а адміністратор отримує готовий розбір і кнопку «схвалити».
+Відео: presentation/videos/scene-B.mp4</a:t>
             </a:r>
             <a:endParaRPr lang="en-US" dirty="0"/>
           </a:p>
@@ -1173,7 +1172,8 @@
           <a:p>
             <a:r>
               <a:rPr lang="en-US" dirty="0"/>
-              <a:t>Це головна ідея повторного використання: агент не захардкожений під салон. Власник у налаштуваннях вирішує, що AI робить сам, а що лише з погодженням. Тому однакове звернення в салоні й клініці закінчується по-різному.</a:t>
+              <a:t>Той самий агент у іншому бізнесі поводиться обережніше, бо правила інші. Він розбиває задачу на дві дії, кожну погоджує людина, і тримає клієнта в курсі.
+Відео: presentation/videos/scene-C.mp4</a:t>
             </a:r>
             <a:endParaRPr lang="en-US" dirty="0"/>
           </a:p>
@@ -1261,7 +1261,7 @@
           <a:p>
             <a:r>
               <a:rPr lang="en-US" dirty="0"/>
-              <a:t>Під агентом — працююча платформа: мульти-тенант, PostgreSQL, Docker, 119 тестів бекенду. Будь-який салон чи клініка реєструється, налаштовує правила — і AI-підтримка працює одразу. Відео: presentation/videos/product-tour.mp4</a:t>
+              <a:t>Це головна ідея повторного використання: агент не захардкожений під салон. Власник у налаштуваннях вирішує, що AI робить сам, а що лише з погодженням. Тому однакове звернення в салоні й клініці закінчується по-різному.</a:t>
             </a:r>
             <a:endParaRPr lang="en-US" dirty="0"/>
           </a:p>
@@ -1349,7 +1349,7 @@
           <a:p>
             <a:r>
               <a:rPr lang="en-US" dirty="0"/>
-              <a:t>Цифри з демо: 500 грн Олени і 400 грн Максима збережено, 800 грн Петру повернено. Адміністратор не робить рутину руками, а лише погоджує те, що справді потребує людини. Далі коротко по п'яти критеріях з ТЗ. Прості питання (ціна, адреса) закриває Gemma 4 без дій — відео scene-Q.mp4 є як запасне.</a:t>
+              <a:t>Під агентом — працююча платформа: мульти-тенант, PostgreSQL, Docker, 119 тестів бекенду. Будь-який салон чи клініка реєструється, налаштовує правила — і AI-підтримка працює одразу. Відео: presentation/videos/product-tour.mp4</a:t>
             </a:r>
             <a:endParaRPr lang="en-US" dirty="0"/>
           </a:p>
@@ -2403,13 +2403,229 @@
       </p:sp>
       <p:sp>
         <p:nvSpPr>
-          <p:cNvPr id="4" name="repo"/>
+          <p:cNvPr id="4" name="closing stat 0"/>
           <p:cNvSpPr txBox="1"/>
           <p:nvPr/>
         </p:nvSpPr>
         <p:spPr>
           <a:xfrm>
-            <a:off x="548640" y="5760720"/>
+            <a:off x="548640" y="4937760"/>
+            <a:ext cx="2743200" cy="548640"/>
+          </a:xfrm>
+          <a:prstGeom prst="rect">
+            <a:avLst/>
+          </a:prstGeom>
+          <a:noFill/>
+          <a:ln/>
+        </p:spPr>
+        <p:txBody>
+          <a:bodyPr wrap="square" lIns="0" tIns="0" rIns="0" bIns="0" rtlCol="0" anchor="ctr"/>
+          <a:lstStyle/>
+          <a:p>
+            <a:pPr indent="0" marL="0">
+              <a:buNone/>
+            </a:pPr>
+            <a:r>
+              <a:rPr lang="en-US" sz="3000" b="1" dirty="0">
+                <a:solidFill>
+                  <a:schemeClr val="bg1"/>
+                </a:solidFill>
+              </a:rPr>
+              <a:t>3 з 3</a:t>
+            </a:r>
+            <a:endParaRPr lang="en-US" sz="3000" dirty="0"/>
+          </a:p>
+        </p:txBody>
+      </p:sp>
+      <p:sp>
+        <p:nvSpPr>
+          <p:cNvPr id="5" name="closing stat 0 label"/>
+          <p:cNvSpPr txBox="1"/>
+          <p:nvPr/>
+        </p:nvSpPr>
+        <p:spPr>
+          <a:xfrm>
+            <a:off x="548640" y="5486400"/>
+            <a:ext cx="2743200" cy="411480"/>
+          </a:xfrm>
+          <a:prstGeom prst="rect">
+            <a:avLst/>
+          </a:prstGeom>
+          <a:noFill/>
+          <a:ln/>
+        </p:spPr>
+        <p:txBody>
+          <a:bodyPr wrap="square" lIns="0" tIns="0" rIns="0" bIns="0" rtlCol="0" anchor="ctr"/>
+          <a:lstStyle/>
+          <a:p>
+            <a:pPr indent="0" marL="0">
+              <a:buNone/>
+            </a:pPr>
+            <a:r>
+              <a:rPr lang="en-US" sz="1300" dirty="0">
+                <a:solidFill>
+                  <a:schemeClr val="accent6"/>
+                </a:solidFill>
+              </a:rPr>
+              <a:t>сценаріїв вирішено діями</a:t>
+            </a:r>
+            <a:endParaRPr lang="en-US" sz="1300" dirty="0"/>
+          </a:p>
+        </p:txBody>
+      </p:sp>
+      <p:sp>
+        <p:nvSpPr>
+          <p:cNvPr id="6" name="closing stat 1"/>
+          <p:cNvSpPr txBox="1"/>
+          <p:nvPr/>
+        </p:nvSpPr>
+        <p:spPr>
+          <a:xfrm>
+            <a:off x="3566160" y="4937760"/>
+            <a:ext cx="2743200" cy="548640"/>
+          </a:xfrm>
+          <a:prstGeom prst="rect">
+            <a:avLst/>
+          </a:prstGeom>
+          <a:noFill/>
+          <a:ln/>
+        </p:spPr>
+        <p:txBody>
+          <a:bodyPr wrap="square" lIns="0" tIns="0" rIns="0" bIns="0" rtlCol="0" anchor="ctr"/>
+          <a:lstStyle/>
+          <a:p>
+            <a:pPr indent="0" marL="0">
+              <a:buNone/>
+            </a:pPr>
+            <a:r>
+              <a:rPr lang="en-US" sz="3000" b="1" dirty="0">
+                <a:solidFill>
+                  <a:schemeClr val="bg1"/>
+                </a:solidFill>
+              </a:rPr>
+              <a:t>1 клік</a:t>
+            </a:r>
+            <a:endParaRPr lang="en-US" sz="3000" dirty="0"/>
+          </a:p>
+        </p:txBody>
+      </p:sp>
+      <p:sp>
+        <p:nvSpPr>
+          <p:cNvPr id="7" name="closing stat 1 label"/>
+          <p:cNvSpPr txBox="1"/>
+          <p:nvPr/>
+        </p:nvSpPr>
+        <p:spPr>
+          <a:xfrm>
+            <a:off x="3566160" y="5486400"/>
+            <a:ext cx="2743200" cy="411480"/>
+          </a:xfrm>
+          <a:prstGeom prst="rect">
+            <a:avLst/>
+          </a:prstGeom>
+          <a:noFill/>
+          <a:ln/>
+        </p:spPr>
+        <p:txBody>
+          <a:bodyPr wrap="square" lIns="0" tIns="0" rIns="0" bIns="0" rtlCol="0" anchor="ctr"/>
+          <a:lstStyle/>
+          <a:p>
+            <a:pPr indent="0" marL="0">
+              <a:buNone/>
+            </a:pPr>
+            <a:r>
+              <a:rPr lang="en-US" sz="1300" dirty="0">
+                <a:solidFill>
+                  <a:schemeClr val="accent6"/>
+                </a:solidFill>
+              </a:rPr>
+              <a:t>на погодження ризикової дії</a:t>
+            </a:r>
+            <a:endParaRPr lang="en-US" sz="1300" dirty="0"/>
+          </a:p>
+        </p:txBody>
+      </p:sp>
+      <p:sp>
+        <p:nvSpPr>
+          <p:cNvPr id="8" name="closing stat 2"/>
+          <p:cNvSpPr txBox="1"/>
+          <p:nvPr/>
+        </p:nvSpPr>
+        <p:spPr>
+          <a:xfrm>
+            <a:off x="6583680" y="4937760"/>
+            <a:ext cx="2743200" cy="548640"/>
+          </a:xfrm>
+          <a:prstGeom prst="rect">
+            <a:avLst/>
+          </a:prstGeom>
+          <a:noFill/>
+          <a:ln/>
+        </p:spPr>
+        <p:txBody>
+          <a:bodyPr wrap="square" lIns="0" tIns="0" rIns="0" bIns="0" rtlCol="0" anchor="ctr"/>
+          <a:lstStyle/>
+          <a:p>
+            <a:pPr indent="0" marL="0">
+              <a:buNone/>
+            </a:pPr>
+            <a:r>
+              <a:rPr lang="en-US" sz="3000" b="1" dirty="0">
+                <a:solidFill>
+                  <a:schemeClr val="bg1"/>
+                </a:solidFill>
+              </a:rPr>
+              <a:t>1 700 грн</a:t>
+            </a:r>
+            <a:endParaRPr lang="en-US" sz="3000" dirty="0"/>
+          </a:p>
+        </p:txBody>
+      </p:sp>
+      <p:sp>
+        <p:nvSpPr>
+          <p:cNvPr id="9" name="closing stat 2 label"/>
+          <p:cNvSpPr txBox="1"/>
+          <p:nvPr/>
+        </p:nvSpPr>
+        <p:spPr>
+          <a:xfrm>
+            <a:off x="6583680" y="5486400"/>
+            <a:ext cx="2743200" cy="411480"/>
+          </a:xfrm>
+          <a:prstGeom prst="rect">
+            <a:avLst/>
+          </a:prstGeom>
+          <a:noFill/>
+          <a:ln/>
+        </p:spPr>
+        <p:txBody>
+          <a:bodyPr wrap="square" lIns="0" tIns="0" rIns="0" bIns="0" rtlCol="0" anchor="ctr"/>
+          <a:lstStyle/>
+          <a:p>
+            <a:pPr indent="0" marL="0">
+              <a:buNone/>
+            </a:pPr>
+            <a:r>
+              <a:rPr lang="en-US" sz="1300" dirty="0">
+                <a:solidFill>
+                  <a:schemeClr val="accent6"/>
+                </a:solidFill>
+              </a:rPr>
+              <a:t>передоплат збережено або повернено</a:t>
+            </a:r>
+            <a:endParaRPr lang="en-US" sz="1300" dirty="0"/>
+          </a:p>
+        </p:txBody>
+      </p:sp>
+      <p:sp>
+        <p:nvSpPr>
+          <p:cNvPr id="10" name="repo"/>
+          <p:cNvSpPr txBox="1"/>
+          <p:nvPr/>
+        </p:nvSpPr>
+        <p:spPr>
+          <a:xfrm>
+            <a:off x="548640" y="6263640"/>
             <a:ext cx="8229600" cy="365760"/>
           </a:xfrm>
           <a:prstGeom prst="rect">
@@ -3367,7 +3583,7 @@
                   <a:schemeClr val="tx1"/>
                 </a:solidFill>
               </a:rPr>
-              <a:t>Як агент приймає рішення</a:t>
+              <a:t>Ринок і конкуренти</a:t>
             </a:r>
             <a:endParaRPr lang="en-US" sz="3200" dirty="0"/>
           </a:p>
@@ -3375,51 +3591,19 @@
       </p:sp>
       <p:sp>
         <p:nvSpPr>
-          <p:cNvPr id="3" name="flow 1 card"/>
+          <p:cNvPr id="3" name="market stat 0"/>
           <p:cNvSpPr/>
           <p:nvPr/>
         </p:nvSpPr>
         <p:spPr>
           <a:xfrm>
-            <a:off x="548640" y="1554480"/>
-            <a:ext cx="1965960" cy="2651760"/>
+            <a:off x="548640" y="1234440"/>
+            <a:ext cx="2567864" cy="1234440"/>
           </a:xfrm>
           <a:prstGeom prst="roundRect">
             <a:avLst>
-              <a:gd name="adj" fmla="val 5581"/>
+              <a:gd name="adj" fmla="val 8889"/>
             </a:avLst>
-          </a:prstGeom>
-          <a:solidFill>
-            <a:schemeClr val="bg1"/>
-          </a:solidFill>
-          <a:ln w="9525">
-            <a:solidFill>
-              <a:schemeClr val="bg2"/>
-            </a:solidFill>
-            <a:prstDash val="solid"/>
-          </a:ln>
-          <a:effectLst>
-            <a:outerShdw sx="100000" sy="100000" kx="0" ky="0" algn="bl" rotWithShape="0" blurRad="101600" dist="25400" dir="5400000">
-              <a:srgbClr val="16163A">
-                <a:alpha val="12000"/>
-              </a:srgbClr>
-            </a:outerShdw>
-          </a:effectLst>
-        </p:spPr>
-      </p:sp>
-      <p:sp>
-        <p:nvSpPr>
-          <p:cNvPr id="4" name="flow 1 icon bg"/>
-          <p:cNvSpPr/>
-          <p:nvPr/>
-        </p:nvSpPr>
-        <p:spPr>
-          <a:xfrm>
-            <a:off x="822960" y="1828800"/>
-            <a:ext cx="566928" cy="566928"/>
-          </a:xfrm>
-          <a:prstGeom prst="ellipse">
-            <a:avLst/>
           </a:prstGeom>
           <a:solidFill>
             <a:schemeClr val="bg2"/>
@@ -3427,40 +3611,16 @@
           <a:ln/>
         </p:spPr>
       </p:sp>
-      <p:pic>
-        <p:nvPicPr>
-          <p:cNvPr id="5" name="flow 1 icon" descr="preencoded.png">    </p:cNvPr>
-          <p:cNvPicPr>
-            <a:picLocks noChangeAspect="1"/>
-          </p:cNvPicPr>
-          <p:nvPr/>
-        </p:nvPicPr>
-        <p:blipFill>
-          <a:blip r:embed="rId1"/>
-          <a:stretch>
-            <a:fillRect/>
-          </a:stretch>
-        </p:blipFill>
-        <p:spPr>
-          <a:xfrm>
-            <a:off x="950976" y="1956816"/>
-            <a:ext cx="310896" cy="310896"/>
-          </a:xfrm>
-          <a:prstGeom prst="rect">
-            <a:avLst/>
-          </a:prstGeom>
-        </p:spPr>
-      </p:pic>
-      <p:sp>
-        <p:nvSpPr>
-          <p:cNvPr id="6" name="flow 1 head"/>
+      <p:sp>
+        <p:nvSpPr>
+          <p:cNvPr id="4" name="market stat 0 value"/>
           <p:cNvSpPr txBox="1"/>
           <p:nvPr/>
         </p:nvSpPr>
         <p:spPr>
           <a:xfrm>
-            <a:off x="822960" y="2578608"/>
-            <a:ext cx="1417320" cy="594360"/>
+            <a:off x="777240" y="1325880"/>
+            <a:ext cx="2110664" cy="566928"/>
           </a:xfrm>
           <a:prstGeom prst="rect">
             <a:avLst/>
@@ -3469,34 +3629,34 @@
           <a:ln/>
         </p:spPr>
         <p:txBody>
-          <a:bodyPr wrap="square" lIns="0" tIns="0" rIns="0" bIns="0" rtlCol="0" anchor="t"/>
+          <a:bodyPr wrap="square" lIns="0" tIns="0" rIns="0" bIns="0" rtlCol="0" anchor="ctr"/>
           <a:lstStyle/>
           <a:p>
             <a:pPr indent="0" marL="0">
               <a:buNone/>
             </a:pPr>
             <a:r>
-              <a:rPr lang="en-US" sz="1400" b="1" dirty="0">
-                <a:solidFill>
-                  <a:schemeClr val="tx1"/>
+              <a:rPr lang="en-US" sz="3000" b="1" dirty="0">
+                <a:solidFill>
+                  <a:schemeClr val="accent2"/>
                 </a:solidFill>
               </a:rPr>
-              <a:t>Клієнт пише</a:t>
-            </a:r>
-            <a:endParaRPr lang="en-US" sz="1400" dirty="0"/>
-          </a:p>
-        </p:txBody>
-      </p:sp>
-      <p:sp>
-        <p:nvSpPr>
-          <p:cNvPr id="7" name="flow 1 text"/>
+              <a:t>≈20%</a:t>
+            </a:r>
+            <a:endParaRPr lang="en-US" sz="3000" dirty="0"/>
+          </a:p>
+        </p:txBody>
+      </p:sp>
+      <p:sp>
+        <p:nvSpPr>
+          <p:cNvPr id="5" name="market stat 0 label"/>
           <p:cNvSpPr txBox="1"/>
           <p:nvPr/>
         </p:nvSpPr>
         <p:spPr>
           <a:xfrm>
-            <a:off x="822960" y="3264408"/>
-            <a:ext cx="1417320" cy="758952"/>
+            <a:off x="777240" y="1901952"/>
+            <a:ext cx="2110664" cy="502920"/>
           </a:xfrm>
           <a:prstGeom prst="rect">
             <a:avLst/>
@@ -3512,100 +3672,32 @@
               <a:buNone/>
             </a:pPr>
             <a:r>
-              <a:rPr lang="en-US" sz="1300" dirty="0">
+              <a:rPr lang="en-US" sz="1200" dirty="0">
                 <a:solidFill>
                   <a:schemeClr val="tx2"/>
                 </a:solidFill>
               </a:rPr>
-              <a:t>Чат на сайті, віджет або дзвінок</a:t>
-            </a:r>
-            <a:endParaRPr lang="en-US" sz="1300" dirty="0"/>
-          </a:p>
-        </p:txBody>
-      </p:sp>
-      <p:sp>
-        <p:nvSpPr>
-          <p:cNvPr id="8" name="flow arrow 1"/>
-          <p:cNvSpPr txBox="1"/>
-          <p:nvPr/>
-        </p:nvSpPr>
-        <p:spPr>
-          <a:xfrm>
-            <a:off x="2514600" y="2651760"/>
-            <a:ext cx="316154" cy="457200"/>
-          </a:xfrm>
-          <a:prstGeom prst="rect">
-            <a:avLst/>
-          </a:prstGeom>
-          <a:noFill/>
-          <a:ln/>
-        </p:spPr>
-        <p:txBody>
-          <a:bodyPr wrap="square" lIns="0" tIns="0" rIns="0" bIns="0" rtlCol="0" anchor="ctr"/>
-          <a:lstStyle/>
-          <a:p>
-            <a:pPr algn="ctr" indent="0" marL="0">
-              <a:buNone/>
-            </a:pPr>
-            <a:r>
-              <a:rPr lang="en-US" sz="2000" b="1" dirty="0">
-                <a:solidFill>
-                  <a:schemeClr val="accent1"/>
-                </a:solidFill>
-              </a:rPr>
-              <a:t>→</a:t>
-            </a:r>
-            <a:endParaRPr lang="en-US" sz="2000" dirty="0"/>
-          </a:p>
-        </p:txBody>
-      </p:sp>
-      <p:sp>
-        <p:nvSpPr>
-          <p:cNvPr id="9" name="flow 2 card"/>
+              <a:t>записів у салонах — неявки</a:t>
+            </a:r>
+            <a:endParaRPr lang="en-US" sz="1200" dirty="0"/>
+          </a:p>
+        </p:txBody>
+      </p:sp>
+      <p:sp>
+        <p:nvSpPr>
+          <p:cNvPr id="6" name="market stat 1"/>
           <p:cNvSpPr/>
           <p:nvPr/>
         </p:nvSpPr>
         <p:spPr>
           <a:xfrm>
-            <a:off x="2830754" y="1554480"/>
-            <a:ext cx="1965960" cy="2651760"/>
+            <a:off x="3390824" y="1234440"/>
+            <a:ext cx="2567864" cy="1234440"/>
           </a:xfrm>
           <a:prstGeom prst="roundRect">
             <a:avLst>
-              <a:gd name="adj" fmla="val 5581"/>
+              <a:gd name="adj" fmla="val 8889"/>
             </a:avLst>
-          </a:prstGeom>
-          <a:solidFill>
-            <a:schemeClr val="bg1"/>
-          </a:solidFill>
-          <a:ln w="9525">
-            <a:solidFill>
-              <a:schemeClr val="bg2"/>
-            </a:solidFill>
-            <a:prstDash val="solid"/>
-          </a:ln>
-          <a:effectLst>
-            <a:outerShdw sx="100000" sy="100000" kx="0" ky="0" algn="bl" rotWithShape="0" blurRad="101600" dist="25400" dir="5400000">
-              <a:srgbClr val="16163A">
-                <a:alpha val="12000"/>
-              </a:srgbClr>
-            </a:outerShdw>
-          </a:effectLst>
-        </p:spPr>
-      </p:sp>
-      <p:sp>
-        <p:nvSpPr>
-          <p:cNvPr id="10" name="flow 2 icon bg"/>
-          <p:cNvSpPr/>
-          <p:nvPr/>
-        </p:nvSpPr>
-        <p:spPr>
-          <a:xfrm>
-            <a:off x="3105074" y="1828800"/>
-            <a:ext cx="566928" cy="566928"/>
-          </a:xfrm>
-          <a:prstGeom prst="ellipse">
-            <a:avLst/>
           </a:prstGeom>
           <a:solidFill>
             <a:schemeClr val="bg2"/>
@@ -3613,40 +3705,16 @@
           <a:ln/>
         </p:spPr>
       </p:sp>
-      <p:pic>
-        <p:nvPicPr>
-          <p:cNvPr id="11" name="flow 2 icon" descr="preencoded.png">    </p:cNvPr>
-          <p:cNvPicPr>
-            <a:picLocks noChangeAspect="1"/>
-          </p:cNvPicPr>
-          <p:nvPr/>
-        </p:nvPicPr>
-        <p:blipFill>
-          <a:blip r:embed="rId2"/>
-          <a:stretch>
-            <a:fillRect/>
-          </a:stretch>
-        </p:blipFill>
-        <p:spPr>
-          <a:xfrm>
-            <a:off x="3233090" y="1956816"/>
-            <a:ext cx="310896" cy="310896"/>
-          </a:xfrm>
-          <a:prstGeom prst="rect">
-            <a:avLst/>
-          </a:prstGeom>
-        </p:spPr>
-      </p:pic>
-      <p:sp>
-        <p:nvSpPr>
-          <p:cNvPr id="12" name="flow 2 head"/>
+      <p:sp>
+        <p:nvSpPr>
+          <p:cNvPr id="7" name="market stat 1 value"/>
           <p:cNvSpPr txBox="1"/>
           <p:nvPr/>
         </p:nvSpPr>
         <p:spPr>
           <a:xfrm>
-            <a:off x="3105074" y="2578608"/>
-            <a:ext cx="1417320" cy="594360"/>
+            <a:off x="3619424" y="1325880"/>
+            <a:ext cx="2110664" cy="566928"/>
           </a:xfrm>
           <a:prstGeom prst="rect">
             <a:avLst/>
@@ -3655,34 +3723,34 @@
           <a:ln/>
         </p:spPr>
         <p:txBody>
-          <a:bodyPr wrap="square" lIns="0" tIns="0" rIns="0" bIns="0" rtlCol="0" anchor="t"/>
+          <a:bodyPr wrap="square" lIns="0" tIns="0" rIns="0" bIns="0" rtlCol="0" anchor="ctr"/>
           <a:lstStyle/>
           <a:p>
             <a:pPr indent="0" marL="0">
               <a:buNone/>
             </a:pPr>
             <a:r>
-              <a:rPr lang="en-US" sz="1400" b="1" dirty="0">
-                <a:solidFill>
-                  <a:schemeClr val="tx1"/>
+              <a:rPr lang="en-US" sz="3000" b="1" dirty="0">
+                <a:solidFill>
+                  <a:schemeClr val="accent2"/>
                 </a:solidFill>
               </a:rPr>
-              <a:t>Оркестратор</a:t>
-            </a:r>
-            <a:endParaRPr lang="en-US" sz="1400" dirty="0"/>
-          </a:p>
-        </p:txBody>
-      </p:sp>
-      <p:sp>
-        <p:nvSpPr>
-          <p:cNvPr id="13" name="flow 2 text"/>
+              <a:t>$3 600</a:t>
+            </a:r>
+            <a:endParaRPr lang="en-US" sz="3000" dirty="0"/>
+          </a:p>
+        </p:txBody>
+      </p:sp>
+      <p:sp>
+        <p:nvSpPr>
+          <p:cNvPr id="8" name="market stat 1 label"/>
           <p:cNvSpPr txBox="1"/>
           <p:nvPr/>
         </p:nvSpPr>
         <p:spPr>
           <a:xfrm>
-            <a:off x="3105074" y="3264408"/>
-            <a:ext cx="1417320" cy="758952"/>
+            <a:off x="3619424" y="1901952"/>
+            <a:ext cx="2110664" cy="502920"/>
           </a:xfrm>
           <a:prstGeom prst="rect">
             <a:avLst/>
@@ -3698,100 +3766,32 @@
               <a:buNone/>
             </a:pPr>
             <a:r>
-              <a:rPr lang="en-US" sz="1300" dirty="0">
+              <a:rPr lang="en-US" sz="1200" dirty="0">
                 <a:solidFill>
                   <a:schemeClr val="tx2"/>
                 </a:solidFill>
               </a:rPr>
-              <a:t>Claude Sonnet: намір, емоція, терміновість, маршрут</a:t>
-            </a:r>
-            <a:endParaRPr lang="en-US" sz="1300" dirty="0"/>
-          </a:p>
-        </p:txBody>
-      </p:sp>
-      <p:sp>
-        <p:nvSpPr>
-          <p:cNvPr id="14" name="flow arrow 2"/>
-          <p:cNvSpPr txBox="1"/>
-          <p:nvPr/>
-        </p:nvSpPr>
-        <p:spPr>
-          <a:xfrm>
-            <a:off x="4796714" y="2651760"/>
-            <a:ext cx="316154" cy="457200"/>
-          </a:xfrm>
-          <a:prstGeom prst="rect">
-            <a:avLst/>
-          </a:prstGeom>
-          <a:noFill/>
-          <a:ln/>
-        </p:spPr>
-        <p:txBody>
-          <a:bodyPr wrap="square" lIns="0" tIns="0" rIns="0" bIns="0" rtlCol="0" anchor="ctr"/>
-          <a:lstStyle/>
-          <a:p>
-            <a:pPr algn="ctr" indent="0" marL="0">
-              <a:buNone/>
-            </a:pPr>
-            <a:r>
-              <a:rPr lang="en-US" sz="2000" b="1" dirty="0">
-                <a:solidFill>
-                  <a:schemeClr val="accent1"/>
-                </a:solidFill>
-              </a:rPr>
-              <a:t>→</a:t>
-            </a:r>
-            <a:endParaRPr lang="en-US" sz="2000" dirty="0"/>
-          </a:p>
-        </p:txBody>
-      </p:sp>
-      <p:sp>
-        <p:nvSpPr>
-          <p:cNvPr id="15" name="flow 3 card"/>
+              <a:t>втрат салону на місяць через неявки</a:t>
+            </a:r>
+            <a:endParaRPr lang="en-US" sz="1200" dirty="0"/>
+          </a:p>
+        </p:txBody>
+      </p:sp>
+      <p:sp>
+        <p:nvSpPr>
+          <p:cNvPr id="9" name="market stat 2"/>
           <p:cNvSpPr/>
           <p:nvPr/>
         </p:nvSpPr>
         <p:spPr>
           <a:xfrm>
-            <a:off x="5112868" y="1554480"/>
-            <a:ext cx="1965960" cy="2651760"/>
+            <a:off x="6233008" y="1234440"/>
+            <a:ext cx="2567864" cy="1234440"/>
           </a:xfrm>
           <a:prstGeom prst="roundRect">
             <a:avLst>
-              <a:gd name="adj" fmla="val 5581"/>
+              <a:gd name="adj" fmla="val 8889"/>
             </a:avLst>
-          </a:prstGeom>
-          <a:solidFill>
-            <a:schemeClr val="bg1"/>
-          </a:solidFill>
-          <a:ln w="9525">
-            <a:solidFill>
-              <a:schemeClr val="bg2"/>
-            </a:solidFill>
-            <a:prstDash val="solid"/>
-          </a:ln>
-          <a:effectLst>
-            <a:outerShdw sx="100000" sy="100000" kx="0" ky="0" algn="bl" rotWithShape="0" blurRad="101600" dist="25400" dir="5400000">
-              <a:srgbClr val="16163A">
-                <a:alpha val="12000"/>
-              </a:srgbClr>
-            </a:outerShdw>
-          </a:effectLst>
-        </p:spPr>
-      </p:sp>
-      <p:sp>
-        <p:nvSpPr>
-          <p:cNvPr id="16" name="flow 3 icon bg"/>
-          <p:cNvSpPr/>
-          <p:nvPr/>
-        </p:nvSpPr>
-        <p:spPr>
-          <a:xfrm>
-            <a:off x="5387188" y="1828800"/>
-            <a:ext cx="566928" cy="566928"/>
-          </a:xfrm>
-          <a:prstGeom prst="ellipse">
-            <a:avLst/>
           </a:prstGeom>
           <a:solidFill>
             <a:schemeClr val="bg2"/>
@@ -3799,40 +3799,16 @@
           <a:ln/>
         </p:spPr>
       </p:sp>
-      <p:pic>
-        <p:nvPicPr>
-          <p:cNvPr id="17" name="flow 3 icon" descr="preencoded.png">    </p:cNvPr>
-          <p:cNvPicPr>
-            <a:picLocks noChangeAspect="1"/>
-          </p:cNvPicPr>
-          <p:nvPr/>
-        </p:nvPicPr>
-        <p:blipFill>
-          <a:blip r:embed="rId3"/>
-          <a:stretch>
-            <a:fillRect/>
-          </a:stretch>
-        </p:blipFill>
-        <p:spPr>
-          <a:xfrm>
-            <a:off x="5515204" y="1956816"/>
-            <a:ext cx="310896" cy="310896"/>
-          </a:xfrm>
-          <a:prstGeom prst="rect">
-            <a:avLst/>
-          </a:prstGeom>
-        </p:spPr>
-      </p:pic>
-      <p:sp>
-        <p:nvSpPr>
-          <p:cNvPr id="18" name="flow 3 head"/>
+      <p:sp>
+        <p:nvSpPr>
+          <p:cNvPr id="10" name="market stat 2 value"/>
           <p:cNvSpPr txBox="1"/>
           <p:nvPr/>
         </p:nvSpPr>
         <p:spPr>
           <a:xfrm>
-            <a:off x="5387188" y="2578608"/>
-            <a:ext cx="1417320" cy="594360"/>
+            <a:off x="6461608" y="1325880"/>
+            <a:ext cx="2110664" cy="566928"/>
           </a:xfrm>
           <a:prstGeom prst="rect">
             <a:avLst/>
@@ -3841,34 +3817,34 @@
           <a:ln/>
         </p:spPr>
         <p:txBody>
-          <a:bodyPr wrap="square" lIns="0" tIns="0" rIns="0" bIns="0" rtlCol="0" anchor="t"/>
+          <a:bodyPr wrap="square" lIns="0" tIns="0" rIns="0" bIns="0" rtlCol="0" anchor="ctr"/>
           <a:lstStyle/>
           <a:p>
             <a:pPr indent="0" marL="0">
               <a:buNone/>
             </a:pPr>
             <a:r>
-              <a:rPr lang="en-US" sz="1400" b="1" dirty="0">
-                <a:solidFill>
-                  <a:schemeClr val="tx1"/>
+              <a:rPr lang="en-US" sz="3000" b="1" dirty="0">
+                <a:solidFill>
+                  <a:schemeClr val="accent3"/>
                 </a:solidFill>
               </a:rPr>
-              <a:t>Агент-виконавець</a:t>
-            </a:r>
-            <a:endParaRPr lang="en-US" sz="1400" dirty="0"/>
-          </a:p>
-        </p:txBody>
-      </p:sp>
-      <p:sp>
-        <p:nvSpPr>
-          <p:cNvPr id="19" name="flow 3 text"/>
+              <a:t>−45%</a:t>
+            </a:r>
+            <a:endParaRPr lang="en-US" sz="3000" dirty="0"/>
+          </a:p>
+        </p:txBody>
+      </p:sp>
+      <p:sp>
+        <p:nvSpPr>
+          <p:cNvPr id="11" name="market stat 2 label"/>
           <p:cNvSpPr txBox="1"/>
           <p:nvPr/>
         </p:nvSpPr>
         <p:spPr>
           <a:xfrm>
-            <a:off x="5387188" y="3264408"/>
-            <a:ext cx="1417320" cy="758952"/>
+            <a:off x="6461608" y="1901952"/>
+            <a:ext cx="2110664" cy="502920"/>
           </a:xfrm>
           <a:prstGeom prst="rect">
             <a:avLst/>
@@ -3884,100 +3860,32 @@
               <a:buNone/>
             </a:pPr>
             <a:r>
-              <a:rPr lang="en-US" sz="1300" dirty="0">
+              <a:rPr lang="en-US" sz="1200" dirty="0">
                 <a:solidFill>
                   <a:schemeClr val="tx2"/>
                 </a:solidFill>
               </a:rPr>
-              <a:t>Читає профіль і правила, викликає інструменти</a:t>
-            </a:r>
-            <a:endParaRPr lang="en-US" sz="1300" dirty="0"/>
-          </a:p>
-        </p:txBody>
-      </p:sp>
-      <p:sp>
-        <p:nvSpPr>
-          <p:cNvPr id="20" name="flow arrow 3"/>
-          <p:cNvSpPr txBox="1"/>
-          <p:nvPr/>
-        </p:nvSpPr>
-        <p:spPr>
-          <a:xfrm>
-            <a:off x="7078828" y="2651760"/>
-            <a:ext cx="316154" cy="457200"/>
-          </a:xfrm>
-          <a:prstGeom prst="rect">
-            <a:avLst/>
-          </a:prstGeom>
-          <a:noFill/>
-          <a:ln/>
-        </p:spPr>
-        <p:txBody>
-          <a:bodyPr wrap="square" lIns="0" tIns="0" rIns="0" bIns="0" rtlCol="0" anchor="ctr"/>
-          <a:lstStyle/>
-          <a:p>
-            <a:pPr algn="ctr" indent="0" marL="0">
-              <a:buNone/>
-            </a:pPr>
-            <a:r>
-              <a:rPr lang="en-US" sz="2000" b="1" dirty="0">
-                <a:solidFill>
-                  <a:schemeClr val="accent1"/>
-                </a:solidFill>
-              </a:rPr>
-              <a:t>→</a:t>
-            </a:r>
-            <a:endParaRPr lang="en-US" sz="2000" dirty="0"/>
-          </a:p>
-        </p:txBody>
-      </p:sp>
-      <p:sp>
-        <p:nvSpPr>
-          <p:cNvPr id="21" name="flow 4 card"/>
+              <a:t>неявок, коли є передоплата й правила скасування</a:t>
+            </a:r>
+            <a:endParaRPr lang="en-US" sz="1200" dirty="0"/>
+          </a:p>
+        </p:txBody>
+      </p:sp>
+      <p:sp>
+        <p:nvSpPr>
+          <p:cNvPr id="12" name="market stat 3"/>
           <p:cNvSpPr/>
           <p:nvPr/>
         </p:nvSpPr>
         <p:spPr>
           <a:xfrm>
-            <a:off x="7394981" y="1554480"/>
-            <a:ext cx="1965960" cy="2651760"/>
+            <a:off x="9075191" y="1234440"/>
+            <a:ext cx="2567864" cy="1234440"/>
           </a:xfrm>
           <a:prstGeom prst="roundRect">
             <a:avLst>
-              <a:gd name="adj" fmla="val 5581"/>
+              <a:gd name="adj" fmla="val 8889"/>
             </a:avLst>
-          </a:prstGeom>
-          <a:solidFill>
-            <a:schemeClr val="bg1"/>
-          </a:solidFill>
-          <a:ln w="9525">
-            <a:solidFill>
-              <a:schemeClr val="bg2"/>
-            </a:solidFill>
-            <a:prstDash val="solid"/>
-          </a:ln>
-          <a:effectLst>
-            <a:outerShdw sx="100000" sy="100000" kx="0" ky="0" algn="bl" rotWithShape="0" blurRad="101600" dist="25400" dir="5400000">
-              <a:srgbClr val="16163A">
-                <a:alpha val="12000"/>
-              </a:srgbClr>
-            </a:outerShdw>
-          </a:effectLst>
-        </p:spPr>
-      </p:sp>
-      <p:sp>
-        <p:nvSpPr>
-          <p:cNvPr id="22" name="flow 4 icon bg"/>
-          <p:cNvSpPr/>
-          <p:nvPr/>
-        </p:nvSpPr>
-        <p:spPr>
-          <a:xfrm>
-            <a:off x="7669301" y="1828800"/>
-            <a:ext cx="566928" cy="566928"/>
-          </a:xfrm>
-          <a:prstGeom prst="ellipse">
-            <a:avLst/>
           </a:prstGeom>
           <a:solidFill>
             <a:schemeClr val="bg2"/>
@@ -3985,40 +3893,16 @@
           <a:ln/>
         </p:spPr>
       </p:sp>
-      <p:pic>
-        <p:nvPicPr>
-          <p:cNvPr id="23" name="flow 4 icon" descr="preencoded.png">    </p:cNvPr>
-          <p:cNvPicPr>
-            <a:picLocks noChangeAspect="1"/>
-          </p:cNvPicPr>
-          <p:nvPr/>
-        </p:nvPicPr>
-        <p:blipFill>
-          <a:blip r:embed="rId4"/>
-          <a:stretch>
-            <a:fillRect/>
-          </a:stretch>
-        </p:blipFill>
-        <p:spPr>
-          <a:xfrm>
-            <a:off x="7797317" y="1956816"/>
-            <a:ext cx="310896" cy="310896"/>
-          </a:xfrm>
-          <a:prstGeom prst="rect">
-            <a:avLst/>
-          </a:prstGeom>
-        </p:spPr>
-      </p:pic>
-      <p:sp>
-        <p:nvSpPr>
-          <p:cNvPr id="24" name="flow 4 head"/>
+      <p:sp>
+        <p:nvSpPr>
+          <p:cNvPr id="13" name="market stat 3 value"/>
           <p:cNvSpPr txBox="1"/>
           <p:nvPr/>
         </p:nvSpPr>
         <p:spPr>
           <a:xfrm>
-            <a:off x="7669301" y="2578608"/>
-            <a:ext cx="1417320" cy="594360"/>
+            <a:off x="9303791" y="1325880"/>
+            <a:ext cx="2110664" cy="566928"/>
           </a:xfrm>
           <a:prstGeom prst="rect">
             <a:avLst/>
@@ -4027,34 +3911,34 @@
           <a:ln/>
         </p:spPr>
         <p:txBody>
-          <a:bodyPr wrap="square" lIns="0" tIns="0" rIns="0" bIns="0" rtlCol="0" anchor="t"/>
+          <a:bodyPr wrap="square" lIns="0" tIns="0" rIns="0" bIns="0" rtlCol="0" anchor="ctr"/>
           <a:lstStyle/>
           <a:p>
             <a:pPr indent="0" marL="0">
               <a:buNone/>
             </a:pPr>
             <a:r>
-              <a:rPr lang="en-US" sz="1400" b="1" dirty="0">
-                <a:solidFill>
-                  <a:schemeClr val="tx1"/>
+              <a:rPr lang="en-US" sz="3000" b="1" dirty="0">
+                <a:solidFill>
+                  <a:schemeClr val="accent1"/>
                 </a:solidFill>
               </a:rPr>
-              <a:t>Permission engine</a:t>
-            </a:r>
-            <a:endParaRPr lang="en-US" sz="1400" dirty="0"/>
-          </a:p>
-        </p:txBody>
-      </p:sp>
-      <p:sp>
-        <p:nvSpPr>
-          <p:cNvPr id="25" name="flow 4 text"/>
+              <a:t>$0,99–2</a:t>
+            </a:r>
+            <a:endParaRPr lang="en-US" sz="3000" dirty="0"/>
+          </a:p>
+        </p:txBody>
+      </p:sp>
+      <p:sp>
+        <p:nvSpPr>
+          <p:cNvPr id="14" name="market stat 3 label"/>
           <p:cNvSpPr txBox="1"/>
           <p:nvPr/>
         </p:nvSpPr>
         <p:spPr>
           <a:xfrm>
-            <a:off x="7669301" y="3264408"/>
-            <a:ext cx="1417320" cy="758952"/>
+            <a:off x="9303791" y="1901952"/>
+            <a:ext cx="2110664" cy="502920"/>
           </a:xfrm>
           <a:prstGeom prst="rect">
             <a:avLst/>
@@ -4070,27 +3954,1894 @@
               <a:buNone/>
             </a:pPr>
             <a:r>
-              <a:rPr lang="en-US" sz="1300" dirty="0">
+              <a:rPr lang="en-US" sz="1200" dirty="0">
                 <a:solidFill>
                   <a:schemeClr val="tx2"/>
                 </a:solidFill>
               </a:rPr>
-              <a:t>Сам · з погодженням · заборонено</a:t>
-            </a:r>
-            <a:endParaRPr lang="en-US" sz="1300" dirty="0"/>
-          </a:p>
-        </p:txBody>
-      </p:sp>
-      <p:sp>
-        <p:nvSpPr>
-          <p:cNvPr id="26" name="flow arrow 4"/>
+              <a:t>платить бізнес за одне AI-рішення в Intercom і Zendesk</a:t>
+            </a:r>
+            <a:endParaRPr lang="en-US" sz="1200" dirty="0"/>
+          </a:p>
+        </p:txBody>
+      </p:sp>
+      <p:graphicFrame>
+        <p:nvGraphicFramePr>
+          <p:cNvPr id="4" name="competitors table"/>
+          <p:cNvGraphicFramePr>
+            <a:graphicFrameLocks noGrp="1"/>
+          </p:cNvGraphicFramePr>
+          <p:nvPr>
+            <p:extLst>
+              <p:ext uri="{D42A27DB-BD31-4B8C-83A1-F6EECF244321}">
+                <p14:modId xmlns:p14="http://schemas.microsoft.com/office/powerpoint/2010/main" val="1579011935"/>
+              </p:ext>
+            </p:extLst>
+          </p:nvPr>
+        </p:nvGraphicFramePr>
+        <p:xfrm>
+          <a:off x="548640" y="2697480"/>
+          <a:ext cx="11094415" cy="914400"/>
+        </p:xfrm>
+        <a:graphic>
+          <a:graphicData uri="http://schemas.openxmlformats.org/drawingml/2006/table">
+            <a:tbl>
+              <a:tblPr/>
+              <a:tblGrid>
+                <a:gridCol w="3200400"/>
+                <a:gridCol w="1874520"/>
+                <a:gridCol w="2011680"/>
+                <a:gridCol w="1737360"/>
+                <a:gridCol w="2267712"/>
+              </a:tblGrid>
+              <a:tr h="475488">
+                <a:tc>
+                  <a:txBody>
+                    <a:bodyPr/>
+                    <a:lstStyle/>
+                    <a:p>
+                      <a:pPr algn="ctr" indent="0" marL="0">
+                        <a:buNone/>
+                      </a:pPr>
+                      <a:endParaRPr lang="en-US" sz="1300" dirty="0"/>
+                    </a:p>
+                  </a:txBody>
+                  <a:tcPr marL="73152" marR="73152" marT="0" marB="0" anchor="ctr">
+                    <a:lnL w="12700" cap="flat" cmpd="sng" algn="ctr">
+                      <a:solidFill>
+                        <a:srgbClr val="F1F2FB"/>
+                      </a:solidFill>
+                      <a:prstDash val="solid"/>
+                      <a:round/>
+                      <a:headEnd type="none" w="med" len="med"/>
+                      <a:tailEnd type="none" w="med" len="med"/>
+                    </a:lnL>
+                    <a:lnR w="12700" cap="flat" cmpd="sng" algn="ctr">
+                      <a:solidFill>
+                        <a:srgbClr val="F1F2FB"/>
+                      </a:solidFill>
+                      <a:prstDash val="solid"/>
+                      <a:round/>
+                      <a:headEnd type="none" w="med" len="med"/>
+                      <a:tailEnd type="none" w="med" len="med"/>
+                    </a:lnR>
+                    <a:lnT w="12700" cap="flat" cmpd="sng" algn="ctr">
+                      <a:solidFill>
+                        <a:srgbClr val="F1F2FB"/>
+                      </a:solidFill>
+                      <a:prstDash val="solid"/>
+                      <a:round/>
+                      <a:headEnd type="none" w="med" len="med"/>
+                      <a:tailEnd type="none" w="med" len="med"/>
+                    </a:lnT>
+                    <a:lnB w="12700" cap="flat" cmpd="sng" algn="ctr">
+                      <a:solidFill>
+                        <a:srgbClr val="F1F2FB"/>
+                      </a:solidFill>
+                      <a:prstDash val="solid"/>
+                      <a:round/>
+                      <a:headEnd type="none" w="med" len="med"/>
+                      <a:tailEnd type="none" w="med" len="med"/>
+                    </a:lnB>
+                    <a:solidFill>
+                      <a:schemeClr val="tx2"/>
+                    </a:solidFill>
+                  </a:tcPr>
+                </a:tc>
+                <a:tc>
+                  <a:txBody>
+                    <a:bodyPr/>
+                    <a:lstStyle/>
+                    <a:p>
+                      <a:pPr algn="ctr" indent="0" marL="0">
+                        <a:buNone/>
+                      </a:pPr>
+                      <a:r>
+                        <a:rPr lang="en-US" sz="1300" b="1" dirty="0">
+                          <a:solidFill>
+                            <a:schemeClr val="bg1"/>
+                          </a:solidFill>
+                        </a:rPr>
+                        <a:t>Bookly</a:t>
+                      </a:r>
+                      <a:endParaRPr lang="en-US" sz="1300" dirty="0"/>
+                    </a:p>
+                  </a:txBody>
+                  <a:tcPr marL="73152" marR="73152" marT="0" marB="0" anchor="ctr">
+                    <a:lnL w="12700" cap="flat" cmpd="sng" algn="ctr">
+                      <a:solidFill>
+                        <a:srgbClr val="F1F2FB"/>
+                      </a:solidFill>
+                      <a:prstDash val="solid"/>
+                      <a:round/>
+                      <a:headEnd type="none" w="med" len="med"/>
+                      <a:tailEnd type="none" w="med" len="med"/>
+                    </a:lnL>
+                    <a:lnR w="12700" cap="flat" cmpd="sng" algn="ctr">
+                      <a:solidFill>
+                        <a:srgbClr val="F1F2FB"/>
+                      </a:solidFill>
+                      <a:prstDash val="solid"/>
+                      <a:round/>
+                      <a:headEnd type="none" w="med" len="med"/>
+                      <a:tailEnd type="none" w="med" len="med"/>
+                    </a:lnR>
+                    <a:lnT w="12700" cap="flat" cmpd="sng" algn="ctr">
+                      <a:solidFill>
+                        <a:srgbClr val="F1F2FB"/>
+                      </a:solidFill>
+                      <a:prstDash val="solid"/>
+                      <a:round/>
+                      <a:headEnd type="none" w="med" len="med"/>
+                      <a:tailEnd type="none" w="med" len="med"/>
+                    </a:lnT>
+                    <a:lnB w="12700" cap="flat" cmpd="sng" algn="ctr">
+                      <a:solidFill>
+                        <a:srgbClr val="F1F2FB"/>
+                      </a:solidFill>
+                      <a:prstDash val="solid"/>
+                      <a:round/>
+                      <a:headEnd type="none" w="med" len="med"/>
+                      <a:tailEnd type="none" w="med" len="med"/>
+                    </a:lnB>
+                    <a:solidFill>
+                      <a:schemeClr val="accent1"/>
+                    </a:solidFill>
+                  </a:tcPr>
+                </a:tc>
+                <a:tc>
+                  <a:txBody>
+                    <a:bodyPr/>
+                    <a:lstStyle/>
+                    <a:p>
+                      <a:pPr algn="ctr" indent="0" marL="0">
+                        <a:buNone/>
+                      </a:pPr>
+                      <a:r>
+                        <a:rPr lang="en-US" sz="1300" b="1" dirty="0">
+                          <a:solidFill>
+                            <a:schemeClr val="bg1"/>
+                          </a:solidFill>
+                        </a:rPr>
+                        <a:t>Fresha AI Concierge</a:t>
+                      </a:r>
+                      <a:endParaRPr lang="en-US" sz="1300" dirty="0"/>
+                    </a:p>
+                  </a:txBody>
+                  <a:tcPr marL="73152" marR="73152" marT="0" marB="0" anchor="ctr">
+                    <a:lnL w="12700" cap="flat" cmpd="sng" algn="ctr">
+                      <a:solidFill>
+                        <a:srgbClr val="F1F2FB"/>
+                      </a:solidFill>
+                      <a:prstDash val="solid"/>
+                      <a:round/>
+                      <a:headEnd type="none" w="med" len="med"/>
+                      <a:tailEnd type="none" w="med" len="med"/>
+                    </a:lnL>
+                    <a:lnR w="12700" cap="flat" cmpd="sng" algn="ctr">
+                      <a:solidFill>
+                        <a:srgbClr val="F1F2FB"/>
+                      </a:solidFill>
+                      <a:prstDash val="solid"/>
+                      <a:round/>
+                      <a:headEnd type="none" w="med" len="med"/>
+                      <a:tailEnd type="none" w="med" len="med"/>
+                    </a:lnR>
+                    <a:lnT w="12700" cap="flat" cmpd="sng" algn="ctr">
+                      <a:solidFill>
+                        <a:srgbClr val="F1F2FB"/>
+                      </a:solidFill>
+                      <a:prstDash val="solid"/>
+                      <a:round/>
+                      <a:headEnd type="none" w="med" len="med"/>
+                      <a:tailEnd type="none" w="med" len="med"/>
+                    </a:lnT>
+                    <a:lnB w="12700" cap="flat" cmpd="sng" algn="ctr">
+                      <a:solidFill>
+                        <a:srgbClr val="F1F2FB"/>
+                      </a:solidFill>
+                      <a:prstDash val="solid"/>
+                      <a:round/>
+                      <a:headEnd type="none" w="med" len="med"/>
+                      <a:tailEnd type="none" w="med" len="med"/>
+                    </a:lnB>
+                    <a:solidFill>
+                      <a:schemeClr val="tx2"/>
+                    </a:solidFill>
+                  </a:tcPr>
+                </a:tc>
+                <a:tc>
+                  <a:txBody>
+                    <a:bodyPr/>
+                    <a:lstStyle/>
+                    <a:p>
+                      <a:pPr algn="ctr" indent="0" marL="0">
+                        <a:buNone/>
+                      </a:pPr>
+                      <a:r>
+                        <a:rPr lang="en-US" sz="1300" b="1" dirty="0">
+                          <a:solidFill>
+                            <a:schemeClr val="bg1"/>
+                          </a:solidFill>
+                        </a:rPr>
+                        <a:t>Booksy</a:t>
+                      </a:r>
+                      <a:endParaRPr lang="en-US" sz="1300" dirty="0"/>
+                    </a:p>
+                  </a:txBody>
+                  <a:tcPr marL="73152" marR="73152" marT="0" marB="0" anchor="ctr">
+                    <a:lnL w="12700" cap="flat" cmpd="sng" algn="ctr">
+                      <a:solidFill>
+                        <a:srgbClr val="F1F2FB"/>
+                      </a:solidFill>
+                      <a:prstDash val="solid"/>
+                      <a:round/>
+                      <a:headEnd type="none" w="med" len="med"/>
+                      <a:tailEnd type="none" w="med" len="med"/>
+                    </a:lnL>
+                    <a:lnR w="12700" cap="flat" cmpd="sng" algn="ctr">
+                      <a:solidFill>
+                        <a:srgbClr val="F1F2FB"/>
+                      </a:solidFill>
+                      <a:prstDash val="solid"/>
+                      <a:round/>
+                      <a:headEnd type="none" w="med" len="med"/>
+                      <a:tailEnd type="none" w="med" len="med"/>
+                    </a:lnR>
+                    <a:lnT w="12700" cap="flat" cmpd="sng" algn="ctr">
+                      <a:solidFill>
+                        <a:srgbClr val="F1F2FB"/>
+                      </a:solidFill>
+                      <a:prstDash val="solid"/>
+                      <a:round/>
+                      <a:headEnd type="none" w="med" len="med"/>
+                      <a:tailEnd type="none" w="med" len="med"/>
+                    </a:lnT>
+                    <a:lnB w="12700" cap="flat" cmpd="sng" algn="ctr">
+                      <a:solidFill>
+                        <a:srgbClr val="F1F2FB"/>
+                      </a:solidFill>
+                      <a:prstDash val="solid"/>
+                      <a:round/>
+                      <a:headEnd type="none" w="med" len="med"/>
+                      <a:tailEnd type="none" w="med" len="med"/>
+                    </a:lnB>
+                    <a:solidFill>
+                      <a:schemeClr val="tx2"/>
+                    </a:solidFill>
+                  </a:tcPr>
+                </a:tc>
+                <a:tc>
+                  <a:txBody>
+                    <a:bodyPr/>
+                    <a:lstStyle/>
+                    <a:p>
+                      <a:pPr algn="ctr" indent="0" marL="0">
+                        <a:buNone/>
+                      </a:pPr>
+                      <a:r>
+                        <a:rPr lang="en-US" sz="1300" b="1" dirty="0">
+                          <a:solidFill>
+                            <a:schemeClr val="bg1"/>
+                          </a:solidFill>
+                        </a:rPr>
+                        <a:t>Intercom Fin / Zendesk AI</a:t>
+                      </a:r>
+                      <a:endParaRPr lang="en-US" sz="1300" dirty="0"/>
+                    </a:p>
+                  </a:txBody>
+                  <a:tcPr marL="73152" marR="73152" marT="0" marB="0" anchor="ctr">
+                    <a:lnL w="12700" cap="flat" cmpd="sng" algn="ctr">
+                      <a:solidFill>
+                        <a:srgbClr val="F1F2FB"/>
+                      </a:solidFill>
+                      <a:prstDash val="solid"/>
+                      <a:round/>
+                      <a:headEnd type="none" w="med" len="med"/>
+                      <a:tailEnd type="none" w="med" len="med"/>
+                    </a:lnL>
+                    <a:lnR w="12700" cap="flat" cmpd="sng" algn="ctr">
+                      <a:solidFill>
+                        <a:srgbClr val="F1F2FB"/>
+                      </a:solidFill>
+                      <a:prstDash val="solid"/>
+                      <a:round/>
+                      <a:headEnd type="none" w="med" len="med"/>
+                      <a:tailEnd type="none" w="med" len="med"/>
+                    </a:lnR>
+                    <a:lnT w="12700" cap="flat" cmpd="sng" algn="ctr">
+                      <a:solidFill>
+                        <a:srgbClr val="F1F2FB"/>
+                      </a:solidFill>
+                      <a:prstDash val="solid"/>
+                      <a:round/>
+                      <a:headEnd type="none" w="med" len="med"/>
+                      <a:tailEnd type="none" w="med" len="med"/>
+                    </a:lnT>
+                    <a:lnB w="12700" cap="flat" cmpd="sng" algn="ctr">
+                      <a:solidFill>
+                        <a:srgbClr val="F1F2FB"/>
+                      </a:solidFill>
+                      <a:prstDash val="solid"/>
+                      <a:round/>
+                      <a:headEnd type="none" w="med" len="med"/>
+                      <a:tailEnd type="none" w="med" len="med"/>
+                    </a:lnB>
+                    <a:solidFill>
+                      <a:schemeClr val="tx2"/>
+                    </a:solidFill>
+                  </a:tcPr>
+                </a:tc>
+              </a:tr>
+              <a:tr h="475488">
+                <a:tc>
+                  <a:txBody>
+                    <a:bodyPr/>
+                    <a:lstStyle/>
+                    <a:p>
+                      <a:pPr indent="0" marL="0">
+                        <a:buNone/>
+                      </a:pPr>
+                      <a:r>
+                        <a:rPr lang="en-US" sz="1300" b="1" dirty="0">
+                          <a:solidFill>
+                            <a:schemeClr val="tx1"/>
+                          </a:solidFill>
+                        </a:rPr>
+                        <a:t>Сам переносить і скасовує записи</a:t>
+                      </a:r>
+                      <a:endParaRPr lang="en-US" sz="1300" dirty="0"/>
+                    </a:p>
+                  </a:txBody>
+                  <a:tcPr marL="73152" marR="73152" marT="0" marB="0" anchor="ctr">
+                    <a:lnL w="12700" cap="flat" cmpd="sng" algn="ctr">
+                      <a:solidFill>
+                        <a:srgbClr val="F1F2FB"/>
+                      </a:solidFill>
+                      <a:prstDash val="solid"/>
+                      <a:round/>
+                      <a:headEnd type="none" w="med" len="med"/>
+                      <a:tailEnd type="none" w="med" len="med"/>
+                    </a:lnL>
+                    <a:lnR w="12700" cap="flat" cmpd="sng" algn="ctr">
+                      <a:solidFill>
+                        <a:srgbClr val="F1F2FB"/>
+                      </a:solidFill>
+                      <a:prstDash val="solid"/>
+                      <a:round/>
+                      <a:headEnd type="none" w="med" len="med"/>
+                      <a:tailEnd type="none" w="med" len="med"/>
+                    </a:lnR>
+                    <a:lnT w="12700" cap="flat" cmpd="sng" algn="ctr">
+                      <a:solidFill>
+                        <a:srgbClr val="F1F2FB"/>
+                      </a:solidFill>
+                      <a:prstDash val="solid"/>
+                      <a:round/>
+                      <a:headEnd type="none" w="med" len="med"/>
+                      <a:tailEnd type="none" w="med" len="med"/>
+                    </a:lnT>
+                    <a:lnB w="12700" cap="flat" cmpd="sng" algn="ctr">
+                      <a:solidFill>
+                        <a:srgbClr val="F1F2FB"/>
+                      </a:solidFill>
+                      <a:prstDash val="solid"/>
+                      <a:round/>
+                      <a:headEnd type="none" w="med" len="med"/>
+                      <a:tailEnd type="none" w="med" len="med"/>
+                    </a:lnB>
+                    <a:solidFill>
+                      <a:srgbClr val="FFFFFF"/>
+                    </a:solidFill>
+                  </a:tcPr>
+                </a:tc>
+                <a:tc>
+                  <a:txBody>
+                    <a:bodyPr/>
+                    <a:lstStyle/>
+                    <a:p>
+                      <a:pPr algn="ctr" indent="0" marL="0">
+                        <a:buNone/>
+                      </a:pPr>
+                      <a:r>
+                        <a:rPr lang="en-US" sz="1300" b="1" dirty="0">
+                          <a:solidFill>
+                            <a:schemeClr val="accent3"/>
+                          </a:solidFill>
+                        </a:rPr>
+                        <a:t>так</a:t>
+                      </a:r>
+                      <a:endParaRPr lang="en-US" sz="1300" dirty="0"/>
+                    </a:p>
+                  </a:txBody>
+                  <a:tcPr marL="73152" marR="73152" marT="0" marB="0" anchor="ctr">
+                    <a:lnL w="12700" cap="flat" cmpd="sng" algn="ctr">
+                      <a:solidFill>
+                        <a:srgbClr val="F1F2FB"/>
+                      </a:solidFill>
+                      <a:prstDash val="solid"/>
+                      <a:round/>
+                      <a:headEnd type="none" w="med" len="med"/>
+                      <a:tailEnd type="none" w="med" len="med"/>
+                    </a:lnL>
+                    <a:lnR w="12700" cap="flat" cmpd="sng" algn="ctr">
+                      <a:solidFill>
+                        <a:srgbClr val="F1F2FB"/>
+                      </a:solidFill>
+                      <a:prstDash val="solid"/>
+                      <a:round/>
+                      <a:headEnd type="none" w="med" len="med"/>
+                      <a:tailEnd type="none" w="med" len="med"/>
+                    </a:lnR>
+                    <a:lnT w="12700" cap="flat" cmpd="sng" algn="ctr">
+                      <a:solidFill>
+                        <a:srgbClr val="F1F2FB"/>
+                      </a:solidFill>
+                      <a:prstDash val="solid"/>
+                      <a:round/>
+                      <a:headEnd type="none" w="med" len="med"/>
+                      <a:tailEnd type="none" w="med" len="med"/>
+                    </a:lnT>
+                    <a:lnB w="12700" cap="flat" cmpd="sng" algn="ctr">
+                      <a:solidFill>
+                        <a:srgbClr val="F1F2FB"/>
+                      </a:solidFill>
+                      <a:prstDash val="solid"/>
+                      <a:round/>
+                      <a:headEnd type="none" w="med" len="med"/>
+                      <a:tailEnd type="none" w="med" len="med"/>
+                    </a:lnB>
+                    <a:solidFill>
+                      <a:schemeClr val="bg2"/>
+                    </a:solidFill>
+                  </a:tcPr>
+                </a:tc>
+                <a:tc>
+                  <a:txBody>
+                    <a:bodyPr/>
+                    <a:lstStyle/>
+                    <a:p>
+                      <a:pPr algn="ctr" indent="0" marL="0">
+                        <a:buNone/>
+                      </a:pPr>
+                      <a:r>
+                        <a:rPr lang="en-US" sz="1300" b="1" dirty="0">
+                          <a:solidFill>
+                            <a:schemeClr val="accent3"/>
+                          </a:solidFill>
+                        </a:rPr>
+                        <a:t>так</a:t>
+                      </a:r>
+                      <a:endParaRPr lang="en-US" sz="1300" dirty="0"/>
+                    </a:p>
+                  </a:txBody>
+                  <a:tcPr marL="73152" marR="73152" marT="0" marB="0" anchor="ctr">
+                    <a:lnL w="12700" cap="flat" cmpd="sng" algn="ctr">
+                      <a:solidFill>
+                        <a:srgbClr val="F1F2FB"/>
+                      </a:solidFill>
+                      <a:prstDash val="solid"/>
+                      <a:round/>
+                      <a:headEnd type="none" w="med" len="med"/>
+                      <a:tailEnd type="none" w="med" len="med"/>
+                    </a:lnL>
+                    <a:lnR w="12700" cap="flat" cmpd="sng" algn="ctr">
+                      <a:solidFill>
+                        <a:srgbClr val="F1F2FB"/>
+                      </a:solidFill>
+                      <a:prstDash val="solid"/>
+                      <a:round/>
+                      <a:headEnd type="none" w="med" len="med"/>
+                      <a:tailEnd type="none" w="med" len="med"/>
+                    </a:lnR>
+                    <a:lnT w="12700" cap="flat" cmpd="sng" algn="ctr">
+                      <a:solidFill>
+                        <a:srgbClr val="F1F2FB"/>
+                      </a:solidFill>
+                      <a:prstDash val="solid"/>
+                      <a:round/>
+                      <a:headEnd type="none" w="med" len="med"/>
+                      <a:tailEnd type="none" w="med" len="med"/>
+                    </a:lnT>
+                    <a:lnB w="12700" cap="flat" cmpd="sng" algn="ctr">
+                      <a:solidFill>
+                        <a:srgbClr val="F1F2FB"/>
+                      </a:solidFill>
+                      <a:prstDash val="solid"/>
+                      <a:round/>
+                      <a:headEnd type="none" w="med" len="med"/>
+                      <a:tailEnd type="none" w="med" len="med"/>
+                    </a:lnB>
+                    <a:solidFill>
+                      <a:srgbClr val="FFFFFF"/>
+                    </a:solidFill>
+                  </a:tcPr>
+                </a:tc>
+                <a:tc>
+                  <a:txBody>
+                    <a:bodyPr/>
+                    <a:lstStyle/>
+                    <a:p>
+                      <a:pPr algn="ctr" indent="0" marL="0">
+                        <a:buNone/>
+                      </a:pPr>
+                      <a:r>
+                        <a:rPr lang="en-US" sz="1300" dirty="0">
+                          <a:solidFill>
+                            <a:schemeClr val="accent5"/>
+                          </a:solidFill>
+                        </a:rPr>
+                        <a:t>лише сторонні сервіси</a:t>
+                      </a:r>
+                      <a:endParaRPr lang="en-US" sz="1300" dirty="0"/>
+                    </a:p>
+                  </a:txBody>
+                  <a:tcPr marL="73152" marR="73152" marT="0" marB="0" anchor="ctr">
+                    <a:lnL w="12700" cap="flat" cmpd="sng" algn="ctr">
+                      <a:solidFill>
+                        <a:srgbClr val="F1F2FB"/>
+                      </a:solidFill>
+                      <a:prstDash val="solid"/>
+                      <a:round/>
+                      <a:headEnd type="none" w="med" len="med"/>
+                      <a:tailEnd type="none" w="med" len="med"/>
+                    </a:lnL>
+                    <a:lnR w="12700" cap="flat" cmpd="sng" algn="ctr">
+                      <a:solidFill>
+                        <a:srgbClr val="F1F2FB"/>
+                      </a:solidFill>
+                      <a:prstDash val="solid"/>
+                      <a:round/>
+                      <a:headEnd type="none" w="med" len="med"/>
+                      <a:tailEnd type="none" w="med" len="med"/>
+                    </a:lnR>
+                    <a:lnT w="12700" cap="flat" cmpd="sng" algn="ctr">
+                      <a:solidFill>
+                        <a:srgbClr val="F1F2FB"/>
+                      </a:solidFill>
+                      <a:prstDash val="solid"/>
+                      <a:round/>
+                      <a:headEnd type="none" w="med" len="med"/>
+                      <a:tailEnd type="none" w="med" len="med"/>
+                    </a:lnT>
+                    <a:lnB w="12700" cap="flat" cmpd="sng" algn="ctr">
+                      <a:solidFill>
+                        <a:srgbClr val="F1F2FB"/>
+                      </a:solidFill>
+                      <a:prstDash val="solid"/>
+                      <a:round/>
+                      <a:headEnd type="none" w="med" len="med"/>
+                      <a:tailEnd type="none" w="med" len="med"/>
+                    </a:lnB>
+                    <a:solidFill>
+                      <a:srgbClr val="FFFFFF"/>
+                    </a:solidFill>
+                  </a:tcPr>
+                </a:tc>
+                <a:tc>
+                  <a:txBody>
+                    <a:bodyPr/>
+                    <a:lstStyle/>
+                    <a:p>
+                      <a:pPr algn="ctr" indent="0" marL="0">
+                        <a:buNone/>
+                      </a:pPr>
+                      <a:r>
+                        <a:rPr lang="en-US" sz="1300" dirty="0">
+                          <a:solidFill>
+                            <a:schemeClr val="accent4"/>
+                          </a:solidFill>
+                        </a:rPr>
+                        <a:t>через власні інтеграції</a:t>
+                      </a:r>
+                      <a:endParaRPr lang="en-US" sz="1300" dirty="0"/>
+                    </a:p>
+                  </a:txBody>
+                  <a:tcPr marL="73152" marR="73152" marT="0" marB="0" anchor="ctr">
+                    <a:lnL w="12700" cap="flat" cmpd="sng" algn="ctr">
+                      <a:solidFill>
+                        <a:srgbClr val="F1F2FB"/>
+                      </a:solidFill>
+                      <a:prstDash val="solid"/>
+                      <a:round/>
+                      <a:headEnd type="none" w="med" len="med"/>
+                      <a:tailEnd type="none" w="med" len="med"/>
+                    </a:lnL>
+                    <a:lnR w="12700" cap="flat" cmpd="sng" algn="ctr">
+                      <a:solidFill>
+                        <a:srgbClr val="F1F2FB"/>
+                      </a:solidFill>
+                      <a:prstDash val="solid"/>
+                      <a:round/>
+                      <a:headEnd type="none" w="med" len="med"/>
+                      <a:tailEnd type="none" w="med" len="med"/>
+                    </a:lnR>
+                    <a:lnT w="12700" cap="flat" cmpd="sng" algn="ctr">
+                      <a:solidFill>
+                        <a:srgbClr val="F1F2FB"/>
+                      </a:solidFill>
+                      <a:prstDash val="solid"/>
+                      <a:round/>
+                      <a:headEnd type="none" w="med" len="med"/>
+                      <a:tailEnd type="none" w="med" len="med"/>
+                    </a:lnT>
+                    <a:lnB w="12700" cap="flat" cmpd="sng" algn="ctr">
+                      <a:solidFill>
+                        <a:srgbClr val="F1F2FB"/>
+                      </a:solidFill>
+                      <a:prstDash val="solid"/>
+                      <a:round/>
+                      <a:headEnd type="none" w="med" len="med"/>
+                      <a:tailEnd type="none" w="med" len="med"/>
+                    </a:lnB>
+                    <a:solidFill>
+                      <a:srgbClr val="FFFFFF"/>
+                    </a:solidFill>
+                  </a:tcPr>
+                </a:tc>
+              </a:tr>
+              <a:tr h="475488">
+                <a:tc>
+                  <a:txBody>
+                    <a:bodyPr/>
+                    <a:lstStyle/>
+                    <a:p>
+                      <a:pPr indent="0" marL="0">
+                        <a:buNone/>
+                      </a:pPr>
+                      <a:r>
+                        <a:rPr lang="en-US" sz="1300" b="1" dirty="0">
+                          <a:solidFill>
+                            <a:schemeClr val="tx1"/>
+                          </a:solidFill>
+                        </a:rPr>
+                        <a:t>Правила бізнесу: передоплата, штраф, виняток</a:t>
+                      </a:r>
+                      <a:endParaRPr lang="en-US" sz="1300" dirty="0"/>
+                    </a:p>
+                  </a:txBody>
+                  <a:tcPr marL="73152" marR="73152" marT="0" marB="0" anchor="ctr">
+                    <a:lnL w="12700" cap="flat" cmpd="sng" algn="ctr">
+                      <a:solidFill>
+                        <a:srgbClr val="F1F2FB"/>
+                      </a:solidFill>
+                      <a:prstDash val="solid"/>
+                      <a:round/>
+                      <a:headEnd type="none" w="med" len="med"/>
+                      <a:tailEnd type="none" w="med" len="med"/>
+                    </a:lnL>
+                    <a:lnR w="12700" cap="flat" cmpd="sng" algn="ctr">
+                      <a:solidFill>
+                        <a:srgbClr val="F1F2FB"/>
+                      </a:solidFill>
+                      <a:prstDash val="solid"/>
+                      <a:round/>
+                      <a:headEnd type="none" w="med" len="med"/>
+                      <a:tailEnd type="none" w="med" len="med"/>
+                    </a:lnR>
+                    <a:lnT w="12700" cap="flat" cmpd="sng" algn="ctr">
+                      <a:solidFill>
+                        <a:srgbClr val="F1F2FB"/>
+                      </a:solidFill>
+                      <a:prstDash val="solid"/>
+                      <a:round/>
+                      <a:headEnd type="none" w="med" len="med"/>
+                      <a:tailEnd type="none" w="med" len="med"/>
+                    </a:lnT>
+                    <a:lnB w="12700" cap="flat" cmpd="sng" algn="ctr">
+                      <a:solidFill>
+                        <a:srgbClr val="F1F2FB"/>
+                      </a:solidFill>
+                      <a:prstDash val="solid"/>
+                      <a:round/>
+                      <a:headEnd type="none" w="med" len="med"/>
+                      <a:tailEnd type="none" w="med" len="med"/>
+                    </a:lnB>
+                    <a:solidFill>
+                      <a:srgbClr val="FFFFFF"/>
+                    </a:solidFill>
+                  </a:tcPr>
+                </a:tc>
+                <a:tc>
+                  <a:txBody>
+                    <a:bodyPr/>
+                    <a:lstStyle/>
+                    <a:p>
+                      <a:pPr algn="ctr" indent="0" marL="0">
+                        <a:buNone/>
+                      </a:pPr>
+                      <a:r>
+                        <a:rPr lang="en-US" sz="1300" b="1" dirty="0">
+                          <a:solidFill>
+                            <a:schemeClr val="accent3"/>
+                          </a:solidFill>
+                        </a:rPr>
+                        <a:t>так, у кожного свої</a:t>
+                      </a:r>
+                      <a:endParaRPr lang="en-US" sz="1300" dirty="0"/>
+                    </a:p>
+                  </a:txBody>
+                  <a:tcPr marL="73152" marR="73152" marT="0" marB="0" anchor="ctr">
+                    <a:lnL w="12700" cap="flat" cmpd="sng" algn="ctr">
+                      <a:solidFill>
+                        <a:srgbClr val="F1F2FB"/>
+                      </a:solidFill>
+                      <a:prstDash val="solid"/>
+                      <a:round/>
+                      <a:headEnd type="none" w="med" len="med"/>
+                      <a:tailEnd type="none" w="med" len="med"/>
+                    </a:lnL>
+                    <a:lnR w="12700" cap="flat" cmpd="sng" algn="ctr">
+                      <a:solidFill>
+                        <a:srgbClr val="F1F2FB"/>
+                      </a:solidFill>
+                      <a:prstDash val="solid"/>
+                      <a:round/>
+                      <a:headEnd type="none" w="med" len="med"/>
+                      <a:tailEnd type="none" w="med" len="med"/>
+                    </a:lnR>
+                    <a:lnT w="12700" cap="flat" cmpd="sng" algn="ctr">
+                      <a:solidFill>
+                        <a:srgbClr val="F1F2FB"/>
+                      </a:solidFill>
+                      <a:prstDash val="solid"/>
+                      <a:round/>
+                      <a:headEnd type="none" w="med" len="med"/>
+                      <a:tailEnd type="none" w="med" len="med"/>
+                    </a:lnT>
+                    <a:lnB w="12700" cap="flat" cmpd="sng" algn="ctr">
+                      <a:solidFill>
+                        <a:srgbClr val="F1F2FB"/>
+                      </a:solidFill>
+                      <a:prstDash val="solid"/>
+                      <a:round/>
+                      <a:headEnd type="none" w="med" len="med"/>
+                      <a:tailEnd type="none" w="med" len="med"/>
+                    </a:lnB>
+                    <a:solidFill>
+                      <a:schemeClr val="bg2"/>
+                    </a:solidFill>
+                  </a:tcPr>
+                </a:tc>
+                <a:tc>
+                  <a:txBody>
+                    <a:bodyPr/>
+                    <a:lstStyle/>
+                    <a:p>
+                      <a:pPr algn="ctr" indent="0" marL="0">
+                        <a:buNone/>
+                      </a:pPr>
+                      <a:r>
+                        <a:rPr lang="en-US" sz="1300" dirty="0">
+                          <a:solidFill>
+                            <a:schemeClr val="accent5"/>
+                          </a:solidFill>
+                        </a:rPr>
+                        <a:t>не заявлено</a:t>
+                      </a:r>
+                      <a:endParaRPr lang="en-US" sz="1300" dirty="0"/>
+                    </a:p>
+                  </a:txBody>
+                  <a:tcPr marL="73152" marR="73152" marT="0" marB="0" anchor="ctr">
+                    <a:lnL w="12700" cap="flat" cmpd="sng" algn="ctr">
+                      <a:solidFill>
+                        <a:srgbClr val="F1F2FB"/>
+                      </a:solidFill>
+                      <a:prstDash val="solid"/>
+                      <a:round/>
+                      <a:headEnd type="none" w="med" len="med"/>
+                      <a:tailEnd type="none" w="med" len="med"/>
+                    </a:lnL>
+                    <a:lnR w="12700" cap="flat" cmpd="sng" algn="ctr">
+                      <a:solidFill>
+                        <a:srgbClr val="F1F2FB"/>
+                      </a:solidFill>
+                      <a:prstDash val="solid"/>
+                      <a:round/>
+                      <a:headEnd type="none" w="med" len="med"/>
+                      <a:tailEnd type="none" w="med" len="med"/>
+                    </a:lnR>
+                    <a:lnT w="12700" cap="flat" cmpd="sng" algn="ctr">
+                      <a:solidFill>
+                        <a:srgbClr val="F1F2FB"/>
+                      </a:solidFill>
+                      <a:prstDash val="solid"/>
+                      <a:round/>
+                      <a:headEnd type="none" w="med" len="med"/>
+                      <a:tailEnd type="none" w="med" len="med"/>
+                    </a:lnT>
+                    <a:lnB w="12700" cap="flat" cmpd="sng" algn="ctr">
+                      <a:solidFill>
+                        <a:srgbClr val="F1F2FB"/>
+                      </a:solidFill>
+                      <a:prstDash val="solid"/>
+                      <a:round/>
+                      <a:headEnd type="none" w="med" len="med"/>
+                      <a:tailEnd type="none" w="med" len="med"/>
+                    </a:lnB>
+                    <a:solidFill>
+                      <a:srgbClr val="FFFFFF"/>
+                    </a:solidFill>
+                  </a:tcPr>
+                </a:tc>
+                <a:tc>
+                  <a:txBody>
+                    <a:bodyPr/>
+                    <a:lstStyle/>
+                    <a:p>
+                      <a:pPr algn="ctr" indent="0" marL="0">
+                        <a:buNone/>
+                      </a:pPr>
+                      <a:r>
+                        <a:rPr lang="en-US" sz="1300" dirty="0">
+                          <a:solidFill>
+                            <a:schemeClr val="accent5"/>
+                          </a:solidFill>
+                        </a:rPr>
+                        <a:t>ні</a:t>
+                      </a:r>
+                      <a:endParaRPr lang="en-US" sz="1300" dirty="0"/>
+                    </a:p>
+                  </a:txBody>
+                  <a:tcPr marL="73152" marR="73152" marT="0" marB="0" anchor="ctr">
+                    <a:lnL w="12700" cap="flat" cmpd="sng" algn="ctr">
+                      <a:solidFill>
+                        <a:srgbClr val="F1F2FB"/>
+                      </a:solidFill>
+                      <a:prstDash val="solid"/>
+                      <a:round/>
+                      <a:headEnd type="none" w="med" len="med"/>
+                      <a:tailEnd type="none" w="med" len="med"/>
+                    </a:lnL>
+                    <a:lnR w="12700" cap="flat" cmpd="sng" algn="ctr">
+                      <a:solidFill>
+                        <a:srgbClr val="F1F2FB"/>
+                      </a:solidFill>
+                      <a:prstDash val="solid"/>
+                      <a:round/>
+                      <a:headEnd type="none" w="med" len="med"/>
+                      <a:tailEnd type="none" w="med" len="med"/>
+                    </a:lnR>
+                    <a:lnT w="12700" cap="flat" cmpd="sng" algn="ctr">
+                      <a:solidFill>
+                        <a:srgbClr val="F1F2FB"/>
+                      </a:solidFill>
+                      <a:prstDash val="solid"/>
+                      <a:round/>
+                      <a:headEnd type="none" w="med" len="med"/>
+                      <a:tailEnd type="none" w="med" len="med"/>
+                    </a:lnT>
+                    <a:lnB w="12700" cap="flat" cmpd="sng" algn="ctr">
+                      <a:solidFill>
+                        <a:srgbClr val="F1F2FB"/>
+                      </a:solidFill>
+                      <a:prstDash val="solid"/>
+                      <a:round/>
+                      <a:headEnd type="none" w="med" len="med"/>
+                      <a:tailEnd type="none" w="med" len="med"/>
+                    </a:lnB>
+                    <a:solidFill>
+                      <a:srgbClr val="FFFFFF"/>
+                    </a:solidFill>
+                  </a:tcPr>
+                </a:tc>
+                <a:tc>
+                  <a:txBody>
+                    <a:bodyPr/>
+                    <a:lstStyle/>
+                    <a:p>
+                      <a:pPr algn="ctr" indent="0" marL="0">
+                        <a:buNone/>
+                      </a:pPr>
+                      <a:r>
+                        <a:rPr lang="en-US" sz="1300" dirty="0">
+                          <a:solidFill>
+                            <a:schemeClr val="accent4"/>
+                          </a:solidFill>
+                        </a:rPr>
+                        <a:t>треба налаштовувати</a:t>
+                      </a:r>
+                      <a:endParaRPr lang="en-US" sz="1300" dirty="0"/>
+                    </a:p>
+                  </a:txBody>
+                  <a:tcPr marL="73152" marR="73152" marT="0" marB="0" anchor="ctr">
+                    <a:lnL w="12700" cap="flat" cmpd="sng" algn="ctr">
+                      <a:solidFill>
+                        <a:srgbClr val="F1F2FB"/>
+                      </a:solidFill>
+                      <a:prstDash val="solid"/>
+                      <a:round/>
+                      <a:headEnd type="none" w="med" len="med"/>
+                      <a:tailEnd type="none" w="med" len="med"/>
+                    </a:lnL>
+                    <a:lnR w="12700" cap="flat" cmpd="sng" algn="ctr">
+                      <a:solidFill>
+                        <a:srgbClr val="F1F2FB"/>
+                      </a:solidFill>
+                      <a:prstDash val="solid"/>
+                      <a:round/>
+                      <a:headEnd type="none" w="med" len="med"/>
+                      <a:tailEnd type="none" w="med" len="med"/>
+                    </a:lnR>
+                    <a:lnT w="12700" cap="flat" cmpd="sng" algn="ctr">
+                      <a:solidFill>
+                        <a:srgbClr val="F1F2FB"/>
+                      </a:solidFill>
+                      <a:prstDash val="solid"/>
+                      <a:round/>
+                      <a:headEnd type="none" w="med" len="med"/>
+                      <a:tailEnd type="none" w="med" len="med"/>
+                    </a:lnT>
+                    <a:lnB w="12700" cap="flat" cmpd="sng" algn="ctr">
+                      <a:solidFill>
+                        <a:srgbClr val="F1F2FB"/>
+                      </a:solidFill>
+                      <a:prstDash val="solid"/>
+                      <a:round/>
+                      <a:headEnd type="none" w="med" len="med"/>
+                      <a:tailEnd type="none" w="med" len="med"/>
+                    </a:lnB>
+                    <a:solidFill>
+                      <a:srgbClr val="FFFFFF"/>
+                    </a:solidFill>
+                  </a:tcPr>
+                </a:tc>
+              </a:tr>
+              <a:tr h="475488">
+                <a:tc>
+                  <a:txBody>
+                    <a:bodyPr/>
+                    <a:lstStyle/>
+                    <a:p>
+                      <a:pPr indent="0" marL="0">
+                        <a:buNone/>
+                      </a:pPr>
+                      <a:r>
+                        <a:rPr lang="en-US" sz="1300" b="1" dirty="0">
+                          <a:solidFill>
+                            <a:schemeClr val="tx1"/>
+                          </a:solidFill>
+                        </a:rPr>
+                        <a:t>Ризикові дії — з погодженням людини</a:t>
+                      </a:r>
+                      <a:endParaRPr lang="en-US" sz="1300" dirty="0"/>
+                    </a:p>
+                  </a:txBody>
+                  <a:tcPr marL="73152" marR="73152" marT="0" marB="0" anchor="ctr">
+                    <a:lnL w="12700" cap="flat" cmpd="sng" algn="ctr">
+                      <a:solidFill>
+                        <a:srgbClr val="F1F2FB"/>
+                      </a:solidFill>
+                      <a:prstDash val="solid"/>
+                      <a:round/>
+                      <a:headEnd type="none" w="med" len="med"/>
+                      <a:tailEnd type="none" w="med" len="med"/>
+                    </a:lnL>
+                    <a:lnR w="12700" cap="flat" cmpd="sng" algn="ctr">
+                      <a:solidFill>
+                        <a:srgbClr val="F1F2FB"/>
+                      </a:solidFill>
+                      <a:prstDash val="solid"/>
+                      <a:round/>
+                      <a:headEnd type="none" w="med" len="med"/>
+                      <a:tailEnd type="none" w="med" len="med"/>
+                    </a:lnR>
+                    <a:lnT w="12700" cap="flat" cmpd="sng" algn="ctr">
+                      <a:solidFill>
+                        <a:srgbClr val="F1F2FB"/>
+                      </a:solidFill>
+                      <a:prstDash val="solid"/>
+                      <a:round/>
+                      <a:headEnd type="none" w="med" len="med"/>
+                      <a:tailEnd type="none" w="med" len="med"/>
+                    </a:lnT>
+                    <a:lnB w="12700" cap="flat" cmpd="sng" algn="ctr">
+                      <a:solidFill>
+                        <a:srgbClr val="F1F2FB"/>
+                      </a:solidFill>
+                      <a:prstDash val="solid"/>
+                      <a:round/>
+                      <a:headEnd type="none" w="med" len="med"/>
+                      <a:tailEnd type="none" w="med" len="med"/>
+                    </a:lnB>
+                    <a:solidFill>
+                      <a:srgbClr val="FFFFFF"/>
+                    </a:solidFill>
+                  </a:tcPr>
+                </a:tc>
+                <a:tc>
+                  <a:txBody>
+                    <a:bodyPr/>
+                    <a:lstStyle/>
+                    <a:p>
+                      <a:pPr algn="ctr" indent="0" marL="0">
+                        <a:buNone/>
+                      </a:pPr>
+                      <a:r>
+                        <a:rPr lang="en-US" sz="1300" b="1" dirty="0">
+                          <a:solidFill>
+                            <a:schemeClr val="accent3"/>
+                          </a:solidFill>
+                        </a:rPr>
+                        <a:t>так, налаштовує власник</a:t>
+                      </a:r>
+                      <a:endParaRPr lang="en-US" sz="1300" dirty="0"/>
+                    </a:p>
+                  </a:txBody>
+                  <a:tcPr marL="73152" marR="73152" marT="0" marB="0" anchor="ctr">
+                    <a:lnL w="12700" cap="flat" cmpd="sng" algn="ctr">
+                      <a:solidFill>
+                        <a:srgbClr val="F1F2FB"/>
+                      </a:solidFill>
+                      <a:prstDash val="solid"/>
+                      <a:round/>
+                      <a:headEnd type="none" w="med" len="med"/>
+                      <a:tailEnd type="none" w="med" len="med"/>
+                    </a:lnL>
+                    <a:lnR w="12700" cap="flat" cmpd="sng" algn="ctr">
+                      <a:solidFill>
+                        <a:srgbClr val="F1F2FB"/>
+                      </a:solidFill>
+                      <a:prstDash val="solid"/>
+                      <a:round/>
+                      <a:headEnd type="none" w="med" len="med"/>
+                      <a:tailEnd type="none" w="med" len="med"/>
+                    </a:lnR>
+                    <a:lnT w="12700" cap="flat" cmpd="sng" algn="ctr">
+                      <a:solidFill>
+                        <a:srgbClr val="F1F2FB"/>
+                      </a:solidFill>
+                      <a:prstDash val="solid"/>
+                      <a:round/>
+                      <a:headEnd type="none" w="med" len="med"/>
+                      <a:tailEnd type="none" w="med" len="med"/>
+                    </a:lnT>
+                    <a:lnB w="12700" cap="flat" cmpd="sng" algn="ctr">
+                      <a:solidFill>
+                        <a:srgbClr val="F1F2FB"/>
+                      </a:solidFill>
+                      <a:prstDash val="solid"/>
+                      <a:round/>
+                      <a:headEnd type="none" w="med" len="med"/>
+                      <a:tailEnd type="none" w="med" len="med"/>
+                    </a:lnB>
+                    <a:solidFill>
+                      <a:schemeClr val="bg2"/>
+                    </a:solidFill>
+                  </a:tcPr>
+                </a:tc>
+                <a:tc>
+                  <a:txBody>
+                    <a:bodyPr/>
+                    <a:lstStyle/>
+                    <a:p>
+                      <a:pPr algn="ctr" indent="0" marL="0">
+                        <a:buNone/>
+                      </a:pPr>
+                      <a:r>
+                        <a:rPr lang="en-US" sz="1300" dirty="0">
+                          <a:solidFill>
+                            <a:schemeClr val="accent5"/>
+                          </a:solidFill>
+                        </a:rPr>
+                        <a:t>не заявлено</a:t>
+                      </a:r>
+                      <a:endParaRPr lang="en-US" sz="1300" dirty="0"/>
+                    </a:p>
+                  </a:txBody>
+                  <a:tcPr marL="73152" marR="73152" marT="0" marB="0" anchor="ctr">
+                    <a:lnL w="12700" cap="flat" cmpd="sng" algn="ctr">
+                      <a:solidFill>
+                        <a:srgbClr val="F1F2FB"/>
+                      </a:solidFill>
+                      <a:prstDash val="solid"/>
+                      <a:round/>
+                      <a:headEnd type="none" w="med" len="med"/>
+                      <a:tailEnd type="none" w="med" len="med"/>
+                    </a:lnL>
+                    <a:lnR w="12700" cap="flat" cmpd="sng" algn="ctr">
+                      <a:solidFill>
+                        <a:srgbClr val="F1F2FB"/>
+                      </a:solidFill>
+                      <a:prstDash val="solid"/>
+                      <a:round/>
+                      <a:headEnd type="none" w="med" len="med"/>
+                      <a:tailEnd type="none" w="med" len="med"/>
+                    </a:lnR>
+                    <a:lnT w="12700" cap="flat" cmpd="sng" algn="ctr">
+                      <a:solidFill>
+                        <a:srgbClr val="F1F2FB"/>
+                      </a:solidFill>
+                      <a:prstDash val="solid"/>
+                      <a:round/>
+                      <a:headEnd type="none" w="med" len="med"/>
+                      <a:tailEnd type="none" w="med" len="med"/>
+                    </a:lnT>
+                    <a:lnB w="12700" cap="flat" cmpd="sng" algn="ctr">
+                      <a:solidFill>
+                        <a:srgbClr val="F1F2FB"/>
+                      </a:solidFill>
+                      <a:prstDash val="solid"/>
+                      <a:round/>
+                      <a:headEnd type="none" w="med" len="med"/>
+                      <a:tailEnd type="none" w="med" len="med"/>
+                    </a:lnB>
+                    <a:solidFill>
+                      <a:srgbClr val="FFFFFF"/>
+                    </a:solidFill>
+                  </a:tcPr>
+                </a:tc>
+                <a:tc>
+                  <a:txBody>
+                    <a:bodyPr/>
+                    <a:lstStyle/>
+                    <a:p>
+                      <a:pPr algn="ctr" indent="0" marL="0">
+                        <a:buNone/>
+                      </a:pPr>
+                      <a:r>
+                        <a:rPr lang="en-US" sz="1300" dirty="0">
+                          <a:solidFill>
+                            <a:schemeClr val="accent5"/>
+                          </a:solidFill>
+                        </a:rPr>
+                        <a:t>ні</a:t>
+                      </a:r>
+                      <a:endParaRPr lang="en-US" sz="1300" dirty="0"/>
+                    </a:p>
+                  </a:txBody>
+                  <a:tcPr marL="73152" marR="73152" marT="0" marB="0" anchor="ctr">
+                    <a:lnL w="12700" cap="flat" cmpd="sng" algn="ctr">
+                      <a:solidFill>
+                        <a:srgbClr val="F1F2FB"/>
+                      </a:solidFill>
+                      <a:prstDash val="solid"/>
+                      <a:round/>
+                      <a:headEnd type="none" w="med" len="med"/>
+                      <a:tailEnd type="none" w="med" len="med"/>
+                    </a:lnL>
+                    <a:lnR w="12700" cap="flat" cmpd="sng" algn="ctr">
+                      <a:solidFill>
+                        <a:srgbClr val="F1F2FB"/>
+                      </a:solidFill>
+                      <a:prstDash val="solid"/>
+                      <a:round/>
+                      <a:headEnd type="none" w="med" len="med"/>
+                      <a:tailEnd type="none" w="med" len="med"/>
+                    </a:lnR>
+                    <a:lnT w="12700" cap="flat" cmpd="sng" algn="ctr">
+                      <a:solidFill>
+                        <a:srgbClr val="F1F2FB"/>
+                      </a:solidFill>
+                      <a:prstDash val="solid"/>
+                      <a:round/>
+                      <a:headEnd type="none" w="med" len="med"/>
+                      <a:tailEnd type="none" w="med" len="med"/>
+                    </a:lnT>
+                    <a:lnB w="12700" cap="flat" cmpd="sng" algn="ctr">
+                      <a:solidFill>
+                        <a:srgbClr val="F1F2FB"/>
+                      </a:solidFill>
+                      <a:prstDash val="solid"/>
+                      <a:round/>
+                      <a:headEnd type="none" w="med" len="med"/>
+                      <a:tailEnd type="none" w="med" len="med"/>
+                    </a:lnB>
+                    <a:solidFill>
+                      <a:srgbClr val="FFFFFF"/>
+                    </a:solidFill>
+                  </a:tcPr>
+                </a:tc>
+                <a:tc>
+                  <a:txBody>
+                    <a:bodyPr/>
+                    <a:lstStyle/>
+                    <a:p>
+                      <a:pPr algn="ctr" indent="0" marL="0">
+                        <a:buNone/>
+                      </a:pPr>
+                      <a:r>
+                        <a:rPr lang="en-US" sz="1300" dirty="0">
+                          <a:solidFill>
+                            <a:schemeClr val="accent4"/>
+                          </a:solidFill>
+                        </a:rPr>
+                        <a:t>частково</a:t>
+                      </a:r>
+                      <a:endParaRPr lang="en-US" sz="1300" dirty="0"/>
+                    </a:p>
+                  </a:txBody>
+                  <a:tcPr marL="73152" marR="73152" marT="0" marB="0" anchor="ctr">
+                    <a:lnL w="12700" cap="flat" cmpd="sng" algn="ctr">
+                      <a:solidFill>
+                        <a:srgbClr val="F1F2FB"/>
+                      </a:solidFill>
+                      <a:prstDash val="solid"/>
+                      <a:round/>
+                      <a:headEnd type="none" w="med" len="med"/>
+                      <a:tailEnd type="none" w="med" len="med"/>
+                    </a:lnL>
+                    <a:lnR w="12700" cap="flat" cmpd="sng" algn="ctr">
+                      <a:solidFill>
+                        <a:srgbClr val="F1F2FB"/>
+                      </a:solidFill>
+                      <a:prstDash val="solid"/>
+                      <a:round/>
+                      <a:headEnd type="none" w="med" len="med"/>
+                      <a:tailEnd type="none" w="med" len="med"/>
+                    </a:lnR>
+                    <a:lnT w="12700" cap="flat" cmpd="sng" algn="ctr">
+                      <a:solidFill>
+                        <a:srgbClr val="F1F2FB"/>
+                      </a:solidFill>
+                      <a:prstDash val="solid"/>
+                      <a:round/>
+                      <a:headEnd type="none" w="med" len="med"/>
+                      <a:tailEnd type="none" w="med" len="med"/>
+                    </a:lnT>
+                    <a:lnB w="12700" cap="flat" cmpd="sng" algn="ctr">
+                      <a:solidFill>
+                        <a:srgbClr val="F1F2FB"/>
+                      </a:solidFill>
+                      <a:prstDash val="solid"/>
+                      <a:round/>
+                      <a:headEnd type="none" w="med" len="med"/>
+                      <a:tailEnd type="none" w="med" len="med"/>
+                    </a:lnB>
+                    <a:solidFill>
+                      <a:srgbClr val="FFFFFF"/>
+                    </a:solidFill>
+                  </a:tcPr>
+                </a:tc>
+              </a:tr>
+              <a:tr h="475488">
+                <a:tc>
+                  <a:txBody>
+                    <a:bodyPr/>
+                    <a:lstStyle/>
+                    <a:p>
+                      <a:pPr indent="0" marL="0">
+                        <a:buNone/>
+                      </a:pPr>
+                      <a:r>
+                        <a:rPr lang="en-US" sz="1300" b="1" dirty="0">
+                          <a:solidFill>
+                            <a:schemeClr val="tx1"/>
+                          </a:solidFill>
+                        </a:rPr>
+                        <a:t>Для салонів і клінік з коробки</a:t>
+                      </a:r>
+                      <a:endParaRPr lang="en-US" sz="1300" dirty="0"/>
+                    </a:p>
+                  </a:txBody>
+                  <a:tcPr marL="73152" marR="73152" marT="0" marB="0" anchor="ctr">
+                    <a:lnL w="12700" cap="flat" cmpd="sng" algn="ctr">
+                      <a:solidFill>
+                        <a:srgbClr val="F1F2FB"/>
+                      </a:solidFill>
+                      <a:prstDash val="solid"/>
+                      <a:round/>
+                      <a:headEnd type="none" w="med" len="med"/>
+                      <a:tailEnd type="none" w="med" len="med"/>
+                    </a:lnL>
+                    <a:lnR w="12700" cap="flat" cmpd="sng" algn="ctr">
+                      <a:solidFill>
+                        <a:srgbClr val="F1F2FB"/>
+                      </a:solidFill>
+                      <a:prstDash val="solid"/>
+                      <a:round/>
+                      <a:headEnd type="none" w="med" len="med"/>
+                      <a:tailEnd type="none" w="med" len="med"/>
+                    </a:lnR>
+                    <a:lnT w="12700" cap="flat" cmpd="sng" algn="ctr">
+                      <a:solidFill>
+                        <a:srgbClr val="F1F2FB"/>
+                      </a:solidFill>
+                      <a:prstDash val="solid"/>
+                      <a:round/>
+                      <a:headEnd type="none" w="med" len="med"/>
+                      <a:tailEnd type="none" w="med" len="med"/>
+                    </a:lnT>
+                    <a:lnB w="12700" cap="flat" cmpd="sng" algn="ctr">
+                      <a:solidFill>
+                        <a:srgbClr val="F1F2FB"/>
+                      </a:solidFill>
+                      <a:prstDash val="solid"/>
+                      <a:round/>
+                      <a:headEnd type="none" w="med" len="med"/>
+                      <a:tailEnd type="none" w="med" len="med"/>
+                    </a:lnB>
+                    <a:solidFill>
+                      <a:srgbClr val="FFFFFF"/>
+                    </a:solidFill>
+                  </a:tcPr>
+                </a:tc>
+                <a:tc>
+                  <a:txBody>
+                    <a:bodyPr/>
+                    <a:lstStyle/>
+                    <a:p>
+                      <a:pPr algn="ctr" indent="0" marL="0">
+                        <a:buNone/>
+                      </a:pPr>
+                      <a:r>
+                        <a:rPr lang="en-US" sz="1300" b="1" dirty="0">
+                          <a:solidFill>
+                            <a:schemeClr val="accent3"/>
+                          </a:solidFill>
+                        </a:rPr>
+                        <a:t>так</a:t>
+                      </a:r>
+                      <a:endParaRPr lang="en-US" sz="1300" dirty="0"/>
+                    </a:p>
+                  </a:txBody>
+                  <a:tcPr marL="73152" marR="73152" marT="0" marB="0" anchor="ctr">
+                    <a:lnL w="12700" cap="flat" cmpd="sng" algn="ctr">
+                      <a:solidFill>
+                        <a:srgbClr val="F1F2FB"/>
+                      </a:solidFill>
+                      <a:prstDash val="solid"/>
+                      <a:round/>
+                      <a:headEnd type="none" w="med" len="med"/>
+                      <a:tailEnd type="none" w="med" len="med"/>
+                    </a:lnL>
+                    <a:lnR w="12700" cap="flat" cmpd="sng" algn="ctr">
+                      <a:solidFill>
+                        <a:srgbClr val="F1F2FB"/>
+                      </a:solidFill>
+                      <a:prstDash val="solid"/>
+                      <a:round/>
+                      <a:headEnd type="none" w="med" len="med"/>
+                      <a:tailEnd type="none" w="med" len="med"/>
+                    </a:lnR>
+                    <a:lnT w="12700" cap="flat" cmpd="sng" algn="ctr">
+                      <a:solidFill>
+                        <a:srgbClr val="F1F2FB"/>
+                      </a:solidFill>
+                      <a:prstDash val="solid"/>
+                      <a:round/>
+                      <a:headEnd type="none" w="med" len="med"/>
+                      <a:tailEnd type="none" w="med" len="med"/>
+                    </a:lnT>
+                    <a:lnB w="12700" cap="flat" cmpd="sng" algn="ctr">
+                      <a:solidFill>
+                        <a:srgbClr val="F1F2FB"/>
+                      </a:solidFill>
+                      <a:prstDash val="solid"/>
+                      <a:round/>
+                      <a:headEnd type="none" w="med" len="med"/>
+                      <a:tailEnd type="none" w="med" len="med"/>
+                    </a:lnB>
+                    <a:solidFill>
+                      <a:schemeClr val="bg2"/>
+                    </a:solidFill>
+                  </a:tcPr>
+                </a:tc>
+                <a:tc>
+                  <a:txBody>
+                    <a:bodyPr/>
+                    <a:lstStyle/>
+                    <a:p>
+                      <a:pPr algn="ctr" indent="0" marL="0">
+                        <a:buNone/>
+                      </a:pPr>
+                      <a:r>
+                        <a:rPr lang="en-US" sz="1300" b="1" dirty="0">
+                          <a:solidFill>
+                            <a:schemeClr val="accent3"/>
+                          </a:solidFill>
+                        </a:rPr>
+                        <a:t>салони й спа</a:t>
+                      </a:r>
+                      <a:endParaRPr lang="en-US" sz="1300" dirty="0"/>
+                    </a:p>
+                  </a:txBody>
+                  <a:tcPr marL="73152" marR="73152" marT="0" marB="0" anchor="ctr">
+                    <a:lnL w="12700" cap="flat" cmpd="sng" algn="ctr">
+                      <a:solidFill>
+                        <a:srgbClr val="F1F2FB"/>
+                      </a:solidFill>
+                      <a:prstDash val="solid"/>
+                      <a:round/>
+                      <a:headEnd type="none" w="med" len="med"/>
+                      <a:tailEnd type="none" w="med" len="med"/>
+                    </a:lnL>
+                    <a:lnR w="12700" cap="flat" cmpd="sng" algn="ctr">
+                      <a:solidFill>
+                        <a:srgbClr val="F1F2FB"/>
+                      </a:solidFill>
+                      <a:prstDash val="solid"/>
+                      <a:round/>
+                      <a:headEnd type="none" w="med" len="med"/>
+                      <a:tailEnd type="none" w="med" len="med"/>
+                    </a:lnR>
+                    <a:lnT w="12700" cap="flat" cmpd="sng" algn="ctr">
+                      <a:solidFill>
+                        <a:srgbClr val="F1F2FB"/>
+                      </a:solidFill>
+                      <a:prstDash val="solid"/>
+                      <a:round/>
+                      <a:headEnd type="none" w="med" len="med"/>
+                      <a:tailEnd type="none" w="med" len="med"/>
+                    </a:lnT>
+                    <a:lnB w="12700" cap="flat" cmpd="sng" algn="ctr">
+                      <a:solidFill>
+                        <a:srgbClr val="F1F2FB"/>
+                      </a:solidFill>
+                      <a:prstDash val="solid"/>
+                      <a:round/>
+                      <a:headEnd type="none" w="med" len="med"/>
+                      <a:tailEnd type="none" w="med" len="med"/>
+                    </a:lnB>
+                    <a:solidFill>
+                      <a:srgbClr val="FFFFFF"/>
+                    </a:solidFill>
+                  </a:tcPr>
+                </a:tc>
+                <a:tc>
+                  <a:txBody>
+                    <a:bodyPr/>
+                    <a:lstStyle/>
+                    <a:p>
+                      <a:pPr algn="ctr" indent="0" marL="0">
+                        <a:buNone/>
+                      </a:pPr>
+                      <a:r>
+                        <a:rPr lang="en-US" sz="1300" dirty="0">
+                          <a:solidFill>
+                            <a:schemeClr val="accent5"/>
+                          </a:solidFill>
+                        </a:rPr>
+                        <a:t>—</a:t>
+                      </a:r>
+                      <a:endParaRPr lang="en-US" sz="1300" dirty="0"/>
+                    </a:p>
+                  </a:txBody>
+                  <a:tcPr marL="73152" marR="73152" marT="0" marB="0" anchor="ctr">
+                    <a:lnL w="12700" cap="flat" cmpd="sng" algn="ctr">
+                      <a:solidFill>
+                        <a:srgbClr val="F1F2FB"/>
+                      </a:solidFill>
+                      <a:prstDash val="solid"/>
+                      <a:round/>
+                      <a:headEnd type="none" w="med" len="med"/>
+                      <a:tailEnd type="none" w="med" len="med"/>
+                    </a:lnL>
+                    <a:lnR w="12700" cap="flat" cmpd="sng" algn="ctr">
+                      <a:solidFill>
+                        <a:srgbClr val="F1F2FB"/>
+                      </a:solidFill>
+                      <a:prstDash val="solid"/>
+                      <a:round/>
+                      <a:headEnd type="none" w="med" len="med"/>
+                      <a:tailEnd type="none" w="med" len="med"/>
+                    </a:lnR>
+                    <a:lnT w="12700" cap="flat" cmpd="sng" algn="ctr">
+                      <a:solidFill>
+                        <a:srgbClr val="F1F2FB"/>
+                      </a:solidFill>
+                      <a:prstDash val="solid"/>
+                      <a:round/>
+                      <a:headEnd type="none" w="med" len="med"/>
+                      <a:tailEnd type="none" w="med" len="med"/>
+                    </a:lnT>
+                    <a:lnB w="12700" cap="flat" cmpd="sng" algn="ctr">
+                      <a:solidFill>
+                        <a:srgbClr val="F1F2FB"/>
+                      </a:solidFill>
+                      <a:prstDash val="solid"/>
+                      <a:round/>
+                      <a:headEnd type="none" w="med" len="med"/>
+                      <a:tailEnd type="none" w="med" len="med"/>
+                    </a:lnB>
+                    <a:solidFill>
+                      <a:srgbClr val="FFFFFF"/>
+                    </a:solidFill>
+                  </a:tcPr>
+                </a:tc>
+                <a:tc>
+                  <a:txBody>
+                    <a:bodyPr/>
+                    <a:lstStyle/>
+                    <a:p>
+                      <a:pPr algn="ctr" indent="0" marL="0">
+                        <a:buNone/>
+                      </a:pPr>
+                      <a:r>
+                        <a:rPr lang="en-US" sz="1300" dirty="0">
+                          <a:solidFill>
+                            <a:schemeClr val="accent5"/>
+                          </a:solidFill>
+                        </a:rPr>
+                        <a:t>ні, загальний helpdesk</a:t>
+                      </a:r>
+                      <a:endParaRPr lang="en-US" sz="1300" dirty="0"/>
+                    </a:p>
+                  </a:txBody>
+                  <a:tcPr marL="73152" marR="73152" marT="0" marB="0" anchor="ctr">
+                    <a:lnL w="12700" cap="flat" cmpd="sng" algn="ctr">
+                      <a:solidFill>
+                        <a:srgbClr val="F1F2FB"/>
+                      </a:solidFill>
+                      <a:prstDash val="solid"/>
+                      <a:round/>
+                      <a:headEnd type="none" w="med" len="med"/>
+                      <a:tailEnd type="none" w="med" len="med"/>
+                    </a:lnL>
+                    <a:lnR w="12700" cap="flat" cmpd="sng" algn="ctr">
+                      <a:solidFill>
+                        <a:srgbClr val="F1F2FB"/>
+                      </a:solidFill>
+                      <a:prstDash val="solid"/>
+                      <a:round/>
+                      <a:headEnd type="none" w="med" len="med"/>
+                      <a:tailEnd type="none" w="med" len="med"/>
+                    </a:lnR>
+                    <a:lnT w="12700" cap="flat" cmpd="sng" algn="ctr">
+                      <a:solidFill>
+                        <a:srgbClr val="F1F2FB"/>
+                      </a:solidFill>
+                      <a:prstDash val="solid"/>
+                      <a:round/>
+                      <a:headEnd type="none" w="med" len="med"/>
+                      <a:tailEnd type="none" w="med" len="med"/>
+                    </a:lnT>
+                    <a:lnB w="12700" cap="flat" cmpd="sng" algn="ctr">
+                      <a:solidFill>
+                        <a:srgbClr val="F1F2FB"/>
+                      </a:solidFill>
+                      <a:prstDash val="solid"/>
+                      <a:round/>
+                      <a:headEnd type="none" w="med" len="med"/>
+                      <a:tailEnd type="none" w="med" len="med"/>
+                    </a:lnB>
+                    <a:solidFill>
+                      <a:srgbClr val="FFFFFF"/>
+                    </a:solidFill>
+                  </a:tcPr>
+                </a:tc>
+              </a:tr>
+              <a:tr h="475488">
+                <a:tc>
+                  <a:txBody>
+                    <a:bodyPr/>
+                    <a:lstStyle/>
+                    <a:p>
+                      <a:pPr indent="0" marL="0">
+                        <a:buNone/>
+                      </a:pPr>
+                      <a:r>
+                        <a:rPr lang="en-US" sz="1300" b="1" dirty="0">
+                          <a:solidFill>
+                            <a:schemeClr val="tx1"/>
+                          </a:solidFill>
+                        </a:rPr>
+                        <a:t>Ціна AI</a:t>
+                      </a:r>
+                      <a:endParaRPr lang="en-US" sz="1300" dirty="0"/>
+                    </a:p>
+                  </a:txBody>
+                  <a:tcPr marL="73152" marR="73152" marT="0" marB="0" anchor="ctr">
+                    <a:lnL w="12700" cap="flat" cmpd="sng" algn="ctr">
+                      <a:solidFill>
+                        <a:srgbClr val="F1F2FB"/>
+                      </a:solidFill>
+                      <a:prstDash val="solid"/>
+                      <a:round/>
+                      <a:headEnd type="none" w="med" len="med"/>
+                      <a:tailEnd type="none" w="med" len="med"/>
+                    </a:lnL>
+                    <a:lnR w="12700" cap="flat" cmpd="sng" algn="ctr">
+                      <a:solidFill>
+                        <a:srgbClr val="F1F2FB"/>
+                      </a:solidFill>
+                      <a:prstDash val="solid"/>
+                      <a:round/>
+                      <a:headEnd type="none" w="med" len="med"/>
+                      <a:tailEnd type="none" w="med" len="med"/>
+                    </a:lnR>
+                    <a:lnT w="12700" cap="flat" cmpd="sng" algn="ctr">
+                      <a:solidFill>
+                        <a:srgbClr val="F1F2FB"/>
+                      </a:solidFill>
+                      <a:prstDash val="solid"/>
+                      <a:round/>
+                      <a:headEnd type="none" w="med" len="med"/>
+                      <a:tailEnd type="none" w="med" len="med"/>
+                    </a:lnT>
+                    <a:lnB w="12700" cap="flat" cmpd="sng" algn="ctr">
+                      <a:solidFill>
+                        <a:srgbClr val="F1F2FB"/>
+                      </a:solidFill>
+                      <a:prstDash val="solid"/>
+                      <a:round/>
+                      <a:headEnd type="none" w="med" len="med"/>
+                      <a:tailEnd type="none" w="med" len="med"/>
+                    </a:lnB>
+                    <a:solidFill>
+                      <a:srgbClr val="FFFFFF"/>
+                    </a:solidFill>
+                  </a:tcPr>
+                </a:tc>
+                <a:tc>
+                  <a:txBody>
+                    <a:bodyPr/>
+                    <a:lstStyle/>
+                    <a:p>
+                      <a:pPr algn="ctr" indent="0" marL="0">
+                        <a:buNone/>
+                      </a:pPr>
+                      <a:r>
+                        <a:rPr lang="en-US" sz="1300" b="1" dirty="0">
+                          <a:solidFill>
+                            <a:schemeClr val="accent3"/>
+                          </a:solidFill>
+                        </a:rPr>
+                        <a:t>за підпискою</a:t>
+                      </a:r>
+                      <a:endParaRPr lang="en-US" sz="1300" dirty="0"/>
+                    </a:p>
+                  </a:txBody>
+                  <a:tcPr marL="73152" marR="73152" marT="0" marB="0" anchor="ctr">
+                    <a:lnL w="12700" cap="flat" cmpd="sng" algn="ctr">
+                      <a:solidFill>
+                        <a:srgbClr val="F1F2FB"/>
+                      </a:solidFill>
+                      <a:prstDash val="solid"/>
+                      <a:round/>
+                      <a:headEnd type="none" w="med" len="med"/>
+                      <a:tailEnd type="none" w="med" len="med"/>
+                    </a:lnL>
+                    <a:lnR w="12700" cap="flat" cmpd="sng" algn="ctr">
+                      <a:solidFill>
+                        <a:srgbClr val="F1F2FB"/>
+                      </a:solidFill>
+                      <a:prstDash val="solid"/>
+                      <a:round/>
+                      <a:headEnd type="none" w="med" len="med"/>
+                      <a:tailEnd type="none" w="med" len="med"/>
+                    </a:lnR>
+                    <a:lnT w="12700" cap="flat" cmpd="sng" algn="ctr">
+                      <a:solidFill>
+                        <a:srgbClr val="F1F2FB"/>
+                      </a:solidFill>
+                      <a:prstDash val="solid"/>
+                      <a:round/>
+                      <a:headEnd type="none" w="med" len="med"/>
+                      <a:tailEnd type="none" w="med" len="med"/>
+                    </a:lnT>
+                    <a:lnB w="12700" cap="flat" cmpd="sng" algn="ctr">
+                      <a:solidFill>
+                        <a:srgbClr val="F1F2FB"/>
+                      </a:solidFill>
+                      <a:prstDash val="solid"/>
+                      <a:round/>
+                      <a:headEnd type="none" w="med" len="med"/>
+                      <a:tailEnd type="none" w="med" len="med"/>
+                    </a:lnB>
+                    <a:solidFill>
+                      <a:schemeClr val="bg2"/>
+                    </a:solidFill>
+                  </a:tcPr>
+                </a:tc>
+                <a:tc>
+                  <a:txBody>
+                    <a:bodyPr/>
+                    <a:lstStyle/>
+                    <a:p>
+                      <a:pPr algn="ctr" indent="0" marL="0">
+                        <a:buNone/>
+                      </a:pPr>
+                      <a:r>
+                        <a:rPr lang="en-US" sz="1300" dirty="0">
+                          <a:solidFill>
+                            <a:schemeClr val="accent4"/>
+                          </a:solidFill>
+                        </a:rPr>
+                        <a:t>$99,95 / міс за локацію</a:t>
+                      </a:r>
+                      <a:endParaRPr lang="en-US" sz="1300" dirty="0"/>
+                    </a:p>
+                  </a:txBody>
+                  <a:tcPr marL="73152" marR="73152" marT="0" marB="0" anchor="ctr">
+                    <a:lnL w="12700" cap="flat" cmpd="sng" algn="ctr">
+                      <a:solidFill>
+                        <a:srgbClr val="F1F2FB"/>
+                      </a:solidFill>
+                      <a:prstDash val="solid"/>
+                      <a:round/>
+                      <a:headEnd type="none" w="med" len="med"/>
+                      <a:tailEnd type="none" w="med" len="med"/>
+                    </a:lnL>
+                    <a:lnR w="12700" cap="flat" cmpd="sng" algn="ctr">
+                      <a:solidFill>
+                        <a:srgbClr val="F1F2FB"/>
+                      </a:solidFill>
+                      <a:prstDash val="solid"/>
+                      <a:round/>
+                      <a:headEnd type="none" w="med" len="med"/>
+                      <a:tailEnd type="none" w="med" len="med"/>
+                    </a:lnR>
+                    <a:lnT w="12700" cap="flat" cmpd="sng" algn="ctr">
+                      <a:solidFill>
+                        <a:srgbClr val="F1F2FB"/>
+                      </a:solidFill>
+                      <a:prstDash val="solid"/>
+                      <a:round/>
+                      <a:headEnd type="none" w="med" len="med"/>
+                      <a:tailEnd type="none" w="med" len="med"/>
+                    </a:lnT>
+                    <a:lnB w="12700" cap="flat" cmpd="sng" algn="ctr">
+                      <a:solidFill>
+                        <a:srgbClr val="F1F2FB"/>
+                      </a:solidFill>
+                      <a:prstDash val="solid"/>
+                      <a:round/>
+                      <a:headEnd type="none" w="med" len="med"/>
+                      <a:tailEnd type="none" w="med" len="med"/>
+                    </a:lnB>
+                    <a:solidFill>
+                      <a:srgbClr val="FFFFFF"/>
+                    </a:solidFill>
+                  </a:tcPr>
+                </a:tc>
+                <a:tc>
+                  <a:txBody>
+                    <a:bodyPr/>
+                    <a:lstStyle/>
+                    <a:p>
+                      <a:pPr algn="ctr" indent="0" marL="0">
+                        <a:buNone/>
+                      </a:pPr>
+                      <a:r>
+                        <a:rPr lang="en-US" sz="1300" dirty="0">
+                          <a:solidFill>
+                            <a:schemeClr val="accent5"/>
+                          </a:solidFill>
+                        </a:rPr>
+                        <a:t>—</a:t>
+                      </a:r>
+                      <a:endParaRPr lang="en-US" sz="1300" dirty="0"/>
+                    </a:p>
+                  </a:txBody>
+                  <a:tcPr marL="73152" marR="73152" marT="0" marB="0" anchor="ctr">
+                    <a:lnL w="12700" cap="flat" cmpd="sng" algn="ctr">
+                      <a:solidFill>
+                        <a:srgbClr val="F1F2FB"/>
+                      </a:solidFill>
+                      <a:prstDash val="solid"/>
+                      <a:round/>
+                      <a:headEnd type="none" w="med" len="med"/>
+                      <a:tailEnd type="none" w="med" len="med"/>
+                    </a:lnL>
+                    <a:lnR w="12700" cap="flat" cmpd="sng" algn="ctr">
+                      <a:solidFill>
+                        <a:srgbClr val="F1F2FB"/>
+                      </a:solidFill>
+                      <a:prstDash val="solid"/>
+                      <a:round/>
+                      <a:headEnd type="none" w="med" len="med"/>
+                      <a:tailEnd type="none" w="med" len="med"/>
+                    </a:lnR>
+                    <a:lnT w="12700" cap="flat" cmpd="sng" algn="ctr">
+                      <a:solidFill>
+                        <a:srgbClr val="F1F2FB"/>
+                      </a:solidFill>
+                      <a:prstDash val="solid"/>
+                      <a:round/>
+                      <a:headEnd type="none" w="med" len="med"/>
+                      <a:tailEnd type="none" w="med" len="med"/>
+                    </a:lnT>
+                    <a:lnB w="12700" cap="flat" cmpd="sng" algn="ctr">
+                      <a:solidFill>
+                        <a:srgbClr val="F1F2FB"/>
+                      </a:solidFill>
+                      <a:prstDash val="solid"/>
+                      <a:round/>
+                      <a:headEnd type="none" w="med" len="med"/>
+                      <a:tailEnd type="none" w="med" len="med"/>
+                    </a:lnB>
+                    <a:solidFill>
+                      <a:srgbClr val="FFFFFF"/>
+                    </a:solidFill>
+                  </a:tcPr>
+                </a:tc>
+                <a:tc>
+                  <a:txBody>
+                    <a:bodyPr/>
+                    <a:lstStyle/>
+                    <a:p>
+                      <a:pPr algn="ctr" indent="0" marL="0">
+                        <a:buNone/>
+                      </a:pPr>
+                      <a:r>
+                        <a:rPr lang="en-US" sz="1300" dirty="0">
+                          <a:solidFill>
+                            <a:schemeClr val="accent4"/>
+                          </a:solidFill>
+                        </a:rPr>
+                        <a:t>$0,99–2 за рішення + місця</a:t>
+                      </a:r>
+                      <a:endParaRPr lang="en-US" sz="1300" dirty="0"/>
+                    </a:p>
+                  </a:txBody>
+                  <a:tcPr marL="73152" marR="73152" marT="0" marB="0" anchor="ctr">
+                    <a:lnL w="12700" cap="flat" cmpd="sng" algn="ctr">
+                      <a:solidFill>
+                        <a:srgbClr val="F1F2FB"/>
+                      </a:solidFill>
+                      <a:prstDash val="solid"/>
+                      <a:round/>
+                      <a:headEnd type="none" w="med" len="med"/>
+                      <a:tailEnd type="none" w="med" len="med"/>
+                    </a:lnL>
+                    <a:lnR w="12700" cap="flat" cmpd="sng" algn="ctr">
+                      <a:solidFill>
+                        <a:srgbClr val="F1F2FB"/>
+                      </a:solidFill>
+                      <a:prstDash val="solid"/>
+                      <a:round/>
+                      <a:headEnd type="none" w="med" len="med"/>
+                      <a:tailEnd type="none" w="med" len="med"/>
+                    </a:lnR>
+                    <a:lnT w="12700" cap="flat" cmpd="sng" algn="ctr">
+                      <a:solidFill>
+                        <a:srgbClr val="F1F2FB"/>
+                      </a:solidFill>
+                      <a:prstDash val="solid"/>
+                      <a:round/>
+                      <a:headEnd type="none" w="med" len="med"/>
+                      <a:tailEnd type="none" w="med" len="med"/>
+                    </a:lnT>
+                    <a:lnB w="12700" cap="flat" cmpd="sng" algn="ctr">
+                      <a:solidFill>
+                        <a:srgbClr val="F1F2FB"/>
+                      </a:solidFill>
+                      <a:prstDash val="solid"/>
+                      <a:round/>
+                      <a:headEnd type="none" w="med" len="med"/>
+                      <a:tailEnd type="none" w="med" len="med"/>
+                    </a:lnB>
+                    <a:solidFill>
+                      <a:srgbClr val="FFFFFF"/>
+                    </a:solidFill>
+                  </a:tcPr>
+                </a:tc>
+              </a:tr>
+            </a:tbl>
+          </a:graphicData>
+        </a:graphic>
+      </p:graphicFrame>
+      <p:sp>
+        <p:nvSpPr>
+          <p:cNvPr id="16" name="market sources"/>
           <p:cNvSpPr txBox="1"/>
           <p:nvPr/>
         </p:nvSpPr>
         <p:spPr>
           <a:xfrm>
-            <a:off x="9360941" y="2651760"/>
-            <a:ext cx="316154" cy="457200"/>
+            <a:off x="548640" y="5989320"/>
+            <a:ext cx="10454335" cy="411480"/>
           </a:xfrm>
           <a:prstGeom prst="rect">
             <a:avLst/>
@@ -4100,283 +5851,20 @@
         </p:spPr>
         <p:txBody>
           <a:bodyPr wrap="square" lIns="0" tIns="0" rIns="0" bIns="0" rtlCol="0" anchor="ctr"/>
-          <a:lstStyle/>
-          <a:p>
-            <a:pPr algn="ctr" indent="0" marL="0">
-              <a:buNone/>
-            </a:pPr>
-            <a:r>
-              <a:rPr lang="en-US" sz="2000" b="1" dirty="0">
-                <a:solidFill>
-                  <a:schemeClr val="accent1"/>
-                </a:solidFill>
-              </a:rPr>
-              <a:t>→</a:t>
-            </a:r>
-            <a:endParaRPr lang="en-US" sz="2000" dirty="0"/>
-          </a:p>
-        </p:txBody>
-      </p:sp>
-      <p:sp>
-        <p:nvSpPr>
-          <p:cNvPr id="27" name="flow 5 card"/>
-          <p:cNvSpPr/>
-          <p:nvPr/>
-        </p:nvSpPr>
-        <p:spPr>
-          <a:xfrm>
-            <a:off x="9677095" y="1554480"/>
-            <a:ext cx="1965960" cy="2651760"/>
-          </a:xfrm>
-          <a:prstGeom prst="roundRect">
-            <a:avLst>
-              <a:gd name="adj" fmla="val 5581"/>
-            </a:avLst>
-          </a:prstGeom>
-          <a:solidFill>
-            <a:schemeClr val="bg1"/>
-          </a:solidFill>
-          <a:ln w="9525">
-            <a:solidFill>
-              <a:schemeClr val="bg2"/>
-            </a:solidFill>
-            <a:prstDash val="solid"/>
-          </a:ln>
-          <a:effectLst>
-            <a:outerShdw sx="100000" sy="100000" kx="0" ky="0" algn="bl" rotWithShape="0" blurRad="101600" dist="25400" dir="5400000">
-              <a:srgbClr val="16163A">
-                <a:alpha val="12000"/>
-              </a:srgbClr>
-            </a:outerShdw>
-          </a:effectLst>
-        </p:spPr>
-      </p:sp>
-      <p:sp>
-        <p:nvSpPr>
-          <p:cNvPr id="28" name="flow 5 icon bg"/>
-          <p:cNvSpPr/>
-          <p:nvPr/>
-        </p:nvSpPr>
-        <p:spPr>
-          <a:xfrm>
-            <a:off x="9951415" y="1828800"/>
-            <a:ext cx="566928" cy="566928"/>
-          </a:xfrm>
-          <a:prstGeom prst="ellipse">
-            <a:avLst/>
-          </a:prstGeom>
-          <a:solidFill>
-            <a:schemeClr val="bg2"/>
-          </a:solidFill>
-          <a:ln/>
-        </p:spPr>
-      </p:sp>
-      <p:pic>
-        <p:nvPicPr>
-          <p:cNvPr id="29" name="flow 5 icon" descr="preencoded.png">    </p:cNvPr>
-          <p:cNvPicPr>
-            <a:picLocks noChangeAspect="1"/>
-          </p:cNvPicPr>
-          <p:nvPr/>
-        </p:nvPicPr>
-        <p:blipFill>
-          <a:blip r:embed="rId5"/>
-          <a:stretch>
-            <a:fillRect/>
-          </a:stretch>
-        </p:blipFill>
-        <p:spPr>
-          <a:xfrm>
-            <a:off x="10079431" y="1956816"/>
-            <a:ext cx="310896" cy="310896"/>
-          </a:xfrm>
-          <a:prstGeom prst="rect">
-            <a:avLst/>
-          </a:prstGeom>
-        </p:spPr>
-      </p:pic>
-      <p:sp>
-        <p:nvSpPr>
-          <p:cNvPr id="30" name="flow 5 head"/>
-          <p:cNvSpPr txBox="1"/>
-          <p:nvPr/>
-        </p:nvSpPr>
-        <p:spPr>
-          <a:xfrm>
-            <a:off x="9951415" y="2578608"/>
-            <a:ext cx="1417320" cy="594360"/>
-          </a:xfrm>
-          <a:prstGeom prst="rect">
-            <a:avLst/>
-          </a:prstGeom>
-          <a:noFill/>
-          <a:ln/>
-        </p:spPr>
-        <p:txBody>
-          <a:bodyPr wrap="square" lIns="0" tIns="0" rIns="0" bIns="0" rtlCol="0" anchor="t"/>
           <a:lstStyle/>
           <a:p>
             <a:pPr indent="0" marL="0">
               <a:buNone/>
             </a:pPr>
             <a:r>
-              <a:rPr lang="en-US" sz="1400" b="1" dirty="0">
-                <a:solidFill>
-                  <a:schemeClr val="tx1"/>
+              <a:rPr lang="en-US" sz="1000" dirty="0">
+                <a:solidFill>
+                  <a:schemeClr val="accent5"/>
                 </a:solidFill>
               </a:rPr>
-              <a:t>Платформа</a:t>
-            </a:r>
-            <a:endParaRPr lang="en-US" sz="1400" dirty="0"/>
-          </a:p>
-        </p:txBody>
-      </p:sp>
-      <p:sp>
-        <p:nvSpPr>
-          <p:cNvPr id="31" name="flow 5 text"/>
-          <p:cNvSpPr txBox="1"/>
-          <p:nvPr/>
-        </p:nvSpPr>
-        <p:spPr>
-          <a:xfrm>
-            <a:off x="9951415" y="3264408"/>
-            <a:ext cx="1417320" cy="758952"/>
-          </a:xfrm>
-          <a:prstGeom prst="rect">
-            <a:avLst/>
-          </a:prstGeom>
-          <a:noFill/>
-          <a:ln/>
-        </p:spPr>
-        <p:txBody>
-          <a:bodyPr wrap="square" lIns="0" tIns="0" rIns="0" bIns="0" rtlCol="0" anchor="t"/>
-          <a:lstStyle/>
-          <a:p>
-            <a:pPr indent="0" marL="0">
-              <a:buNone/>
-            </a:pPr>
-            <a:r>
-              <a:rPr lang="en-US" sz="1300" dirty="0">
-                <a:solidFill>
-                  <a:schemeClr val="tx2"/>
-                </a:solidFill>
-              </a:rPr>
-              <a:t>API / MCP: зміни в реальних даних</a:t>
-            </a:r>
-            <a:endParaRPr lang="en-US" sz="1300" dirty="0"/>
-          </a:p>
-        </p:txBody>
-      </p:sp>
-      <p:sp>
-        <p:nvSpPr>
-          <p:cNvPr id="32" name="routing box"/>
-          <p:cNvSpPr/>
-          <p:nvPr/>
-        </p:nvSpPr>
-        <p:spPr>
-          <a:xfrm>
-            <a:off x="548640" y="4572000"/>
-            <a:ext cx="11094415" cy="1325880"/>
-          </a:xfrm>
-          <a:prstGeom prst="roundRect">
-            <a:avLst>
-              <a:gd name="adj" fmla="val 8276"/>
-            </a:avLst>
-          </a:prstGeom>
-          <a:solidFill>
-            <a:schemeClr val="bg2"/>
-          </a:solidFill>
-          <a:ln/>
-        </p:spPr>
-      </p:sp>
-      <p:sp>
-        <p:nvSpPr>
-          <p:cNvPr id="33" name="routing text"/>
-          <p:cNvSpPr txBox="1"/>
-          <p:nvPr/>
-        </p:nvSpPr>
-        <p:spPr>
-          <a:xfrm>
-            <a:off x="822960" y="4572000"/>
-            <a:ext cx="10545775" cy="1325880"/>
-          </a:xfrm>
-          <a:prstGeom prst="rect">
-            <a:avLst/>
-          </a:prstGeom>
-          <a:noFill/>
-          <a:ln/>
-        </p:spPr>
-        <p:txBody>
-          <a:bodyPr wrap="square" lIns="0" tIns="0" rIns="0" bIns="0" rtlCol="0" anchor="ctr"/>
-          <a:lstStyle/>
-          <a:p>
-            <a:pPr indent="0" marL="0">
-              <a:buNone/>
-            </a:pPr>
-            <a:r>
-              <a:rPr lang="en-US" sz="1600" b="1" dirty="0">
-                <a:solidFill>
-                  <a:schemeClr val="tx1"/>
-                </a:solidFill>
-              </a:rPr>
-              <a:t>Просте питання </a:t>
-            </a:r>
-            <a:pPr indent="0" marL="0">
-              <a:buNone/>
-            </a:pPr>
-            <a:r>
-              <a:rPr lang="en-US" sz="1600" dirty="0">
-                <a:solidFill>
-                  <a:schemeClr val="tx2"/>
-                </a:solidFill>
-              </a:rPr>
-              <a:t>(ціна, адреса) → відповідає Gemma 4, без дій.   </a:t>
-            </a:r>
-            <a:pPr indent="0" marL="0">
-              <a:buNone/>
-            </a:pPr>
-            <a:r>
-              <a:rPr lang="en-US" sz="1600" b="1" dirty="0">
-                <a:solidFill>
-                  <a:schemeClr val="tx1"/>
-                </a:solidFill>
-              </a:rPr>
-              <a:t>Дія із записом </a:t>
-            </a:r>
-            <a:pPr indent="0" marL="0">
-              <a:buNone/>
-            </a:pPr>
-            <a:r>
-              <a:rPr lang="en-US" sz="1600" dirty="0">
-                <a:solidFill>
-                  <a:schemeClr val="tx2"/>
-                </a:solidFill>
-              </a:rPr>
-              <a:t>→ завжди через агента й permission engine.   </a:t>
-            </a:r>
-            <a:pPr indent="0" marL="0">
-              <a:buNone/>
-            </a:pPr>
-            <a:r>
-              <a:rPr lang="en-US" sz="1600" b="1" dirty="0">
-                <a:solidFill>
-                  <a:schemeClr val="tx1"/>
-                </a:solidFill>
-              </a:rPr>
-              <a:t>Гнів чи терміновість </a:t>
-            </a:r>
-            <a:pPr indent="0" marL="0">
-              <a:buNone/>
-            </a:pPr>
-            <a:r>
-              <a:rPr lang="en-US" sz="1600" dirty="0">
-                <a:solidFill>
-                  <a:schemeClr val="tx2"/>
-                </a:solidFill>
-              </a:rPr>
-              <a:t>→ ескалація людині.</a:t>
-            </a:r>
-            <a:endParaRPr lang="en-US" sz="1600" dirty="0"/>
+              <a:t>Джерела: SchedulingKit і Square (неявки, оцінки вендорів), сайт Fresha та огляди 2026, огляди цін Intercom і Zendesk 2026. «Не заявлено» — у відкритих описах продукту такої функції немає.</a:t>
+            </a:r>
+            <a:endParaRPr lang="en-US" sz="1000" dirty="0"/>
           </a:p>
         </p:txBody>
       </p:sp>
@@ -4460,8 +5948,8 @@
         </p:nvSpPr>
         <p:spPr>
           <a:xfrm>
-            <a:off x="548640" y="320040"/>
-            <a:ext cx="11094415" cy="640080"/>
+            <a:off x="548640" y="365760"/>
+            <a:ext cx="11094415" cy="731520"/>
           </a:xfrm>
           <a:prstGeom prst="rect">
             <a:avLst/>
@@ -4477,58 +5965,74 @@
               <a:buNone/>
             </a:pPr>
             <a:r>
-              <a:rPr lang="en-US" sz="3000" b="1" dirty="0">
+              <a:rPr lang="en-US" sz="3200" b="1" dirty="0">
                 <a:solidFill>
                   <a:schemeClr val="tx1"/>
                 </a:solidFill>
               </a:rPr>
-              <a:t>Демо 1. Олена: агент сам рятує передоплату</a:t>
-            </a:r>
-            <a:endParaRPr lang="en-US" sz="3000" dirty="0"/>
-          </a:p>
-        </p:txBody>
-      </p:sp>
-      <p:sp>
-        <p:nvSpPr>
-          <p:cNvPr id="3" name="Text 0"/>
+              <a:t>Як агент приймає рішення</a:t>
+            </a:r>
+            <a:endParaRPr lang="en-US" sz="3200" dirty="0"/>
+          </a:p>
+        </p:txBody>
+      </p:sp>
+      <p:sp>
+        <p:nvSpPr>
+          <p:cNvPr id="3" name="flow 1 card"/>
           <p:cNvSpPr/>
-          <p:nvPr>
-            <p:ph idx="101" type="body" hasCustomPrompt="1"/>
-          </p:nvPr>
-        </p:nvSpPr>
-        <p:spPr>
-          <a:xfrm>
-            <a:off x="548640" y="960120"/>
-            <a:ext cx="11094415" cy="411480"/>
-          </a:xfrm>
-          <a:prstGeom prst="rect">
-            <a:avLst/>
-          </a:prstGeom>
-          <a:noFill/>
-          <a:ln/>
-        </p:spPr>
-        <p:txBody>
-          <a:bodyPr wrap="square" lIns="0" tIns="0" rIns="0" bIns="0" rtlCol="0" anchor="t"/>
-          <a:lstStyle/>
-          <a:p>
-            <a:pPr indent="0" marL="0">
-              <a:buNone/>
-            </a:pPr>
-            <a:r>
-              <a:rPr lang="en-US" sz="1600" dirty="0">
-                <a:solidFill>
-                  <a:schemeClr val="tx2"/>
-                </a:solidFill>
-              </a:rPr>
-              <a:t>«Дитина захворіла, не встигаю завтра на 10». Пізнє перенесення — за правилами передоплата згорає.</a:t>
-            </a:r>
-            <a:endParaRPr lang="en-US" sz="1600" dirty="0"/>
-          </a:p>
-        </p:txBody>
+          <p:nvPr/>
+        </p:nvSpPr>
+        <p:spPr>
+          <a:xfrm>
+            <a:off x="548640" y="1554480"/>
+            <a:ext cx="1965960" cy="2651760"/>
+          </a:xfrm>
+          <a:prstGeom prst="roundRect">
+            <a:avLst>
+              <a:gd name="adj" fmla="val 5581"/>
+            </a:avLst>
+          </a:prstGeom>
+          <a:solidFill>
+            <a:schemeClr val="bg1"/>
+          </a:solidFill>
+          <a:ln w="9525">
+            <a:solidFill>
+              <a:schemeClr val="bg2"/>
+            </a:solidFill>
+            <a:prstDash val="solid"/>
+          </a:ln>
+          <a:effectLst>
+            <a:outerShdw sx="100000" sy="100000" kx="0" ky="0" algn="bl" rotWithShape="0" blurRad="101600" dist="25400" dir="5400000">
+              <a:srgbClr val="16163A">
+                <a:alpha val="12000"/>
+              </a:srgbClr>
+            </a:outerShdw>
+          </a:effectLst>
+        </p:spPr>
+      </p:sp>
+      <p:sp>
+        <p:nvSpPr>
+          <p:cNvPr id="4" name="flow 1 icon bg"/>
+          <p:cNvSpPr/>
+          <p:nvPr/>
+        </p:nvSpPr>
+        <p:spPr>
+          <a:xfrm>
+            <a:off x="822960" y="1828800"/>
+            <a:ext cx="566928" cy="566928"/>
+          </a:xfrm>
+          <a:prstGeom prst="ellipse">
+            <a:avLst/>
+          </a:prstGeom>
+          <a:solidFill>
+            <a:schemeClr val="bg2"/>
+          </a:solidFill>
+          <a:ln/>
+        </p:spPr>
       </p:sp>
       <p:pic>
         <p:nvPicPr>
-          <p:cNvPr id="4" name="video scene-A.mp4" descr="Кадр з відео scene-A.mp4">    </p:cNvPr>
+          <p:cNvPr id="5" name="flow 1 icon" descr="preencoded.png">    </p:cNvPr>
           <p:cNvPicPr>
             <a:picLocks noChangeAspect="1"/>
           </p:cNvPicPr>
@@ -4542,8 +6046,8 @@
         </p:blipFill>
         <p:spPr>
           <a:xfrm>
-            <a:off x="548640" y="1737360"/>
-            <a:ext cx="11094415" cy="3467005"/>
+            <a:off x="950976" y="1956816"/>
+            <a:ext cx="310896" cy="310896"/>
           </a:xfrm>
           <a:prstGeom prst="rect">
             <a:avLst/>
@@ -4552,38 +6056,86 @@
       </p:pic>
       <p:sp>
         <p:nvSpPr>
-          <p:cNvPr id="5" name="insert video badge"/>
-          <p:cNvSpPr/>
-          <p:nvPr/>
-        </p:nvSpPr>
-        <p:spPr>
-          <a:xfrm>
-            <a:off x="4632808" y="3196542"/>
-            <a:ext cx="2926080" cy="548640"/>
-          </a:xfrm>
-          <a:prstGeom prst="roundRect">
-            <a:avLst>
-              <a:gd name="adj" fmla="val 50000"/>
-            </a:avLst>
-          </a:prstGeom>
-          <a:solidFill>
-            <a:schemeClr val="tx1">
-              <a:alpha val="85000"/>
-            </a:schemeClr>
-          </a:solidFill>
-          <a:ln/>
-        </p:spPr>
-      </p:sp>
-      <p:sp>
-        <p:nvSpPr>
-          <p:cNvPr id="6" name="insert video label"/>
+          <p:cNvPr id="6" name="flow 1 head"/>
           <p:cNvSpPr txBox="1"/>
           <p:nvPr/>
         </p:nvSpPr>
         <p:spPr>
           <a:xfrm>
-            <a:off x="4632808" y="3196542"/>
-            <a:ext cx="2926080" cy="548640"/>
+            <a:off x="822960" y="2578608"/>
+            <a:ext cx="1417320" cy="594360"/>
+          </a:xfrm>
+          <a:prstGeom prst="rect">
+            <a:avLst/>
+          </a:prstGeom>
+          <a:noFill/>
+          <a:ln/>
+        </p:spPr>
+        <p:txBody>
+          <a:bodyPr wrap="square" lIns="0" tIns="0" rIns="0" bIns="0" rtlCol="0" anchor="t"/>
+          <a:lstStyle/>
+          <a:p>
+            <a:pPr indent="0" marL="0">
+              <a:buNone/>
+            </a:pPr>
+            <a:r>
+              <a:rPr lang="en-US" sz="1400" b="1" dirty="0">
+                <a:solidFill>
+                  <a:schemeClr val="tx1"/>
+                </a:solidFill>
+              </a:rPr>
+              <a:t>Клієнт пише</a:t>
+            </a:r>
+            <a:endParaRPr lang="en-US" sz="1400" dirty="0"/>
+          </a:p>
+        </p:txBody>
+      </p:sp>
+      <p:sp>
+        <p:nvSpPr>
+          <p:cNvPr id="7" name="flow 1 text"/>
+          <p:cNvSpPr txBox="1"/>
+          <p:nvPr/>
+        </p:nvSpPr>
+        <p:spPr>
+          <a:xfrm>
+            <a:off x="822960" y="3264408"/>
+            <a:ext cx="1417320" cy="758952"/>
+          </a:xfrm>
+          <a:prstGeom prst="rect">
+            <a:avLst/>
+          </a:prstGeom>
+          <a:noFill/>
+          <a:ln/>
+        </p:spPr>
+        <p:txBody>
+          <a:bodyPr wrap="square" lIns="0" tIns="0" rIns="0" bIns="0" rtlCol="0" anchor="t"/>
+          <a:lstStyle/>
+          <a:p>
+            <a:pPr indent="0" marL="0">
+              <a:buNone/>
+            </a:pPr>
+            <a:r>
+              <a:rPr lang="en-US" sz="1300" dirty="0">
+                <a:solidFill>
+                  <a:schemeClr val="tx2"/>
+                </a:solidFill>
+              </a:rPr>
+              <a:t>Чат на сайті, віджет або дзвінок</a:t>
+            </a:r>
+            <a:endParaRPr lang="en-US" sz="1300" dirty="0"/>
+          </a:p>
+        </p:txBody>
+      </p:sp>
+      <p:sp>
+        <p:nvSpPr>
+          <p:cNvPr id="8" name="flow arrow 1"/>
+          <p:cNvSpPr txBox="1"/>
+          <p:nvPr/>
+        </p:nvSpPr>
+        <p:spPr>
+          <a:xfrm>
+            <a:off x="2514600" y="2651760"/>
+            <a:ext cx="316154" cy="457200"/>
           </a:xfrm>
           <a:prstGeom prst="rect">
             <a:avLst/>
@@ -4599,109 +6151,42 @@
               <a:buNone/>
             </a:pPr>
             <a:r>
-              <a:rPr lang="en-US" sz="1400" b="1" dirty="0">
-                <a:solidFill>
-                  <a:schemeClr val="bg1"/>
+              <a:rPr lang="en-US" sz="2000" b="1" dirty="0">
+                <a:solidFill>
+                  <a:schemeClr val="accent1"/>
                 </a:solidFill>
               </a:rPr>
-              <a:t>▶  вставити scene-A.mp4</a:t>
-            </a:r>
-            <a:endParaRPr lang="en-US" sz="1400" dirty="0"/>
-          </a:p>
-        </p:txBody>
-      </p:sp>
-      <p:sp>
-        <p:nvSpPr>
-          <p:cNvPr id="7" name="video label 0"/>
-          <p:cNvSpPr txBox="1"/>
-          <p:nvPr/>
-        </p:nvSpPr>
-        <p:spPr>
-          <a:xfrm>
-            <a:off x="548640" y="1444752"/>
-            <a:ext cx="5547208" cy="256032"/>
-          </a:xfrm>
-          <a:prstGeom prst="rect">
-            <a:avLst/>
-          </a:prstGeom>
-          <a:noFill/>
-          <a:ln/>
-        </p:spPr>
-        <p:txBody>
-          <a:bodyPr wrap="square" lIns="0" tIns="0" rIns="0" bIns="0" rtlCol="0" anchor="ctr"/>
-          <a:lstStyle/>
-          <a:p>
-            <a:pPr algn="ctr" indent="0" marL="0">
-              <a:buNone/>
-            </a:pPr>
-            <a:r>
-              <a:rPr lang="en-US" sz="1200" b="1" dirty="0">
-                <a:solidFill>
-                  <a:schemeClr val="accent5"/>
-                </a:solidFill>
-              </a:rPr>
-              <a:t>Клієнт на сайті Bookly</a:t>
-            </a:r>
-            <a:endParaRPr lang="en-US" sz="1200" dirty="0"/>
-          </a:p>
-        </p:txBody>
-      </p:sp>
-      <p:sp>
-        <p:nvSpPr>
-          <p:cNvPr id="8" name="video label 1"/>
-          <p:cNvSpPr txBox="1"/>
-          <p:nvPr/>
-        </p:nvSpPr>
-        <p:spPr>
-          <a:xfrm>
-            <a:off x="6095848" y="1444752"/>
-            <a:ext cx="5547208" cy="256032"/>
-          </a:xfrm>
-          <a:prstGeom prst="rect">
-            <a:avLst/>
-          </a:prstGeom>
-          <a:noFill/>
-          <a:ln/>
-        </p:spPr>
-        <p:txBody>
-          <a:bodyPr wrap="square" lIns="0" tIns="0" rIns="0" bIns="0" rtlCol="0" anchor="ctr"/>
-          <a:lstStyle/>
-          <a:p>
-            <a:pPr algn="ctr" indent="0" marL="0">
-              <a:buNone/>
-            </a:pPr>
-            <a:r>
-              <a:rPr lang="en-US" sz="1200" b="1" dirty="0">
-                <a:solidFill>
-                  <a:schemeClr val="accent5"/>
-                </a:solidFill>
-              </a:rPr>
-              <a:t>Чат і copilot адміністратора</a:t>
-            </a:r>
-            <a:endParaRPr lang="en-US" sz="1200" dirty="0"/>
-          </a:p>
-        </p:txBody>
-      </p:sp>
-      <p:sp>
-        <p:nvSpPr>
-          <p:cNvPr id="9" name="step 1"/>
+              <a:t>→</a:t>
+            </a:r>
+            <a:endParaRPr lang="en-US" sz="2000" dirty="0"/>
+          </a:p>
+        </p:txBody>
+      </p:sp>
+      <p:sp>
+        <p:nvSpPr>
+          <p:cNvPr id="9" name="flow 2 card"/>
           <p:cNvSpPr/>
           <p:nvPr/>
         </p:nvSpPr>
         <p:spPr>
           <a:xfrm>
-            <a:off x="548640" y="5303520"/>
-            <a:ext cx="3515258" cy="1005840"/>
+            <a:off x="2830754" y="1554480"/>
+            <a:ext cx="1965960" cy="2651760"/>
           </a:xfrm>
           <a:prstGeom prst="roundRect">
             <a:avLst>
-              <a:gd name="adj" fmla="val 9091"/>
+              <a:gd name="adj" fmla="val 5581"/>
             </a:avLst>
           </a:prstGeom>
           <a:solidFill>
             <a:schemeClr val="bg1"/>
           </a:solidFill>
-          <a:ln/>
+          <a:ln w="9525">
+            <a:solidFill>
+              <a:schemeClr val="bg2"/>
+            </a:solidFill>
+            <a:prstDash val="solid"/>
+          </a:ln>
           <a:effectLst>
             <a:outerShdw sx="100000" sy="100000" kx="0" ky="0" algn="bl" rotWithShape="0" blurRad="101600" dist="25400" dir="5400000">
               <a:srgbClr val="16163A">
@@ -4713,34 +6198,130 @@
       </p:sp>
       <p:sp>
         <p:nvSpPr>
-          <p:cNvPr id="10" name="step 1 dot"/>
+          <p:cNvPr id="10" name="flow 2 icon bg"/>
           <p:cNvSpPr/>
           <p:nvPr/>
         </p:nvSpPr>
         <p:spPr>
           <a:xfrm>
-            <a:off x="749808" y="5504688"/>
-            <a:ext cx="365760" cy="365760"/>
+            <a:off x="3105074" y="1828800"/>
+            <a:ext cx="566928" cy="566928"/>
           </a:xfrm>
           <a:prstGeom prst="ellipse">
             <a:avLst/>
           </a:prstGeom>
           <a:solidFill>
-            <a:schemeClr val="accent1"/>
+            <a:schemeClr val="bg2"/>
           </a:solidFill>
           <a:ln/>
         </p:spPr>
       </p:sp>
-      <p:sp>
-        <p:nvSpPr>
-          <p:cNvPr id="11" name="step 1 number"/>
+      <p:pic>
+        <p:nvPicPr>
+          <p:cNvPr id="11" name="flow 2 icon" descr="preencoded.png">    </p:cNvPr>
+          <p:cNvPicPr>
+            <a:picLocks noChangeAspect="1"/>
+          </p:cNvPicPr>
+          <p:nvPr/>
+        </p:nvPicPr>
+        <p:blipFill>
+          <a:blip r:embed="rId2"/>
+          <a:stretch>
+            <a:fillRect/>
+          </a:stretch>
+        </p:blipFill>
+        <p:spPr>
+          <a:xfrm>
+            <a:off x="3233090" y="1956816"/>
+            <a:ext cx="310896" cy="310896"/>
+          </a:xfrm>
+          <a:prstGeom prst="rect">
+            <a:avLst/>
+          </a:prstGeom>
+        </p:spPr>
+      </p:pic>
+      <p:sp>
+        <p:nvSpPr>
+          <p:cNvPr id="12" name="flow 2 head"/>
           <p:cNvSpPr txBox="1"/>
           <p:nvPr/>
         </p:nvSpPr>
         <p:spPr>
           <a:xfrm>
-            <a:off x="749808" y="5504688"/>
-            <a:ext cx="365760" cy="365760"/>
+            <a:off x="3105074" y="2578608"/>
+            <a:ext cx="1417320" cy="594360"/>
+          </a:xfrm>
+          <a:prstGeom prst="rect">
+            <a:avLst/>
+          </a:prstGeom>
+          <a:noFill/>
+          <a:ln/>
+        </p:spPr>
+        <p:txBody>
+          <a:bodyPr wrap="square" lIns="0" tIns="0" rIns="0" bIns="0" rtlCol="0" anchor="t"/>
+          <a:lstStyle/>
+          <a:p>
+            <a:pPr indent="0" marL="0">
+              <a:buNone/>
+            </a:pPr>
+            <a:r>
+              <a:rPr lang="en-US" sz="1400" b="1" dirty="0">
+                <a:solidFill>
+                  <a:schemeClr val="tx1"/>
+                </a:solidFill>
+              </a:rPr>
+              <a:t>Оркестратор</a:t>
+            </a:r>
+            <a:endParaRPr lang="en-US" sz="1400" dirty="0"/>
+          </a:p>
+        </p:txBody>
+      </p:sp>
+      <p:sp>
+        <p:nvSpPr>
+          <p:cNvPr id="13" name="flow 2 text"/>
+          <p:cNvSpPr txBox="1"/>
+          <p:nvPr/>
+        </p:nvSpPr>
+        <p:spPr>
+          <a:xfrm>
+            <a:off x="3105074" y="3264408"/>
+            <a:ext cx="1417320" cy="758952"/>
+          </a:xfrm>
+          <a:prstGeom prst="rect">
+            <a:avLst/>
+          </a:prstGeom>
+          <a:noFill/>
+          <a:ln/>
+        </p:spPr>
+        <p:txBody>
+          <a:bodyPr wrap="square" lIns="0" tIns="0" rIns="0" bIns="0" rtlCol="0" anchor="t"/>
+          <a:lstStyle/>
+          <a:p>
+            <a:pPr indent="0" marL="0">
+              <a:buNone/>
+            </a:pPr>
+            <a:r>
+              <a:rPr lang="en-US" sz="1300" dirty="0">
+                <a:solidFill>
+                  <a:schemeClr val="tx2"/>
+                </a:solidFill>
+              </a:rPr>
+              <a:t>Claude Sonnet: намір, емоція, терміновість, маршрут</a:t>
+            </a:r>
+            <a:endParaRPr lang="en-US" sz="1300" dirty="0"/>
+          </a:p>
+        </p:txBody>
+      </p:sp>
+      <p:sp>
+        <p:nvSpPr>
+          <p:cNvPr id="14" name="flow arrow 2"/>
+          <p:cNvSpPr txBox="1"/>
+          <p:nvPr/>
+        </p:nvSpPr>
+        <p:spPr>
+          <a:xfrm>
+            <a:off x="4796714" y="2651760"/>
+            <a:ext cx="316154" cy="457200"/>
           </a:xfrm>
           <a:prstGeom prst="rect">
             <a:avLst/>
@@ -4756,109 +6337,42 @@
               <a:buNone/>
             </a:pPr>
             <a:r>
-              <a:rPr lang="en-US" sz="1400" b="1" dirty="0">
-                <a:solidFill>
-                  <a:schemeClr val="bg1"/>
+              <a:rPr lang="en-US" sz="2000" b="1" dirty="0">
+                <a:solidFill>
+                  <a:schemeClr val="accent1"/>
                 </a:solidFill>
               </a:rPr>
-              <a:t>1</a:t>
-            </a:r>
-            <a:endParaRPr lang="en-US" sz="1400" dirty="0"/>
-          </a:p>
-        </p:txBody>
-      </p:sp>
-      <p:sp>
-        <p:nvSpPr>
-          <p:cNvPr id="12" name="step 1 head"/>
-          <p:cNvSpPr txBox="1"/>
-          <p:nvPr/>
-        </p:nvSpPr>
-        <p:spPr>
-          <a:xfrm>
-            <a:off x="1234440" y="5468112"/>
-            <a:ext cx="2646578" cy="411480"/>
-          </a:xfrm>
-          <a:prstGeom prst="rect">
-            <a:avLst/>
-          </a:prstGeom>
-          <a:noFill/>
-          <a:ln/>
-        </p:spPr>
-        <p:txBody>
-          <a:bodyPr wrap="square" lIns="0" tIns="0" rIns="0" bIns="0" rtlCol="0" anchor="ctr"/>
-          <a:lstStyle/>
-          <a:p>
-            <a:pPr indent="0" marL="0">
-              <a:buNone/>
-            </a:pPr>
-            <a:r>
-              <a:rPr lang="en-US" sz="1500" b="1" dirty="0">
-                <a:solidFill>
-                  <a:schemeClr val="tx1"/>
-                </a:solidFill>
-              </a:rPr>
-              <a:t>Контекст</a:t>
-            </a:r>
-            <a:endParaRPr lang="en-US" sz="1500" dirty="0"/>
-          </a:p>
-        </p:txBody>
-      </p:sp>
-      <p:sp>
-        <p:nvSpPr>
-          <p:cNvPr id="13" name="step 1 text"/>
-          <p:cNvSpPr txBox="1"/>
-          <p:nvPr/>
-        </p:nvSpPr>
-        <p:spPr>
-          <a:xfrm>
-            <a:off x="1234440" y="5870448"/>
-            <a:ext cx="2646578" cy="502920"/>
-          </a:xfrm>
-          <a:prstGeom prst="rect">
-            <a:avLst/>
-          </a:prstGeom>
-          <a:noFill/>
-          <a:ln/>
-        </p:spPr>
-        <p:txBody>
-          <a:bodyPr wrap="square" lIns="0" tIns="0" rIns="0" bIns="0" rtlCol="0" anchor="t"/>
-          <a:lstStyle/>
-          <a:p>
-            <a:pPr indent="0" marL="0">
-              <a:buNone/>
-            </a:pPr>
-            <a:r>
-              <a:rPr lang="en-US" sz="1200" dirty="0">
-                <a:solidFill>
-                  <a:schemeClr val="tx2"/>
-                </a:solidFill>
-              </a:rPr>
-              <a:t>12 візитів, 0 неявок, винятків ще не було</a:t>
-            </a:r>
-            <a:endParaRPr lang="en-US" sz="1200" dirty="0"/>
-          </a:p>
-        </p:txBody>
-      </p:sp>
-      <p:sp>
-        <p:nvSpPr>
-          <p:cNvPr id="14" name="step 2"/>
+              <a:t>→</a:t>
+            </a:r>
+            <a:endParaRPr lang="en-US" sz="2000" dirty="0"/>
+          </a:p>
+        </p:txBody>
+      </p:sp>
+      <p:sp>
+        <p:nvSpPr>
+          <p:cNvPr id="15" name="flow 3 card"/>
           <p:cNvSpPr/>
           <p:nvPr/>
         </p:nvSpPr>
         <p:spPr>
           <a:xfrm>
-            <a:off x="4338218" y="5303520"/>
-            <a:ext cx="3515258" cy="1005840"/>
+            <a:off x="5112868" y="1554480"/>
+            <a:ext cx="1965960" cy="2651760"/>
           </a:xfrm>
           <a:prstGeom prst="roundRect">
             <a:avLst>
-              <a:gd name="adj" fmla="val 9091"/>
+              <a:gd name="adj" fmla="val 5581"/>
             </a:avLst>
           </a:prstGeom>
           <a:solidFill>
             <a:schemeClr val="bg1"/>
           </a:solidFill>
-          <a:ln/>
+          <a:ln w="9525">
+            <a:solidFill>
+              <a:schemeClr val="bg2"/>
+            </a:solidFill>
+            <a:prstDash val="solid"/>
+          </a:ln>
           <a:effectLst>
             <a:outerShdw sx="100000" sy="100000" kx="0" ky="0" algn="bl" rotWithShape="0" blurRad="101600" dist="25400" dir="5400000">
               <a:srgbClr val="16163A">
@@ -4870,34 +6384,130 @@
       </p:sp>
       <p:sp>
         <p:nvSpPr>
-          <p:cNvPr id="15" name="step 2 dot"/>
+          <p:cNvPr id="16" name="flow 3 icon bg"/>
           <p:cNvSpPr/>
           <p:nvPr/>
         </p:nvSpPr>
         <p:spPr>
           <a:xfrm>
-            <a:off x="4539386" y="5504688"/>
-            <a:ext cx="365760" cy="365760"/>
+            <a:off x="5387188" y="1828800"/>
+            <a:ext cx="566928" cy="566928"/>
           </a:xfrm>
           <a:prstGeom prst="ellipse">
             <a:avLst/>
           </a:prstGeom>
           <a:solidFill>
-            <a:srgbClr val="12B886"/>
+            <a:schemeClr val="bg2"/>
           </a:solidFill>
           <a:ln/>
         </p:spPr>
       </p:sp>
-      <p:sp>
-        <p:nvSpPr>
-          <p:cNvPr id="16" name="step 2 number"/>
+      <p:pic>
+        <p:nvPicPr>
+          <p:cNvPr id="17" name="flow 3 icon" descr="preencoded.png">    </p:cNvPr>
+          <p:cNvPicPr>
+            <a:picLocks noChangeAspect="1"/>
+          </p:cNvPicPr>
+          <p:nvPr/>
+        </p:nvPicPr>
+        <p:blipFill>
+          <a:blip r:embed="rId3"/>
+          <a:stretch>
+            <a:fillRect/>
+          </a:stretch>
+        </p:blipFill>
+        <p:spPr>
+          <a:xfrm>
+            <a:off x="5515204" y="1956816"/>
+            <a:ext cx="310896" cy="310896"/>
+          </a:xfrm>
+          <a:prstGeom prst="rect">
+            <a:avLst/>
+          </a:prstGeom>
+        </p:spPr>
+      </p:pic>
+      <p:sp>
+        <p:nvSpPr>
+          <p:cNvPr id="18" name="flow 3 head"/>
           <p:cNvSpPr txBox="1"/>
           <p:nvPr/>
         </p:nvSpPr>
         <p:spPr>
           <a:xfrm>
-            <a:off x="4539386" y="5504688"/>
-            <a:ext cx="365760" cy="365760"/>
+            <a:off x="5387188" y="2578608"/>
+            <a:ext cx="1417320" cy="594360"/>
+          </a:xfrm>
+          <a:prstGeom prst="rect">
+            <a:avLst/>
+          </a:prstGeom>
+          <a:noFill/>
+          <a:ln/>
+        </p:spPr>
+        <p:txBody>
+          <a:bodyPr wrap="square" lIns="0" tIns="0" rIns="0" bIns="0" rtlCol="0" anchor="t"/>
+          <a:lstStyle/>
+          <a:p>
+            <a:pPr indent="0" marL="0">
+              <a:buNone/>
+            </a:pPr>
+            <a:r>
+              <a:rPr lang="en-US" sz="1400" b="1" dirty="0">
+                <a:solidFill>
+                  <a:schemeClr val="tx1"/>
+                </a:solidFill>
+              </a:rPr>
+              <a:t>Агент-виконавець</a:t>
+            </a:r>
+            <a:endParaRPr lang="en-US" sz="1400" dirty="0"/>
+          </a:p>
+        </p:txBody>
+      </p:sp>
+      <p:sp>
+        <p:nvSpPr>
+          <p:cNvPr id="19" name="flow 3 text"/>
+          <p:cNvSpPr txBox="1"/>
+          <p:nvPr/>
+        </p:nvSpPr>
+        <p:spPr>
+          <a:xfrm>
+            <a:off x="5387188" y="3264408"/>
+            <a:ext cx="1417320" cy="758952"/>
+          </a:xfrm>
+          <a:prstGeom prst="rect">
+            <a:avLst/>
+          </a:prstGeom>
+          <a:noFill/>
+          <a:ln/>
+        </p:spPr>
+        <p:txBody>
+          <a:bodyPr wrap="square" lIns="0" tIns="0" rIns="0" bIns="0" rtlCol="0" anchor="t"/>
+          <a:lstStyle/>
+          <a:p>
+            <a:pPr indent="0" marL="0">
+              <a:buNone/>
+            </a:pPr>
+            <a:r>
+              <a:rPr lang="en-US" sz="1300" dirty="0">
+                <a:solidFill>
+                  <a:schemeClr val="tx2"/>
+                </a:solidFill>
+              </a:rPr>
+              <a:t>Читає профіль і правила, викликає інструменти</a:t>
+            </a:r>
+            <a:endParaRPr lang="en-US" sz="1300" dirty="0"/>
+          </a:p>
+        </p:txBody>
+      </p:sp>
+      <p:sp>
+        <p:nvSpPr>
+          <p:cNvPr id="20" name="flow arrow 3"/>
+          <p:cNvSpPr txBox="1"/>
+          <p:nvPr/>
+        </p:nvSpPr>
+        <p:spPr>
+          <a:xfrm>
+            <a:off x="7078828" y="2651760"/>
+            <a:ext cx="316154" cy="457200"/>
           </a:xfrm>
           <a:prstGeom prst="rect">
             <a:avLst/>
@@ -4913,109 +6523,42 @@
               <a:buNone/>
             </a:pPr>
             <a:r>
-              <a:rPr lang="en-US" sz="1400" b="1" dirty="0">
-                <a:solidFill>
-                  <a:schemeClr val="bg1"/>
+              <a:rPr lang="en-US" sz="2000" b="1" dirty="0">
+                <a:solidFill>
+                  <a:schemeClr val="accent1"/>
                 </a:solidFill>
               </a:rPr>
-              <a:t>2</a:t>
-            </a:r>
-            <a:endParaRPr lang="en-US" sz="1400" dirty="0"/>
-          </a:p>
-        </p:txBody>
-      </p:sp>
-      <p:sp>
-        <p:nvSpPr>
-          <p:cNvPr id="17" name="step 2 head"/>
-          <p:cNvSpPr txBox="1"/>
-          <p:nvPr/>
-        </p:nvSpPr>
-        <p:spPr>
-          <a:xfrm>
-            <a:off x="5024018" y="5468112"/>
-            <a:ext cx="2646578" cy="411480"/>
-          </a:xfrm>
-          <a:prstGeom prst="rect">
-            <a:avLst/>
-          </a:prstGeom>
-          <a:noFill/>
-          <a:ln/>
-        </p:spPr>
-        <p:txBody>
-          <a:bodyPr wrap="square" lIns="0" tIns="0" rIns="0" bIns="0" rtlCol="0" anchor="ctr"/>
-          <a:lstStyle/>
-          <a:p>
-            <a:pPr indent="0" marL="0">
-              <a:buNone/>
-            </a:pPr>
-            <a:r>
-              <a:rPr lang="en-US" sz="1500" b="1" dirty="0">
-                <a:solidFill>
-                  <a:schemeClr val="tx1"/>
-                </a:solidFill>
-              </a:rPr>
-              <a:t>Рішення сам</a:t>
-            </a:r>
-            <a:endParaRPr lang="en-US" sz="1500" dirty="0"/>
-          </a:p>
-        </p:txBody>
-      </p:sp>
-      <p:sp>
-        <p:nvSpPr>
-          <p:cNvPr id="18" name="step 2 text"/>
-          <p:cNvSpPr txBox="1"/>
-          <p:nvPr/>
-        </p:nvSpPr>
-        <p:spPr>
-          <a:xfrm>
-            <a:off x="5024018" y="5870448"/>
-            <a:ext cx="2646578" cy="502920"/>
-          </a:xfrm>
-          <a:prstGeom prst="rect">
-            <a:avLst/>
-          </a:prstGeom>
-          <a:noFill/>
-          <a:ln/>
-        </p:spPr>
-        <p:txBody>
-          <a:bodyPr wrap="square" lIns="0" tIns="0" rIns="0" bIns="0" rtlCol="0" anchor="t"/>
-          <a:lstStyle/>
-          <a:p>
-            <a:pPr indent="0" marL="0">
-              <a:buNone/>
-            </a:pPr>
-            <a:r>
-              <a:rPr lang="en-US" sz="1200" dirty="0">
-                <a:solidFill>
-                  <a:schemeClr val="tx2"/>
-                </a:solidFill>
-              </a:rPr>
-              <a:t>Правило салону дозволяє виняток автоматично</a:t>
-            </a:r>
-            <a:endParaRPr lang="en-US" sz="1200" dirty="0"/>
-          </a:p>
-        </p:txBody>
-      </p:sp>
-      <p:sp>
-        <p:nvSpPr>
-          <p:cNvPr id="19" name="step 3"/>
+              <a:t>→</a:t>
+            </a:r>
+            <a:endParaRPr lang="en-US" sz="2000" dirty="0"/>
+          </a:p>
+        </p:txBody>
+      </p:sp>
+      <p:sp>
+        <p:nvSpPr>
+          <p:cNvPr id="21" name="flow 4 card"/>
           <p:cNvSpPr/>
           <p:nvPr/>
         </p:nvSpPr>
         <p:spPr>
           <a:xfrm>
-            <a:off x="8127797" y="5303520"/>
-            <a:ext cx="3515258" cy="1005840"/>
+            <a:off x="7394981" y="1554480"/>
+            <a:ext cx="1965960" cy="2651760"/>
           </a:xfrm>
           <a:prstGeom prst="roundRect">
             <a:avLst>
-              <a:gd name="adj" fmla="val 9091"/>
+              <a:gd name="adj" fmla="val 5581"/>
             </a:avLst>
           </a:prstGeom>
           <a:solidFill>
             <a:schemeClr val="bg1"/>
           </a:solidFill>
-          <a:ln/>
+          <a:ln w="9525">
+            <a:solidFill>
+              <a:schemeClr val="bg2"/>
+            </a:solidFill>
+            <a:prstDash val="solid"/>
+          </a:ln>
           <a:effectLst>
             <a:outerShdw sx="100000" sy="100000" kx="0" ky="0" algn="bl" rotWithShape="0" blurRad="101600" dist="25400" dir="5400000">
               <a:srgbClr val="16163A">
@@ -5027,34 +6570,130 @@
       </p:sp>
       <p:sp>
         <p:nvSpPr>
-          <p:cNvPr id="20" name="step 3 dot"/>
+          <p:cNvPr id="22" name="flow 4 icon bg"/>
           <p:cNvSpPr/>
           <p:nvPr/>
         </p:nvSpPr>
         <p:spPr>
           <a:xfrm>
-            <a:off x="8328965" y="5504688"/>
-            <a:ext cx="365760" cy="365760"/>
+            <a:off x="7669301" y="1828800"/>
+            <a:ext cx="566928" cy="566928"/>
           </a:xfrm>
           <a:prstGeom prst="ellipse">
             <a:avLst/>
           </a:prstGeom>
           <a:solidFill>
-            <a:schemeClr val="accent1"/>
+            <a:schemeClr val="bg2"/>
           </a:solidFill>
           <a:ln/>
         </p:spPr>
       </p:sp>
-      <p:sp>
-        <p:nvSpPr>
-          <p:cNvPr id="21" name="step 3 number"/>
+      <p:pic>
+        <p:nvPicPr>
+          <p:cNvPr id="23" name="flow 4 icon" descr="preencoded.png">    </p:cNvPr>
+          <p:cNvPicPr>
+            <a:picLocks noChangeAspect="1"/>
+          </p:cNvPicPr>
+          <p:nvPr/>
+        </p:nvPicPr>
+        <p:blipFill>
+          <a:blip r:embed="rId4"/>
+          <a:stretch>
+            <a:fillRect/>
+          </a:stretch>
+        </p:blipFill>
+        <p:spPr>
+          <a:xfrm>
+            <a:off x="7797317" y="1956816"/>
+            <a:ext cx="310896" cy="310896"/>
+          </a:xfrm>
+          <a:prstGeom prst="rect">
+            <a:avLst/>
+          </a:prstGeom>
+        </p:spPr>
+      </p:pic>
+      <p:sp>
+        <p:nvSpPr>
+          <p:cNvPr id="24" name="flow 4 head"/>
           <p:cNvSpPr txBox="1"/>
           <p:nvPr/>
         </p:nvSpPr>
         <p:spPr>
           <a:xfrm>
-            <a:off x="8328965" y="5504688"/>
-            <a:ext cx="365760" cy="365760"/>
+            <a:off x="7669301" y="2578608"/>
+            <a:ext cx="1417320" cy="594360"/>
+          </a:xfrm>
+          <a:prstGeom prst="rect">
+            <a:avLst/>
+          </a:prstGeom>
+          <a:noFill/>
+          <a:ln/>
+        </p:spPr>
+        <p:txBody>
+          <a:bodyPr wrap="square" lIns="0" tIns="0" rIns="0" bIns="0" rtlCol="0" anchor="t"/>
+          <a:lstStyle/>
+          <a:p>
+            <a:pPr indent="0" marL="0">
+              <a:buNone/>
+            </a:pPr>
+            <a:r>
+              <a:rPr lang="en-US" sz="1400" b="1" dirty="0">
+                <a:solidFill>
+                  <a:schemeClr val="tx1"/>
+                </a:solidFill>
+              </a:rPr>
+              <a:t>Permission engine</a:t>
+            </a:r>
+            <a:endParaRPr lang="en-US" sz="1400" dirty="0"/>
+          </a:p>
+        </p:txBody>
+      </p:sp>
+      <p:sp>
+        <p:nvSpPr>
+          <p:cNvPr id="25" name="flow 4 text"/>
+          <p:cNvSpPr txBox="1"/>
+          <p:nvPr/>
+        </p:nvSpPr>
+        <p:spPr>
+          <a:xfrm>
+            <a:off x="7669301" y="3264408"/>
+            <a:ext cx="1417320" cy="758952"/>
+          </a:xfrm>
+          <a:prstGeom prst="rect">
+            <a:avLst/>
+          </a:prstGeom>
+          <a:noFill/>
+          <a:ln/>
+        </p:spPr>
+        <p:txBody>
+          <a:bodyPr wrap="square" lIns="0" tIns="0" rIns="0" bIns="0" rtlCol="0" anchor="t"/>
+          <a:lstStyle/>
+          <a:p>
+            <a:pPr indent="0" marL="0">
+              <a:buNone/>
+            </a:pPr>
+            <a:r>
+              <a:rPr lang="en-US" sz="1300" dirty="0">
+                <a:solidFill>
+                  <a:schemeClr val="tx2"/>
+                </a:solidFill>
+              </a:rPr>
+              <a:t>Сам · з погодженням · заборонено</a:t>
+            </a:r>
+            <a:endParaRPr lang="en-US" sz="1300" dirty="0"/>
+          </a:p>
+        </p:txBody>
+      </p:sp>
+      <p:sp>
+        <p:nvSpPr>
+          <p:cNvPr id="26" name="flow arrow 4"/>
+          <p:cNvSpPr txBox="1"/>
+          <p:nvPr/>
+        </p:nvSpPr>
+        <p:spPr>
+          <a:xfrm>
+            <a:off x="9360941" y="2651760"/>
+            <a:ext cx="316154" cy="457200"/>
           </a:xfrm>
           <a:prstGeom prst="rect">
             <a:avLst/>
@@ -5070,27 +6709,105 @@
               <a:buNone/>
             </a:pPr>
             <a:r>
-              <a:rPr lang="en-US" sz="1400" b="1" dirty="0">
-                <a:solidFill>
-                  <a:schemeClr val="bg1"/>
+              <a:rPr lang="en-US" sz="2000" b="1" dirty="0">
+                <a:solidFill>
+                  <a:schemeClr val="accent1"/>
                 </a:solidFill>
               </a:rPr>
-              <a:t>3</a:t>
-            </a:r>
-            <a:endParaRPr lang="en-US" sz="1400" dirty="0"/>
-          </a:p>
-        </p:txBody>
-      </p:sp>
-      <p:sp>
-        <p:nvSpPr>
-          <p:cNvPr id="22" name="step 3 head"/>
+              <a:t>→</a:t>
+            </a:r>
+            <a:endParaRPr lang="en-US" sz="2000" dirty="0"/>
+          </a:p>
+        </p:txBody>
+      </p:sp>
+      <p:sp>
+        <p:nvSpPr>
+          <p:cNvPr id="27" name="flow 5 card"/>
+          <p:cNvSpPr/>
+          <p:nvPr/>
+        </p:nvSpPr>
+        <p:spPr>
+          <a:xfrm>
+            <a:off x="9677095" y="1554480"/>
+            <a:ext cx="1965960" cy="2651760"/>
+          </a:xfrm>
+          <a:prstGeom prst="roundRect">
+            <a:avLst>
+              <a:gd name="adj" fmla="val 5581"/>
+            </a:avLst>
+          </a:prstGeom>
+          <a:solidFill>
+            <a:schemeClr val="bg1"/>
+          </a:solidFill>
+          <a:ln w="9525">
+            <a:solidFill>
+              <a:schemeClr val="bg2"/>
+            </a:solidFill>
+            <a:prstDash val="solid"/>
+          </a:ln>
+          <a:effectLst>
+            <a:outerShdw sx="100000" sy="100000" kx="0" ky="0" algn="bl" rotWithShape="0" blurRad="101600" dist="25400" dir="5400000">
+              <a:srgbClr val="16163A">
+                <a:alpha val="12000"/>
+              </a:srgbClr>
+            </a:outerShdw>
+          </a:effectLst>
+        </p:spPr>
+      </p:sp>
+      <p:sp>
+        <p:nvSpPr>
+          <p:cNvPr id="28" name="flow 5 icon bg"/>
+          <p:cNvSpPr/>
+          <p:nvPr/>
+        </p:nvSpPr>
+        <p:spPr>
+          <a:xfrm>
+            <a:off x="9951415" y="1828800"/>
+            <a:ext cx="566928" cy="566928"/>
+          </a:xfrm>
+          <a:prstGeom prst="ellipse">
+            <a:avLst/>
+          </a:prstGeom>
+          <a:solidFill>
+            <a:schemeClr val="bg2"/>
+          </a:solidFill>
+          <a:ln/>
+        </p:spPr>
+      </p:sp>
+      <p:pic>
+        <p:nvPicPr>
+          <p:cNvPr id="29" name="flow 5 icon" descr="preencoded.png">    </p:cNvPr>
+          <p:cNvPicPr>
+            <a:picLocks noChangeAspect="1"/>
+          </p:cNvPicPr>
+          <p:nvPr/>
+        </p:nvPicPr>
+        <p:blipFill>
+          <a:blip r:embed="rId5"/>
+          <a:stretch>
+            <a:fillRect/>
+          </a:stretch>
+        </p:blipFill>
+        <p:spPr>
+          <a:xfrm>
+            <a:off x="10079431" y="1956816"/>
+            <a:ext cx="310896" cy="310896"/>
+          </a:xfrm>
+          <a:prstGeom prst="rect">
+            <a:avLst/>
+          </a:prstGeom>
+        </p:spPr>
+      </p:pic>
+      <p:sp>
+        <p:nvSpPr>
+          <p:cNvPr id="30" name="flow 5 head"/>
           <p:cNvSpPr txBox="1"/>
           <p:nvPr/>
         </p:nvSpPr>
         <p:spPr>
           <a:xfrm>
-            <a:off x="8813597" y="5468112"/>
-            <a:ext cx="2646578" cy="411480"/>
+            <a:off x="9951415" y="2578608"/>
+            <a:ext cx="1417320" cy="594360"/>
           </a:xfrm>
           <a:prstGeom prst="rect">
             <a:avLst/>
@@ -5099,34 +6816,34 @@
           <a:ln/>
         </p:spPr>
         <p:txBody>
-          <a:bodyPr wrap="square" lIns="0" tIns="0" rIns="0" bIns="0" rtlCol="0" anchor="ctr"/>
+          <a:bodyPr wrap="square" lIns="0" tIns="0" rIns="0" bIns="0" rtlCol="0" anchor="t"/>
           <a:lstStyle/>
           <a:p>
             <a:pPr indent="0" marL="0">
               <a:buNone/>
             </a:pPr>
             <a:r>
-              <a:rPr lang="en-US" sz="1500" b="1" dirty="0">
+              <a:rPr lang="en-US" sz="1400" b="1" dirty="0">
                 <a:solidFill>
                   <a:schemeClr val="tx1"/>
                 </a:solidFill>
               </a:rPr>
-              <a:t>Дія</a:t>
-            </a:r>
-            <a:endParaRPr lang="en-US" sz="1500" dirty="0"/>
-          </a:p>
-        </p:txBody>
-      </p:sp>
-      <p:sp>
-        <p:nvSpPr>
-          <p:cNvPr id="23" name="step 3 text"/>
+              <a:t>Платформа</a:t>
+            </a:r>
+            <a:endParaRPr lang="en-US" sz="1400" dirty="0"/>
+          </a:p>
+        </p:txBody>
+      </p:sp>
+      <p:sp>
+        <p:nvSpPr>
+          <p:cNvPr id="31" name="flow 5 text"/>
           <p:cNvSpPr txBox="1"/>
           <p:nvPr/>
         </p:nvSpPr>
         <p:spPr>
           <a:xfrm>
-            <a:off x="8813597" y="5870448"/>
-            <a:ext cx="2646578" cy="502920"/>
+            <a:off x="9951415" y="3264408"/>
+            <a:ext cx="1417320" cy="758952"/>
           </a:xfrm>
           <a:prstGeom prst="rect">
             <a:avLst/>
@@ -5142,14 +6859,127 @@
               <a:buNone/>
             </a:pPr>
             <a:r>
-              <a:rPr lang="en-US" sz="1200" dirty="0">
+              <a:rPr lang="en-US" sz="1300" dirty="0">
                 <a:solidFill>
                   <a:schemeClr val="tx2"/>
                 </a:solidFill>
               </a:rPr>
-              <a:t>Знаходить слоти, переносить, 500 грн збережено</a:t>
-            </a:r>
-            <a:endParaRPr lang="en-US" sz="1200" dirty="0"/>
+              <a:t>API / MCP: зміни в реальних даних</a:t>
+            </a:r>
+            <a:endParaRPr lang="en-US" sz="1300" dirty="0"/>
+          </a:p>
+        </p:txBody>
+      </p:sp>
+      <p:sp>
+        <p:nvSpPr>
+          <p:cNvPr id="32" name="routing box"/>
+          <p:cNvSpPr/>
+          <p:nvPr/>
+        </p:nvSpPr>
+        <p:spPr>
+          <a:xfrm>
+            <a:off x="548640" y="4572000"/>
+            <a:ext cx="11094415" cy="1325880"/>
+          </a:xfrm>
+          <a:prstGeom prst="roundRect">
+            <a:avLst>
+              <a:gd name="adj" fmla="val 8276"/>
+            </a:avLst>
+          </a:prstGeom>
+          <a:solidFill>
+            <a:schemeClr val="bg2"/>
+          </a:solidFill>
+          <a:ln/>
+        </p:spPr>
+      </p:sp>
+      <p:sp>
+        <p:nvSpPr>
+          <p:cNvPr id="33" name="routing text"/>
+          <p:cNvSpPr txBox="1"/>
+          <p:nvPr/>
+        </p:nvSpPr>
+        <p:spPr>
+          <a:xfrm>
+            <a:off x="822960" y="4572000"/>
+            <a:ext cx="10545775" cy="1325880"/>
+          </a:xfrm>
+          <a:prstGeom prst="rect">
+            <a:avLst/>
+          </a:prstGeom>
+          <a:noFill/>
+          <a:ln/>
+        </p:spPr>
+        <p:txBody>
+          <a:bodyPr wrap="square" lIns="0" tIns="0" rIns="0" bIns="0" rtlCol="0" anchor="ctr"/>
+          <a:lstStyle/>
+          <a:p>
+            <a:pPr indent="0" marL="0">
+              <a:buNone/>
+            </a:pPr>
+            <a:r>
+              <a:rPr lang="en-US" sz="1600" b="1" dirty="0">
+                <a:solidFill>
+                  <a:schemeClr val="tx1"/>
+                </a:solidFill>
+              </a:rPr>
+              <a:t>Просте питання </a:t>
+            </a:r>
+            <a:pPr indent="0" marL="0">
+              <a:buNone/>
+            </a:pPr>
+            <a:r>
+              <a:rPr lang="en-US" sz="1600" dirty="0">
+                <a:solidFill>
+                  <a:schemeClr val="tx2"/>
+                </a:solidFill>
+              </a:rPr>
+              <a:t>(ціна, адреса) → відповідає Gemma 4, без дій.   </a:t>
+            </a:r>
+            <a:pPr indent="0" marL="0">
+              <a:buNone/>
+            </a:pPr>
+            <a:r>
+              <a:rPr lang="en-US" sz="1600" b="1" dirty="0">
+                <a:solidFill>
+                  <a:schemeClr val="tx1"/>
+                </a:solidFill>
+              </a:rPr>
+              <a:t>Дія із записом </a:t>
+            </a:r>
+            <a:pPr indent="0" marL="0">
+              <a:buNone/>
+            </a:pPr>
+            <a:r>
+              <a:rPr lang="en-US" sz="1600" dirty="0">
+                <a:solidFill>
+                  <a:schemeClr val="tx2"/>
+                </a:solidFill>
+              </a:rPr>
+              <a:t>→ завжди через агента й permission engine.   </a:t>
+            </a:r>
+            <a:pPr indent="0" marL="0">
+              <a:buNone/>
+            </a:pPr>
+            <a:r>
+              <a:rPr lang="en-US" sz="1600" b="1" dirty="0">
+                <a:solidFill>
+                  <a:schemeClr val="tx1"/>
+                </a:solidFill>
+              </a:rPr>
+              <a:t>Гнів чи терміновість </a:t>
+            </a:r>
+            <a:pPr indent="0" marL="0">
+              <a:buNone/>
+            </a:pPr>
+            <a:r>
+              <a:rPr lang="en-US" sz="1600" dirty="0">
+                <a:solidFill>
+                  <a:schemeClr val="tx2"/>
+                </a:solidFill>
+              </a:rPr>
+              <a:t>→ ескалація людині.</a:t>
+            </a:r>
+            <a:endParaRPr lang="en-US" sz="1600" dirty="0"/>
           </a:p>
         </p:txBody>
       </p:sp>
@@ -5255,7 +7085,7 @@
                   <a:schemeClr val="tx1"/>
                 </a:solidFill>
               </a:rPr>
-              <a:t>Демо 2. Максим: ризикове рішення — людині</a:t>
+              <a:t>Демо 1. Олена: агент сам рятує передоплату</a:t>
             </a:r>
             <a:endParaRPr lang="en-US" sz="3000" dirty="0"/>
           </a:p>
@@ -5293,7 +7123,7 @@
                   <a:schemeClr val="tx2"/>
                 </a:solidFill>
               </a:rPr>
-              <a:t>Той самий запит, але в клієнта 2 неявки. Агент не вирішує сам, а просить адміністратора.</a:t>
+              <a:t>«Дитина захворіла, не встигаю завтра на 10». Пізнє перенесення — за правилами передоплата згорає.</a:t>
             </a:r>
             <a:endParaRPr lang="en-US" sz="1600" dirty="0"/>
           </a:p>
@@ -5301,7 +7131,7 @@
       </p:sp>
       <p:pic>
         <p:nvPicPr>
-          <p:cNvPr id="4" name="video scene-B.mp4" descr="Кадр з відео scene-B.mp4">    </p:cNvPr>
+          <p:cNvPr id="4" name="video scene-A.mp4" descr="Кадр з відео scene-A.mp4">    </p:cNvPr>
           <p:cNvPicPr>
             <a:picLocks noChangeAspect="1"/>
           </p:cNvPicPr>
@@ -5377,7 +7207,7 @@
                   <a:schemeClr val="bg1"/>
                 </a:solidFill>
               </a:rPr>
-              <a:t>▶  вставити scene-B.mp4</a:t>
+              <a:t>▶  вставити scene-A.mp4</a:t>
             </a:r>
             <a:endParaRPr lang="en-US" sz="1400" dirty="0"/>
           </a:p>
@@ -5499,7 +7329,7 @@
             <a:avLst/>
           </a:prstGeom>
           <a:solidFill>
-            <a:srgbClr val="F59F00"/>
+            <a:schemeClr val="accent1"/>
           </a:solidFill>
           <a:ln/>
         </p:spPr>
@@ -5606,7 +7436,7 @@
                   <a:schemeClr val="tx2"/>
                 </a:solidFill>
               </a:rPr>
-              <a:t>2 неявки — автоматичний виняток не дозволено</a:t>
+              <a:t>12 візитів, 0 неявок, винятків ще не було</a:t>
             </a:r>
             <a:endParaRPr lang="en-US" sz="1200" dirty="0"/>
           </a:p>
@@ -5656,7 +7486,7 @@
             <a:avLst/>
           </a:prstGeom>
           <a:solidFill>
-            <a:srgbClr val="F59F00"/>
+            <a:srgbClr val="12B886"/>
           </a:solidFill>
           <a:ln/>
         </p:spPr>
@@ -5727,7 +7557,7 @@
                   <a:schemeClr val="tx1"/>
                 </a:solidFill>
               </a:rPr>
-              <a:t>Погодження</a:t>
+              <a:t>Рішення сам</a:t>
             </a:r>
             <a:endParaRPr lang="en-US" sz="1500" dirty="0"/>
           </a:p>
@@ -5763,7 +7593,7 @@
                   <a:schemeClr val="tx2"/>
                 </a:solidFill>
               </a:rPr>
-              <a:t>Адміністратор схвалює в copilot одним кліком</a:t>
+              <a:t>Правило салону дозволяє виняток автоматично</a:t>
             </a:r>
             <a:endParaRPr lang="en-US" sz="1200" dirty="0"/>
           </a:p>
@@ -5920,7 +7750,7 @@
                   <a:schemeClr val="tx2"/>
                 </a:solidFill>
               </a:rPr>
-              <a:t>Агент сам повертається до клієнта й переносить</a:t>
+              <a:t>Знаходить слоти, переносить, 500 грн збережено</a:t>
             </a:r>
             <a:endParaRPr lang="en-US" sz="1200" dirty="0"/>
           </a:p>
@@ -6028,7 +7858,7 @@
                   <a:schemeClr val="tx1"/>
                 </a:solidFill>
               </a:rPr>
-              <a:t>Демо 3. Петро в клініці: суворі правила, дві дії</a:t>
+              <a:t>Демо 2. Максим: ризикове рішення — людині</a:t>
             </a:r>
             <a:endParaRPr lang="en-US" sz="3000" dirty="0"/>
           </a:p>
@@ -6066,7 +7896,7 @@
                   <a:schemeClr val="tx2"/>
                 </a:solidFill>
               </a:rPr>
-              <a:t>«Хочу скасувати запис і повернути гроші». У клініці правила суворіші: усе через погодження.</a:t>
+              <a:t>Той самий запит, але в клієнта 2 неявки. Агент не вирішує сам, а просить адміністратора.</a:t>
             </a:r>
             <a:endParaRPr lang="en-US" sz="1600" dirty="0"/>
           </a:p>
@@ -6074,7 +7904,7 @@
       </p:sp>
       <p:pic>
         <p:nvPicPr>
-          <p:cNvPr id="4" name="video scene-C.mp4" descr="Кадр з відео scene-C.mp4">    </p:cNvPr>
+          <p:cNvPr id="4" name="video scene-B.mp4" descr="Кадр з відео scene-B.mp4">    </p:cNvPr>
           <p:cNvPicPr>
             <a:picLocks noChangeAspect="1"/>
           </p:cNvPicPr>
@@ -6150,7 +7980,7 @@
                   <a:schemeClr val="bg1"/>
                 </a:solidFill>
               </a:rPr>
-              <a:t>▶  вставити scene-C.mp4</a:t>
+              <a:t>▶  вставити scene-B.mp4</a:t>
             </a:r>
             <a:endParaRPr lang="en-US" sz="1400" dirty="0"/>
           </a:p>
@@ -6272,7 +8102,7 @@
             <a:avLst/>
           </a:prstGeom>
           <a:solidFill>
-            <a:schemeClr val="accent1"/>
+            <a:srgbClr val="F59F00"/>
           </a:solidFill>
           <a:ln/>
         </p:spPr>
@@ -6343,7 +8173,7 @@
                   <a:schemeClr val="tx1"/>
                 </a:solidFill>
               </a:rPr>
-              <a:t>Правила клініки</a:t>
+              <a:t>Контекст</a:t>
             </a:r>
             <a:endParaRPr lang="en-US" sz="1500" dirty="0"/>
           </a:p>
@@ -6379,7 +8209,7 @@
                   <a:schemeClr val="tx2"/>
                 </a:solidFill>
               </a:rPr>
-              <a:t>Пізніше 48 год — передоплата 800 грн згорає</a:t>
+              <a:t>2 неявки — автоматичний виняток не дозволено</a:t>
             </a:r>
             <a:endParaRPr lang="en-US" sz="1200" dirty="0"/>
           </a:p>
@@ -6500,7 +8330,7 @@
                   <a:schemeClr val="tx1"/>
                 </a:solidFill>
               </a:rPr>
-              <a:t>Два погодження</a:t>
+              <a:t>Погодження</a:t>
             </a:r>
             <a:endParaRPr lang="en-US" sz="1500" dirty="0"/>
           </a:p>
@@ -6536,7 +8366,7 @@
                   <a:schemeClr val="tx2"/>
                 </a:solidFill>
               </a:rPr>
-              <a:t>Спершу повернення, потім скасування</a:t>
+              <a:t>Адміністратор схвалює в copilot одним кліком</a:t>
             </a:r>
             <a:endParaRPr lang="en-US" sz="1200" dirty="0"/>
           </a:p>
@@ -6586,7 +8416,7 @@
             <a:avLst/>
           </a:prstGeom>
           <a:solidFill>
-            <a:srgbClr val="12B886"/>
+            <a:schemeClr val="accent1"/>
           </a:solidFill>
           <a:ln/>
         </p:spPr>
@@ -6657,7 +8487,7 @@
                   <a:schemeClr val="tx1"/>
                 </a:solidFill>
               </a:rPr>
-              <a:t>Результат</a:t>
+              <a:t>Дія</a:t>
             </a:r>
             <a:endParaRPr lang="en-US" sz="1500" dirty="0"/>
           </a:p>
@@ -6693,7 +8523,7 @@
                   <a:schemeClr val="tx2"/>
                 </a:solidFill>
               </a:rPr>
-              <a:t>Запис скасовано, 800 грн повернено</a:t>
+              <a:t>Агент сам повертається до клієнта й переносить</a:t>
             </a:r>
             <a:endParaRPr lang="en-US" sz="1200" dirty="0"/>
           </a:p>
@@ -6779,8 +8609,8 @@
         </p:nvSpPr>
         <p:spPr>
           <a:xfrm>
-            <a:off x="548640" y="365760"/>
-            <a:ext cx="11094415" cy="731520"/>
+            <a:off x="548640" y="320040"/>
+            <a:ext cx="11094415" cy="640080"/>
           </a:xfrm>
           <a:prstGeom prst="rect">
             <a:avLst/>
@@ -6796,6 +8626,779 @@
               <a:buNone/>
             </a:pPr>
             <a:r>
+              <a:rPr lang="en-US" sz="3000" b="1" dirty="0">
+                <a:solidFill>
+                  <a:schemeClr val="tx1"/>
+                </a:solidFill>
+              </a:rPr>
+              <a:t>Демо 3. Петро в клініці: суворі правила, дві дії</a:t>
+            </a:r>
+            <a:endParaRPr lang="en-US" sz="3000" dirty="0"/>
+          </a:p>
+        </p:txBody>
+      </p:sp>
+      <p:sp>
+        <p:nvSpPr>
+          <p:cNvPr id="3" name="Text 0"/>
+          <p:cNvSpPr/>
+          <p:nvPr>
+            <p:ph idx="101" type="body" hasCustomPrompt="1"/>
+          </p:nvPr>
+        </p:nvSpPr>
+        <p:spPr>
+          <a:xfrm>
+            <a:off x="548640" y="960120"/>
+            <a:ext cx="11094415" cy="411480"/>
+          </a:xfrm>
+          <a:prstGeom prst="rect">
+            <a:avLst/>
+          </a:prstGeom>
+          <a:noFill/>
+          <a:ln/>
+        </p:spPr>
+        <p:txBody>
+          <a:bodyPr wrap="square" lIns="0" tIns="0" rIns="0" bIns="0" rtlCol="0" anchor="t"/>
+          <a:lstStyle/>
+          <a:p>
+            <a:pPr indent="0" marL="0">
+              <a:buNone/>
+            </a:pPr>
+            <a:r>
+              <a:rPr lang="en-US" sz="1600" dirty="0">
+                <a:solidFill>
+                  <a:schemeClr val="tx2"/>
+                </a:solidFill>
+              </a:rPr>
+              <a:t>«Хочу скасувати запис і повернути гроші». У клініці правила суворіші: усе через погодження.</a:t>
+            </a:r>
+            <a:endParaRPr lang="en-US" sz="1600" dirty="0"/>
+          </a:p>
+        </p:txBody>
+      </p:sp>
+      <p:pic>
+        <p:nvPicPr>
+          <p:cNvPr id="4" name="video scene-C.mp4" descr="Кадр з відео scene-C.mp4">    </p:cNvPr>
+          <p:cNvPicPr>
+            <a:picLocks noChangeAspect="1"/>
+          </p:cNvPicPr>
+          <p:nvPr/>
+        </p:nvPicPr>
+        <p:blipFill>
+          <a:blip r:embed="rId1"/>
+          <a:stretch>
+            <a:fillRect/>
+          </a:stretch>
+        </p:blipFill>
+        <p:spPr>
+          <a:xfrm>
+            <a:off x="548640" y="1737360"/>
+            <a:ext cx="11094415" cy="3467005"/>
+          </a:xfrm>
+          <a:prstGeom prst="rect">
+            <a:avLst/>
+          </a:prstGeom>
+        </p:spPr>
+      </p:pic>
+      <p:sp>
+        <p:nvSpPr>
+          <p:cNvPr id="5" name="insert video badge"/>
+          <p:cNvSpPr/>
+          <p:nvPr/>
+        </p:nvSpPr>
+        <p:spPr>
+          <a:xfrm>
+            <a:off x="4632808" y="3196542"/>
+            <a:ext cx="2926080" cy="548640"/>
+          </a:xfrm>
+          <a:prstGeom prst="roundRect">
+            <a:avLst>
+              <a:gd name="adj" fmla="val 50000"/>
+            </a:avLst>
+          </a:prstGeom>
+          <a:solidFill>
+            <a:schemeClr val="tx1">
+              <a:alpha val="85000"/>
+            </a:schemeClr>
+          </a:solidFill>
+          <a:ln/>
+        </p:spPr>
+      </p:sp>
+      <p:sp>
+        <p:nvSpPr>
+          <p:cNvPr id="6" name="insert video label"/>
+          <p:cNvSpPr txBox="1"/>
+          <p:nvPr/>
+        </p:nvSpPr>
+        <p:spPr>
+          <a:xfrm>
+            <a:off x="4632808" y="3196542"/>
+            <a:ext cx="2926080" cy="548640"/>
+          </a:xfrm>
+          <a:prstGeom prst="rect">
+            <a:avLst/>
+          </a:prstGeom>
+          <a:noFill/>
+          <a:ln/>
+        </p:spPr>
+        <p:txBody>
+          <a:bodyPr wrap="square" lIns="0" tIns="0" rIns="0" bIns="0" rtlCol="0" anchor="ctr"/>
+          <a:lstStyle/>
+          <a:p>
+            <a:pPr algn="ctr" indent="0" marL="0">
+              <a:buNone/>
+            </a:pPr>
+            <a:r>
+              <a:rPr lang="en-US" sz="1400" b="1" dirty="0">
+                <a:solidFill>
+                  <a:schemeClr val="bg1"/>
+                </a:solidFill>
+              </a:rPr>
+              <a:t>▶  вставити scene-C.mp4</a:t>
+            </a:r>
+            <a:endParaRPr lang="en-US" sz="1400" dirty="0"/>
+          </a:p>
+        </p:txBody>
+      </p:sp>
+      <p:sp>
+        <p:nvSpPr>
+          <p:cNvPr id="7" name="video label 0"/>
+          <p:cNvSpPr txBox="1"/>
+          <p:nvPr/>
+        </p:nvSpPr>
+        <p:spPr>
+          <a:xfrm>
+            <a:off x="548640" y="1444752"/>
+            <a:ext cx="5547208" cy="256032"/>
+          </a:xfrm>
+          <a:prstGeom prst="rect">
+            <a:avLst/>
+          </a:prstGeom>
+          <a:noFill/>
+          <a:ln/>
+        </p:spPr>
+        <p:txBody>
+          <a:bodyPr wrap="square" lIns="0" tIns="0" rIns="0" bIns="0" rtlCol="0" anchor="ctr"/>
+          <a:lstStyle/>
+          <a:p>
+            <a:pPr algn="ctr" indent="0" marL="0">
+              <a:buNone/>
+            </a:pPr>
+            <a:r>
+              <a:rPr lang="en-US" sz="1200" b="1" dirty="0">
+                <a:solidFill>
+                  <a:schemeClr val="accent5"/>
+                </a:solidFill>
+              </a:rPr>
+              <a:t>Клієнт на сайті Bookly</a:t>
+            </a:r>
+            <a:endParaRPr lang="en-US" sz="1200" dirty="0"/>
+          </a:p>
+        </p:txBody>
+      </p:sp>
+      <p:sp>
+        <p:nvSpPr>
+          <p:cNvPr id="8" name="video label 1"/>
+          <p:cNvSpPr txBox="1"/>
+          <p:nvPr/>
+        </p:nvSpPr>
+        <p:spPr>
+          <a:xfrm>
+            <a:off x="6095848" y="1444752"/>
+            <a:ext cx="5547208" cy="256032"/>
+          </a:xfrm>
+          <a:prstGeom prst="rect">
+            <a:avLst/>
+          </a:prstGeom>
+          <a:noFill/>
+          <a:ln/>
+        </p:spPr>
+        <p:txBody>
+          <a:bodyPr wrap="square" lIns="0" tIns="0" rIns="0" bIns="0" rtlCol="0" anchor="ctr"/>
+          <a:lstStyle/>
+          <a:p>
+            <a:pPr algn="ctr" indent="0" marL="0">
+              <a:buNone/>
+            </a:pPr>
+            <a:r>
+              <a:rPr lang="en-US" sz="1200" b="1" dirty="0">
+                <a:solidFill>
+                  <a:schemeClr val="accent5"/>
+                </a:solidFill>
+              </a:rPr>
+              <a:t>Чат і copilot адміністратора</a:t>
+            </a:r>
+            <a:endParaRPr lang="en-US" sz="1200" dirty="0"/>
+          </a:p>
+        </p:txBody>
+      </p:sp>
+      <p:sp>
+        <p:nvSpPr>
+          <p:cNvPr id="9" name="step 1"/>
+          <p:cNvSpPr/>
+          <p:nvPr/>
+        </p:nvSpPr>
+        <p:spPr>
+          <a:xfrm>
+            <a:off x="548640" y="5303520"/>
+            <a:ext cx="3515258" cy="1005840"/>
+          </a:xfrm>
+          <a:prstGeom prst="roundRect">
+            <a:avLst>
+              <a:gd name="adj" fmla="val 9091"/>
+            </a:avLst>
+          </a:prstGeom>
+          <a:solidFill>
+            <a:schemeClr val="bg1"/>
+          </a:solidFill>
+          <a:ln/>
+          <a:effectLst>
+            <a:outerShdw sx="100000" sy="100000" kx="0" ky="0" algn="bl" rotWithShape="0" blurRad="101600" dist="25400" dir="5400000">
+              <a:srgbClr val="16163A">
+                <a:alpha val="12000"/>
+              </a:srgbClr>
+            </a:outerShdw>
+          </a:effectLst>
+        </p:spPr>
+      </p:sp>
+      <p:sp>
+        <p:nvSpPr>
+          <p:cNvPr id="10" name="step 1 dot"/>
+          <p:cNvSpPr/>
+          <p:nvPr/>
+        </p:nvSpPr>
+        <p:spPr>
+          <a:xfrm>
+            <a:off x="749808" y="5504688"/>
+            <a:ext cx="365760" cy="365760"/>
+          </a:xfrm>
+          <a:prstGeom prst="ellipse">
+            <a:avLst/>
+          </a:prstGeom>
+          <a:solidFill>
+            <a:schemeClr val="accent1"/>
+          </a:solidFill>
+          <a:ln/>
+        </p:spPr>
+      </p:sp>
+      <p:sp>
+        <p:nvSpPr>
+          <p:cNvPr id="11" name="step 1 number"/>
+          <p:cNvSpPr txBox="1"/>
+          <p:nvPr/>
+        </p:nvSpPr>
+        <p:spPr>
+          <a:xfrm>
+            <a:off x="749808" y="5504688"/>
+            <a:ext cx="365760" cy="365760"/>
+          </a:xfrm>
+          <a:prstGeom prst="rect">
+            <a:avLst/>
+          </a:prstGeom>
+          <a:noFill/>
+          <a:ln/>
+        </p:spPr>
+        <p:txBody>
+          <a:bodyPr wrap="square" lIns="0" tIns="0" rIns="0" bIns="0" rtlCol="0" anchor="ctr"/>
+          <a:lstStyle/>
+          <a:p>
+            <a:pPr algn="ctr" indent="0" marL="0">
+              <a:buNone/>
+            </a:pPr>
+            <a:r>
+              <a:rPr lang="en-US" sz="1400" b="1" dirty="0">
+                <a:solidFill>
+                  <a:schemeClr val="bg1"/>
+                </a:solidFill>
+              </a:rPr>
+              <a:t>1</a:t>
+            </a:r>
+            <a:endParaRPr lang="en-US" sz="1400" dirty="0"/>
+          </a:p>
+        </p:txBody>
+      </p:sp>
+      <p:sp>
+        <p:nvSpPr>
+          <p:cNvPr id="12" name="step 1 head"/>
+          <p:cNvSpPr txBox="1"/>
+          <p:nvPr/>
+        </p:nvSpPr>
+        <p:spPr>
+          <a:xfrm>
+            <a:off x="1234440" y="5468112"/>
+            <a:ext cx="2646578" cy="411480"/>
+          </a:xfrm>
+          <a:prstGeom prst="rect">
+            <a:avLst/>
+          </a:prstGeom>
+          <a:noFill/>
+          <a:ln/>
+        </p:spPr>
+        <p:txBody>
+          <a:bodyPr wrap="square" lIns="0" tIns="0" rIns="0" bIns="0" rtlCol="0" anchor="ctr"/>
+          <a:lstStyle/>
+          <a:p>
+            <a:pPr indent="0" marL="0">
+              <a:buNone/>
+            </a:pPr>
+            <a:r>
+              <a:rPr lang="en-US" sz="1500" b="1" dirty="0">
+                <a:solidFill>
+                  <a:schemeClr val="tx1"/>
+                </a:solidFill>
+              </a:rPr>
+              <a:t>Правила клініки</a:t>
+            </a:r>
+            <a:endParaRPr lang="en-US" sz="1500" dirty="0"/>
+          </a:p>
+        </p:txBody>
+      </p:sp>
+      <p:sp>
+        <p:nvSpPr>
+          <p:cNvPr id="13" name="step 1 text"/>
+          <p:cNvSpPr txBox="1"/>
+          <p:nvPr/>
+        </p:nvSpPr>
+        <p:spPr>
+          <a:xfrm>
+            <a:off x="1234440" y="5870448"/>
+            <a:ext cx="2646578" cy="502920"/>
+          </a:xfrm>
+          <a:prstGeom prst="rect">
+            <a:avLst/>
+          </a:prstGeom>
+          <a:noFill/>
+          <a:ln/>
+        </p:spPr>
+        <p:txBody>
+          <a:bodyPr wrap="square" lIns="0" tIns="0" rIns="0" bIns="0" rtlCol="0" anchor="t"/>
+          <a:lstStyle/>
+          <a:p>
+            <a:pPr indent="0" marL="0">
+              <a:buNone/>
+            </a:pPr>
+            <a:r>
+              <a:rPr lang="en-US" sz="1200" dirty="0">
+                <a:solidFill>
+                  <a:schemeClr val="tx2"/>
+                </a:solidFill>
+              </a:rPr>
+              <a:t>Пізніше 48 год — передоплата 800 грн згорає</a:t>
+            </a:r>
+            <a:endParaRPr lang="en-US" sz="1200" dirty="0"/>
+          </a:p>
+        </p:txBody>
+      </p:sp>
+      <p:sp>
+        <p:nvSpPr>
+          <p:cNvPr id="14" name="step 2"/>
+          <p:cNvSpPr/>
+          <p:nvPr/>
+        </p:nvSpPr>
+        <p:spPr>
+          <a:xfrm>
+            <a:off x="4338218" y="5303520"/>
+            <a:ext cx="3515258" cy="1005840"/>
+          </a:xfrm>
+          <a:prstGeom prst="roundRect">
+            <a:avLst>
+              <a:gd name="adj" fmla="val 9091"/>
+            </a:avLst>
+          </a:prstGeom>
+          <a:solidFill>
+            <a:schemeClr val="bg1"/>
+          </a:solidFill>
+          <a:ln/>
+          <a:effectLst>
+            <a:outerShdw sx="100000" sy="100000" kx="0" ky="0" algn="bl" rotWithShape="0" blurRad="101600" dist="25400" dir="5400000">
+              <a:srgbClr val="16163A">
+                <a:alpha val="12000"/>
+              </a:srgbClr>
+            </a:outerShdw>
+          </a:effectLst>
+        </p:spPr>
+      </p:sp>
+      <p:sp>
+        <p:nvSpPr>
+          <p:cNvPr id="15" name="step 2 dot"/>
+          <p:cNvSpPr/>
+          <p:nvPr/>
+        </p:nvSpPr>
+        <p:spPr>
+          <a:xfrm>
+            <a:off x="4539386" y="5504688"/>
+            <a:ext cx="365760" cy="365760"/>
+          </a:xfrm>
+          <a:prstGeom prst="ellipse">
+            <a:avLst/>
+          </a:prstGeom>
+          <a:solidFill>
+            <a:srgbClr val="F59F00"/>
+          </a:solidFill>
+          <a:ln/>
+        </p:spPr>
+      </p:sp>
+      <p:sp>
+        <p:nvSpPr>
+          <p:cNvPr id="16" name="step 2 number"/>
+          <p:cNvSpPr txBox="1"/>
+          <p:nvPr/>
+        </p:nvSpPr>
+        <p:spPr>
+          <a:xfrm>
+            <a:off x="4539386" y="5504688"/>
+            <a:ext cx="365760" cy="365760"/>
+          </a:xfrm>
+          <a:prstGeom prst="rect">
+            <a:avLst/>
+          </a:prstGeom>
+          <a:noFill/>
+          <a:ln/>
+        </p:spPr>
+        <p:txBody>
+          <a:bodyPr wrap="square" lIns="0" tIns="0" rIns="0" bIns="0" rtlCol="0" anchor="ctr"/>
+          <a:lstStyle/>
+          <a:p>
+            <a:pPr algn="ctr" indent="0" marL="0">
+              <a:buNone/>
+            </a:pPr>
+            <a:r>
+              <a:rPr lang="en-US" sz="1400" b="1" dirty="0">
+                <a:solidFill>
+                  <a:schemeClr val="bg1"/>
+                </a:solidFill>
+              </a:rPr>
+              <a:t>2</a:t>
+            </a:r>
+            <a:endParaRPr lang="en-US" sz="1400" dirty="0"/>
+          </a:p>
+        </p:txBody>
+      </p:sp>
+      <p:sp>
+        <p:nvSpPr>
+          <p:cNvPr id="17" name="step 2 head"/>
+          <p:cNvSpPr txBox="1"/>
+          <p:nvPr/>
+        </p:nvSpPr>
+        <p:spPr>
+          <a:xfrm>
+            <a:off x="5024018" y="5468112"/>
+            <a:ext cx="2646578" cy="411480"/>
+          </a:xfrm>
+          <a:prstGeom prst="rect">
+            <a:avLst/>
+          </a:prstGeom>
+          <a:noFill/>
+          <a:ln/>
+        </p:spPr>
+        <p:txBody>
+          <a:bodyPr wrap="square" lIns="0" tIns="0" rIns="0" bIns="0" rtlCol="0" anchor="ctr"/>
+          <a:lstStyle/>
+          <a:p>
+            <a:pPr indent="0" marL="0">
+              <a:buNone/>
+            </a:pPr>
+            <a:r>
+              <a:rPr lang="en-US" sz="1500" b="1" dirty="0">
+                <a:solidFill>
+                  <a:schemeClr val="tx1"/>
+                </a:solidFill>
+              </a:rPr>
+              <a:t>Два погодження</a:t>
+            </a:r>
+            <a:endParaRPr lang="en-US" sz="1500" dirty="0"/>
+          </a:p>
+        </p:txBody>
+      </p:sp>
+      <p:sp>
+        <p:nvSpPr>
+          <p:cNvPr id="18" name="step 2 text"/>
+          <p:cNvSpPr txBox="1"/>
+          <p:nvPr/>
+        </p:nvSpPr>
+        <p:spPr>
+          <a:xfrm>
+            <a:off x="5024018" y="5870448"/>
+            <a:ext cx="2646578" cy="502920"/>
+          </a:xfrm>
+          <a:prstGeom prst="rect">
+            <a:avLst/>
+          </a:prstGeom>
+          <a:noFill/>
+          <a:ln/>
+        </p:spPr>
+        <p:txBody>
+          <a:bodyPr wrap="square" lIns="0" tIns="0" rIns="0" bIns="0" rtlCol="0" anchor="t"/>
+          <a:lstStyle/>
+          <a:p>
+            <a:pPr indent="0" marL="0">
+              <a:buNone/>
+            </a:pPr>
+            <a:r>
+              <a:rPr lang="en-US" sz="1200" dirty="0">
+                <a:solidFill>
+                  <a:schemeClr val="tx2"/>
+                </a:solidFill>
+              </a:rPr>
+              <a:t>Спершу повернення, потім скасування</a:t>
+            </a:r>
+            <a:endParaRPr lang="en-US" sz="1200" dirty="0"/>
+          </a:p>
+        </p:txBody>
+      </p:sp>
+      <p:sp>
+        <p:nvSpPr>
+          <p:cNvPr id="19" name="step 3"/>
+          <p:cNvSpPr/>
+          <p:nvPr/>
+        </p:nvSpPr>
+        <p:spPr>
+          <a:xfrm>
+            <a:off x="8127797" y="5303520"/>
+            <a:ext cx="3515258" cy="1005840"/>
+          </a:xfrm>
+          <a:prstGeom prst="roundRect">
+            <a:avLst>
+              <a:gd name="adj" fmla="val 9091"/>
+            </a:avLst>
+          </a:prstGeom>
+          <a:solidFill>
+            <a:schemeClr val="bg1"/>
+          </a:solidFill>
+          <a:ln/>
+          <a:effectLst>
+            <a:outerShdw sx="100000" sy="100000" kx="0" ky="0" algn="bl" rotWithShape="0" blurRad="101600" dist="25400" dir="5400000">
+              <a:srgbClr val="16163A">
+                <a:alpha val="12000"/>
+              </a:srgbClr>
+            </a:outerShdw>
+          </a:effectLst>
+        </p:spPr>
+      </p:sp>
+      <p:sp>
+        <p:nvSpPr>
+          <p:cNvPr id="20" name="step 3 dot"/>
+          <p:cNvSpPr/>
+          <p:nvPr/>
+        </p:nvSpPr>
+        <p:spPr>
+          <a:xfrm>
+            <a:off x="8328965" y="5504688"/>
+            <a:ext cx="365760" cy="365760"/>
+          </a:xfrm>
+          <a:prstGeom prst="ellipse">
+            <a:avLst/>
+          </a:prstGeom>
+          <a:solidFill>
+            <a:srgbClr val="12B886"/>
+          </a:solidFill>
+          <a:ln/>
+        </p:spPr>
+      </p:sp>
+      <p:sp>
+        <p:nvSpPr>
+          <p:cNvPr id="21" name="step 3 number"/>
+          <p:cNvSpPr txBox="1"/>
+          <p:nvPr/>
+        </p:nvSpPr>
+        <p:spPr>
+          <a:xfrm>
+            <a:off x="8328965" y="5504688"/>
+            <a:ext cx="365760" cy="365760"/>
+          </a:xfrm>
+          <a:prstGeom prst="rect">
+            <a:avLst/>
+          </a:prstGeom>
+          <a:noFill/>
+          <a:ln/>
+        </p:spPr>
+        <p:txBody>
+          <a:bodyPr wrap="square" lIns="0" tIns="0" rIns="0" bIns="0" rtlCol="0" anchor="ctr"/>
+          <a:lstStyle/>
+          <a:p>
+            <a:pPr algn="ctr" indent="0" marL="0">
+              <a:buNone/>
+            </a:pPr>
+            <a:r>
+              <a:rPr lang="en-US" sz="1400" b="1" dirty="0">
+                <a:solidFill>
+                  <a:schemeClr val="bg1"/>
+                </a:solidFill>
+              </a:rPr>
+              <a:t>3</a:t>
+            </a:r>
+            <a:endParaRPr lang="en-US" sz="1400" dirty="0"/>
+          </a:p>
+        </p:txBody>
+      </p:sp>
+      <p:sp>
+        <p:nvSpPr>
+          <p:cNvPr id="22" name="step 3 head"/>
+          <p:cNvSpPr txBox="1"/>
+          <p:nvPr/>
+        </p:nvSpPr>
+        <p:spPr>
+          <a:xfrm>
+            <a:off x="8813597" y="5468112"/>
+            <a:ext cx="2646578" cy="411480"/>
+          </a:xfrm>
+          <a:prstGeom prst="rect">
+            <a:avLst/>
+          </a:prstGeom>
+          <a:noFill/>
+          <a:ln/>
+        </p:spPr>
+        <p:txBody>
+          <a:bodyPr wrap="square" lIns="0" tIns="0" rIns="0" bIns="0" rtlCol="0" anchor="ctr"/>
+          <a:lstStyle/>
+          <a:p>
+            <a:pPr indent="0" marL="0">
+              <a:buNone/>
+            </a:pPr>
+            <a:r>
+              <a:rPr lang="en-US" sz="1500" b="1" dirty="0">
+                <a:solidFill>
+                  <a:schemeClr val="tx1"/>
+                </a:solidFill>
+              </a:rPr>
+              <a:t>Результат</a:t>
+            </a:r>
+            <a:endParaRPr lang="en-US" sz="1500" dirty="0"/>
+          </a:p>
+        </p:txBody>
+      </p:sp>
+      <p:sp>
+        <p:nvSpPr>
+          <p:cNvPr id="23" name="step 3 text"/>
+          <p:cNvSpPr txBox="1"/>
+          <p:nvPr/>
+        </p:nvSpPr>
+        <p:spPr>
+          <a:xfrm>
+            <a:off x="8813597" y="5870448"/>
+            <a:ext cx="2646578" cy="502920"/>
+          </a:xfrm>
+          <a:prstGeom prst="rect">
+            <a:avLst/>
+          </a:prstGeom>
+          <a:noFill/>
+          <a:ln/>
+        </p:spPr>
+        <p:txBody>
+          <a:bodyPr wrap="square" lIns="0" tIns="0" rIns="0" bIns="0" rtlCol="0" anchor="t"/>
+          <a:lstStyle/>
+          <a:p>
+            <a:pPr indent="0" marL="0">
+              <a:buNone/>
+            </a:pPr>
+            <a:r>
+              <a:rPr lang="en-US" sz="1200" dirty="0">
+                <a:solidFill>
+                  <a:schemeClr val="tx2"/>
+                </a:solidFill>
+              </a:rPr>
+              <a:t>Запис скасовано, 800 грн повернено</a:t>
+            </a:r>
+            <a:endParaRPr lang="en-US" sz="1200" dirty="0"/>
+          </a:p>
+        </p:txBody>
+      </p:sp>
+      <p:sp>
+        <p:nvSpPr>
+          <p:cNvPr id="25" name="Slide Number Placeholder 0"/>
+          <p:cNvSpPr>
+            <a:spLocks noGrp="1"/>
+          </p:cNvSpPr>
+          <p:nvPr>
+            <p:ph type="sldNum" sz="quarter" idx="4294967295"/>
+          </p:nvPr>
+        </p:nvSpPr>
+        <p:spPr>
+          <a:xfrm>
+            <a:off x="11185855" y="6446520"/>
+            <a:ext cx="457200" cy="274320"/>
+          </a:xfrm>
+          <a:prstGeom prst="rect">
+            <a:avLst/>
+          </a:prstGeom>
+          <a:extLst>
+            <a:ext uri="{C572A759-6A51-4108-AA02-DFA0A04FC94B}">
+              <ma14:wrappingTextBoxFlag xmlns:ma14="http://schemas.microsoft.com/office/mac/drawingml/2011/main" val="0"/>
+            </a:ext>
+          </a:extLst>
+        </p:spPr>
+        <p:txBody>
+          <a:bodyPr/>
+          <a:lstStyle>
+            <a:lvl1pPr>
+              <a:defRPr sz="1000">
+                <a:solidFill>
+                  <a:schemeClr val="accent5"/>
+                </a:solidFill>
+              </a:defRPr>
+            </a:lvl1pPr>
+          </a:lstStyle>
+          <a:p>
+            <a:pPr algn="r"/>
+            <a:fld id="{F7021451-1387-4CA6-816F-3879F97B5CBC}" type="slidenum">
+              <a:rPr b="0" lang="en-US"/>
+              <a:t>7</a:t>
+            </a:fld>
+            <a:endParaRPr lang="en-US"/>
+          </a:p>
+        </p:txBody>
+      </p:sp>
+    </p:spTree>
+  </p:cSld>
+  <p:clrMapOvr>
+    <a:masterClrMapping/>
+  </p:clrMapOvr>
+</p:sld>
+</file>
+
+<file path=ppt/slides/slide8.xml><?xml version="1.0" encoding="utf-8"?>
+<p:sld xmlns:a="http://schemas.openxmlformats.org/drawingml/2006/main" xmlns:r="http://schemas.openxmlformats.org/officeDocument/2006/relationships" xmlns:p="http://schemas.openxmlformats.org/presentationml/2006/main">
+  <p:cSld name="Slide 8">
+    <p:spTree>
+      <p:nvGrpSpPr>
+        <p:cNvPr id="1" name=""/>
+        <p:cNvGrpSpPr/>
+        <p:nvPr/>
+      </p:nvGrpSpPr>
+      <p:grpSpPr>
+        <a:xfrm>
+          <a:off x="0" y="0"/>
+          <a:ext cx="0" cy="0"/>
+          <a:chOff x="0" y="0"/>
+          <a:chExt cx="0" cy="0"/>
+        </a:xfrm>
+      </p:grpSpPr>
+      <p:sp>
+        <p:nvSpPr>
+          <p:cNvPr id="2" name="Text 0"/>
+          <p:cNvSpPr/>
+          <p:nvPr>
+            <p:ph idx="100" type="title" hasCustomPrompt="1"/>
+          </p:nvPr>
+        </p:nvSpPr>
+        <p:spPr>
+          <a:xfrm>
+            <a:off x="548640" y="365760"/>
+            <a:ext cx="11094415" cy="731520"/>
+          </a:xfrm>
+          <a:prstGeom prst="rect">
+            <a:avLst/>
+          </a:prstGeom>
+          <a:noFill/>
+          <a:ln/>
+        </p:spPr>
+        <p:txBody>
+          <a:bodyPr wrap="square" lIns="0" tIns="0" rIns="0" bIns="0" rtlCol="0" anchor="ctr"/>
+          <a:lstStyle/>
+          <a:p>
+            <a:pPr algn="l" indent="0" marL="0">
+              <a:buNone/>
+            </a:pPr>
+            <a:r>
               <a:rPr lang="en-US" sz="3200" b="1" dirty="0">
                 <a:solidFill>
                   <a:schemeClr val="tx1"/>
@@ -6809,7 +9412,7 @@
       </p:sp>
       <p:graphicFrame>
         <p:nvGraphicFramePr>
-          <p:cNvPr id="8" name="policy table"/>
+          <p:cNvPr id="9" name="policy table"/>
           <p:cNvGraphicFramePr>
             <a:graphicFrameLocks noGrp="1"/>
           </p:cNvGraphicFramePr>
@@ -8507,546 +11110,6 @@
             <a:pPr algn="r"/>
             <a:fld id="{F7021451-1387-4CA6-816F-3879F97B5CBC}" type="slidenum">
               <a:rPr b="0" lang="en-US"/>
-              <a:t>7</a:t>
-            </a:fld>
-            <a:endParaRPr lang="en-US"/>
-          </a:p>
-        </p:txBody>
-      </p:sp>
-    </p:spTree>
-  </p:cSld>
-  <p:clrMapOvr>
-    <a:masterClrMapping/>
-  </p:clrMapOvr>
-</p:sld>
-</file>
-
-<file path=ppt/slides/slide8.xml><?xml version="1.0" encoding="utf-8"?>
-<p:sld xmlns:a="http://schemas.openxmlformats.org/drawingml/2006/main" xmlns:r="http://schemas.openxmlformats.org/officeDocument/2006/relationships" xmlns:p="http://schemas.openxmlformats.org/presentationml/2006/main">
-  <p:cSld name="Slide 8">
-    <p:spTree>
-      <p:nvGrpSpPr>
-        <p:cNvPr id="1" name=""/>
-        <p:cNvGrpSpPr/>
-        <p:nvPr/>
-      </p:nvGrpSpPr>
-      <p:grpSpPr>
-        <a:xfrm>
-          <a:off x="0" y="0"/>
-          <a:ext cx="0" cy="0"/>
-          <a:chOff x="0" y="0"/>
-          <a:chExt cx="0" cy="0"/>
-        </a:xfrm>
-      </p:grpSpPr>
-      <p:sp>
-        <p:nvSpPr>
-          <p:cNvPr id="2" name="Text 0"/>
-          <p:cNvSpPr/>
-          <p:nvPr>
-            <p:ph idx="100" type="title" hasCustomPrompt="1"/>
-          </p:nvPr>
-        </p:nvSpPr>
-        <p:spPr>
-          <a:xfrm>
-            <a:off x="548640" y="365760"/>
-            <a:ext cx="11094415" cy="731520"/>
-          </a:xfrm>
-          <a:prstGeom prst="rect">
-            <a:avLst/>
-          </a:prstGeom>
-          <a:noFill/>
-          <a:ln/>
-        </p:spPr>
-        <p:txBody>
-          <a:bodyPr wrap="square" lIns="0" tIns="0" rIns="0" bIns="0" rtlCol="0" anchor="ctr"/>
-          <a:lstStyle/>
-          <a:p>
-            <a:pPr algn="l" indent="0" marL="0">
-              <a:buNone/>
-            </a:pPr>
-            <a:r>
-              <a:rPr lang="en-US" sz="3200" b="1" dirty="0">
-                <a:solidFill>
-                  <a:schemeClr val="tx1"/>
-                </a:solidFill>
-              </a:rPr>
-              <a:t>Справжній продукт, а не макет</a:t>
-            </a:r>
-            <a:endParaRPr lang="en-US" sz="3200" dirty="0"/>
-          </a:p>
-        </p:txBody>
-      </p:sp>
-      <p:pic>
-        <p:nvPicPr>
-          <p:cNvPr id="3" name="video product-tour.mp4" descr="Кадр з відео product-tour.mp4">    </p:cNvPr>
-          <p:cNvPicPr>
-            <a:picLocks noChangeAspect="1"/>
-          </p:cNvPicPr>
-          <p:nvPr/>
-        </p:nvPicPr>
-        <p:blipFill>
-          <a:blip r:embed="rId1"/>
-          <a:stretch>
-            <a:fillRect/>
-          </a:stretch>
-        </p:blipFill>
-        <p:spPr>
-          <a:xfrm>
-            <a:off x="548640" y="1417320"/>
-            <a:ext cx="6949440" cy="4343400"/>
-          </a:xfrm>
-          <a:prstGeom prst="rect">
-            <a:avLst/>
-          </a:prstGeom>
-        </p:spPr>
-      </p:pic>
-      <p:sp>
-        <p:nvSpPr>
-          <p:cNvPr id="4" name="insert video badge"/>
-          <p:cNvSpPr/>
-          <p:nvPr/>
-        </p:nvSpPr>
-        <p:spPr>
-          <a:xfrm>
-            <a:off x="2560320" y="3314700"/>
-            <a:ext cx="2926080" cy="548640"/>
-          </a:xfrm>
-          <a:prstGeom prst="roundRect">
-            <a:avLst>
-              <a:gd name="adj" fmla="val 50000"/>
-            </a:avLst>
-          </a:prstGeom>
-          <a:solidFill>
-            <a:schemeClr val="tx1">
-              <a:alpha val="85000"/>
-            </a:schemeClr>
-          </a:solidFill>
-          <a:ln/>
-        </p:spPr>
-      </p:sp>
-      <p:sp>
-        <p:nvSpPr>
-          <p:cNvPr id="5" name="insert video label"/>
-          <p:cNvSpPr txBox="1"/>
-          <p:nvPr/>
-        </p:nvSpPr>
-        <p:spPr>
-          <a:xfrm>
-            <a:off x="2560320" y="3314700"/>
-            <a:ext cx="2926080" cy="548640"/>
-          </a:xfrm>
-          <a:prstGeom prst="rect">
-            <a:avLst/>
-          </a:prstGeom>
-          <a:noFill/>
-          <a:ln/>
-        </p:spPr>
-        <p:txBody>
-          <a:bodyPr wrap="square" lIns="0" tIns="0" rIns="0" bIns="0" rtlCol="0" anchor="ctr"/>
-          <a:lstStyle/>
-          <a:p>
-            <a:pPr algn="ctr" indent="0" marL="0">
-              <a:buNone/>
-            </a:pPr>
-            <a:r>
-              <a:rPr lang="en-US" sz="1400" b="1" dirty="0">
-                <a:solidFill>
-                  <a:schemeClr val="bg1"/>
-                </a:solidFill>
-              </a:rPr>
-              <a:t>▶  вставити product-tour.mp4</a:t>
-            </a:r>
-            <a:endParaRPr lang="en-US" sz="1400" dirty="0"/>
-          </a:p>
-        </p:txBody>
-      </p:sp>
-      <p:sp>
-        <p:nvSpPr>
-          <p:cNvPr id="6" name="tour icon bg 0"/>
-          <p:cNvSpPr/>
-          <p:nvPr/>
-        </p:nvSpPr>
-        <p:spPr>
-          <a:xfrm>
-            <a:off x="7863840" y="1417320"/>
-            <a:ext cx="566928" cy="566928"/>
-          </a:xfrm>
-          <a:prstGeom prst="ellipse">
-            <a:avLst/>
-          </a:prstGeom>
-          <a:solidFill>
-            <a:schemeClr val="bg2"/>
-          </a:solidFill>
-          <a:ln/>
-        </p:spPr>
-      </p:sp>
-      <p:pic>
-        <p:nvPicPr>
-          <p:cNvPr id="7" name="tour icon 0" descr="preencoded.png">    </p:cNvPr>
-          <p:cNvPicPr>
-            <a:picLocks noChangeAspect="1"/>
-          </p:cNvPicPr>
-          <p:nvPr/>
-        </p:nvPicPr>
-        <p:blipFill>
-          <a:blip r:embed="rId2"/>
-          <a:stretch>
-            <a:fillRect/>
-          </a:stretch>
-        </p:blipFill>
-        <p:spPr>
-          <a:xfrm>
-            <a:off x="7991856" y="1545336"/>
-            <a:ext cx="310896" cy="310896"/>
-          </a:xfrm>
-          <a:prstGeom prst="rect">
-            <a:avLst/>
-          </a:prstGeom>
-        </p:spPr>
-      </p:pic>
-      <p:sp>
-        <p:nvSpPr>
-          <p:cNvPr id="8" name="tour head 0"/>
-          <p:cNvSpPr txBox="1"/>
-          <p:nvPr/>
-        </p:nvSpPr>
-        <p:spPr>
-          <a:xfrm>
-            <a:off x="8641080" y="1417320"/>
-            <a:ext cx="3001975" cy="365760"/>
-          </a:xfrm>
-          <a:prstGeom prst="rect">
-            <a:avLst/>
-          </a:prstGeom>
-          <a:noFill/>
-          <a:ln/>
-        </p:spPr>
-        <p:txBody>
-          <a:bodyPr wrap="square" lIns="0" tIns="0" rIns="0" bIns="0" rtlCol="0" anchor="ctr"/>
-          <a:lstStyle/>
-          <a:p>
-            <a:pPr indent="0" marL="0">
-              <a:buNone/>
-            </a:pPr>
-            <a:r>
-              <a:rPr lang="en-US" sz="1700" b="1" dirty="0">
-                <a:solidFill>
-                  <a:schemeClr val="tx1"/>
-                </a:solidFill>
-              </a:rPr>
-              <a:t>Сторінка бізнесу і запис</a:t>
-            </a:r>
-            <a:endParaRPr lang="en-US" sz="1700" dirty="0"/>
-          </a:p>
-        </p:txBody>
-      </p:sp>
-      <p:sp>
-        <p:nvSpPr>
-          <p:cNvPr id="9" name="tour text 0"/>
-          <p:cNvSpPr txBox="1"/>
-          <p:nvPr/>
-        </p:nvSpPr>
-        <p:spPr>
-          <a:xfrm>
-            <a:off x="8641080" y="1801368"/>
-            <a:ext cx="3001975" cy="822960"/>
-          </a:xfrm>
-          <a:prstGeom prst="rect">
-            <a:avLst/>
-          </a:prstGeom>
-          <a:noFill/>
-          <a:ln/>
-        </p:spPr>
-        <p:txBody>
-          <a:bodyPr wrap="square" lIns="0" tIns="0" rIns="0" bIns="0" rtlCol="0" anchor="t"/>
-          <a:lstStyle/>
-          <a:p>
-            <a:pPr indent="0" marL="0">
-              <a:buNone/>
-            </a:pPr>
-            <a:r>
-              <a:rPr lang="en-US" sz="1400" dirty="0">
-                <a:solidFill>
-                  <a:schemeClr val="tx2"/>
-                </a:solidFill>
-              </a:rPr>
-              <a:t>Послуги, майстри, правила, вільні слоти, передоплата</a:t>
-            </a:r>
-            <a:endParaRPr lang="en-US" sz="1400" dirty="0"/>
-          </a:p>
-        </p:txBody>
-      </p:sp>
-      <p:sp>
-        <p:nvSpPr>
-          <p:cNvPr id="10" name="tour icon bg 1"/>
-          <p:cNvSpPr/>
-          <p:nvPr/>
-        </p:nvSpPr>
-        <p:spPr>
-          <a:xfrm>
-            <a:off x="7863840" y="2880360"/>
-            <a:ext cx="566928" cy="566928"/>
-          </a:xfrm>
-          <a:prstGeom prst="ellipse">
-            <a:avLst/>
-          </a:prstGeom>
-          <a:solidFill>
-            <a:schemeClr val="bg2"/>
-          </a:solidFill>
-          <a:ln/>
-        </p:spPr>
-      </p:sp>
-      <p:pic>
-        <p:nvPicPr>
-          <p:cNvPr id="11" name="tour icon 1" descr="preencoded.png">    </p:cNvPr>
-          <p:cNvPicPr>
-            <a:picLocks noChangeAspect="1"/>
-          </p:cNvPicPr>
-          <p:nvPr/>
-        </p:nvPicPr>
-        <p:blipFill>
-          <a:blip r:embed="rId3"/>
-          <a:stretch>
-            <a:fillRect/>
-          </a:stretch>
-        </p:blipFill>
-        <p:spPr>
-          <a:xfrm>
-            <a:off x="7991856" y="3008376"/>
-            <a:ext cx="310896" cy="310896"/>
-          </a:xfrm>
-          <a:prstGeom prst="rect">
-            <a:avLst/>
-          </a:prstGeom>
-        </p:spPr>
-      </p:pic>
-      <p:sp>
-        <p:nvSpPr>
-          <p:cNvPr id="12" name="tour head 1"/>
-          <p:cNvSpPr txBox="1"/>
-          <p:nvPr/>
-        </p:nvSpPr>
-        <p:spPr>
-          <a:xfrm>
-            <a:off x="8641080" y="2880360"/>
-            <a:ext cx="3001975" cy="365760"/>
-          </a:xfrm>
-          <a:prstGeom prst="rect">
-            <a:avLst/>
-          </a:prstGeom>
-          <a:noFill/>
-          <a:ln/>
-        </p:spPr>
-        <p:txBody>
-          <a:bodyPr wrap="square" lIns="0" tIns="0" rIns="0" bIns="0" rtlCol="0" anchor="ctr"/>
-          <a:lstStyle/>
-          <a:p>
-            <a:pPr indent="0" marL="0">
-              <a:buNone/>
-            </a:pPr>
-            <a:r>
-              <a:rPr lang="en-US" sz="1700" b="1" dirty="0">
-                <a:solidFill>
-                  <a:schemeClr val="tx1"/>
-                </a:solidFill>
-              </a:rPr>
-              <a:t>Адмінка</a:t>
-            </a:r>
-            <a:endParaRPr lang="en-US" sz="1700" dirty="0"/>
-          </a:p>
-        </p:txBody>
-      </p:sp>
-      <p:sp>
-        <p:nvSpPr>
-          <p:cNvPr id="13" name="tour text 1"/>
-          <p:cNvSpPr txBox="1"/>
-          <p:nvPr/>
-        </p:nvSpPr>
-        <p:spPr>
-          <a:xfrm>
-            <a:off x="8641080" y="3264408"/>
-            <a:ext cx="3001975" cy="822960"/>
-          </a:xfrm>
-          <a:prstGeom prst="rect">
-            <a:avLst/>
-          </a:prstGeom>
-          <a:noFill/>
-          <a:ln/>
-        </p:spPr>
-        <p:txBody>
-          <a:bodyPr wrap="square" lIns="0" tIns="0" rIns="0" bIns="0" rtlCol="0" anchor="t"/>
-          <a:lstStyle/>
-          <a:p>
-            <a:pPr indent="0" marL="0">
-              <a:buNone/>
-            </a:pPr>
-            <a:r>
-              <a:rPr lang="en-US" sz="1400" dirty="0">
-                <a:solidFill>
-                  <a:schemeClr val="tx2"/>
-                </a:solidFill>
-              </a:rPr>
-              <a:t>Тиждень бронювань, дії агента з міткою «AI», клієнти, майстри, послуги</a:t>
-            </a:r>
-            <a:endParaRPr lang="en-US" sz="1400" dirty="0"/>
-          </a:p>
-        </p:txBody>
-      </p:sp>
-      <p:sp>
-        <p:nvSpPr>
-          <p:cNvPr id="14" name="tour icon bg 2"/>
-          <p:cNvSpPr/>
-          <p:nvPr/>
-        </p:nvSpPr>
-        <p:spPr>
-          <a:xfrm>
-            <a:off x="7863840" y="4343400"/>
-            <a:ext cx="566928" cy="566928"/>
-          </a:xfrm>
-          <a:prstGeom prst="ellipse">
-            <a:avLst/>
-          </a:prstGeom>
-          <a:solidFill>
-            <a:schemeClr val="bg2"/>
-          </a:solidFill>
-          <a:ln/>
-        </p:spPr>
-      </p:sp>
-      <p:pic>
-        <p:nvPicPr>
-          <p:cNvPr id="15" name="tour icon 2" descr="preencoded.png">    </p:cNvPr>
-          <p:cNvPicPr>
-            <a:picLocks noChangeAspect="1"/>
-          </p:cNvPicPr>
-          <p:nvPr/>
-        </p:nvPicPr>
-        <p:blipFill>
-          <a:blip r:embed="rId4"/>
-          <a:stretch>
-            <a:fillRect/>
-          </a:stretch>
-        </p:blipFill>
-        <p:spPr>
-          <a:xfrm>
-            <a:off x="7991856" y="4471416"/>
-            <a:ext cx="310896" cy="310896"/>
-          </a:xfrm>
-          <a:prstGeom prst="rect">
-            <a:avLst/>
-          </a:prstGeom>
-        </p:spPr>
-      </p:pic>
-      <p:sp>
-        <p:nvSpPr>
-          <p:cNvPr id="16" name="tour head 2"/>
-          <p:cNvSpPr txBox="1"/>
-          <p:nvPr/>
-        </p:nvSpPr>
-        <p:spPr>
-          <a:xfrm>
-            <a:off x="8641080" y="4343400"/>
-            <a:ext cx="3001975" cy="365760"/>
-          </a:xfrm>
-          <a:prstGeom prst="rect">
-            <a:avLst/>
-          </a:prstGeom>
-          <a:noFill/>
-          <a:ln/>
-        </p:spPr>
-        <p:txBody>
-          <a:bodyPr wrap="square" lIns="0" tIns="0" rIns="0" bIns="0" rtlCol="0" anchor="ctr"/>
-          <a:lstStyle/>
-          <a:p>
-            <a:pPr indent="0" marL="0">
-              <a:buNone/>
-            </a:pPr>
-            <a:r>
-              <a:rPr lang="en-US" sz="1700" b="1" dirty="0">
-                <a:solidFill>
-                  <a:schemeClr val="tx1"/>
-                </a:solidFill>
-              </a:rPr>
-              <a:t>Відкриті інтеграції</a:t>
-            </a:r>
-            <a:endParaRPr lang="en-US" sz="1700" dirty="0"/>
-          </a:p>
-        </p:txBody>
-      </p:sp>
-      <p:sp>
-        <p:nvSpPr>
-          <p:cNvPr id="17" name="tour text 2"/>
-          <p:cNvSpPr txBox="1"/>
-          <p:nvPr/>
-        </p:nvSpPr>
-        <p:spPr>
-          <a:xfrm>
-            <a:off x="8641080" y="4727448"/>
-            <a:ext cx="3001975" cy="822960"/>
-          </a:xfrm>
-          <a:prstGeom prst="rect">
-            <a:avLst/>
-          </a:prstGeom>
-          <a:noFill/>
-          <a:ln/>
-        </p:spPr>
-        <p:txBody>
-          <a:bodyPr wrap="square" lIns="0" tIns="0" rIns="0" bIns="0" rtlCol="0" anchor="t"/>
-          <a:lstStyle/>
-          <a:p>
-            <a:pPr indent="0" marL="0">
-              <a:buNone/>
-            </a:pPr>
-            <a:r>
-              <a:rPr lang="en-US" sz="1400" dirty="0">
-                <a:solidFill>
-                  <a:schemeClr val="tx2"/>
-                </a:solidFill>
-              </a:rPr>
-              <a:t>HTTP API, MCP-сервер для агента, віджет одним рядком коду</a:t>
-            </a:r>
-            <a:endParaRPr lang="en-US" sz="1400" dirty="0"/>
-          </a:p>
-        </p:txBody>
-      </p:sp>
-      <p:sp>
-        <p:nvSpPr>
-          <p:cNvPr id="25" name="Slide Number Placeholder 0"/>
-          <p:cNvSpPr>
-            <a:spLocks noGrp="1"/>
-          </p:cNvSpPr>
-          <p:nvPr>
-            <p:ph type="sldNum" sz="quarter" idx="4294967295"/>
-          </p:nvPr>
-        </p:nvSpPr>
-        <p:spPr>
-          <a:xfrm>
-            <a:off x="11185855" y="6446520"/>
-            <a:ext cx="457200" cy="274320"/>
-          </a:xfrm>
-          <a:prstGeom prst="rect">
-            <a:avLst/>
-          </a:prstGeom>
-          <a:extLst>
-            <a:ext uri="{C572A759-6A51-4108-AA02-DFA0A04FC94B}">
-              <ma14:wrappingTextBoxFlag xmlns:ma14="http://schemas.microsoft.com/office/mac/drawingml/2011/main" val="0"/>
-            </a:ext>
-          </a:extLst>
-        </p:spPr>
-        <p:txBody>
-          <a:bodyPr/>
-          <a:lstStyle>
-            <a:lvl1pPr>
-              <a:defRPr sz="1000">
-                <a:solidFill>
-                  <a:schemeClr val="accent5"/>
-                </a:solidFill>
-              </a:defRPr>
-            </a:lvl1pPr>
-          </a:lstStyle>
-          <a:p>
-            <a:pPr algn="r"/>
-            <a:fld id="{F7021451-1387-4CA6-816F-3879F97B5CBC}" type="slidenum">
-              <a:rPr b="0" lang="en-US"/>
               <a:t>8</a:t>
             </a:fld>
             <a:endParaRPr lang="en-US"/>
@@ -9110,27 +11173,109 @@
                   <a:schemeClr val="tx1"/>
                 </a:solidFill>
               </a:rPr>
-              <a:t>Що отримує підтримка і як ми закриваємо критерії</a:t>
+              <a:t>Справжній продукт, а не макет</a:t>
             </a:r>
             <a:endParaRPr lang="en-US" sz="3200" dirty="0"/>
           </a:p>
         </p:txBody>
       </p:sp>
-      <p:sp>
-        <p:nvSpPr>
-          <p:cNvPr id="3" name="stat 0"/>
+      <p:pic>
+        <p:nvPicPr>
+          <p:cNvPr id="3" name="video product-tour.mp4" descr="Кадр з відео product-tour.mp4">    </p:cNvPr>
+          <p:cNvPicPr>
+            <a:picLocks noChangeAspect="1"/>
+          </p:cNvPicPr>
+          <p:nvPr/>
+        </p:nvPicPr>
+        <p:blipFill>
+          <a:blip r:embed="rId1"/>
+          <a:stretch>
+            <a:fillRect/>
+          </a:stretch>
+        </p:blipFill>
+        <p:spPr>
+          <a:xfrm>
+            <a:off x="548640" y="1417320"/>
+            <a:ext cx="6949440" cy="4343400"/>
+          </a:xfrm>
+          <a:prstGeom prst="rect">
+            <a:avLst/>
+          </a:prstGeom>
+        </p:spPr>
+      </p:pic>
+      <p:sp>
+        <p:nvSpPr>
+          <p:cNvPr id="4" name="insert video badge"/>
           <p:cNvSpPr/>
           <p:nvPr/>
         </p:nvSpPr>
         <p:spPr>
           <a:xfrm>
-            <a:off x="548640" y="1280160"/>
-            <a:ext cx="3515258" cy="1463040"/>
+            <a:off x="2560320" y="3314700"/>
+            <a:ext cx="2926080" cy="548640"/>
           </a:xfrm>
           <a:prstGeom prst="roundRect">
             <a:avLst>
-              <a:gd name="adj" fmla="val 7500"/>
+              <a:gd name="adj" fmla="val 50000"/>
             </a:avLst>
+          </a:prstGeom>
+          <a:solidFill>
+            <a:schemeClr val="tx1">
+              <a:alpha val="85000"/>
+            </a:schemeClr>
+          </a:solidFill>
+          <a:ln/>
+        </p:spPr>
+      </p:sp>
+      <p:sp>
+        <p:nvSpPr>
+          <p:cNvPr id="5" name="insert video label"/>
+          <p:cNvSpPr txBox="1"/>
+          <p:nvPr/>
+        </p:nvSpPr>
+        <p:spPr>
+          <a:xfrm>
+            <a:off x="2560320" y="3314700"/>
+            <a:ext cx="2926080" cy="548640"/>
+          </a:xfrm>
+          <a:prstGeom prst="rect">
+            <a:avLst/>
+          </a:prstGeom>
+          <a:noFill/>
+          <a:ln/>
+        </p:spPr>
+        <p:txBody>
+          <a:bodyPr wrap="square" lIns="0" tIns="0" rIns="0" bIns="0" rtlCol="0" anchor="ctr"/>
+          <a:lstStyle/>
+          <a:p>
+            <a:pPr algn="ctr" indent="0" marL="0">
+              <a:buNone/>
+            </a:pPr>
+            <a:r>
+              <a:rPr lang="en-US" sz="1400" b="1" dirty="0">
+                <a:solidFill>
+                  <a:schemeClr val="bg1"/>
+                </a:solidFill>
+              </a:rPr>
+              <a:t>▶  вставити product-tour.mp4</a:t>
+            </a:r>
+            <a:endParaRPr lang="en-US" sz="1400" dirty="0"/>
+          </a:p>
+        </p:txBody>
+      </p:sp>
+      <p:sp>
+        <p:nvSpPr>
+          <p:cNvPr id="6" name="tour icon bg 0"/>
+          <p:cNvSpPr/>
+          <p:nvPr/>
+        </p:nvSpPr>
+        <p:spPr>
+          <a:xfrm>
+            <a:off x="7863840" y="1417320"/>
+            <a:ext cx="566928" cy="566928"/>
+          </a:xfrm>
+          <a:prstGeom prst="ellipse">
+            <a:avLst/>
           </a:prstGeom>
           <a:solidFill>
             <a:schemeClr val="bg2"/>
@@ -9138,16 +11283,40 @@
           <a:ln/>
         </p:spPr>
       </p:sp>
-      <p:sp>
-        <p:nvSpPr>
-          <p:cNvPr id="4" name="stat 0 value"/>
+      <p:pic>
+        <p:nvPicPr>
+          <p:cNvPr id="7" name="tour icon 0" descr="preencoded.png">    </p:cNvPr>
+          <p:cNvPicPr>
+            <a:picLocks noChangeAspect="1"/>
+          </p:cNvPicPr>
+          <p:nvPr/>
+        </p:nvPicPr>
+        <p:blipFill>
+          <a:blip r:embed="rId2"/>
+          <a:stretch>
+            <a:fillRect/>
+          </a:stretch>
+        </p:blipFill>
+        <p:spPr>
+          <a:xfrm>
+            <a:off x="7991856" y="1545336"/>
+            <a:ext cx="310896" cy="310896"/>
+          </a:xfrm>
+          <a:prstGeom prst="rect">
+            <a:avLst/>
+          </a:prstGeom>
+        </p:spPr>
+      </p:pic>
+      <p:sp>
+        <p:nvSpPr>
+          <p:cNvPr id="8" name="tour head 0"/>
           <p:cNvSpPr txBox="1"/>
           <p:nvPr/>
         </p:nvSpPr>
         <p:spPr>
           <a:xfrm>
-            <a:off x="822960" y="1371600"/>
-            <a:ext cx="2966618" cy="685800"/>
+            <a:off x="8641080" y="1417320"/>
+            <a:ext cx="3001975" cy="365760"/>
           </a:xfrm>
           <a:prstGeom prst="rect">
             <a:avLst/>
@@ -9163,27 +11332,27 @@
               <a:buNone/>
             </a:pPr>
             <a:r>
-              <a:rPr lang="en-US" sz="4000" b="1" dirty="0">
-                <a:solidFill>
-                  <a:schemeClr val="accent1"/>
+              <a:rPr lang="en-US" sz="1700" b="1" dirty="0">
+                <a:solidFill>
+                  <a:schemeClr val="tx1"/>
                 </a:solidFill>
               </a:rPr>
-              <a:t>3 з 3</a:t>
-            </a:r>
-            <a:endParaRPr lang="en-US" sz="4000" dirty="0"/>
-          </a:p>
-        </p:txBody>
-      </p:sp>
-      <p:sp>
-        <p:nvSpPr>
-          <p:cNvPr id="5" name="stat 0 label"/>
+              <a:t>Сторінка бізнесу і запис</a:t>
+            </a:r>
+            <a:endParaRPr lang="en-US" sz="1700" dirty="0"/>
+          </a:p>
+        </p:txBody>
+      </p:sp>
+      <p:sp>
+        <p:nvSpPr>
+          <p:cNvPr id="9" name="tour text 0"/>
           <p:cNvSpPr txBox="1"/>
           <p:nvPr/>
         </p:nvSpPr>
         <p:spPr>
           <a:xfrm>
-            <a:off x="822960" y="2084832"/>
-            <a:ext cx="2966618" cy="594360"/>
+            <a:off x="8641080" y="1801368"/>
+            <a:ext cx="3001975" cy="822960"/>
           </a:xfrm>
           <a:prstGeom prst="rect">
             <a:avLst/>
@@ -9199,32 +11368,30 @@
               <a:buNone/>
             </a:pPr>
             <a:r>
-              <a:rPr lang="en-US" sz="1300" dirty="0">
+              <a:rPr lang="en-US" sz="1400" dirty="0">
                 <a:solidFill>
                   <a:schemeClr val="tx2"/>
                 </a:solidFill>
               </a:rPr>
-              <a:t>сценаріїв вирішено діями в системі, а не лише відповіддю</a:t>
-            </a:r>
-            <a:endParaRPr lang="en-US" sz="1300" dirty="0"/>
-          </a:p>
-        </p:txBody>
-      </p:sp>
-      <p:sp>
-        <p:nvSpPr>
-          <p:cNvPr id="6" name="stat 1"/>
+              <a:t>Послуги, майстри, правила, вільні слоти, передоплата</a:t>
+            </a:r>
+            <a:endParaRPr lang="en-US" sz="1400" dirty="0"/>
+          </a:p>
+        </p:txBody>
+      </p:sp>
+      <p:sp>
+        <p:nvSpPr>
+          <p:cNvPr id="10" name="tour icon bg 1"/>
           <p:cNvSpPr/>
           <p:nvPr/>
         </p:nvSpPr>
         <p:spPr>
           <a:xfrm>
-            <a:off x="4338218" y="1280160"/>
-            <a:ext cx="3515258" cy="1463040"/>
-          </a:xfrm>
-          <a:prstGeom prst="roundRect">
-            <a:avLst>
-              <a:gd name="adj" fmla="val 7500"/>
-            </a:avLst>
+            <a:off x="7863840" y="2880360"/>
+            <a:ext cx="566928" cy="566928"/>
+          </a:xfrm>
+          <a:prstGeom prst="ellipse">
+            <a:avLst/>
           </a:prstGeom>
           <a:solidFill>
             <a:schemeClr val="bg2"/>
@@ -9232,16 +11399,40 @@
           <a:ln/>
         </p:spPr>
       </p:sp>
-      <p:sp>
-        <p:nvSpPr>
-          <p:cNvPr id="7" name="stat 1 value"/>
+      <p:pic>
+        <p:nvPicPr>
+          <p:cNvPr id="11" name="tour icon 1" descr="preencoded.png">    </p:cNvPr>
+          <p:cNvPicPr>
+            <a:picLocks noChangeAspect="1"/>
+          </p:cNvPicPr>
+          <p:nvPr/>
+        </p:nvPicPr>
+        <p:blipFill>
+          <a:blip r:embed="rId3"/>
+          <a:stretch>
+            <a:fillRect/>
+          </a:stretch>
+        </p:blipFill>
+        <p:spPr>
+          <a:xfrm>
+            <a:off x="7991856" y="3008376"/>
+            <a:ext cx="310896" cy="310896"/>
+          </a:xfrm>
+          <a:prstGeom prst="rect">
+            <a:avLst/>
+          </a:prstGeom>
+        </p:spPr>
+      </p:pic>
+      <p:sp>
+        <p:nvSpPr>
+          <p:cNvPr id="12" name="tour head 1"/>
           <p:cNvSpPr txBox="1"/>
           <p:nvPr/>
         </p:nvSpPr>
         <p:spPr>
           <a:xfrm>
-            <a:off x="4612538" y="1371600"/>
-            <a:ext cx="2966618" cy="685800"/>
+            <a:off x="8641080" y="2880360"/>
+            <a:ext cx="3001975" cy="365760"/>
           </a:xfrm>
           <a:prstGeom prst="rect">
             <a:avLst/>
@@ -9257,27 +11448,27 @@
               <a:buNone/>
             </a:pPr>
             <a:r>
-              <a:rPr lang="en-US" sz="4000" b="1" dirty="0">
-                <a:solidFill>
-                  <a:schemeClr val="accent4"/>
+              <a:rPr lang="en-US" sz="1700" b="1" dirty="0">
+                <a:solidFill>
+                  <a:schemeClr val="tx1"/>
                 </a:solidFill>
               </a:rPr>
-              <a:t>1 клік</a:t>
-            </a:r>
-            <a:endParaRPr lang="en-US" sz="4000" dirty="0"/>
-          </a:p>
-        </p:txBody>
-      </p:sp>
-      <p:sp>
-        <p:nvSpPr>
-          <p:cNvPr id="8" name="stat 1 label"/>
+              <a:t>Адмінка</a:t>
+            </a:r>
+            <a:endParaRPr lang="en-US" sz="1700" dirty="0"/>
+          </a:p>
+        </p:txBody>
+      </p:sp>
+      <p:sp>
+        <p:nvSpPr>
+          <p:cNvPr id="13" name="tour text 1"/>
           <p:cNvSpPr txBox="1"/>
           <p:nvPr/>
         </p:nvSpPr>
         <p:spPr>
           <a:xfrm>
-            <a:off x="4612538" y="2084832"/>
-            <a:ext cx="2966618" cy="594360"/>
+            <a:off x="8641080" y="3264408"/>
+            <a:ext cx="3001975" cy="822960"/>
           </a:xfrm>
           <a:prstGeom prst="rect">
             <a:avLst/>
@@ -9293,32 +11484,30 @@
               <a:buNone/>
             </a:pPr>
             <a:r>
-              <a:rPr lang="en-US" sz="1300" dirty="0">
+              <a:rPr lang="en-US" sz="1400" dirty="0">
                 <a:solidFill>
                   <a:schemeClr val="tx2"/>
                 </a:solidFill>
               </a:rPr>
-              <a:t>щоб адміністратор погодив ризикову дію з готовим розбором</a:t>
-            </a:r>
-            <a:endParaRPr lang="en-US" sz="1300" dirty="0"/>
-          </a:p>
-        </p:txBody>
-      </p:sp>
-      <p:sp>
-        <p:nvSpPr>
-          <p:cNvPr id="9" name="stat 2"/>
+              <a:t>Тиждень бронювань, дії агента з міткою «AI», клієнти, майстри, послуги</a:t>
+            </a:r>
+            <a:endParaRPr lang="en-US" sz="1400" dirty="0"/>
+          </a:p>
+        </p:txBody>
+      </p:sp>
+      <p:sp>
+        <p:nvSpPr>
+          <p:cNvPr id="14" name="tour icon bg 2"/>
           <p:cNvSpPr/>
           <p:nvPr/>
         </p:nvSpPr>
         <p:spPr>
           <a:xfrm>
-            <a:off x="8127797" y="1280160"/>
-            <a:ext cx="3515258" cy="1463040"/>
-          </a:xfrm>
-          <a:prstGeom prst="roundRect">
-            <a:avLst>
-              <a:gd name="adj" fmla="val 7500"/>
-            </a:avLst>
+            <a:off x="7863840" y="4343400"/>
+            <a:ext cx="566928" cy="566928"/>
+          </a:xfrm>
+          <a:prstGeom prst="ellipse">
+            <a:avLst/>
           </a:prstGeom>
           <a:solidFill>
             <a:schemeClr val="bg2"/>
@@ -9326,16 +11515,40 @@
           <a:ln/>
         </p:spPr>
       </p:sp>
-      <p:sp>
-        <p:nvSpPr>
-          <p:cNvPr id="10" name="stat 2 value"/>
+      <p:pic>
+        <p:nvPicPr>
+          <p:cNvPr id="15" name="tour icon 2" descr="preencoded.png">    </p:cNvPr>
+          <p:cNvPicPr>
+            <a:picLocks noChangeAspect="1"/>
+          </p:cNvPicPr>
+          <p:nvPr/>
+        </p:nvPicPr>
+        <p:blipFill>
+          <a:blip r:embed="rId4"/>
+          <a:stretch>
+            <a:fillRect/>
+          </a:stretch>
+        </p:blipFill>
+        <p:spPr>
+          <a:xfrm>
+            <a:off x="7991856" y="4471416"/>
+            <a:ext cx="310896" cy="310896"/>
+          </a:xfrm>
+          <a:prstGeom prst="rect">
+            <a:avLst/>
+          </a:prstGeom>
+        </p:spPr>
+      </p:pic>
+      <p:sp>
+        <p:nvSpPr>
+          <p:cNvPr id="16" name="tour head 2"/>
           <p:cNvSpPr txBox="1"/>
           <p:nvPr/>
         </p:nvSpPr>
         <p:spPr>
           <a:xfrm>
-            <a:off x="8402117" y="1371600"/>
-            <a:ext cx="2966618" cy="685800"/>
+            <a:off x="8641080" y="4343400"/>
+            <a:ext cx="3001975" cy="365760"/>
           </a:xfrm>
           <a:prstGeom prst="rect">
             <a:avLst/>
@@ -9351,27 +11564,27 @@
               <a:buNone/>
             </a:pPr>
             <a:r>
-              <a:rPr lang="en-US" sz="4000" b="1" dirty="0">
-                <a:solidFill>
-                  <a:schemeClr val="accent3"/>
+              <a:rPr lang="en-US" sz="1700" b="1" dirty="0">
+                <a:solidFill>
+                  <a:schemeClr val="tx1"/>
                 </a:solidFill>
               </a:rPr>
-              <a:t>1 700 грн</a:t>
-            </a:r>
-            <a:endParaRPr lang="en-US" sz="4000" dirty="0"/>
-          </a:p>
-        </p:txBody>
-      </p:sp>
-      <p:sp>
-        <p:nvSpPr>
-          <p:cNvPr id="11" name="stat 2 label"/>
+              <a:t>Відкриті інтеграції</a:t>
+            </a:r>
+            <a:endParaRPr lang="en-US" sz="1700" dirty="0"/>
+          </a:p>
+        </p:txBody>
+      </p:sp>
+      <p:sp>
+        <p:nvSpPr>
+          <p:cNvPr id="17" name="tour text 2"/>
           <p:cNvSpPr txBox="1"/>
           <p:nvPr/>
         </p:nvSpPr>
         <p:spPr>
           <a:xfrm>
-            <a:off x="8402117" y="2084832"/>
-            <a:ext cx="2966618" cy="594360"/>
+            <a:off x="8641080" y="4727448"/>
+            <a:ext cx="3001975" cy="822960"/>
           </a:xfrm>
           <a:prstGeom prst="rect">
             <a:avLst/>
@@ -9387,484 +11600,14 @@
               <a:buNone/>
             </a:pPr>
             <a:r>
-              <a:rPr lang="en-US" sz="1300" dirty="0">
+              <a:rPr lang="en-US" sz="1400" dirty="0">
                 <a:solidFill>
                   <a:schemeClr val="tx2"/>
                 </a:solidFill>
               </a:rPr>
-              <a:t>передоплат збережено або повернено клієнтам у демо</a:t>
-            </a:r>
-            <a:endParaRPr lang="en-US" sz="1300" dirty="0"/>
-          </a:p>
-        </p:txBody>
-      </p:sp>
-      <p:sp>
-        <p:nvSpPr>
-          <p:cNvPr id="12" name="criterion 0"/>
-          <p:cNvSpPr/>
-          <p:nvPr/>
-        </p:nvSpPr>
-        <p:spPr>
-          <a:xfrm>
-            <a:off x="548640" y="3017520"/>
-            <a:ext cx="11094415" cy="566928"/>
-          </a:xfrm>
-          <a:prstGeom prst="roundRect">
-            <a:avLst>
-              <a:gd name="adj" fmla="val 16129"/>
-            </a:avLst>
-          </a:prstGeom>
-          <a:solidFill>
-            <a:schemeClr val="bg2"/>
-          </a:solidFill>
-          <a:ln/>
-        </p:spPr>
-      </p:sp>
-      <p:sp>
-        <p:nvSpPr>
-          <p:cNvPr id="13" name="criterion 0 name"/>
-          <p:cNvSpPr txBox="1"/>
-          <p:nvPr/>
-        </p:nvSpPr>
-        <p:spPr>
-          <a:xfrm>
-            <a:off x="822960" y="3017520"/>
-            <a:ext cx="2926080" cy="566928"/>
-          </a:xfrm>
-          <a:prstGeom prst="rect">
-            <a:avLst/>
-          </a:prstGeom>
-          <a:noFill/>
-          <a:ln/>
-        </p:spPr>
-        <p:txBody>
-          <a:bodyPr wrap="square" lIns="0" tIns="0" rIns="0" bIns="0" rtlCol="0" anchor="ctr"/>
-          <a:lstStyle/>
-          <a:p>
-            <a:pPr indent="0" marL="0">
-              <a:buNone/>
-            </a:pPr>
-            <a:r>
-              <a:rPr lang="en-US" sz="1600" b="1" dirty="0">
-                <a:solidFill>
-                  <a:schemeClr val="accent1"/>
-                </a:solidFill>
-              </a:rPr>
-              <a:t>Operational Impact</a:t>
-            </a:r>
-            <a:endParaRPr lang="en-US" sz="1600" dirty="0"/>
-          </a:p>
-        </p:txBody>
-      </p:sp>
-      <p:sp>
-        <p:nvSpPr>
-          <p:cNvPr id="14" name="criterion 0 text"/>
-          <p:cNvSpPr txBox="1"/>
-          <p:nvPr/>
-        </p:nvSpPr>
-        <p:spPr>
-          <a:xfrm>
-            <a:off x="3840480" y="3017520"/>
-            <a:ext cx="7528255" cy="566928"/>
-          </a:xfrm>
-          <a:prstGeom prst="rect">
-            <a:avLst/>
-          </a:prstGeom>
-          <a:noFill/>
-          <a:ln/>
-        </p:spPr>
-        <p:txBody>
-          <a:bodyPr wrap="square" lIns="0" tIns="0" rIns="0" bIns="0" rtlCol="0" anchor="ctr"/>
-          <a:lstStyle/>
-          <a:p>
-            <a:pPr indent="0" marL="0">
-              <a:buNone/>
-            </a:pPr>
-            <a:r>
-              <a:rPr lang="en-US" sz="1500" dirty="0">
-                <a:solidFill>
-                  <a:schemeClr val="tx1"/>
-                </a:solidFill>
-              </a:rPr>
-              <a:t>Звернення закриваються діями в системі; людина — лише для ризикових рішень</a:t>
-            </a:r>
-            <a:endParaRPr lang="en-US" sz="1500" dirty="0"/>
-          </a:p>
-        </p:txBody>
-      </p:sp>
-      <p:sp>
-        <p:nvSpPr>
-          <p:cNvPr id="15" name="criterion 1"/>
-          <p:cNvSpPr/>
-          <p:nvPr/>
-        </p:nvSpPr>
-        <p:spPr>
-          <a:xfrm>
-            <a:off x="548640" y="3675888"/>
-            <a:ext cx="11094415" cy="566928"/>
-          </a:xfrm>
-          <a:prstGeom prst="roundRect">
-            <a:avLst>
-              <a:gd name="adj" fmla="val 16129"/>
-            </a:avLst>
-          </a:prstGeom>
-          <a:solidFill>
-            <a:schemeClr val="bg1"/>
-          </a:solidFill>
-          <a:ln/>
-        </p:spPr>
-      </p:sp>
-      <p:sp>
-        <p:nvSpPr>
-          <p:cNvPr id="16" name="criterion 1 name"/>
-          <p:cNvSpPr txBox="1"/>
-          <p:nvPr/>
-        </p:nvSpPr>
-        <p:spPr>
-          <a:xfrm>
-            <a:off x="822960" y="3675888"/>
-            <a:ext cx="2926080" cy="566928"/>
-          </a:xfrm>
-          <a:prstGeom prst="rect">
-            <a:avLst/>
-          </a:prstGeom>
-          <a:noFill/>
-          <a:ln/>
-        </p:spPr>
-        <p:txBody>
-          <a:bodyPr wrap="square" lIns="0" tIns="0" rIns="0" bIns="0" rtlCol="0" anchor="ctr"/>
-          <a:lstStyle/>
-          <a:p>
-            <a:pPr indent="0" marL="0">
-              <a:buNone/>
-            </a:pPr>
-            <a:r>
-              <a:rPr lang="en-US" sz="1600" b="1" dirty="0">
-                <a:solidFill>
-                  <a:schemeClr val="accent1"/>
-                </a:solidFill>
-              </a:rPr>
-              <a:t>Innovation</a:t>
-            </a:r>
-            <a:endParaRPr lang="en-US" sz="1600" dirty="0"/>
-          </a:p>
-        </p:txBody>
-      </p:sp>
-      <p:sp>
-        <p:nvSpPr>
-          <p:cNvPr id="17" name="criterion 1 text"/>
-          <p:cNvSpPr txBox="1"/>
-          <p:nvPr/>
-        </p:nvSpPr>
-        <p:spPr>
-          <a:xfrm>
-            <a:off x="3840480" y="3675888"/>
-            <a:ext cx="7528255" cy="566928"/>
-          </a:xfrm>
-          <a:prstGeom prst="rect">
-            <a:avLst/>
-          </a:prstGeom>
-          <a:noFill/>
-          <a:ln/>
-        </p:spPr>
-        <p:txBody>
-          <a:bodyPr wrap="square" lIns="0" tIns="0" rIns="0" bIns="0" rtlCol="0" anchor="ctr"/>
-          <a:lstStyle/>
-          <a:p>
-            <a:pPr indent="0" marL="0">
-              <a:buNone/>
-            </a:pPr>
-            <a:r>
-              <a:rPr lang="en-US" sz="1500" dirty="0">
-                <a:solidFill>
-                  <a:schemeClr val="tx1"/>
-                </a:solidFill>
-              </a:rPr>
-              <a:t>Permission engine, який налаштовує власник, і один агент для будь-якого бізнесу</a:t>
-            </a:r>
-            <a:endParaRPr lang="en-US" sz="1500" dirty="0"/>
-          </a:p>
-        </p:txBody>
-      </p:sp>
-      <p:sp>
-        <p:nvSpPr>
-          <p:cNvPr id="18" name="criterion 2"/>
-          <p:cNvSpPr/>
-          <p:nvPr/>
-        </p:nvSpPr>
-        <p:spPr>
-          <a:xfrm>
-            <a:off x="548640" y="4334256"/>
-            <a:ext cx="11094415" cy="566928"/>
-          </a:xfrm>
-          <a:prstGeom prst="roundRect">
-            <a:avLst>
-              <a:gd name="adj" fmla="val 16129"/>
-            </a:avLst>
-          </a:prstGeom>
-          <a:solidFill>
-            <a:schemeClr val="bg2"/>
-          </a:solidFill>
-          <a:ln/>
-        </p:spPr>
-      </p:sp>
-      <p:sp>
-        <p:nvSpPr>
-          <p:cNvPr id="19" name="criterion 2 name"/>
-          <p:cNvSpPr txBox="1"/>
-          <p:nvPr/>
-        </p:nvSpPr>
-        <p:spPr>
-          <a:xfrm>
-            <a:off x="822960" y="4334256"/>
-            <a:ext cx="2926080" cy="566928"/>
-          </a:xfrm>
-          <a:prstGeom prst="rect">
-            <a:avLst/>
-          </a:prstGeom>
-          <a:noFill/>
-          <a:ln/>
-        </p:spPr>
-        <p:txBody>
-          <a:bodyPr wrap="square" lIns="0" tIns="0" rIns="0" bIns="0" rtlCol="0" anchor="ctr"/>
-          <a:lstStyle/>
-          <a:p>
-            <a:pPr indent="0" marL="0">
-              <a:buNone/>
-            </a:pPr>
-            <a:r>
-              <a:rPr lang="en-US" sz="1600" b="1" dirty="0">
-                <a:solidFill>
-                  <a:schemeClr val="accent1"/>
-                </a:solidFill>
-              </a:rPr>
-              <a:t>Use of AI</a:t>
-            </a:r>
-            <a:endParaRPr lang="en-US" sz="1600" dirty="0"/>
-          </a:p>
-        </p:txBody>
-      </p:sp>
-      <p:sp>
-        <p:nvSpPr>
-          <p:cNvPr id="20" name="criterion 2 text"/>
-          <p:cNvSpPr txBox="1"/>
-          <p:nvPr/>
-        </p:nvSpPr>
-        <p:spPr>
-          <a:xfrm>
-            <a:off x="3840480" y="4334256"/>
-            <a:ext cx="7528255" cy="566928"/>
-          </a:xfrm>
-          <a:prstGeom prst="rect">
-            <a:avLst/>
-          </a:prstGeom>
-          <a:noFill/>
-          <a:ln/>
-        </p:spPr>
-        <p:txBody>
-          <a:bodyPr wrap="square" lIns="0" tIns="0" rIns="0" bIns="0" rtlCol="0" anchor="ctr"/>
-          <a:lstStyle/>
-          <a:p>
-            <a:pPr indent="0" marL="0">
-              <a:buNone/>
-            </a:pPr>
-            <a:r>
-              <a:rPr lang="en-US" sz="1500" dirty="0">
-                <a:solidFill>
-                  <a:schemeClr val="tx1"/>
-                </a:solidFill>
-              </a:rPr>
-              <a:t>Оркестратор Claude Sonnet, Gemma 4 для простих питань, агент з інструментами</a:t>
-            </a:r>
-            <a:endParaRPr lang="en-US" sz="1500" dirty="0"/>
-          </a:p>
-        </p:txBody>
-      </p:sp>
-      <p:sp>
-        <p:nvSpPr>
-          <p:cNvPr id="21" name="criterion 3"/>
-          <p:cNvSpPr/>
-          <p:nvPr/>
-        </p:nvSpPr>
-        <p:spPr>
-          <a:xfrm>
-            <a:off x="548640" y="4992624"/>
-            <a:ext cx="11094415" cy="566928"/>
-          </a:xfrm>
-          <a:prstGeom prst="roundRect">
-            <a:avLst>
-              <a:gd name="adj" fmla="val 16129"/>
-            </a:avLst>
-          </a:prstGeom>
-          <a:solidFill>
-            <a:schemeClr val="bg1"/>
-          </a:solidFill>
-          <a:ln/>
-        </p:spPr>
-      </p:sp>
-      <p:sp>
-        <p:nvSpPr>
-          <p:cNvPr id="22" name="criterion 3 name"/>
-          <p:cNvSpPr txBox="1"/>
-          <p:nvPr/>
-        </p:nvSpPr>
-        <p:spPr>
-          <a:xfrm>
-            <a:off x="822960" y="4992624"/>
-            <a:ext cx="2926080" cy="566928"/>
-          </a:xfrm>
-          <a:prstGeom prst="rect">
-            <a:avLst/>
-          </a:prstGeom>
-          <a:noFill/>
-          <a:ln/>
-        </p:spPr>
-        <p:txBody>
-          <a:bodyPr wrap="square" lIns="0" tIns="0" rIns="0" bIns="0" rtlCol="0" anchor="ctr"/>
-          <a:lstStyle/>
-          <a:p>
-            <a:pPr indent="0" marL="0">
-              <a:buNone/>
-            </a:pPr>
-            <a:r>
-              <a:rPr lang="en-US" sz="1600" b="1" dirty="0">
-                <a:solidFill>
-                  <a:schemeClr val="accent1"/>
-                </a:solidFill>
-              </a:rPr>
-              <a:t>Reasoning &amp; Context</a:t>
-            </a:r>
-            <a:endParaRPr lang="en-US" sz="1600" dirty="0"/>
-          </a:p>
-        </p:txBody>
-      </p:sp>
-      <p:sp>
-        <p:nvSpPr>
-          <p:cNvPr id="23" name="criterion 3 text"/>
-          <p:cNvSpPr txBox="1"/>
-          <p:nvPr/>
-        </p:nvSpPr>
-        <p:spPr>
-          <a:xfrm>
-            <a:off x="3840480" y="4992624"/>
-            <a:ext cx="7528255" cy="566928"/>
-          </a:xfrm>
-          <a:prstGeom prst="rect">
-            <a:avLst/>
-          </a:prstGeom>
-          <a:noFill/>
-          <a:ln/>
-        </p:spPr>
-        <p:txBody>
-          <a:bodyPr wrap="square" lIns="0" tIns="0" rIns="0" bIns="0" rtlCol="0" anchor="ctr"/>
-          <a:lstStyle/>
-          <a:p>
-            <a:pPr indent="0" marL="0">
-              <a:buNone/>
-            </a:pPr>
-            <a:r>
-              <a:rPr lang="en-US" sz="1500" dirty="0">
-                <a:solidFill>
-                  <a:schemeClr val="tx1"/>
-                </a:solidFill>
-              </a:rPr>
-              <a:t>Рішення залежить від історії клієнта, правил бізнесу та емоції звернення</a:t>
-            </a:r>
-            <a:endParaRPr lang="en-US" sz="1500" dirty="0"/>
-          </a:p>
-        </p:txBody>
-      </p:sp>
-      <p:sp>
-        <p:nvSpPr>
-          <p:cNvPr id="24" name="criterion 4"/>
-          <p:cNvSpPr/>
-          <p:nvPr/>
-        </p:nvSpPr>
-        <p:spPr>
-          <a:xfrm>
-            <a:off x="548640" y="5650992"/>
-            <a:ext cx="11094415" cy="566928"/>
-          </a:xfrm>
-          <a:prstGeom prst="roundRect">
-            <a:avLst>
-              <a:gd name="adj" fmla="val 16129"/>
-            </a:avLst>
-          </a:prstGeom>
-          <a:solidFill>
-            <a:schemeClr val="bg2"/>
-          </a:solidFill>
-          <a:ln/>
-        </p:spPr>
-      </p:sp>
-      <p:sp>
-        <p:nvSpPr>
-          <p:cNvPr id="25" name="criterion 4 name"/>
-          <p:cNvSpPr txBox="1"/>
-          <p:nvPr/>
-        </p:nvSpPr>
-        <p:spPr>
-          <a:xfrm>
-            <a:off x="822960" y="5650992"/>
-            <a:ext cx="2926080" cy="566928"/>
-          </a:xfrm>
-          <a:prstGeom prst="rect">
-            <a:avLst/>
-          </a:prstGeom>
-          <a:noFill/>
-          <a:ln/>
-        </p:spPr>
-        <p:txBody>
-          <a:bodyPr wrap="square" lIns="0" tIns="0" rIns="0" bIns="0" rtlCol="0" anchor="ctr"/>
-          <a:lstStyle/>
-          <a:p>
-            <a:pPr indent="0" marL="0">
-              <a:buNone/>
-            </a:pPr>
-            <a:r>
-              <a:rPr lang="en-US" sz="1600" b="1" dirty="0">
-                <a:solidFill>
-                  <a:schemeClr val="accent1"/>
-                </a:solidFill>
-              </a:rPr>
-              <a:t>Presentation &amp; Demo</a:t>
-            </a:r>
-            <a:endParaRPr lang="en-US" sz="1600" dirty="0"/>
-          </a:p>
-        </p:txBody>
-      </p:sp>
-      <p:sp>
-        <p:nvSpPr>
-          <p:cNvPr id="26" name="criterion 4 text"/>
-          <p:cNvSpPr txBox="1"/>
-          <p:nvPr/>
-        </p:nvSpPr>
-        <p:spPr>
-          <a:xfrm>
-            <a:off x="3840480" y="5650992"/>
-            <a:ext cx="7528255" cy="566928"/>
-          </a:xfrm>
-          <a:prstGeom prst="rect">
-            <a:avLst/>
-          </a:prstGeom>
-          <a:noFill/>
-          <a:ln/>
-        </p:spPr>
-        <p:txBody>
-          <a:bodyPr wrap="square" lIns="0" tIns="0" rIns="0" bIns="0" rtlCol="0" anchor="ctr"/>
-          <a:lstStyle/>
-          <a:p>
-            <a:pPr indent="0" marL="0">
-              <a:buNone/>
-            </a:pPr>
-            <a:r>
-              <a:rPr lang="en-US" sz="1500" dirty="0">
-                <a:solidFill>
-                  <a:schemeClr val="tx1"/>
-                </a:solidFill>
-              </a:rPr>
-              <a:t>Працюючий продукт: сайт, адмінка, API, MCP, телефон — усе на відео</a:t>
-            </a:r>
-            <a:endParaRPr lang="en-US" sz="1500" dirty="0"/>
+              <a:t>HTTP API, MCP-сервер для агента, віджет одним рядком коду</a:t>
+            </a:r>
+            <a:endParaRPr lang="en-US" sz="1400" dirty="0"/>
           </a:p>
         </p:txBody>
       </p:sp>
